--- a/Slides/Week03/02：Transformers函數庫.pptx
+++ b/Slides/Week03/02：Transformers函數庫.pptx
@@ -14,8 +14,8 @@
     <p:sldId id="1195" r:id="rId5"/>
     <p:sldId id="1196" r:id="rId6"/>
     <p:sldId id="1197" r:id="rId7"/>
-    <p:sldId id="1199" r:id="rId8"/>
-    <p:sldId id="1200" r:id="rId9"/>
+    <p:sldId id="1200" r:id="rId8"/>
+    <p:sldId id="1199" r:id="rId9"/>
     <p:sldId id="1201" r:id="rId10"/>
     <p:sldId id="1202" r:id="rId11"/>
     <p:sldId id="1203" r:id="rId12"/>
@@ -117,6 +117,11 @@
       </a:defRPr>
     </a:lvl9pPr>
   </p:defaultTextStyle>
+  <p:extLst>
+    <p:ext uri="{EFAFB233-063F-42B5-8137-9DF3F51BA10A}">
+      <p15:sldGuideLst xmlns:p15="http://schemas.microsoft.com/office/powerpoint/2012/main"/>
+    </p:ext>
+  </p:extLst>
 </p:presentation>
 </file>
 
@@ -202,7 +207,7 @@
           <a:p>
             <a:fld id="{9720C436-07A3-46D6-A8C6-4DFF2B51DC63}" type="datetimeFigureOut">
               <a:rPr lang="zh-TW" altLang="en-US" smtClean="0"/>
-              <a:t>2024/3/29</a:t>
+              <a:t>2024/12/4</a:t>
             </a:fld>
             <a:endParaRPr lang="zh-TW" altLang="en-US"/>
           </a:p>
@@ -1440,7 +1445,7 @@
     </p:spTree>
     <p:extLst>
       <p:ext uri="{BB962C8B-B14F-4D97-AF65-F5344CB8AC3E}">
-        <p14:creationId xmlns:p14="http://schemas.microsoft.com/office/powerpoint/2010/main" val="3429393922"/>
+        <p14:creationId xmlns:p14="http://schemas.microsoft.com/office/powerpoint/2010/main" val="3224360598"/>
       </p:ext>
     </p:extLst>
   </p:cSld>
@@ -1589,7 +1594,7 @@
     </p:spTree>
     <p:extLst>
       <p:ext uri="{BB962C8B-B14F-4D97-AF65-F5344CB8AC3E}">
-        <p14:creationId xmlns:p14="http://schemas.microsoft.com/office/powerpoint/2010/main" val="3224360598"/>
+        <p14:creationId xmlns:p14="http://schemas.microsoft.com/office/powerpoint/2010/main" val="3429393922"/>
       </p:ext>
     </p:extLst>
   </p:cSld>
@@ -2044,7 +2049,7 @@
           <a:p>
             <a:fld id="{C5A53396-52C0-405C-BBDC-73FF63BF6BF1}" type="datetimeFigureOut">
               <a:rPr lang="zh-TW" altLang="en-US" smtClean="0"/>
-              <a:t>2024/3/29</a:t>
+              <a:t>2024/12/4</a:t>
             </a:fld>
             <a:endParaRPr lang="zh-TW" altLang="en-US"/>
           </a:p>
@@ -2242,7 +2247,7 @@
           <a:p>
             <a:fld id="{C5A53396-52C0-405C-BBDC-73FF63BF6BF1}" type="datetimeFigureOut">
               <a:rPr lang="zh-TW" altLang="en-US" smtClean="0"/>
-              <a:t>2024/3/29</a:t>
+              <a:t>2024/12/4</a:t>
             </a:fld>
             <a:endParaRPr lang="zh-TW" altLang="en-US"/>
           </a:p>
@@ -2450,7 +2455,7 @@
           <a:p>
             <a:fld id="{C5A53396-52C0-405C-BBDC-73FF63BF6BF1}" type="datetimeFigureOut">
               <a:rPr lang="zh-TW" altLang="en-US" smtClean="0"/>
-              <a:t>2024/3/29</a:t>
+              <a:t>2024/12/4</a:t>
             </a:fld>
             <a:endParaRPr lang="zh-TW" altLang="en-US"/>
           </a:p>
@@ -2831,7 +2836,7 @@
                 </a:solidFill>
               </a:rPr>
               <a:pPr/>
-              <a:t>3/29/2024</a:t>
+              <a:t>12/4/2024</a:t>
             </a:fld>
             <a:endParaRPr kumimoji="0" lang="en-US" dirty="0"/>
           </a:p>
@@ -3062,7 +3067,7 @@
                 </a:solidFill>
               </a:rPr>
               <a:pPr/>
-              <a:t>3/29/2024</a:t>
+              <a:t>12/4/2024</a:t>
             </a:fld>
             <a:endParaRPr kumimoji="0" lang="en-US" dirty="0"/>
           </a:p>
@@ -3295,7 +3300,7 @@
                 </a:solidFill>
               </a:rPr>
               <a:pPr/>
-              <a:t>3/29/2024</a:t>
+              <a:t>12/4/2024</a:t>
             </a:fld>
             <a:endParaRPr kumimoji="0" lang="en-US" dirty="0"/>
           </a:p>
@@ -3777,7 +3782,7 @@
                 </a:solidFill>
               </a:rPr>
               <a:pPr/>
-              <a:t>3/29/2024</a:t>
+              <a:t>12/4/2024</a:t>
             </a:fld>
             <a:endParaRPr kumimoji="0" lang="en-US" dirty="0"/>
           </a:p>
@@ -4134,7 +4139,7 @@
                 </a:solidFill>
               </a:rPr>
               <a:pPr/>
-              <a:t>3/29/2024</a:t>
+              <a:t>12/4/2024</a:t>
             </a:fld>
             <a:endParaRPr kumimoji="0" lang="en-US" dirty="0"/>
           </a:p>
@@ -4497,7 +4502,7 @@
                 </a:solidFill>
               </a:rPr>
               <a:pPr/>
-              <a:t>3/29/2024</a:t>
+              <a:t>12/4/2024</a:t>
             </a:fld>
             <a:endParaRPr kumimoji="0" lang="en-US" dirty="0"/>
           </a:p>
@@ -4807,7 +4812,7 @@
                 </a:solidFill>
               </a:rPr>
               <a:pPr/>
-              <a:t>3/29/2024</a:t>
+              <a:t>12/4/2024</a:t>
             </a:fld>
             <a:endParaRPr kumimoji="0" lang="en-US" dirty="0"/>
           </a:p>
@@ -5002,7 +5007,7 @@
           <a:p>
             <a:fld id="{C5A53396-52C0-405C-BBDC-73FF63BF6BF1}" type="datetimeFigureOut">
               <a:rPr lang="zh-TW" altLang="en-US" smtClean="0"/>
-              <a:t>2024/3/29</a:t>
+              <a:t>2024/12/4</a:t>
             </a:fld>
             <a:endParaRPr lang="zh-TW" altLang="en-US"/>
           </a:p>
@@ -5486,7 +5491,7 @@
                 </a:solidFill>
               </a:rPr>
               <a:pPr/>
-              <a:t>3/29/2024</a:t>
+              <a:t>12/4/2024</a:t>
             </a:fld>
             <a:endParaRPr kumimoji="0" lang="en-US" dirty="0"/>
           </a:p>
@@ -5882,7 +5887,7 @@
                 </a:solidFill>
               </a:rPr>
               <a:pPr/>
-              <a:t>3/29/2024</a:t>
+              <a:t>12/4/2024</a:t>
             </a:fld>
             <a:endParaRPr kumimoji="0" lang="en-US" dirty="0"/>
           </a:p>
@@ -6222,7 +6227,7 @@
                 </a:solidFill>
               </a:rPr>
               <a:pPr/>
-              <a:t>3/29/2024</a:t>
+              <a:t>12/4/2024</a:t>
             </a:fld>
             <a:endParaRPr kumimoji="0" lang="en-US" dirty="0"/>
           </a:p>
@@ -6803,7 +6808,7 @@
                 </a:solidFill>
               </a:rPr>
               <a:pPr/>
-              <a:t>3/29/2024</a:t>
+              <a:t>12/4/2024</a:t>
             </a:fld>
             <a:endParaRPr kumimoji="0" lang="en-US" dirty="0"/>
           </a:p>
@@ -7372,7 +7377,7 @@
                 </a:solidFill>
               </a:rPr>
               <a:pPr/>
-              <a:t>3/29/2024</a:t>
+              <a:t>12/4/2024</a:t>
             </a:fld>
             <a:endParaRPr kumimoji="0" lang="en-US" dirty="0"/>
           </a:p>
@@ -7836,7 +7841,7 @@
                 </a:solidFill>
               </a:rPr>
               <a:pPr/>
-              <a:t>3/29/2024</a:t>
+              <a:t>12/4/2024</a:t>
             </a:fld>
             <a:endParaRPr kumimoji="0" lang="en-US" dirty="0"/>
           </a:p>
@@ -8265,7 +8270,7 @@
                 </a:solidFill>
               </a:rPr>
               <a:pPr/>
-              <a:t>3/29/2024</a:t>
+              <a:t>12/4/2024</a:t>
             </a:fld>
             <a:endParaRPr kumimoji="0" lang="en-US" dirty="0"/>
           </a:p>
@@ -8774,7 +8779,7 @@
                 </a:solidFill>
               </a:rPr>
               <a:pPr/>
-              <a:t>3/29/2024</a:t>
+              <a:t>12/4/2024</a:t>
             </a:fld>
             <a:endParaRPr kumimoji="0" lang="en-US" dirty="0"/>
           </a:p>
@@ -9283,7 +9288,7 @@
                 </a:solidFill>
               </a:rPr>
               <a:pPr/>
-              <a:t>3/29/2024</a:t>
+              <a:t>12/4/2024</a:t>
             </a:fld>
             <a:endParaRPr kumimoji="0" lang="en-US" dirty="0"/>
           </a:p>
@@ -9504,7 +9509,7 @@
                 </a:solidFill>
               </a:rPr>
               <a:pPr/>
-              <a:t>3/29/2024</a:t>
+              <a:t>12/4/2024</a:t>
             </a:fld>
             <a:endParaRPr kumimoji="0" lang="en-US" dirty="0"/>
           </a:p>
@@ -9776,7 +9781,7 @@
           <a:p>
             <a:fld id="{C5A53396-52C0-405C-BBDC-73FF63BF6BF1}" type="datetimeFigureOut">
               <a:rPr lang="zh-TW" altLang="en-US" smtClean="0"/>
-              <a:t>2024/3/29</a:t>
+              <a:t>2024/12/4</a:t>
             </a:fld>
             <a:endParaRPr lang="zh-TW" altLang="en-US"/>
           </a:p>
@@ -10112,7 +10117,7 @@
                 </a:solidFill>
               </a:rPr>
               <a:pPr/>
-              <a:t>3/29/2024</a:t>
+              <a:t>12/4/2024</a:t>
             </a:fld>
             <a:endParaRPr kumimoji="0" lang="en-US" dirty="0"/>
           </a:p>
@@ -10336,7 +10341,7 @@
                 </a:solidFill>
               </a:rPr>
               <a:pPr/>
-              <a:t>3/29/2024</a:t>
+              <a:t>12/4/2024</a:t>
             </a:fld>
             <a:endParaRPr kumimoji="0" lang="en-US" dirty="0"/>
           </a:p>
@@ -10517,7 +10522,7 @@
             <a:fld id="{ACB2EC6F-6501-4E04-BD6C-A8A6CABB2C5B}" type="datetimeFigureOut">
               <a:rPr kumimoji="0" lang="en-US" smtClean="0"/>
               <a:pPr/>
-              <a:t>3/29/2024</a:t>
+              <a:t>12/4/2024</a:t>
             </a:fld>
             <a:endParaRPr kumimoji="0" lang="en-US" dirty="0"/>
           </a:p>
@@ -10801,7 +10806,7 @@
           <a:p>
             <a:fld id="{C5A53396-52C0-405C-BBDC-73FF63BF6BF1}" type="datetimeFigureOut">
               <a:rPr lang="zh-TW" altLang="en-US" smtClean="0"/>
-              <a:t>2024/3/29</a:t>
+              <a:t>2024/12/4</a:t>
             </a:fld>
             <a:endParaRPr lang="zh-TW" altLang="en-US"/>
           </a:p>
@@ -11213,7 +11218,7 @@
           <a:p>
             <a:fld id="{C5A53396-52C0-405C-BBDC-73FF63BF6BF1}" type="datetimeFigureOut">
               <a:rPr lang="zh-TW" altLang="en-US" smtClean="0"/>
-              <a:t>2024/3/29</a:t>
+              <a:t>2024/12/4</a:t>
             </a:fld>
             <a:endParaRPr lang="zh-TW" altLang="en-US"/>
           </a:p>
@@ -11354,7 +11359,7 @@
           <a:p>
             <a:fld id="{C5A53396-52C0-405C-BBDC-73FF63BF6BF1}" type="datetimeFigureOut">
               <a:rPr lang="zh-TW" altLang="en-US" smtClean="0"/>
-              <a:t>2024/3/29</a:t>
+              <a:t>2024/12/4</a:t>
             </a:fld>
             <a:endParaRPr lang="zh-TW" altLang="en-US"/>
           </a:p>
@@ -11467,7 +11472,7 @@
           <a:p>
             <a:fld id="{C5A53396-52C0-405C-BBDC-73FF63BF6BF1}" type="datetimeFigureOut">
               <a:rPr lang="zh-TW" altLang="en-US" smtClean="0"/>
-              <a:t>2024/3/29</a:t>
+              <a:t>2024/12/4</a:t>
             </a:fld>
             <a:endParaRPr lang="zh-TW" altLang="en-US"/>
           </a:p>
@@ -11778,7 +11783,7 @@
           <a:p>
             <a:fld id="{C5A53396-52C0-405C-BBDC-73FF63BF6BF1}" type="datetimeFigureOut">
               <a:rPr lang="zh-TW" altLang="en-US" smtClean="0"/>
-              <a:t>2024/3/29</a:t>
+              <a:t>2024/12/4</a:t>
             </a:fld>
             <a:endParaRPr lang="zh-TW" altLang="en-US"/>
           </a:p>
@@ -12066,7 +12071,7 @@
           <a:p>
             <a:fld id="{C5A53396-52C0-405C-BBDC-73FF63BF6BF1}" type="datetimeFigureOut">
               <a:rPr lang="zh-TW" altLang="en-US" smtClean="0"/>
-              <a:t>2024/3/29</a:t>
+              <a:t>2024/12/4</a:t>
             </a:fld>
             <a:endParaRPr lang="zh-TW" altLang="en-US"/>
           </a:p>
@@ -12307,7 +12312,7 @@
           <a:p>
             <a:fld id="{C5A53396-52C0-405C-BBDC-73FF63BF6BF1}" type="datetimeFigureOut">
               <a:rPr lang="zh-TW" altLang="en-US" smtClean="0"/>
-              <a:t>2024/3/29</a:t>
+              <a:t>2024/12/4</a:t>
             </a:fld>
             <a:endParaRPr lang="zh-TW" altLang="en-US"/>
           </a:p>
@@ -12879,7 +12884,7 @@
                 </a:solidFill>
               </a:rPr>
               <a:pPr/>
-              <a:t>3/29/2024</a:t>
+              <a:t>12/4/2024</a:t>
             </a:fld>
             <a:endParaRPr kumimoji="0" lang="en-US" sz="1200" dirty="0">
               <a:solidFill>
@@ -14349,7 +14354,7 @@
         <p:spPr>
           <a:xfrm>
             <a:off x="685800" y="1828800"/>
-            <a:ext cx="8077200" cy="3539430"/>
+            <a:ext cx="8077200" cy="4031873"/>
           </a:xfrm>
           <a:prstGeom prst="rect">
             <a:avLst/>
@@ -14384,7 +14389,7 @@
                 <a:latin typeface="微軟正黑體" panose="020B0604030504040204" pitchFamily="34" charset="-120"/>
                 <a:ea typeface="微軟正黑體" panose="020B0604030504040204" pitchFamily="34" charset="-120"/>
               </a:rPr>
-              <a:t>庫就是為了解決這個問題</a:t>
+              <a:t>函式庫就是為了解決這個問題</a:t>
             </a:r>
             <a:endParaRPr lang="en-US" altLang="zh-TW" sz="3200" dirty="0">
               <a:solidFill>
@@ -14427,7 +14432,7 @@
                 <a:latin typeface="微軟正黑體" panose="020B0604030504040204" pitchFamily="34" charset="-120"/>
                 <a:ea typeface="微軟正黑體" panose="020B0604030504040204" pitchFamily="34" charset="-120"/>
               </a:rPr>
-              <a:t>，通過它可以加載、訓練和保存任何</a:t>
+              <a:t>，透過它可以加載、訓練和保存任何</a:t>
             </a:r>
             <a:r>
               <a:rPr lang="en-US" altLang="zh-TW" sz="3200" dirty="0">
@@ -14830,8 +14835,8 @@
         </p:nvSpPr>
         <p:spPr>
           <a:xfrm>
-            <a:off x="609600" y="1295400"/>
-            <a:ext cx="8077200" cy="5509200"/>
+            <a:off x="609600" y="1600202"/>
+            <a:ext cx="8077200" cy="4031873"/>
           </a:xfrm>
           <a:prstGeom prst="rect">
             <a:avLst/>
@@ -14856,7 +14861,7 @@
                 <a:latin typeface="微軟正黑體" panose="020B0604030504040204" pitchFamily="34" charset="-120"/>
                 <a:ea typeface="微軟正黑體" panose="020B0604030504040204" pitchFamily="34" charset="-120"/>
               </a:rPr>
-              <a:t>2019 </a:t>
+              <a:t>Transformer </a:t>
             </a:r>
             <a:r>
               <a:rPr lang="zh-TW" altLang="en-US" sz="3200" dirty="0">
@@ -14866,7 +14871,7 @@
                 <a:latin typeface="微軟正黑體" panose="020B0604030504040204" pitchFamily="34" charset="-120"/>
                 <a:ea typeface="微軟正黑體" panose="020B0604030504040204" pitchFamily="34" charset="-120"/>
               </a:rPr>
-              <a:t>年 </a:t>
+              <a:t>架構 於 </a:t>
             </a:r>
             <a:r>
               <a:rPr lang="en-US" altLang="zh-TW" sz="3200" dirty="0">
@@ -14876,7 +14881,7 @@
                 <a:latin typeface="微軟正黑體" panose="020B0604030504040204" pitchFamily="34" charset="-120"/>
                 <a:ea typeface="微軟正黑體" panose="020B0604030504040204" pitchFamily="34" charset="-120"/>
               </a:rPr>
-              <a:t>2 </a:t>
+              <a:t>2017 </a:t>
             </a:r>
             <a:r>
               <a:rPr lang="zh-TW" altLang="en-US" sz="3200" dirty="0">
@@ -14886,7 +14891,7 @@
                 <a:latin typeface="微軟正黑體" panose="020B0604030504040204" pitchFamily="34" charset="-120"/>
                 <a:ea typeface="微軟正黑體" panose="020B0604030504040204" pitchFamily="34" charset="-120"/>
               </a:rPr>
-              <a:t>月</a:t>
+              <a:t>年 </a:t>
             </a:r>
             <a:r>
               <a:rPr lang="en-US" altLang="zh-TW" sz="3200" dirty="0">
@@ -14896,7 +14901,7 @@
                 <a:latin typeface="微軟正黑體" panose="020B0604030504040204" pitchFamily="34" charset="-120"/>
                 <a:ea typeface="微軟正黑體" panose="020B0604030504040204" pitchFamily="34" charset="-120"/>
               </a:rPr>
-              <a:t>: GPT-2, GPT </a:t>
+              <a:t>6 </a:t>
             </a:r>
             <a:r>
               <a:rPr lang="zh-TW" altLang="en-US" sz="3200" dirty="0">
@@ -14906,7 +14911,7 @@
                 <a:latin typeface="微軟正黑體" panose="020B0604030504040204" pitchFamily="34" charset="-120"/>
                 <a:ea typeface="微軟正黑體" panose="020B0604030504040204" pitchFamily="34" charset="-120"/>
               </a:rPr>
-              <a:t>的改進版本，由於道德問題沒有立即公開發布</a:t>
+              <a:t>月推出。原本研究的重點是翻譯任務。隨後推出了幾個有影響力的模型</a:t>
             </a:r>
           </a:p>
           <a:p>
@@ -14922,7 +14927,7 @@
                 <a:latin typeface="微軟正黑體" panose="020B0604030504040204" pitchFamily="34" charset="-120"/>
                 <a:ea typeface="微軟正黑體" panose="020B0604030504040204" pitchFamily="34" charset="-120"/>
               </a:rPr>
-              <a:t>2019 </a:t>
+              <a:t>2018 </a:t>
             </a:r>
             <a:r>
               <a:rPr lang="zh-TW" altLang="en-US" sz="3200" dirty="0">
@@ -14942,7 +14947,7 @@
                 <a:latin typeface="微軟正黑體" panose="020B0604030504040204" pitchFamily="34" charset="-120"/>
                 <a:ea typeface="微軟正黑體" panose="020B0604030504040204" pitchFamily="34" charset="-120"/>
               </a:rPr>
-              <a:t>10 </a:t>
+              <a:t>6 </a:t>
             </a:r>
             <a:r>
               <a:rPr lang="zh-TW" altLang="en-US" sz="3200" dirty="0">
@@ -14962,17 +14967,17 @@
                 <a:latin typeface="微軟正黑體" panose="020B0604030504040204" pitchFamily="34" charset="-120"/>
                 <a:ea typeface="微軟正黑體" panose="020B0604030504040204" pitchFamily="34" charset="-120"/>
               </a:rPr>
-              <a:t>: </a:t>
-            </a:r>
-            <a:r>
-              <a:rPr lang="en-US" altLang="zh-TW" sz="3200" dirty="0" err="1">
+              <a:t>: GPT, </a:t>
+            </a:r>
+            <a:r>
+              <a:rPr lang="zh-TW" altLang="en-US" sz="3200" dirty="0">
                 <a:solidFill>
                   <a:prstClr val="white"/>
                 </a:solidFill>
                 <a:latin typeface="微軟正黑體" panose="020B0604030504040204" pitchFamily="34" charset="-120"/>
                 <a:ea typeface="微軟正黑體" panose="020B0604030504040204" pitchFamily="34" charset="-120"/>
               </a:rPr>
-              <a:t>DistilBERT</a:t>
+              <a:t>第一個預訓練的 </a:t>
             </a:r>
             <a:r>
               <a:rPr lang="en-US" altLang="zh-TW" sz="3200" dirty="0">
@@ -14982,7 +14987,7 @@
                 <a:latin typeface="微軟正黑體" panose="020B0604030504040204" pitchFamily="34" charset="-120"/>
                 <a:ea typeface="微軟正黑體" panose="020B0604030504040204" pitchFamily="34" charset="-120"/>
               </a:rPr>
-              <a:t>, BERT </a:t>
+              <a:t>Transformer </a:t>
             </a:r>
             <a:r>
               <a:rPr lang="zh-TW" altLang="en-US" sz="3200" dirty="0">
@@ -14992,7 +14997,7 @@
                 <a:latin typeface="微軟正黑體" panose="020B0604030504040204" pitchFamily="34" charset="-120"/>
                 <a:ea typeface="微軟正黑體" panose="020B0604030504040204" pitchFamily="34" charset="-120"/>
               </a:rPr>
-              <a:t>的提煉版本，速度提高 </a:t>
+              <a:t>模型，用於各種 </a:t>
             </a:r>
             <a:r>
               <a:rPr lang="en-US" altLang="zh-TW" sz="3200" dirty="0">
@@ -15002,7 +15007,7 @@
                 <a:latin typeface="微軟正黑體" panose="020B0604030504040204" pitchFamily="34" charset="-120"/>
                 <a:ea typeface="微軟正黑體" panose="020B0604030504040204" pitchFamily="34" charset="-120"/>
               </a:rPr>
-              <a:t>60%</a:t>
+              <a:t>NLP </a:t>
             </a:r>
             <a:r>
               <a:rPr lang="zh-TW" altLang="en-US" sz="3200" dirty="0">
@@ -15012,47 +15017,7 @@
                 <a:latin typeface="微軟正黑體" panose="020B0604030504040204" pitchFamily="34" charset="-120"/>
                 <a:ea typeface="微軟正黑體" panose="020B0604030504040204" pitchFamily="34" charset="-120"/>
               </a:rPr>
-              <a:t>，記憶體減輕 </a:t>
-            </a:r>
-            <a:r>
-              <a:rPr lang="en-US" altLang="zh-TW" sz="3200" dirty="0">
-                <a:solidFill>
-                  <a:prstClr val="white"/>
-                </a:solidFill>
-                <a:latin typeface="微軟正黑體" panose="020B0604030504040204" pitchFamily="34" charset="-120"/>
-                <a:ea typeface="微軟正黑體" panose="020B0604030504040204" pitchFamily="34" charset="-120"/>
-              </a:rPr>
-              <a:t>40%</a:t>
-            </a:r>
-            <a:r>
-              <a:rPr lang="zh-TW" altLang="en-US" sz="3200" dirty="0">
-                <a:solidFill>
-                  <a:prstClr val="white"/>
-                </a:solidFill>
-                <a:latin typeface="微軟正黑體" panose="020B0604030504040204" pitchFamily="34" charset="-120"/>
-                <a:ea typeface="微軟正黑體" panose="020B0604030504040204" pitchFamily="34" charset="-120"/>
-              </a:rPr>
-              <a:t>，但仍保留 </a:t>
-            </a:r>
-            <a:r>
-              <a:rPr lang="en-US" altLang="zh-TW" sz="3200" dirty="0">
-                <a:solidFill>
-                  <a:prstClr val="white"/>
-                </a:solidFill>
-                <a:latin typeface="微軟正黑體" panose="020B0604030504040204" pitchFamily="34" charset="-120"/>
-                <a:ea typeface="微軟正黑體" panose="020B0604030504040204" pitchFamily="34" charset="-120"/>
-              </a:rPr>
-              <a:t>BERT 97% </a:t>
-            </a:r>
-            <a:r>
-              <a:rPr lang="zh-TW" altLang="en-US" sz="3200" dirty="0">
-                <a:solidFill>
-                  <a:prstClr val="white"/>
-                </a:solidFill>
-                <a:latin typeface="微軟正黑體" panose="020B0604030504040204" pitchFamily="34" charset="-120"/>
-                <a:ea typeface="微軟正黑體" panose="020B0604030504040204" pitchFamily="34" charset="-120"/>
-              </a:rPr>
-              <a:t>的性能</a:t>
+              <a:t>任務並獲得極好的結果</a:t>
             </a:r>
           </a:p>
           <a:p>
@@ -15068,7 +15033,7 @@
                 <a:latin typeface="微軟正黑體" panose="020B0604030504040204" pitchFamily="34" charset="-120"/>
                 <a:ea typeface="微軟正黑體" panose="020B0604030504040204" pitchFamily="34" charset="-120"/>
               </a:rPr>
-              <a:t>2019 </a:t>
+              <a:t>2018 </a:t>
             </a:r>
             <a:r>
               <a:rPr lang="zh-TW" altLang="en-US" sz="3200" dirty="0">
@@ -15108,7 +15073,7 @@
                 <a:latin typeface="微軟正黑體" panose="020B0604030504040204" pitchFamily="34" charset="-120"/>
                 <a:ea typeface="微軟正黑體" panose="020B0604030504040204" pitchFamily="34" charset="-120"/>
               </a:rPr>
-              <a:t>: BART </a:t>
+              <a:t>: BERT, </a:t>
             </a:r>
             <a:r>
               <a:rPr lang="zh-TW" altLang="en-US" sz="3200" dirty="0">
@@ -15118,128 +15083,8 @@
                 <a:latin typeface="微軟正黑體" panose="020B0604030504040204" pitchFamily="34" charset="-120"/>
                 <a:ea typeface="微軟正黑體" panose="020B0604030504040204" pitchFamily="34" charset="-120"/>
               </a:rPr>
-              <a:t>和 </a:t>
-            </a:r>
-            <a:r>
-              <a:rPr lang="en-US" altLang="zh-TW" sz="3200" dirty="0">
-                <a:solidFill>
-                  <a:prstClr val="white"/>
-                </a:solidFill>
-                <a:latin typeface="微軟正黑體" panose="020B0604030504040204" pitchFamily="34" charset="-120"/>
-                <a:ea typeface="微軟正黑體" panose="020B0604030504040204" pitchFamily="34" charset="-120"/>
-              </a:rPr>
-              <a:t>T5, </a:t>
-            </a:r>
-            <a:r>
-              <a:rPr lang="zh-TW" altLang="en-US" sz="3200" dirty="0">
-                <a:solidFill>
-                  <a:prstClr val="white"/>
-                </a:solidFill>
-                <a:latin typeface="微軟正黑體" panose="020B0604030504040204" pitchFamily="34" charset="-120"/>
-                <a:ea typeface="微軟正黑體" panose="020B0604030504040204" pitchFamily="34" charset="-120"/>
-              </a:rPr>
-              <a:t>兩個使用與原始 </a:t>
-            </a:r>
-            <a:r>
-              <a:rPr lang="en-US" altLang="zh-TW" sz="3200" dirty="0">
-                <a:solidFill>
-                  <a:prstClr val="white"/>
-                </a:solidFill>
-                <a:latin typeface="微軟正黑體" panose="020B0604030504040204" pitchFamily="34" charset="-120"/>
-                <a:ea typeface="微軟正黑體" panose="020B0604030504040204" pitchFamily="34" charset="-120"/>
-              </a:rPr>
-              <a:t>Transformer </a:t>
-            </a:r>
-            <a:r>
-              <a:rPr lang="zh-TW" altLang="en-US" sz="3200" dirty="0">
-                <a:solidFill>
-                  <a:prstClr val="white"/>
-                </a:solidFill>
-                <a:latin typeface="微軟正黑體" panose="020B0604030504040204" pitchFamily="34" charset="-120"/>
-                <a:ea typeface="微軟正黑體" panose="020B0604030504040204" pitchFamily="34" charset="-120"/>
-              </a:rPr>
-              <a:t>模型相同架構的大型預訓練模型</a:t>
-            </a:r>
-            <a:endParaRPr lang="en-US" altLang="zh-TW" sz="3200" dirty="0">
-              <a:solidFill>
-                <a:prstClr val="white"/>
-              </a:solidFill>
-              <a:latin typeface="微軟正黑體" panose="020B0604030504040204" pitchFamily="34" charset="-120"/>
-              <a:ea typeface="微軟正黑體" panose="020B0604030504040204" pitchFamily="34" charset="-120"/>
-            </a:endParaRPr>
-          </a:p>
-          <a:p>
-            <a:pPr marL="514350" indent="-514350">
-              <a:buFont typeface="Arial" panose="020B0604020202020204" pitchFamily="34" charset="0"/>
-              <a:buChar char="•"/>
-            </a:pPr>
-            <a:r>
-              <a:rPr lang="en-US" altLang="zh-TW" sz="3200" dirty="0">
-                <a:solidFill>
-                  <a:prstClr val="white"/>
-                </a:solidFill>
-                <a:latin typeface="微軟正黑體" panose="020B0604030504040204" pitchFamily="34" charset="-120"/>
-                <a:ea typeface="微軟正黑體" panose="020B0604030504040204" pitchFamily="34" charset="-120"/>
-              </a:rPr>
-              <a:t>2020 </a:t>
-            </a:r>
-            <a:r>
-              <a:rPr lang="zh-TW" altLang="en-US" sz="3200" dirty="0">
-                <a:solidFill>
-                  <a:prstClr val="white"/>
-                </a:solidFill>
-                <a:latin typeface="微軟正黑體" panose="020B0604030504040204" pitchFamily="34" charset="-120"/>
-                <a:ea typeface="微軟正黑體" panose="020B0604030504040204" pitchFamily="34" charset="-120"/>
-              </a:rPr>
-              <a:t>年 </a:t>
-            </a:r>
-            <a:r>
-              <a:rPr lang="en-US" altLang="zh-TW" sz="3200" dirty="0">
-                <a:solidFill>
-                  <a:prstClr val="white"/>
-                </a:solidFill>
-                <a:latin typeface="微軟正黑體" panose="020B0604030504040204" pitchFamily="34" charset="-120"/>
-                <a:ea typeface="微軟正黑體" panose="020B0604030504040204" pitchFamily="34" charset="-120"/>
-              </a:rPr>
-              <a:t>5 </a:t>
-            </a:r>
-            <a:r>
-              <a:rPr lang="zh-TW" altLang="en-US" sz="3200" dirty="0">
-                <a:solidFill>
-                  <a:prstClr val="white"/>
-                </a:solidFill>
-                <a:latin typeface="微軟正黑體" panose="020B0604030504040204" pitchFamily="34" charset="-120"/>
-                <a:ea typeface="微軟正黑體" panose="020B0604030504040204" pitchFamily="34" charset="-120"/>
-              </a:rPr>
-              <a:t>月</a:t>
-            </a:r>
-            <a:r>
-              <a:rPr lang="en-US" altLang="zh-TW" sz="3200" dirty="0">
-                <a:solidFill>
-                  <a:prstClr val="white"/>
-                </a:solidFill>
-                <a:latin typeface="微軟正黑體" panose="020B0604030504040204" pitchFamily="34" charset="-120"/>
-                <a:ea typeface="微軟正黑體" panose="020B0604030504040204" pitchFamily="34" charset="-120"/>
-              </a:rPr>
-              <a:t>, GPT-3, GPT-2 </a:t>
-            </a:r>
-            <a:r>
-              <a:rPr lang="zh-TW" altLang="en-US" sz="3200" dirty="0">
-                <a:solidFill>
-                  <a:prstClr val="white"/>
-                </a:solidFill>
-                <a:latin typeface="微軟正黑體" panose="020B0604030504040204" pitchFamily="34" charset="-120"/>
-                <a:ea typeface="微軟正黑體" panose="020B0604030504040204" pitchFamily="34" charset="-120"/>
-              </a:rPr>
-              <a:t>的更大版本，無需微調即可在各種任務上表現良好（稱爲零樣本學習）</a:t>
-            </a:r>
-            <a:endParaRPr lang="en-US" altLang="zh-TW" sz="3200" dirty="0">
-              <a:solidFill>
-                <a:prstClr val="white"/>
-              </a:solidFill>
-              <a:latin typeface="微軟正黑體" panose="020B0604030504040204" pitchFamily="34" charset="-120"/>
-              <a:ea typeface="微軟正黑體" panose="020B0604030504040204" pitchFamily="34" charset="-120"/>
-            </a:endParaRPr>
+              <a:t>另一個大型預訓練模型，該模型旨在生成更好的句子摘要</a:t>
+            </a:r>
           </a:p>
         </p:txBody>
       </p:sp>
@@ -15253,7 +15098,7 @@
         </p:nvSpPr>
         <p:spPr>
           <a:xfrm>
-            <a:off x="990600" y="152400"/>
+            <a:off x="990600" y="304800"/>
             <a:ext cx="7696200" cy="990600"/>
           </a:xfrm>
           <a:prstGeom prst="rect">
@@ -15312,7 +15157,7 @@
     </p:spTree>
     <p:extLst>
       <p:ext uri="{BB962C8B-B14F-4D97-AF65-F5344CB8AC3E}">
-        <p14:creationId xmlns:p14="http://schemas.microsoft.com/office/powerpoint/2010/main" val="502793792"/>
+        <p14:creationId xmlns:p14="http://schemas.microsoft.com/office/powerpoint/2010/main" val="108379556"/>
       </p:ext>
     </p:extLst>
   </p:cSld>
@@ -15350,8 +15195,8 @@
         </p:nvSpPr>
         <p:spPr>
           <a:xfrm>
-            <a:off x="609600" y="1600202"/>
-            <a:ext cx="8077200" cy="4031873"/>
+            <a:off x="609600" y="1295400"/>
+            <a:ext cx="8077200" cy="5509200"/>
           </a:xfrm>
           <a:prstGeom prst="rect">
             <a:avLst/>
@@ -15376,7 +15221,7 @@
                 <a:latin typeface="微軟正黑體" panose="020B0604030504040204" pitchFamily="34" charset="-120"/>
                 <a:ea typeface="微軟正黑體" panose="020B0604030504040204" pitchFamily="34" charset="-120"/>
               </a:rPr>
-              <a:t>Transformer </a:t>
+              <a:t>2019 </a:t>
             </a:r>
             <a:r>
               <a:rPr lang="zh-TW" altLang="en-US" sz="3200" dirty="0">
@@ -15386,7 +15231,7 @@
                 <a:latin typeface="微軟正黑體" panose="020B0604030504040204" pitchFamily="34" charset="-120"/>
                 <a:ea typeface="微軟正黑體" panose="020B0604030504040204" pitchFamily="34" charset="-120"/>
               </a:rPr>
-              <a:t>架構 於 </a:t>
+              <a:t>年 </a:t>
             </a:r>
             <a:r>
               <a:rPr lang="en-US" altLang="zh-TW" sz="3200" dirty="0">
@@ -15396,7 +15241,7 @@
                 <a:latin typeface="微軟正黑體" panose="020B0604030504040204" pitchFamily="34" charset="-120"/>
                 <a:ea typeface="微軟正黑體" panose="020B0604030504040204" pitchFamily="34" charset="-120"/>
               </a:rPr>
-              <a:t>2017 </a:t>
+              <a:t>2 </a:t>
             </a:r>
             <a:r>
               <a:rPr lang="zh-TW" altLang="en-US" sz="3200" dirty="0">
@@ -15406,7 +15251,7 @@
                 <a:latin typeface="微軟正黑體" panose="020B0604030504040204" pitchFamily="34" charset="-120"/>
                 <a:ea typeface="微軟正黑體" panose="020B0604030504040204" pitchFamily="34" charset="-120"/>
               </a:rPr>
-              <a:t>年 </a:t>
+              <a:t>月</a:t>
             </a:r>
             <a:r>
               <a:rPr lang="en-US" altLang="zh-TW" sz="3200" dirty="0">
@@ -15416,7 +15261,7 @@
                 <a:latin typeface="微軟正黑體" panose="020B0604030504040204" pitchFamily="34" charset="-120"/>
                 <a:ea typeface="微軟正黑體" panose="020B0604030504040204" pitchFamily="34" charset="-120"/>
               </a:rPr>
-              <a:t>6 </a:t>
+              <a:t>: GPT-2, GPT </a:t>
             </a:r>
             <a:r>
               <a:rPr lang="zh-TW" altLang="en-US" sz="3200" dirty="0">
@@ -15426,7 +15271,7 @@
                 <a:latin typeface="微軟正黑體" panose="020B0604030504040204" pitchFamily="34" charset="-120"/>
                 <a:ea typeface="微軟正黑體" panose="020B0604030504040204" pitchFamily="34" charset="-120"/>
               </a:rPr>
-              <a:t>月推出。原本研究的重點是翻譯任務。隨後推出了幾個有影響力的模型</a:t>
+              <a:t>的改進版本，由於道德問題沒有立即公開發布</a:t>
             </a:r>
           </a:p>
           <a:p>
@@ -15442,7 +15287,7 @@
                 <a:latin typeface="微軟正黑體" panose="020B0604030504040204" pitchFamily="34" charset="-120"/>
                 <a:ea typeface="微軟正黑體" panose="020B0604030504040204" pitchFamily="34" charset="-120"/>
               </a:rPr>
-              <a:t>2018 </a:t>
+              <a:t>2019 </a:t>
             </a:r>
             <a:r>
               <a:rPr lang="zh-TW" altLang="en-US" sz="3200" dirty="0">
@@ -15462,7 +15307,7 @@
                 <a:latin typeface="微軟正黑體" panose="020B0604030504040204" pitchFamily="34" charset="-120"/>
                 <a:ea typeface="微軟正黑體" panose="020B0604030504040204" pitchFamily="34" charset="-120"/>
               </a:rPr>
-              <a:t>6 </a:t>
+              <a:t>10 </a:t>
             </a:r>
             <a:r>
               <a:rPr lang="zh-TW" altLang="en-US" sz="3200" dirty="0">
@@ -15482,17 +15327,17 @@
                 <a:latin typeface="微軟正黑體" panose="020B0604030504040204" pitchFamily="34" charset="-120"/>
                 <a:ea typeface="微軟正黑體" panose="020B0604030504040204" pitchFamily="34" charset="-120"/>
               </a:rPr>
-              <a:t>: GPT, </a:t>
-            </a:r>
-            <a:r>
-              <a:rPr lang="zh-TW" altLang="en-US" sz="3200" dirty="0">
+              <a:t>: </a:t>
+            </a:r>
+            <a:r>
+              <a:rPr lang="en-US" altLang="zh-TW" sz="3200" dirty="0" err="1">
                 <a:solidFill>
                   <a:prstClr val="white"/>
                 </a:solidFill>
                 <a:latin typeface="微軟正黑體" panose="020B0604030504040204" pitchFamily="34" charset="-120"/>
                 <a:ea typeface="微軟正黑體" panose="020B0604030504040204" pitchFamily="34" charset="-120"/>
               </a:rPr>
-              <a:t>第一個預訓練的 </a:t>
+              <a:t>DistilBERT</a:t>
             </a:r>
             <a:r>
               <a:rPr lang="en-US" altLang="zh-TW" sz="3200" dirty="0">
@@ -15502,7 +15347,7 @@
                 <a:latin typeface="微軟正黑體" panose="020B0604030504040204" pitchFamily="34" charset="-120"/>
                 <a:ea typeface="微軟正黑體" panose="020B0604030504040204" pitchFamily="34" charset="-120"/>
               </a:rPr>
-              <a:t>Transformer </a:t>
+              <a:t>, BERT </a:t>
             </a:r>
             <a:r>
               <a:rPr lang="zh-TW" altLang="en-US" sz="3200" dirty="0">
@@ -15512,7 +15357,7 @@
                 <a:latin typeface="微軟正黑體" panose="020B0604030504040204" pitchFamily="34" charset="-120"/>
                 <a:ea typeface="微軟正黑體" panose="020B0604030504040204" pitchFamily="34" charset="-120"/>
               </a:rPr>
-              <a:t>模型，用於各種 </a:t>
+              <a:t>的提煉版本，速度提高 </a:t>
             </a:r>
             <a:r>
               <a:rPr lang="en-US" altLang="zh-TW" sz="3200" dirty="0">
@@ -15522,7 +15367,7 @@
                 <a:latin typeface="微軟正黑體" panose="020B0604030504040204" pitchFamily="34" charset="-120"/>
                 <a:ea typeface="微軟正黑體" panose="020B0604030504040204" pitchFamily="34" charset="-120"/>
               </a:rPr>
-              <a:t>NLP </a:t>
+              <a:t>60%</a:t>
             </a:r>
             <a:r>
               <a:rPr lang="zh-TW" altLang="en-US" sz="3200" dirty="0">
@@ -15532,7 +15377,47 @@
                 <a:latin typeface="微軟正黑體" panose="020B0604030504040204" pitchFamily="34" charset="-120"/>
                 <a:ea typeface="微軟正黑體" panose="020B0604030504040204" pitchFamily="34" charset="-120"/>
               </a:rPr>
-              <a:t>任務並獲得極好的結果</a:t>
+              <a:t>，記憶體減輕 </a:t>
+            </a:r>
+            <a:r>
+              <a:rPr lang="en-US" altLang="zh-TW" sz="3200" dirty="0">
+                <a:solidFill>
+                  <a:prstClr val="white"/>
+                </a:solidFill>
+                <a:latin typeface="微軟正黑體" panose="020B0604030504040204" pitchFamily="34" charset="-120"/>
+                <a:ea typeface="微軟正黑體" panose="020B0604030504040204" pitchFamily="34" charset="-120"/>
+              </a:rPr>
+              <a:t>40%</a:t>
+            </a:r>
+            <a:r>
+              <a:rPr lang="zh-TW" altLang="en-US" sz="3200" dirty="0">
+                <a:solidFill>
+                  <a:prstClr val="white"/>
+                </a:solidFill>
+                <a:latin typeface="微軟正黑體" panose="020B0604030504040204" pitchFamily="34" charset="-120"/>
+                <a:ea typeface="微軟正黑體" panose="020B0604030504040204" pitchFamily="34" charset="-120"/>
+              </a:rPr>
+              <a:t>，但仍保留 </a:t>
+            </a:r>
+            <a:r>
+              <a:rPr lang="en-US" altLang="zh-TW" sz="3200" dirty="0">
+                <a:solidFill>
+                  <a:prstClr val="white"/>
+                </a:solidFill>
+                <a:latin typeface="微軟正黑體" panose="020B0604030504040204" pitchFamily="34" charset="-120"/>
+                <a:ea typeface="微軟正黑體" panose="020B0604030504040204" pitchFamily="34" charset="-120"/>
+              </a:rPr>
+              <a:t>BERT 97% </a:t>
+            </a:r>
+            <a:r>
+              <a:rPr lang="zh-TW" altLang="en-US" sz="3200" dirty="0">
+                <a:solidFill>
+                  <a:prstClr val="white"/>
+                </a:solidFill>
+                <a:latin typeface="微軟正黑體" panose="020B0604030504040204" pitchFamily="34" charset="-120"/>
+                <a:ea typeface="微軟正黑體" panose="020B0604030504040204" pitchFamily="34" charset="-120"/>
+              </a:rPr>
+              <a:t>的性能</a:t>
             </a:r>
           </a:p>
           <a:p>
@@ -15548,7 +15433,7 @@
                 <a:latin typeface="微軟正黑體" panose="020B0604030504040204" pitchFamily="34" charset="-120"/>
                 <a:ea typeface="微軟正黑體" panose="020B0604030504040204" pitchFamily="34" charset="-120"/>
               </a:rPr>
-              <a:t>2018 </a:t>
+              <a:t>2019 </a:t>
             </a:r>
             <a:r>
               <a:rPr lang="zh-TW" altLang="en-US" sz="3200" dirty="0">
@@ -15588,7 +15473,7 @@
                 <a:latin typeface="微軟正黑體" panose="020B0604030504040204" pitchFamily="34" charset="-120"/>
                 <a:ea typeface="微軟正黑體" panose="020B0604030504040204" pitchFamily="34" charset="-120"/>
               </a:rPr>
-              <a:t>: BERT, </a:t>
+              <a:t>: BART </a:t>
             </a:r>
             <a:r>
               <a:rPr lang="zh-TW" altLang="en-US" sz="3200" dirty="0">
@@ -15598,8 +15483,128 @@
                 <a:latin typeface="微軟正黑體" panose="020B0604030504040204" pitchFamily="34" charset="-120"/>
                 <a:ea typeface="微軟正黑體" panose="020B0604030504040204" pitchFamily="34" charset="-120"/>
               </a:rPr>
-              <a:t>另一個大型預訓練模型，該模型旨在生成更好的句子摘要</a:t>
-            </a:r>
+              <a:t>和 </a:t>
+            </a:r>
+            <a:r>
+              <a:rPr lang="en-US" altLang="zh-TW" sz="3200" dirty="0">
+                <a:solidFill>
+                  <a:prstClr val="white"/>
+                </a:solidFill>
+                <a:latin typeface="微軟正黑體" panose="020B0604030504040204" pitchFamily="34" charset="-120"/>
+                <a:ea typeface="微軟正黑體" panose="020B0604030504040204" pitchFamily="34" charset="-120"/>
+              </a:rPr>
+              <a:t>T5, </a:t>
+            </a:r>
+            <a:r>
+              <a:rPr lang="zh-TW" altLang="en-US" sz="3200" dirty="0">
+                <a:solidFill>
+                  <a:prstClr val="white"/>
+                </a:solidFill>
+                <a:latin typeface="微軟正黑體" panose="020B0604030504040204" pitchFamily="34" charset="-120"/>
+                <a:ea typeface="微軟正黑體" panose="020B0604030504040204" pitchFamily="34" charset="-120"/>
+              </a:rPr>
+              <a:t>兩個使用與原始 </a:t>
+            </a:r>
+            <a:r>
+              <a:rPr lang="en-US" altLang="zh-TW" sz="3200" dirty="0">
+                <a:solidFill>
+                  <a:prstClr val="white"/>
+                </a:solidFill>
+                <a:latin typeface="微軟正黑體" panose="020B0604030504040204" pitchFamily="34" charset="-120"/>
+                <a:ea typeface="微軟正黑體" panose="020B0604030504040204" pitchFamily="34" charset="-120"/>
+              </a:rPr>
+              <a:t>Transformer </a:t>
+            </a:r>
+            <a:r>
+              <a:rPr lang="zh-TW" altLang="en-US" sz="3200" dirty="0">
+                <a:solidFill>
+                  <a:prstClr val="white"/>
+                </a:solidFill>
+                <a:latin typeface="微軟正黑體" panose="020B0604030504040204" pitchFamily="34" charset="-120"/>
+                <a:ea typeface="微軟正黑體" panose="020B0604030504040204" pitchFamily="34" charset="-120"/>
+              </a:rPr>
+              <a:t>模型相同架構的大型預訓練模型</a:t>
+            </a:r>
+            <a:endParaRPr lang="en-US" altLang="zh-TW" sz="3200" dirty="0">
+              <a:solidFill>
+                <a:prstClr val="white"/>
+              </a:solidFill>
+              <a:latin typeface="微軟正黑體" panose="020B0604030504040204" pitchFamily="34" charset="-120"/>
+              <a:ea typeface="微軟正黑體" panose="020B0604030504040204" pitchFamily="34" charset="-120"/>
+            </a:endParaRPr>
+          </a:p>
+          <a:p>
+            <a:pPr marL="514350" indent="-514350">
+              <a:buFont typeface="Arial" panose="020B0604020202020204" pitchFamily="34" charset="0"/>
+              <a:buChar char="•"/>
+            </a:pPr>
+            <a:r>
+              <a:rPr lang="en-US" altLang="zh-TW" sz="3200" dirty="0">
+                <a:solidFill>
+                  <a:prstClr val="white"/>
+                </a:solidFill>
+                <a:latin typeface="微軟正黑體" panose="020B0604030504040204" pitchFamily="34" charset="-120"/>
+                <a:ea typeface="微軟正黑體" panose="020B0604030504040204" pitchFamily="34" charset="-120"/>
+              </a:rPr>
+              <a:t>2020 </a:t>
+            </a:r>
+            <a:r>
+              <a:rPr lang="zh-TW" altLang="en-US" sz="3200" dirty="0">
+                <a:solidFill>
+                  <a:prstClr val="white"/>
+                </a:solidFill>
+                <a:latin typeface="微軟正黑體" panose="020B0604030504040204" pitchFamily="34" charset="-120"/>
+                <a:ea typeface="微軟正黑體" panose="020B0604030504040204" pitchFamily="34" charset="-120"/>
+              </a:rPr>
+              <a:t>年 </a:t>
+            </a:r>
+            <a:r>
+              <a:rPr lang="en-US" altLang="zh-TW" sz="3200" dirty="0">
+                <a:solidFill>
+                  <a:prstClr val="white"/>
+                </a:solidFill>
+                <a:latin typeface="微軟正黑體" panose="020B0604030504040204" pitchFamily="34" charset="-120"/>
+                <a:ea typeface="微軟正黑體" panose="020B0604030504040204" pitchFamily="34" charset="-120"/>
+              </a:rPr>
+              <a:t>5 </a:t>
+            </a:r>
+            <a:r>
+              <a:rPr lang="zh-TW" altLang="en-US" sz="3200" dirty="0">
+                <a:solidFill>
+                  <a:prstClr val="white"/>
+                </a:solidFill>
+                <a:latin typeface="微軟正黑體" panose="020B0604030504040204" pitchFamily="34" charset="-120"/>
+                <a:ea typeface="微軟正黑體" panose="020B0604030504040204" pitchFamily="34" charset="-120"/>
+              </a:rPr>
+              <a:t>月</a:t>
+            </a:r>
+            <a:r>
+              <a:rPr lang="en-US" altLang="zh-TW" sz="3200" dirty="0">
+                <a:solidFill>
+                  <a:prstClr val="white"/>
+                </a:solidFill>
+                <a:latin typeface="微軟正黑體" panose="020B0604030504040204" pitchFamily="34" charset="-120"/>
+                <a:ea typeface="微軟正黑體" panose="020B0604030504040204" pitchFamily="34" charset="-120"/>
+              </a:rPr>
+              <a:t>, GPT-3, GPT-2 </a:t>
+            </a:r>
+            <a:r>
+              <a:rPr lang="zh-TW" altLang="en-US" sz="3200" dirty="0">
+                <a:solidFill>
+                  <a:prstClr val="white"/>
+                </a:solidFill>
+                <a:latin typeface="微軟正黑體" panose="020B0604030504040204" pitchFamily="34" charset="-120"/>
+                <a:ea typeface="微軟正黑體" panose="020B0604030504040204" pitchFamily="34" charset="-120"/>
+              </a:rPr>
+              <a:t>的更大版本，無需微調即可在各種任務上表現良好（稱爲零樣本學習）</a:t>
+            </a:r>
+            <a:endParaRPr lang="en-US" altLang="zh-TW" sz="3200" dirty="0">
+              <a:solidFill>
+                <a:prstClr val="white"/>
+              </a:solidFill>
+              <a:latin typeface="微軟正黑體" panose="020B0604030504040204" pitchFamily="34" charset="-120"/>
+              <a:ea typeface="微軟正黑體" panose="020B0604030504040204" pitchFamily="34" charset="-120"/>
+            </a:endParaRPr>
           </a:p>
         </p:txBody>
       </p:sp>
@@ -15613,7 +15618,7 @@
         </p:nvSpPr>
         <p:spPr>
           <a:xfrm>
-            <a:off x="990600" y="304800"/>
+            <a:off x="990600" y="152400"/>
             <a:ext cx="7696200" cy="990600"/>
           </a:xfrm>
           <a:prstGeom prst="rect">
@@ -15672,7 +15677,7 @@
     </p:spTree>
     <p:extLst>
       <p:ext uri="{BB962C8B-B14F-4D97-AF65-F5344CB8AC3E}">
-        <p14:creationId xmlns:p14="http://schemas.microsoft.com/office/powerpoint/2010/main" val="108379556"/>
+        <p14:creationId xmlns:p14="http://schemas.microsoft.com/office/powerpoint/2010/main" val="502793792"/>
       </p:ext>
     </p:extLst>
   </p:cSld>

--- a/Slides/Week03/02：Transformers函數庫.pptx
+++ b/Slides/Week03/02：Transformers函數庫.pptx
@@ -6,19 +6,32 @@
     <p:sldMasterId id="2147483660" r:id="rId2"/>
   </p:sldMasterIdLst>
   <p:notesMasterIdLst>
-    <p:notesMasterId r:id="rId13"/>
+    <p:notesMasterId r:id="rId26"/>
   </p:notesMasterIdLst>
   <p:sldIdLst>
     <p:sldId id="681" r:id="rId3"/>
     <p:sldId id="1186" r:id="rId4"/>
-    <p:sldId id="1195" r:id="rId5"/>
-    <p:sldId id="1196" r:id="rId6"/>
-    <p:sldId id="1197" r:id="rId7"/>
-    <p:sldId id="1200" r:id="rId8"/>
-    <p:sldId id="1199" r:id="rId9"/>
-    <p:sldId id="1201" r:id="rId10"/>
-    <p:sldId id="1202" r:id="rId11"/>
-    <p:sldId id="1203" r:id="rId12"/>
+    <p:sldId id="1204" r:id="rId5"/>
+    <p:sldId id="1206" r:id="rId6"/>
+    <p:sldId id="1207" r:id="rId7"/>
+    <p:sldId id="1208" r:id="rId8"/>
+    <p:sldId id="1209" r:id="rId9"/>
+    <p:sldId id="1210" r:id="rId10"/>
+    <p:sldId id="1211" r:id="rId11"/>
+    <p:sldId id="1213" r:id="rId12"/>
+    <p:sldId id="1212" r:id="rId13"/>
+    <p:sldId id="1205" r:id="rId14"/>
+    <p:sldId id="1195" r:id="rId15"/>
+    <p:sldId id="1196" r:id="rId16"/>
+    <p:sldId id="1214" r:id="rId17"/>
+    <p:sldId id="1215" r:id="rId18"/>
+    <p:sldId id="1216" r:id="rId19"/>
+    <p:sldId id="1197" r:id="rId20"/>
+    <p:sldId id="1200" r:id="rId21"/>
+    <p:sldId id="1199" r:id="rId22"/>
+    <p:sldId id="1201" r:id="rId23"/>
+    <p:sldId id="1202" r:id="rId24"/>
+    <p:sldId id="1203" r:id="rId25"/>
   </p:sldIdLst>
   <p:sldSz cx="9144000" cy="6858000" type="screen4x3"/>
   <p:notesSz cx="6858000" cy="9144000"/>
@@ -207,7 +220,7 @@
           <a:p>
             <a:fld id="{9720C436-07A3-46D6-A8C6-4DFF2B51DC63}" type="datetimeFigureOut">
               <a:rPr lang="zh-TW" altLang="en-US" smtClean="0"/>
-              <a:t>2024/12/4</a:t>
+              <a:t>2024/12/10</a:t>
             </a:fld>
             <a:endParaRPr lang="zh-TW" altLang="en-US"/>
           </a:p>
@@ -678,7 +691,1247 @@
                 <a:tabLst/>
                 <a:defRPr/>
               </a:pPr>
-              <a:t>10</a:t>
+              <a:t>14</a:t>
+            </a:fld>
+            <a:endParaRPr kumimoji="0" lang="en-US" sz="1200" b="0" i="0" u="none" strike="noStrike" kern="1200" cap="none" spc="0" normalizeH="0" baseline="0" noProof="0" dirty="0">
+              <a:ln>
+                <a:noFill/>
+              </a:ln>
+              <a:solidFill>
+                <a:prstClr val="black"/>
+              </a:solidFill>
+              <a:effectLst/>
+              <a:uLnTx/>
+              <a:uFillTx/>
+              <a:latin typeface="Calibri"/>
+              <a:ea typeface="+mn-ea"/>
+              <a:cs typeface="+mn-cs"/>
+            </a:endParaRPr>
+          </a:p>
+        </p:txBody>
+      </p:sp>
+    </p:spTree>
+    <p:extLst>
+      <p:ext uri="{BB962C8B-B14F-4D97-AF65-F5344CB8AC3E}">
+        <p14:creationId xmlns:p14="http://schemas.microsoft.com/office/powerpoint/2010/main" val="2322252248"/>
+      </p:ext>
+    </p:extLst>
+  </p:cSld>
+  <p:clrMapOvr>
+    <a:masterClrMapping/>
+  </p:clrMapOvr>
+</p:notes>
+</file>
+
+<file path=ppt/notesSlides/notesSlide11.xml><?xml version="1.0" encoding="utf-8"?>
+<p:notes xmlns:a="http://schemas.openxmlformats.org/drawingml/2006/main" xmlns:r="http://schemas.openxmlformats.org/officeDocument/2006/relationships" xmlns:p="http://schemas.openxmlformats.org/presentationml/2006/main">
+  <p:cSld>
+    <p:spTree>
+      <p:nvGrpSpPr>
+        <p:cNvPr id="1" name="">
+          <a:extLst>
+            <a:ext uri="{FF2B5EF4-FFF2-40B4-BE49-F238E27FC236}">
+              <a16:creationId xmlns:a16="http://schemas.microsoft.com/office/drawing/2014/main" id="{983947FB-4C5E-F0EA-11E2-FC8A3B4C10AF}"/>
+            </a:ext>
+          </a:extLst>
+        </p:cNvPr>
+        <p:cNvGrpSpPr/>
+        <p:nvPr/>
+      </p:nvGrpSpPr>
+      <p:grpSpPr>
+        <a:xfrm>
+          <a:off x="0" y="0"/>
+          <a:ext cx="0" cy="0"/>
+          <a:chOff x="0" y="0"/>
+          <a:chExt cx="0" cy="0"/>
+        </a:xfrm>
+      </p:grpSpPr>
+      <p:sp>
+        <p:nvSpPr>
+          <p:cNvPr id="2" name="投影片圖像版面配置區 1">
+            <a:extLst>
+              <a:ext uri="{FF2B5EF4-FFF2-40B4-BE49-F238E27FC236}">
+                <a16:creationId xmlns:a16="http://schemas.microsoft.com/office/drawing/2014/main" id="{72ABB648-948F-4C30-DEB4-3368906A67F1}"/>
+              </a:ext>
+            </a:extLst>
+          </p:cNvPr>
+          <p:cNvSpPr>
+            <a:spLocks noGrp="1" noRot="1" noChangeAspect="1"/>
+          </p:cNvSpPr>
+          <p:nvPr>
+            <p:ph type="sldImg"/>
+          </p:nvPr>
+        </p:nvSpPr>
+        <p:spPr>
+          <a:xfrm>
+            <a:off x="1371600" y="1143000"/>
+            <a:ext cx="4114800" cy="3086100"/>
+          </a:xfrm>
+        </p:spPr>
+      </p:sp>
+      <p:sp>
+        <p:nvSpPr>
+          <p:cNvPr id="3" name="備忘稿版面配置區 2">
+            <a:extLst>
+              <a:ext uri="{FF2B5EF4-FFF2-40B4-BE49-F238E27FC236}">
+                <a16:creationId xmlns:a16="http://schemas.microsoft.com/office/drawing/2014/main" id="{81DE7D39-736B-3164-FA85-68589FDD303E}"/>
+              </a:ext>
+            </a:extLst>
+          </p:cNvPr>
+          <p:cNvSpPr>
+            <a:spLocks noGrp="1"/>
+          </p:cNvSpPr>
+          <p:nvPr>
+            <p:ph type="body" idx="1"/>
+          </p:nvPr>
+        </p:nvSpPr>
+        <p:spPr/>
+        <p:txBody>
+          <a:bodyPr/>
+          <a:lstStyle/>
+          <a:p>
+            <a:endParaRPr lang="zh-TW" altLang="en-US" dirty="0"/>
+          </a:p>
+        </p:txBody>
+      </p:sp>
+      <p:sp>
+        <p:nvSpPr>
+          <p:cNvPr id="4" name="投影片編號版面配置區 3">
+            <a:extLst>
+              <a:ext uri="{FF2B5EF4-FFF2-40B4-BE49-F238E27FC236}">
+                <a16:creationId xmlns:a16="http://schemas.microsoft.com/office/drawing/2014/main" id="{6C7A6889-3A59-3314-7BCF-846196802F83}"/>
+              </a:ext>
+            </a:extLst>
+          </p:cNvPr>
+          <p:cNvSpPr>
+            <a:spLocks noGrp="1"/>
+          </p:cNvSpPr>
+          <p:nvPr>
+            <p:ph type="sldNum" sz="quarter" idx="10"/>
+          </p:nvPr>
+        </p:nvSpPr>
+        <p:spPr/>
+        <p:txBody>
+          <a:bodyPr/>
+          <a:lstStyle/>
+          <a:p>
+            <a:pPr marL="0" marR="0" lvl="0" indent="0" algn="r" defTabSz="914400" rtl="0" eaLnBrk="1" fontAlgn="auto" latinLnBrk="0" hangingPunct="1">
+              <a:lnSpc>
+                <a:spcPct val="100000"/>
+              </a:lnSpc>
+              <a:spcBef>
+                <a:spcPts val="0"/>
+              </a:spcBef>
+              <a:spcAft>
+                <a:spcPts val="0"/>
+              </a:spcAft>
+              <a:buClrTx/>
+              <a:buSzTx/>
+              <a:buFontTx/>
+              <a:buNone/>
+              <a:tabLst/>
+              <a:defRPr/>
+            </a:pPr>
+            <a:fld id="{9B26CD33-4337-4529-948A-94F6960B2374}" type="slidenum">
+              <a:rPr kumimoji="0" lang="en-US" sz="1200" b="0" i="0" u="none" strike="noStrike" kern="1200" cap="none" spc="0" normalizeH="0" baseline="0" noProof="0" smtClean="0">
+                <a:ln>
+                  <a:noFill/>
+                </a:ln>
+                <a:solidFill>
+                  <a:prstClr val="black"/>
+                </a:solidFill>
+                <a:effectLst/>
+                <a:uLnTx/>
+                <a:uFillTx/>
+                <a:latin typeface="Calibri"/>
+                <a:ea typeface="+mn-ea"/>
+                <a:cs typeface="+mn-cs"/>
+              </a:rPr>
+              <a:pPr marL="0" marR="0" lvl="0" indent="0" algn="r" defTabSz="914400" rtl="0" eaLnBrk="1" fontAlgn="auto" latinLnBrk="0" hangingPunct="1">
+                <a:lnSpc>
+                  <a:spcPct val="100000"/>
+                </a:lnSpc>
+                <a:spcBef>
+                  <a:spcPts val="0"/>
+                </a:spcBef>
+                <a:spcAft>
+                  <a:spcPts val="0"/>
+                </a:spcAft>
+                <a:buClrTx/>
+                <a:buSzTx/>
+                <a:buFontTx/>
+                <a:buNone/>
+                <a:tabLst/>
+                <a:defRPr/>
+              </a:pPr>
+              <a:t>15</a:t>
+            </a:fld>
+            <a:endParaRPr kumimoji="0" lang="en-US" sz="1200" b="0" i="0" u="none" strike="noStrike" kern="1200" cap="none" spc="0" normalizeH="0" baseline="0" noProof="0" dirty="0">
+              <a:ln>
+                <a:noFill/>
+              </a:ln>
+              <a:solidFill>
+                <a:prstClr val="black"/>
+              </a:solidFill>
+              <a:effectLst/>
+              <a:uLnTx/>
+              <a:uFillTx/>
+              <a:latin typeface="Calibri"/>
+              <a:ea typeface="+mn-ea"/>
+              <a:cs typeface="+mn-cs"/>
+            </a:endParaRPr>
+          </a:p>
+        </p:txBody>
+      </p:sp>
+    </p:spTree>
+    <p:extLst>
+      <p:ext uri="{BB962C8B-B14F-4D97-AF65-F5344CB8AC3E}">
+        <p14:creationId xmlns:p14="http://schemas.microsoft.com/office/powerpoint/2010/main" val="1766640118"/>
+      </p:ext>
+    </p:extLst>
+  </p:cSld>
+  <p:clrMapOvr>
+    <a:masterClrMapping/>
+  </p:clrMapOvr>
+</p:notes>
+</file>
+
+<file path=ppt/notesSlides/notesSlide12.xml><?xml version="1.0" encoding="utf-8"?>
+<p:notes xmlns:a="http://schemas.openxmlformats.org/drawingml/2006/main" xmlns:r="http://schemas.openxmlformats.org/officeDocument/2006/relationships" xmlns:p="http://schemas.openxmlformats.org/presentationml/2006/main">
+  <p:cSld>
+    <p:spTree>
+      <p:nvGrpSpPr>
+        <p:cNvPr id="1" name="">
+          <a:extLst>
+            <a:ext uri="{FF2B5EF4-FFF2-40B4-BE49-F238E27FC236}">
+              <a16:creationId xmlns:a16="http://schemas.microsoft.com/office/drawing/2014/main" id="{F41A18CD-3ED1-4092-7167-E16E05EEE816}"/>
+            </a:ext>
+          </a:extLst>
+        </p:cNvPr>
+        <p:cNvGrpSpPr/>
+        <p:nvPr/>
+      </p:nvGrpSpPr>
+      <p:grpSpPr>
+        <a:xfrm>
+          <a:off x="0" y="0"/>
+          <a:ext cx="0" cy="0"/>
+          <a:chOff x="0" y="0"/>
+          <a:chExt cx="0" cy="0"/>
+        </a:xfrm>
+      </p:grpSpPr>
+      <p:sp>
+        <p:nvSpPr>
+          <p:cNvPr id="2" name="投影片圖像版面配置區 1">
+            <a:extLst>
+              <a:ext uri="{FF2B5EF4-FFF2-40B4-BE49-F238E27FC236}">
+                <a16:creationId xmlns:a16="http://schemas.microsoft.com/office/drawing/2014/main" id="{72FE0A26-B3FA-C84A-5468-5E8D951C2EE6}"/>
+              </a:ext>
+            </a:extLst>
+          </p:cNvPr>
+          <p:cNvSpPr>
+            <a:spLocks noGrp="1" noRot="1" noChangeAspect="1"/>
+          </p:cNvSpPr>
+          <p:nvPr>
+            <p:ph type="sldImg"/>
+          </p:nvPr>
+        </p:nvSpPr>
+        <p:spPr>
+          <a:xfrm>
+            <a:off x="1371600" y="1143000"/>
+            <a:ext cx="4114800" cy="3086100"/>
+          </a:xfrm>
+        </p:spPr>
+      </p:sp>
+      <p:sp>
+        <p:nvSpPr>
+          <p:cNvPr id="3" name="備忘稿版面配置區 2">
+            <a:extLst>
+              <a:ext uri="{FF2B5EF4-FFF2-40B4-BE49-F238E27FC236}">
+                <a16:creationId xmlns:a16="http://schemas.microsoft.com/office/drawing/2014/main" id="{BA580294-7884-A45E-1434-A0FF894E8F2A}"/>
+              </a:ext>
+            </a:extLst>
+          </p:cNvPr>
+          <p:cNvSpPr>
+            <a:spLocks noGrp="1"/>
+          </p:cNvSpPr>
+          <p:nvPr>
+            <p:ph type="body" idx="1"/>
+          </p:nvPr>
+        </p:nvSpPr>
+        <p:spPr/>
+        <p:txBody>
+          <a:bodyPr/>
+          <a:lstStyle/>
+          <a:p>
+            <a:endParaRPr lang="zh-TW" altLang="en-US" dirty="0"/>
+          </a:p>
+        </p:txBody>
+      </p:sp>
+      <p:sp>
+        <p:nvSpPr>
+          <p:cNvPr id="4" name="投影片編號版面配置區 3">
+            <a:extLst>
+              <a:ext uri="{FF2B5EF4-FFF2-40B4-BE49-F238E27FC236}">
+                <a16:creationId xmlns:a16="http://schemas.microsoft.com/office/drawing/2014/main" id="{A0EC2DFA-F465-88BD-2FE6-9CA98A38F413}"/>
+              </a:ext>
+            </a:extLst>
+          </p:cNvPr>
+          <p:cNvSpPr>
+            <a:spLocks noGrp="1"/>
+          </p:cNvSpPr>
+          <p:nvPr>
+            <p:ph type="sldNum" sz="quarter" idx="10"/>
+          </p:nvPr>
+        </p:nvSpPr>
+        <p:spPr/>
+        <p:txBody>
+          <a:bodyPr/>
+          <a:lstStyle/>
+          <a:p>
+            <a:pPr marL="0" marR="0" lvl="0" indent="0" algn="r" defTabSz="914400" rtl="0" eaLnBrk="1" fontAlgn="auto" latinLnBrk="0" hangingPunct="1">
+              <a:lnSpc>
+                <a:spcPct val="100000"/>
+              </a:lnSpc>
+              <a:spcBef>
+                <a:spcPts val="0"/>
+              </a:spcBef>
+              <a:spcAft>
+                <a:spcPts val="0"/>
+              </a:spcAft>
+              <a:buClrTx/>
+              <a:buSzTx/>
+              <a:buFontTx/>
+              <a:buNone/>
+              <a:tabLst/>
+              <a:defRPr/>
+            </a:pPr>
+            <a:fld id="{9B26CD33-4337-4529-948A-94F6960B2374}" type="slidenum">
+              <a:rPr kumimoji="0" lang="en-US" sz="1200" b="0" i="0" u="none" strike="noStrike" kern="1200" cap="none" spc="0" normalizeH="0" baseline="0" noProof="0" smtClean="0">
+                <a:ln>
+                  <a:noFill/>
+                </a:ln>
+                <a:solidFill>
+                  <a:prstClr val="black"/>
+                </a:solidFill>
+                <a:effectLst/>
+                <a:uLnTx/>
+                <a:uFillTx/>
+                <a:latin typeface="Calibri"/>
+                <a:ea typeface="+mn-ea"/>
+                <a:cs typeface="+mn-cs"/>
+              </a:rPr>
+              <a:pPr marL="0" marR="0" lvl="0" indent="0" algn="r" defTabSz="914400" rtl="0" eaLnBrk="1" fontAlgn="auto" latinLnBrk="0" hangingPunct="1">
+                <a:lnSpc>
+                  <a:spcPct val="100000"/>
+                </a:lnSpc>
+                <a:spcBef>
+                  <a:spcPts val="0"/>
+                </a:spcBef>
+                <a:spcAft>
+                  <a:spcPts val="0"/>
+                </a:spcAft>
+                <a:buClrTx/>
+                <a:buSzTx/>
+                <a:buFontTx/>
+                <a:buNone/>
+                <a:tabLst/>
+                <a:defRPr/>
+              </a:pPr>
+              <a:t>16</a:t>
+            </a:fld>
+            <a:endParaRPr kumimoji="0" lang="en-US" sz="1200" b="0" i="0" u="none" strike="noStrike" kern="1200" cap="none" spc="0" normalizeH="0" baseline="0" noProof="0" dirty="0">
+              <a:ln>
+                <a:noFill/>
+              </a:ln>
+              <a:solidFill>
+                <a:prstClr val="black"/>
+              </a:solidFill>
+              <a:effectLst/>
+              <a:uLnTx/>
+              <a:uFillTx/>
+              <a:latin typeface="Calibri"/>
+              <a:ea typeface="+mn-ea"/>
+              <a:cs typeface="+mn-cs"/>
+            </a:endParaRPr>
+          </a:p>
+        </p:txBody>
+      </p:sp>
+    </p:spTree>
+    <p:extLst>
+      <p:ext uri="{BB962C8B-B14F-4D97-AF65-F5344CB8AC3E}">
+        <p14:creationId xmlns:p14="http://schemas.microsoft.com/office/powerpoint/2010/main" val="3188624887"/>
+      </p:ext>
+    </p:extLst>
+  </p:cSld>
+  <p:clrMapOvr>
+    <a:masterClrMapping/>
+  </p:clrMapOvr>
+</p:notes>
+</file>
+
+<file path=ppt/notesSlides/notesSlide13.xml><?xml version="1.0" encoding="utf-8"?>
+<p:notes xmlns:a="http://schemas.openxmlformats.org/drawingml/2006/main" xmlns:r="http://schemas.openxmlformats.org/officeDocument/2006/relationships" xmlns:p="http://schemas.openxmlformats.org/presentationml/2006/main">
+  <p:cSld>
+    <p:spTree>
+      <p:nvGrpSpPr>
+        <p:cNvPr id="1" name=""/>
+        <p:cNvGrpSpPr/>
+        <p:nvPr/>
+      </p:nvGrpSpPr>
+      <p:grpSpPr>
+        <a:xfrm>
+          <a:off x="0" y="0"/>
+          <a:ext cx="0" cy="0"/>
+          <a:chOff x="0" y="0"/>
+          <a:chExt cx="0" cy="0"/>
+        </a:xfrm>
+      </p:grpSpPr>
+      <p:sp>
+        <p:nvSpPr>
+          <p:cNvPr id="2" name="投影片圖像版面配置區 1"/>
+          <p:cNvSpPr>
+            <a:spLocks noGrp="1" noRot="1" noChangeAspect="1"/>
+          </p:cNvSpPr>
+          <p:nvPr>
+            <p:ph type="sldImg"/>
+          </p:nvPr>
+        </p:nvSpPr>
+        <p:spPr>
+          <a:xfrm>
+            <a:off x="1371600" y="1143000"/>
+            <a:ext cx="4114800" cy="3086100"/>
+          </a:xfrm>
+        </p:spPr>
+      </p:sp>
+      <p:sp>
+        <p:nvSpPr>
+          <p:cNvPr id="3" name="備忘稿版面配置區 2"/>
+          <p:cNvSpPr>
+            <a:spLocks noGrp="1"/>
+          </p:cNvSpPr>
+          <p:nvPr>
+            <p:ph type="body" idx="1"/>
+          </p:nvPr>
+        </p:nvSpPr>
+        <p:spPr/>
+        <p:txBody>
+          <a:bodyPr/>
+          <a:lstStyle/>
+          <a:p>
+            <a:endParaRPr lang="zh-TW" altLang="en-US" dirty="0"/>
+          </a:p>
+        </p:txBody>
+      </p:sp>
+      <p:sp>
+        <p:nvSpPr>
+          <p:cNvPr id="4" name="投影片編號版面配置區 3"/>
+          <p:cNvSpPr>
+            <a:spLocks noGrp="1"/>
+          </p:cNvSpPr>
+          <p:nvPr>
+            <p:ph type="sldNum" sz="quarter" idx="10"/>
+          </p:nvPr>
+        </p:nvSpPr>
+        <p:spPr/>
+        <p:txBody>
+          <a:bodyPr/>
+          <a:lstStyle/>
+          <a:p>
+            <a:pPr marL="0" marR="0" lvl="0" indent="0" algn="r" defTabSz="914400" rtl="0" eaLnBrk="1" fontAlgn="auto" latinLnBrk="0" hangingPunct="1">
+              <a:lnSpc>
+                <a:spcPct val="100000"/>
+              </a:lnSpc>
+              <a:spcBef>
+                <a:spcPts val="0"/>
+              </a:spcBef>
+              <a:spcAft>
+                <a:spcPts val="0"/>
+              </a:spcAft>
+              <a:buClrTx/>
+              <a:buSzTx/>
+              <a:buFontTx/>
+              <a:buNone/>
+              <a:tabLst/>
+              <a:defRPr/>
+            </a:pPr>
+            <a:fld id="{9B26CD33-4337-4529-948A-94F6960B2374}" type="slidenum">
+              <a:rPr kumimoji="0" lang="en-US" sz="1200" b="0" i="0" u="none" strike="noStrike" kern="1200" cap="none" spc="0" normalizeH="0" baseline="0" noProof="0" smtClean="0">
+                <a:ln>
+                  <a:noFill/>
+                </a:ln>
+                <a:solidFill>
+                  <a:prstClr val="black"/>
+                </a:solidFill>
+                <a:effectLst/>
+                <a:uLnTx/>
+                <a:uFillTx/>
+                <a:latin typeface="Calibri"/>
+                <a:ea typeface="+mn-ea"/>
+                <a:cs typeface="+mn-cs"/>
+              </a:rPr>
+              <a:pPr marL="0" marR="0" lvl="0" indent="0" algn="r" defTabSz="914400" rtl="0" eaLnBrk="1" fontAlgn="auto" latinLnBrk="0" hangingPunct="1">
+                <a:lnSpc>
+                  <a:spcPct val="100000"/>
+                </a:lnSpc>
+                <a:spcBef>
+                  <a:spcPts val="0"/>
+                </a:spcBef>
+                <a:spcAft>
+                  <a:spcPts val="0"/>
+                </a:spcAft>
+                <a:buClrTx/>
+                <a:buSzTx/>
+                <a:buFontTx/>
+                <a:buNone/>
+                <a:tabLst/>
+                <a:defRPr/>
+              </a:pPr>
+              <a:t>18</a:t>
+            </a:fld>
+            <a:endParaRPr kumimoji="0" lang="en-US" sz="1200" b="0" i="0" u="none" strike="noStrike" kern="1200" cap="none" spc="0" normalizeH="0" baseline="0" noProof="0" dirty="0">
+              <a:ln>
+                <a:noFill/>
+              </a:ln>
+              <a:solidFill>
+                <a:prstClr val="black"/>
+              </a:solidFill>
+              <a:effectLst/>
+              <a:uLnTx/>
+              <a:uFillTx/>
+              <a:latin typeface="Calibri"/>
+              <a:ea typeface="+mn-ea"/>
+              <a:cs typeface="+mn-cs"/>
+            </a:endParaRPr>
+          </a:p>
+        </p:txBody>
+      </p:sp>
+    </p:spTree>
+    <p:extLst>
+      <p:ext uri="{BB962C8B-B14F-4D97-AF65-F5344CB8AC3E}">
+        <p14:creationId xmlns:p14="http://schemas.microsoft.com/office/powerpoint/2010/main" val="673313408"/>
+      </p:ext>
+    </p:extLst>
+  </p:cSld>
+  <p:clrMapOvr>
+    <a:masterClrMapping/>
+  </p:clrMapOvr>
+</p:notes>
+</file>
+
+<file path=ppt/notesSlides/notesSlide14.xml><?xml version="1.0" encoding="utf-8"?>
+<p:notes xmlns:a="http://schemas.openxmlformats.org/drawingml/2006/main" xmlns:r="http://schemas.openxmlformats.org/officeDocument/2006/relationships" xmlns:p="http://schemas.openxmlformats.org/presentationml/2006/main">
+  <p:cSld>
+    <p:spTree>
+      <p:nvGrpSpPr>
+        <p:cNvPr id="1" name=""/>
+        <p:cNvGrpSpPr/>
+        <p:nvPr/>
+      </p:nvGrpSpPr>
+      <p:grpSpPr>
+        <a:xfrm>
+          <a:off x="0" y="0"/>
+          <a:ext cx="0" cy="0"/>
+          <a:chOff x="0" y="0"/>
+          <a:chExt cx="0" cy="0"/>
+        </a:xfrm>
+      </p:grpSpPr>
+      <p:sp>
+        <p:nvSpPr>
+          <p:cNvPr id="2" name="投影片圖像版面配置區 1"/>
+          <p:cNvSpPr>
+            <a:spLocks noGrp="1" noRot="1" noChangeAspect="1"/>
+          </p:cNvSpPr>
+          <p:nvPr>
+            <p:ph type="sldImg"/>
+          </p:nvPr>
+        </p:nvSpPr>
+        <p:spPr>
+          <a:xfrm>
+            <a:off x="1371600" y="1143000"/>
+            <a:ext cx="4114800" cy="3086100"/>
+          </a:xfrm>
+        </p:spPr>
+      </p:sp>
+      <p:sp>
+        <p:nvSpPr>
+          <p:cNvPr id="3" name="備忘稿版面配置區 2"/>
+          <p:cNvSpPr>
+            <a:spLocks noGrp="1"/>
+          </p:cNvSpPr>
+          <p:nvPr>
+            <p:ph type="body" idx="1"/>
+          </p:nvPr>
+        </p:nvSpPr>
+        <p:spPr/>
+        <p:txBody>
+          <a:bodyPr/>
+          <a:lstStyle/>
+          <a:p>
+            <a:endParaRPr lang="zh-TW" altLang="en-US" dirty="0"/>
+          </a:p>
+        </p:txBody>
+      </p:sp>
+      <p:sp>
+        <p:nvSpPr>
+          <p:cNvPr id="4" name="投影片編號版面配置區 3"/>
+          <p:cNvSpPr>
+            <a:spLocks noGrp="1"/>
+          </p:cNvSpPr>
+          <p:nvPr>
+            <p:ph type="sldNum" sz="quarter" idx="10"/>
+          </p:nvPr>
+        </p:nvSpPr>
+        <p:spPr/>
+        <p:txBody>
+          <a:bodyPr/>
+          <a:lstStyle/>
+          <a:p>
+            <a:pPr marL="0" marR="0" lvl="0" indent="0" algn="r" defTabSz="914400" rtl="0" eaLnBrk="1" fontAlgn="auto" latinLnBrk="0" hangingPunct="1">
+              <a:lnSpc>
+                <a:spcPct val="100000"/>
+              </a:lnSpc>
+              <a:spcBef>
+                <a:spcPts val="0"/>
+              </a:spcBef>
+              <a:spcAft>
+                <a:spcPts val="0"/>
+              </a:spcAft>
+              <a:buClrTx/>
+              <a:buSzTx/>
+              <a:buFontTx/>
+              <a:buNone/>
+              <a:tabLst/>
+              <a:defRPr/>
+            </a:pPr>
+            <a:fld id="{9B26CD33-4337-4529-948A-94F6960B2374}" type="slidenum">
+              <a:rPr kumimoji="0" lang="en-US" sz="1200" b="0" i="0" u="none" strike="noStrike" kern="1200" cap="none" spc="0" normalizeH="0" baseline="0" noProof="0" smtClean="0">
+                <a:ln>
+                  <a:noFill/>
+                </a:ln>
+                <a:solidFill>
+                  <a:prstClr val="black"/>
+                </a:solidFill>
+                <a:effectLst/>
+                <a:uLnTx/>
+                <a:uFillTx/>
+                <a:latin typeface="Calibri"/>
+                <a:ea typeface="+mn-ea"/>
+                <a:cs typeface="+mn-cs"/>
+              </a:rPr>
+              <a:pPr marL="0" marR="0" lvl="0" indent="0" algn="r" defTabSz="914400" rtl="0" eaLnBrk="1" fontAlgn="auto" latinLnBrk="0" hangingPunct="1">
+                <a:lnSpc>
+                  <a:spcPct val="100000"/>
+                </a:lnSpc>
+                <a:spcBef>
+                  <a:spcPts val="0"/>
+                </a:spcBef>
+                <a:spcAft>
+                  <a:spcPts val="0"/>
+                </a:spcAft>
+                <a:buClrTx/>
+                <a:buSzTx/>
+                <a:buFontTx/>
+                <a:buNone/>
+                <a:tabLst/>
+                <a:defRPr/>
+              </a:pPr>
+              <a:t>19</a:t>
+            </a:fld>
+            <a:endParaRPr kumimoji="0" lang="en-US" sz="1200" b="0" i="0" u="none" strike="noStrike" kern="1200" cap="none" spc="0" normalizeH="0" baseline="0" noProof="0" dirty="0">
+              <a:ln>
+                <a:noFill/>
+              </a:ln>
+              <a:solidFill>
+                <a:prstClr val="black"/>
+              </a:solidFill>
+              <a:effectLst/>
+              <a:uLnTx/>
+              <a:uFillTx/>
+              <a:latin typeface="Calibri"/>
+              <a:ea typeface="+mn-ea"/>
+              <a:cs typeface="+mn-cs"/>
+            </a:endParaRPr>
+          </a:p>
+        </p:txBody>
+      </p:sp>
+    </p:spTree>
+    <p:extLst>
+      <p:ext uri="{BB962C8B-B14F-4D97-AF65-F5344CB8AC3E}">
+        <p14:creationId xmlns:p14="http://schemas.microsoft.com/office/powerpoint/2010/main" val="3224360598"/>
+      </p:ext>
+    </p:extLst>
+  </p:cSld>
+  <p:clrMapOvr>
+    <a:masterClrMapping/>
+  </p:clrMapOvr>
+</p:notes>
+</file>
+
+<file path=ppt/notesSlides/notesSlide15.xml><?xml version="1.0" encoding="utf-8"?>
+<p:notes xmlns:a="http://schemas.openxmlformats.org/drawingml/2006/main" xmlns:r="http://schemas.openxmlformats.org/officeDocument/2006/relationships" xmlns:p="http://schemas.openxmlformats.org/presentationml/2006/main">
+  <p:cSld>
+    <p:spTree>
+      <p:nvGrpSpPr>
+        <p:cNvPr id="1" name=""/>
+        <p:cNvGrpSpPr/>
+        <p:nvPr/>
+      </p:nvGrpSpPr>
+      <p:grpSpPr>
+        <a:xfrm>
+          <a:off x="0" y="0"/>
+          <a:ext cx="0" cy="0"/>
+          <a:chOff x="0" y="0"/>
+          <a:chExt cx="0" cy="0"/>
+        </a:xfrm>
+      </p:grpSpPr>
+      <p:sp>
+        <p:nvSpPr>
+          <p:cNvPr id="2" name="投影片圖像版面配置區 1"/>
+          <p:cNvSpPr>
+            <a:spLocks noGrp="1" noRot="1" noChangeAspect="1"/>
+          </p:cNvSpPr>
+          <p:nvPr>
+            <p:ph type="sldImg"/>
+          </p:nvPr>
+        </p:nvSpPr>
+        <p:spPr>
+          <a:xfrm>
+            <a:off x="1371600" y="1143000"/>
+            <a:ext cx="4114800" cy="3086100"/>
+          </a:xfrm>
+        </p:spPr>
+      </p:sp>
+      <p:sp>
+        <p:nvSpPr>
+          <p:cNvPr id="3" name="備忘稿版面配置區 2"/>
+          <p:cNvSpPr>
+            <a:spLocks noGrp="1"/>
+          </p:cNvSpPr>
+          <p:nvPr>
+            <p:ph type="body" idx="1"/>
+          </p:nvPr>
+        </p:nvSpPr>
+        <p:spPr/>
+        <p:txBody>
+          <a:bodyPr/>
+          <a:lstStyle/>
+          <a:p>
+            <a:endParaRPr lang="zh-TW" altLang="en-US" dirty="0"/>
+          </a:p>
+        </p:txBody>
+      </p:sp>
+      <p:sp>
+        <p:nvSpPr>
+          <p:cNvPr id="4" name="投影片編號版面配置區 3"/>
+          <p:cNvSpPr>
+            <a:spLocks noGrp="1"/>
+          </p:cNvSpPr>
+          <p:nvPr>
+            <p:ph type="sldNum" sz="quarter" idx="10"/>
+          </p:nvPr>
+        </p:nvSpPr>
+        <p:spPr/>
+        <p:txBody>
+          <a:bodyPr/>
+          <a:lstStyle/>
+          <a:p>
+            <a:pPr marL="0" marR="0" lvl="0" indent="0" algn="r" defTabSz="914400" rtl="0" eaLnBrk="1" fontAlgn="auto" latinLnBrk="0" hangingPunct="1">
+              <a:lnSpc>
+                <a:spcPct val="100000"/>
+              </a:lnSpc>
+              <a:spcBef>
+                <a:spcPts val="0"/>
+              </a:spcBef>
+              <a:spcAft>
+                <a:spcPts val="0"/>
+              </a:spcAft>
+              <a:buClrTx/>
+              <a:buSzTx/>
+              <a:buFontTx/>
+              <a:buNone/>
+              <a:tabLst/>
+              <a:defRPr/>
+            </a:pPr>
+            <a:fld id="{9B26CD33-4337-4529-948A-94F6960B2374}" type="slidenum">
+              <a:rPr kumimoji="0" lang="en-US" sz="1200" b="0" i="0" u="none" strike="noStrike" kern="1200" cap="none" spc="0" normalizeH="0" baseline="0" noProof="0" smtClean="0">
+                <a:ln>
+                  <a:noFill/>
+                </a:ln>
+                <a:solidFill>
+                  <a:prstClr val="black"/>
+                </a:solidFill>
+                <a:effectLst/>
+                <a:uLnTx/>
+                <a:uFillTx/>
+                <a:latin typeface="Calibri"/>
+                <a:ea typeface="+mn-ea"/>
+                <a:cs typeface="+mn-cs"/>
+              </a:rPr>
+              <a:pPr marL="0" marR="0" lvl="0" indent="0" algn="r" defTabSz="914400" rtl="0" eaLnBrk="1" fontAlgn="auto" latinLnBrk="0" hangingPunct="1">
+                <a:lnSpc>
+                  <a:spcPct val="100000"/>
+                </a:lnSpc>
+                <a:spcBef>
+                  <a:spcPts val="0"/>
+                </a:spcBef>
+                <a:spcAft>
+                  <a:spcPts val="0"/>
+                </a:spcAft>
+                <a:buClrTx/>
+                <a:buSzTx/>
+                <a:buFontTx/>
+                <a:buNone/>
+                <a:tabLst/>
+                <a:defRPr/>
+              </a:pPr>
+              <a:t>20</a:t>
+            </a:fld>
+            <a:endParaRPr kumimoji="0" lang="en-US" sz="1200" b="0" i="0" u="none" strike="noStrike" kern="1200" cap="none" spc="0" normalizeH="0" baseline="0" noProof="0" dirty="0">
+              <a:ln>
+                <a:noFill/>
+              </a:ln>
+              <a:solidFill>
+                <a:prstClr val="black"/>
+              </a:solidFill>
+              <a:effectLst/>
+              <a:uLnTx/>
+              <a:uFillTx/>
+              <a:latin typeface="Calibri"/>
+              <a:ea typeface="+mn-ea"/>
+              <a:cs typeface="+mn-cs"/>
+            </a:endParaRPr>
+          </a:p>
+        </p:txBody>
+      </p:sp>
+    </p:spTree>
+    <p:extLst>
+      <p:ext uri="{BB962C8B-B14F-4D97-AF65-F5344CB8AC3E}">
+        <p14:creationId xmlns:p14="http://schemas.microsoft.com/office/powerpoint/2010/main" val="3429393922"/>
+      </p:ext>
+    </p:extLst>
+  </p:cSld>
+  <p:clrMapOvr>
+    <a:masterClrMapping/>
+  </p:clrMapOvr>
+</p:notes>
+</file>
+
+<file path=ppt/notesSlides/notesSlide16.xml><?xml version="1.0" encoding="utf-8"?>
+<p:notes xmlns:a="http://schemas.openxmlformats.org/drawingml/2006/main" xmlns:r="http://schemas.openxmlformats.org/officeDocument/2006/relationships" xmlns:p="http://schemas.openxmlformats.org/presentationml/2006/main">
+  <p:cSld>
+    <p:spTree>
+      <p:nvGrpSpPr>
+        <p:cNvPr id="1" name=""/>
+        <p:cNvGrpSpPr/>
+        <p:nvPr/>
+      </p:nvGrpSpPr>
+      <p:grpSpPr>
+        <a:xfrm>
+          <a:off x="0" y="0"/>
+          <a:ext cx="0" cy="0"/>
+          <a:chOff x="0" y="0"/>
+          <a:chExt cx="0" cy="0"/>
+        </a:xfrm>
+      </p:grpSpPr>
+      <p:sp>
+        <p:nvSpPr>
+          <p:cNvPr id="2" name="投影片圖像版面配置區 1"/>
+          <p:cNvSpPr>
+            <a:spLocks noGrp="1" noRot="1" noChangeAspect="1"/>
+          </p:cNvSpPr>
+          <p:nvPr>
+            <p:ph type="sldImg"/>
+          </p:nvPr>
+        </p:nvSpPr>
+        <p:spPr>
+          <a:xfrm>
+            <a:off x="1371600" y="1143000"/>
+            <a:ext cx="4114800" cy="3086100"/>
+          </a:xfrm>
+        </p:spPr>
+      </p:sp>
+      <p:sp>
+        <p:nvSpPr>
+          <p:cNvPr id="3" name="備忘稿版面配置區 2"/>
+          <p:cNvSpPr>
+            <a:spLocks noGrp="1"/>
+          </p:cNvSpPr>
+          <p:nvPr>
+            <p:ph type="body" idx="1"/>
+          </p:nvPr>
+        </p:nvSpPr>
+        <p:spPr/>
+        <p:txBody>
+          <a:bodyPr/>
+          <a:lstStyle/>
+          <a:p>
+            <a:endParaRPr lang="zh-TW" altLang="en-US" dirty="0"/>
+          </a:p>
+        </p:txBody>
+      </p:sp>
+      <p:sp>
+        <p:nvSpPr>
+          <p:cNvPr id="4" name="投影片編號版面配置區 3"/>
+          <p:cNvSpPr>
+            <a:spLocks noGrp="1"/>
+          </p:cNvSpPr>
+          <p:nvPr>
+            <p:ph type="sldNum" sz="quarter" idx="10"/>
+          </p:nvPr>
+        </p:nvSpPr>
+        <p:spPr/>
+        <p:txBody>
+          <a:bodyPr/>
+          <a:lstStyle/>
+          <a:p>
+            <a:pPr marL="0" marR="0" lvl="0" indent="0" algn="r" defTabSz="914400" rtl="0" eaLnBrk="1" fontAlgn="auto" latinLnBrk="0" hangingPunct="1">
+              <a:lnSpc>
+                <a:spcPct val="100000"/>
+              </a:lnSpc>
+              <a:spcBef>
+                <a:spcPts val="0"/>
+              </a:spcBef>
+              <a:spcAft>
+                <a:spcPts val="0"/>
+              </a:spcAft>
+              <a:buClrTx/>
+              <a:buSzTx/>
+              <a:buFontTx/>
+              <a:buNone/>
+              <a:tabLst/>
+              <a:defRPr/>
+            </a:pPr>
+            <a:fld id="{9B26CD33-4337-4529-948A-94F6960B2374}" type="slidenum">
+              <a:rPr kumimoji="0" lang="en-US" sz="1200" b="0" i="0" u="none" strike="noStrike" kern="1200" cap="none" spc="0" normalizeH="0" baseline="0" noProof="0" smtClean="0">
+                <a:ln>
+                  <a:noFill/>
+                </a:ln>
+                <a:solidFill>
+                  <a:prstClr val="black"/>
+                </a:solidFill>
+                <a:effectLst/>
+                <a:uLnTx/>
+                <a:uFillTx/>
+                <a:latin typeface="Calibri"/>
+                <a:ea typeface="+mn-ea"/>
+                <a:cs typeface="+mn-cs"/>
+              </a:rPr>
+              <a:pPr marL="0" marR="0" lvl="0" indent="0" algn="r" defTabSz="914400" rtl="0" eaLnBrk="1" fontAlgn="auto" latinLnBrk="0" hangingPunct="1">
+                <a:lnSpc>
+                  <a:spcPct val="100000"/>
+                </a:lnSpc>
+                <a:spcBef>
+                  <a:spcPts val="0"/>
+                </a:spcBef>
+                <a:spcAft>
+                  <a:spcPts val="0"/>
+                </a:spcAft>
+                <a:buClrTx/>
+                <a:buSzTx/>
+                <a:buFontTx/>
+                <a:buNone/>
+                <a:tabLst/>
+                <a:defRPr/>
+              </a:pPr>
+              <a:t>21</a:t>
+            </a:fld>
+            <a:endParaRPr kumimoji="0" lang="en-US" sz="1200" b="0" i="0" u="none" strike="noStrike" kern="1200" cap="none" spc="0" normalizeH="0" baseline="0" noProof="0" dirty="0">
+              <a:ln>
+                <a:noFill/>
+              </a:ln>
+              <a:solidFill>
+                <a:prstClr val="black"/>
+              </a:solidFill>
+              <a:effectLst/>
+              <a:uLnTx/>
+              <a:uFillTx/>
+              <a:latin typeface="Calibri"/>
+              <a:ea typeface="+mn-ea"/>
+              <a:cs typeface="+mn-cs"/>
+            </a:endParaRPr>
+          </a:p>
+        </p:txBody>
+      </p:sp>
+    </p:spTree>
+    <p:extLst>
+      <p:ext uri="{BB962C8B-B14F-4D97-AF65-F5344CB8AC3E}">
+        <p14:creationId xmlns:p14="http://schemas.microsoft.com/office/powerpoint/2010/main" val="3380246969"/>
+      </p:ext>
+    </p:extLst>
+  </p:cSld>
+  <p:clrMapOvr>
+    <a:masterClrMapping/>
+  </p:clrMapOvr>
+</p:notes>
+</file>
+
+<file path=ppt/notesSlides/notesSlide17.xml><?xml version="1.0" encoding="utf-8"?>
+<p:notes xmlns:a="http://schemas.openxmlformats.org/drawingml/2006/main" xmlns:r="http://schemas.openxmlformats.org/officeDocument/2006/relationships" xmlns:p="http://schemas.openxmlformats.org/presentationml/2006/main">
+  <p:cSld>
+    <p:spTree>
+      <p:nvGrpSpPr>
+        <p:cNvPr id="1" name=""/>
+        <p:cNvGrpSpPr/>
+        <p:nvPr/>
+      </p:nvGrpSpPr>
+      <p:grpSpPr>
+        <a:xfrm>
+          <a:off x="0" y="0"/>
+          <a:ext cx="0" cy="0"/>
+          <a:chOff x="0" y="0"/>
+          <a:chExt cx="0" cy="0"/>
+        </a:xfrm>
+      </p:grpSpPr>
+      <p:sp>
+        <p:nvSpPr>
+          <p:cNvPr id="2" name="投影片圖像版面配置區 1"/>
+          <p:cNvSpPr>
+            <a:spLocks noGrp="1" noRot="1" noChangeAspect="1"/>
+          </p:cNvSpPr>
+          <p:nvPr>
+            <p:ph type="sldImg"/>
+          </p:nvPr>
+        </p:nvSpPr>
+        <p:spPr>
+          <a:xfrm>
+            <a:off x="1371600" y="1143000"/>
+            <a:ext cx="4114800" cy="3086100"/>
+          </a:xfrm>
+        </p:spPr>
+      </p:sp>
+      <p:sp>
+        <p:nvSpPr>
+          <p:cNvPr id="3" name="備忘稿版面配置區 2"/>
+          <p:cNvSpPr>
+            <a:spLocks noGrp="1"/>
+          </p:cNvSpPr>
+          <p:nvPr>
+            <p:ph type="body" idx="1"/>
+          </p:nvPr>
+        </p:nvSpPr>
+        <p:spPr/>
+        <p:txBody>
+          <a:bodyPr/>
+          <a:lstStyle/>
+          <a:p>
+            <a:endParaRPr lang="zh-TW" altLang="en-US" dirty="0"/>
+          </a:p>
+        </p:txBody>
+      </p:sp>
+      <p:sp>
+        <p:nvSpPr>
+          <p:cNvPr id="4" name="投影片編號版面配置區 3"/>
+          <p:cNvSpPr>
+            <a:spLocks noGrp="1"/>
+          </p:cNvSpPr>
+          <p:nvPr>
+            <p:ph type="sldNum" sz="quarter" idx="10"/>
+          </p:nvPr>
+        </p:nvSpPr>
+        <p:spPr/>
+        <p:txBody>
+          <a:bodyPr/>
+          <a:lstStyle/>
+          <a:p>
+            <a:pPr marL="0" marR="0" lvl="0" indent="0" algn="r" defTabSz="914400" rtl="0" eaLnBrk="1" fontAlgn="auto" latinLnBrk="0" hangingPunct="1">
+              <a:lnSpc>
+                <a:spcPct val="100000"/>
+              </a:lnSpc>
+              <a:spcBef>
+                <a:spcPts val="0"/>
+              </a:spcBef>
+              <a:spcAft>
+                <a:spcPts val="0"/>
+              </a:spcAft>
+              <a:buClrTx/>
+              <a:buSzTx/>
+              <a:buFontTx/>
+              <a:buNone/>
+              <a:tabLst/>
+              <a:defRPr/>
+            </a:pPr>
+            <a:fld id="{9B26CD33-4337-4529-948A-94F6960B2374}" type="slidenum">
+              <a:rPr kumimoji="0" lang="en-US" sz="1200" b="0" i="0" u="none" strike="noStrike" kern="1200" cap="none" spc="0" normalizeH="0" baseline="0" noProof="0" smtClean="0">
+                <a:ln>
+                  <a:noFill/>
+                </a:ln>
+                <a:solidFill>
+                  <a:prstClr val="black"/>
+                </a:solidFill>
+                <a:effectLst/>
+                <a:uLnTx/>
+                <a:uFillTx/>
+                <a:latin typeface="Calibri"/>
+                <a:ea typeface="+mn-ea"/>
+                <a:cs typeface="+mn-cs"/>
+              </a:rPr>
+              <a:pPr marL="0" marR="0" lvl="0" indent="0" algn="r" defTabSz="914400" rtl="0" eaLnBrk="1" fontAlgn="auto" latinLnBrk="0" hangingPunct="1">
+                <a:lnSpc>
+                  <a:spcPct val="100000"/>
+                </a:lnSpc>
+                <a:spcBef>
+                  <a:spcPts val="0"/>
+                </a:spcBef>
+                <a:spcAft>
+                  <a:spcPts val="0"/>
+                </a:spcAft>
+                <a:buClrTx/>
+                <a:buSzTx/>
+                <a:buFontTx/>
+                <a:buNone/>
+                <a:tabLst/>
+                <a:defRPr/>
+              </a:pPr>
+              <a:t>22</a:t>
+            </a:fld>
+            <a:endParaRPr kumimoji="0" lang="en-US" sz="1200" b="0" i="0" u="none" strike="noStrike" kern="1200" cap="none" spc="0" normalizeH="0" baseline="0" noProof="0" dirty="0">
+              <a:ln>
+                <a:noFill/>
+              </a:ln>
+              <a:solidFill>
+                <a:prstClr val="black"/>
+              </a:solidFill>
+              <a:effectLst/>
+              <a:uLnTx/>
+              <a:uFillTx/>
+              <a:latin typeface="Calibri"/>
+              <a:ea typeface="+mn-ea"/>
+              <a:cs typeface="+mn-cs"/>
+            </a:endParaRPr>
+          </a:p>
+        </p:txBody>
+      </p:sp>
+    </p:spTree>
+    <p:extLst>
+      <p:ext uri="{BB962C8B-B14F-4D97-AF65-F5344CB8AC3E}">
+        <p14:creationId xmlns:p14="http://schemas.microsoft.com/office/powerpoint/2010/main" val="1475083261"/>
+      </p:ext>
+    </p:extLst>
+  </p:cSld>
+  <p:clrMapOvr>
+    <a:masterClrMapping/>
+  </p:clrMapOvr>
+</p:notes>
+</file>
+
+<file path=ppt/notesSlides/notesSlide18.xml><?xml version="1.0" encoding="utf-8"?>
+<p:notes xmlns:a="http://schemas.openxmlformats.org/drawingml/2006/main" xmlns:r="http://schemas.openxmlformats.org/officeDocument/2006/relationships" xmlns:p="http://schemas.openxmlformats.org/presentationml/2006/main">
+  <p:cSld>
+    <p:spTree>
+      <p:nvGrpSpPr>
+        <p:cNvPr id="1" name=""/>
+        <p:cNvGrpSpPr/>
+        <p:nvPr/>
+      </p:nvGrpSpPr>
+      <p:grpSpPr>
+        <a:xfrm>
+          <a:off x="0" y="0"/>
+          <a:ext cx="0" cy="0"/>
+          <a:chOff x="0" y="0"/>
+          <a:chExt cx="0" cy="0"/>
+        </a:xfrm>
+      </p:grpSpPr>
+      <p:sp>
+        <p:nvSpPr>
+          <p:cNvPr id="2" name="投影片圖像版面配置區 1"/>
+          <p:cNvSpPr>
+            <a:spLocks noGrp="1" noRot="1" noChangeAspect="1"/>
+          </p:cNvSpPr>
+          <p:nvPr>
+            <p:ph type="sldImg"/>
+          </p:nvPr>
+        </p:nvSpPr>
+        <p:spPr>
+          <a:xfrm>
+            <a:off x="1371600" y="1143000"/>
+            <a:ext cx="4114800" cy="3086100"/>
+          </a:xfrm>
+        </p:spPr>
+      </p:sp>
+      <p:sp>
+        <p:nvSpPr>
+          <p:cNvPr id="3" name="備忘稿版面配置區 2"/>
+          <p:cNvSpPr>
+            <a:spLocks noGrp="1"/>
+          </p:cNvSpPr>
+          <p:nvPr>
+            <p:ph type="body" idx="1"/>
+          </p:nvPr>
+        </p:nvSpPr>
+        <p:spPr/>
+        <p:txBody>
+          <a:bodyPr/>
+          <a:lstStyle/>
+          <a:p>
+            <a:endParaRPr lang="zh-TW" altLang="en-US" dirty="0"/>
+          </a:p>
+        </p:txBody>
+      </p:sp>
+      <p:sp>
+        <p:nvSpPr>
+          <p:cNvPr id="4" name="投影片編號版面配置區 3"/>
+          <p:cNvSpPr>
+            <a:spLocks noGrp="1"/>
+          </p:cNvSpPr>
+          <p:nvPr>
+            <p:ph type="sldNum" sz="quarter" idx="10"/>
+          </p:nvPr>
+        </p:nvSpPr>
+        <p:spPr/>
+        <p:txBody>
+          <a:bodyPr/>
+          <a:lstStyle/>
+          <a:p>
+            <a:pPr marL="0" marR="0" lvl="0" indent="0" algn="r" defTabSz="914400" rtl="0" eaLnBrk="1" fontAlgn="auto" latinLnBrk="0" hangingPunct="1">
+              <a:lnSpc>
+                <a:spcPct val="100000"/>
+              </a:lnSpc>
+              <a:spcBef>
+                <a:spcPts val="0"/>
+              </a:spcBef>
+              <a:spcAft>
+                <a:spcPts val="0"/>
+              </a:spcAft>
+              <a:buClrTx/>
+              <a:buSzTx/>
+              <a:buFontTx/>
+              <a:buNone/>
+              <a:tabLst/>
+              <a:defRPr/>
+            </a:pPr>
+            <a:fld id="{9B26CD33-4337-4529-948A-94F6960B2374}" type="slidenum">
+              <a:rPr kumimoji="0" lang="en-US" sz="1200" b="0" i="0" u="none" strike="noStrike" kern="1200" cap="none" spc="0" normalizeH="0" baseline="0" noProof="0" smtClean="0">
+                <a:ln>
+                  <a:noFill/>
+                </a:ln>
+                <a:solidFill>
+                  <a:prstClr val="black"/>
+                </a:solidFill>
+                <a:effectLst/>
+                <a:uLnTx/>
+                <a:uFillTx/>
+                <a:latin typeface="Calibri"/>
+                <a:ea typeface="+mn-ea"/>
+                <a:cs typeface="+mn-cs"/>
+              </a:rPr>
+              <a:pPr marL="0" marR="0" lvl="0" indent="0" algn="r" defTabSz="914400" rtl="0" eaLnBrk="1" fontAlgn="auto" latinLnBrk="0" hangingPunct="1">
+                <a:lnSpc>
+                  <a:spcPct val="100000"/>
+                </a:lnSpc>
+                <a:spcBef>
+                  <a:spcPts val="0"/>
+                </a:spcBef>
+                <a:spcAft>
+                  <a:spcPts val="0"/>
+                </a:spcAft>
+                <a:buClrTx/>
+                <a:buSzTx/>
+                <a:buFontTx/>
+                <a:buNone/>
+                <a:tabLst/>
+                <a:defRPr/>
+              </a:pPr>
+              <a:t>23</a:t>
             </a:fld>
             <a:endParaRPr kumimoji="0" lang="en-US" sz="1200" b="0" i="0" u="none" strike="noStrike" kern="1200" cap="none" spc="0" normalizeH="0" baseline="0" noProof="0" dirty="0">
               <a:ln>
@@ -864,7 +2117,13 @@
   <p:cSld>
     <p:spTree>
       <p:nvGrpSpPr>
-        <p:cNvPr id="1" name=""/>
+        <p:cNvPr id="1" name="">
+          <a:extLst>
+            <a:ext uri="{FF2B5EF4-FFF2-40B4-BE49-F238E27FC236}">
+              <a16:creationId xmlns:a16="http://schemas.microsoft.com/office/drawing/2014/main" id="{025776B7-CC7E-D5F6-5602-8B7D669AEF73}"/>
+            </a:ext>
+          </a:extLst>
+        </p:cNvPr>
         <p:cNvGrpSpPr/>
         <p:nvPr/>
       </p:nvGrpSpPr>
@@ -878,7 +2137,13 @@
       </p:grpSpPr>
       <p:sp>
         <p:nvSpPr>
-          <p:cNvPr id="2" name="投影片圖像版面配置區 1"/>
+          <p:cNvPr id="2" name="投影片圖像版面配置區 1">
+            <a:extLst>
+              <a:ext uri="{FF2B5EF4-FFF2-40B4-BE49-F238E27FC236}">
+                <a16:creationId xmlns:a16="http://schemas.microsoft.com/office/drawing/2014/main" id="{2A2CF9D1-3086-0911-3AF7-26E82C01D440}"/>
+              </a:ext>
+            </a:extLst>
+          </p:cNvPr>
           <p:cNvSpPr>
             <a:spLocks noGrp="1" noRot="1" noChangeAspect="1"/>
           </p:cNvSpPr>
@@ -886,21 +2151,49 @@
             <p:ph type="sldImg"/>
           </p:nvPr>
         </p:nvSpPr>
-        <p:spPr>
-          <a:xfrm>
-            <a:off x="1371600" y="1143000"/>
-            <a:ext cx="4114800" cy="3086100"/>
-          </a:xfrm>
-        </p:spPr>
-      </p:sp>
-      <p:sp>
-        <p:nvSpPr>
-          <p:cNvPr id="3" name="備忘稿版面配置區 2"/>
+        <p:spPr/>
+      </p:sp>
+      <p:sp>
+        <p:nvSpPr>
+          <p:cNvPr id="3" name="備忘稿版面配置區 2">
+            <a:extLst>
+              <a:ext uri="{FF2B5EF4-FFF2-40B4-BE49-F238E27FC236}">
+                <a16:creationId xmlns:a16="http://schemas.microsoft.com/office/drawing/2014/main" id="{49502F33-66D5-DE51-4583-35BF3AF084B6}"/>
+              </a:ext>
+            </a:extLst>
+          </p:cNvPr>
           <p:cNvSpPr>
             <a:spLocks noGrp="1"/>
           </p:cNvSpPr>
           <p:nvPr>
             <p:ph type="body" idx="1"/>
+          </p:nvPr>
+        </p:nvSpPr>
+        <p:spPr/>
+        <p:txBody>
+          <a:bodyPr>
+            <a:normAutofit/>
+          </a:bodyPr>
+          <a:lstStyle/>
+          <a:p>
+            <a:endParaRPr lang="zh-TW" altLang="en-US" dirty="0"/>
+          </a:p>
+        </p:txBody>
+      </p:sp>
+      <p:sp>
+        <p:nvSpPr>
+          <p:cNvPr id="4" name="投影片編號版面配置區 3">
+            <a:extLst>
+              <a:ext uri="{FF2B5EF4-FFF2-40B4-BE49-F238E27FC236}">
+                <a16:creationId xmlns:a16="http://schemas.microsoft.com/office/drawing/2014/main" id="{325AC105-F45F-23D9-0AC2-A95E9FBB0BC9}"/>
+              </a:ext>
+            </a:extLst>
+          </p:cNvPr>
+          <p:cNvSpPr>
+            <a:spLocks noGrp="1"/>
+          </p:cNvSpPr>
+          <p:nvPr>
+            <p:ph type="sldNum" sz="quarter" idx="10"/>
           </p:nvPr>
         </p:nvSpPr>
         <p:spPr/>
@@ -908,97 +2201,19 @@
           <a:bodyPr/>
           <a:lstStyle/>
           <a:p>
-            <a:endParaRPr lang="zh-TW" altLang="en-US" dirty="0"/>
-          </a:p>
-        </p:txBody>
-      </p:sp>
-      <p:sp>
-        <p:nvSpPr>
-          <p:cNvPr id="4" name="投影片編號版面配置區 3"/>
-          <p:cNvSpPr>
-            <a:spLocks noGrp="1"/>
-          </p:cNvSpPr>
-          <p:nvPr>
-            <p:ph type="sldNum" sz="quarter" idx="10"/>
-          </p:nvPr>
-        </p:nvSpPr>
-        <p:spPr/>
-        <p:txBody>
-          <a:bodyPr/>
-          <a:lstStyle/>
-          <a:p>
-            <a:pPr marL="0" marR="0" lvl="0" indent="0" algn="r" defTabSz="914400" rtl="0" eaLnBrk="1" fontAlgn="auto" latinLnBrk="0" hangingPunct="1">
-              <a:lnSpc>
-                <a:spcPct val="100000"/>
-              </a:lnSpc>
-              <a:spcBef>
-                <a:spcPts val="0"/>
-              </a:spcBef>
-              <a:spcAft>
-                <a:spcPts val="0"/>
-              </a:spcAft>
-              <a:buClrTx/>
-              <a:buSzTx/>
-              <a:buFontTx/>
-              <a:buNone/>
-              <a:tabLst/>
-              <a:defRPr/>
-            </a:pPr>
             <a:fld id="{9B26CD33-4337-4529-948A-94F6960B2374}" type="slidenum">
-              <a:rPr kumimoji="0" lang="en-US" sz="1200" b="0" i="0" u="none" strike="noStrike" kern="1200" cap="none" spc="0" normalizeH="0" baseline="0" noProof="0" smtClean="0">
-                <a:ln>
-                  <a:noFill/>
-                </a:ln>
-                <a:solidFill>
-                  <a:prstClr val="black"/>
-                </a:solidFill>
-                <a:effectLst/>
-                <a:uLnTx/>
-                <a:uFillTx/>
-                <a:latin typeface="Calibri"/>
-                <a:ea typeface="+mn-ea"/>
-                <a:cs typeface="+mn-cs"/>
-              </a:rPr>
-              <a:pPr marL="0" marR="0" lvl="0" indent="0" algn="r" defTabSz="914400" rtl="0" eaLnBrk="1" fontAlgn="auto" latinLnBrk="0" hangingPunct="1">
-                <a:lnSpc>
-                  <a:spcPct val="100000"/>
-                </a:lnSpc>
-                <a:spcBef>
-                  <a:spcPts val="0"/>
-                </a:spcBef>
-                <a:spcAft>
-                  <a:spcPts val="0"/>
-                </a:spcAft>
-                <a:buClrTx/>
-                <a:buSzTx/>
-                <a:buFontTx/>
-                <a:buNone/>
-                <a:tabLst/>
-                <a:defRPr/>
-              </a:pPr>
+              <a:rPr lang="en-US" smtClean="0"/>
+              <a:pPr/>
               <a:t>3</a:t>
             </a:fld>
-            <a:endParaRPr kumimoji="0" lang="en-US" sz="1200" b="0" i="0" u="none" strike="noStrike" kern="1200" cap="none" spc="0" normalizeH="0" baseline="0" noProof="0" dirty="0">
-              <a:ln>
-                <a:noFill/>
-              </a:ln>
-              <a:solidFill>
-                <a:prstClr val="black"/>
-              </a:solidFill>
-              <a:effectLst/>
-              <a:uLnTx/>
-              <a:uFillTx/>
-              <a:latin typeface="Calibri"/>
-              <a:ea typeface="+mn-ea"/>
-              <a:cs typeface="+mn-cs"/>
-            </a:endParaRPr>
+            <a:endParaRPr lang="en-US" dirty="0"/>
           </a:p>
         </p:txBody>
       </p:sp>
     </p:spTree>
     <p:extLst>
       <p:ext uri="{BB962C8B-B14F-4D97-AF65-F5344CB8AC3E}">
-        <p14:creationId xmlns:p14="http://schemas.microsoft.com/office/powerpoint/2010/main" val="1180290836"/>
+        <p14:creationId xmlns:p14="http://schemas.microsoft.com/office/powerpoint/2010/main" val="2373930573"/>
       </p:ext>
     </p:extLst>
   </p:cSld>
@@ -1013,7 +2228,13 @@
   <p:cSld>
     <p:spTree>
       <p:nvGrpSpPr>
-        <p:cNvPr id="1" name=""/>
+        <p:cNvPr id="1" name="">
+          <a:extLst>
+            <a:ext uri="{FF2B5EF4-FFF2-40B4-BE49-F238E27FC236}">
+              <a16:creationId xmlns:a16="http://schemas.microsoft.com/office/drawing/2014/main" id="{473FC665-69C7-B96E-A128-24D860AC561C}"/>
+            </a:ext>
+          </a:extLst>
+        </p:cNvPr>
         <p:cNvGrpSpPr/>
         <p:nvPr/>
       </p:nvGrpSpPr>
@@ -1027,7 +2248,13 @@
       </p:grpSpPr>
       <p:sp>
         <p:nvSpPr>
-          <p:cNvPr id="2" name="投影片圖像版面配置區 1"/>
+          <p:cNvPr id="2" name="投影片圖像版面配置區 1">
+            <a:extLst>
+              <a:ext uri="{FF2B5EF4-FFF2-40B4-BE49-F238E27FC236}">
+                <a16:creationId xmlns:a16="http://schemas.microsoft.com/office/drawing/2014/main" id="{60C36E71-BF8C-466D-8F9C-F706934CE627}"/>
+              </a:ext>
+            </a:extLst>
+          </p:cNvPr>
           <p:cNvSpPr>
             <a:spLocks noGrp="1" noRot="1" noChangeAspect="1"/>
           </p:cNvSpPr>
@@ -1044,7 +2271,13 @@
       </p:sp>
       <p:sp>
         <p:nvSpPr>
-          <p:cNvPr id="3" name="備忘稿版面配置區 2"/>
+          <p:cNvPr id="3" name="備忘稿版面配置區 2">
+            <a:extLst>
+              <a:ext uri="{FF2B5EF4-FFF2-40B4-BE49-F238E27FC236}">
+                <a16:creationId xmlns:a16="http://schemas.microsoft.com/office/drawing/2014/main" id="{EA2C5E28-B0A4-99E9-1631-C6B4660EF4C6}"/>
+              </a:ext>
+            </a:extLst>
+          </p:cNvPr>
           <p:cNvSpPr>
             <a:spLocks noGrp="1"/>
           </p:cNvSpPr>
@@ -1063,7 +2296,13 @@
       </p:sp>
       <p:sp>
         <p:nvSpPr>
-          <p:cNvPr id="4" name="投影片編號版面配置區 3"/>
+          <p:cNvPr id="4" name="投影片編號版面配置區 3">
+            <a:extLst>
+              <a:ext uri="{FF2B5EF4-FFF2-40B4-BE49-F238E27FC236}">
+                <a16:creationId xmlns:a16="http://schemas.microsoft.com/office/drawing/2014/main" id="{BEEAC8AA-208D-AB6A-6669-DD78346A0CB6}"/>
+              </a:ext>
+            </a:extLst>
+          </p:cNvPr>
           <p:cNvSpPr>
             <a:spLocks noGrp="1"/>
           </p:cNvSpPr>
@@ -1147,7 +2386,7 @@
     </p:spTree>
     <p:extLst>
       <p:ext uri="{BB962C8B-B14F-4D97-AF65-F5344CB8AC3E}">
-        <p14:creationId xmlns:p14="http://schemas.microsoft.com/office/powerpoint/2010/main" val="2322252248"/>
+        <p14:creationId xmlns:p14="http://schemas.microsoft.com/office/powerpoint/2010/main" val="373456216"/>
       </p:ext>
     </p:extLst>
   </p:cSld>
@@ -1162,7 +2401,13 @@
   <p:cSld>
     <p:spTree>
       <p:nvGrpSpPr>
-        <p:cNvPr id="1" name=""/>
+        <p:cNvPr id="1" name="">
+          <a:extLst>
+            <a:ext uri="{FF2B5EF4-FFF2-40B4-BE49-F238E27FC236}">
+              <a16:creationId xmlns:a16="http://schemas.microsoft.com/office/drawing/2014/main" id="{BF5B88C6-663F-50FC-39CE-1D6A5E345B95}"/>
+            </a:ext>
+          </a:extLst>
+        </p:cNvPr>
         <p:cNvGrpSpPr/>
         <p:nvPr/>
       </p:nvGrpSpPr>
@@ -1176,7 +2421,13 @@
       </p:grpSpPr>
       <p:sp>
         <p:nvSpPr>
-          <p:cNvPr id="2" name="投影片圖像版面配置區 1"/>
+          <p:cNvPr id="2" name="投影片圖像版面配置區 1">
+            <a:extLst>
+              <a:ext uri="{FF2B5EF4-FFF2-40B4-BE49-F238E27FC236}">
+                <a16:creationId xmlns:a16="http://schemas.microsoft.com/office/drawing/2014/main" id="{F33AF182-275F-449E-EDA5-5E9CEF68A882}"/>
+              </a:ext>
+            </a:extLst>
+          </p:cNvPr>
           <p:cNvSpPr>
             <a:spLocks noGrp="1" noRot="1" noChangeAspect="1"/>
           </p:cNvSpPr>
@@ -1193,7 +2444,13 @@
       </p:sp>
       <p:sp>
         <p:nvSpPr>
-          <p:cNvPr id="3" name="備忘稿版面配置區 2"/>
+          <p:cNvPr id="3" name="備忘稿版面配置區 2">
+            <a:extLst>
+              <a:ext uri="{FF2B5EF4-FFF2-40B4-BE49-F238E27FC236}">
+                <a16:creationId xmlns:a16="http://schemas.microsoft.com/office/drawing/2014/main" id="{67271CA4-2746-5B9C-ED4F-DD676B8E63AA}"/>
+              </a:ext>
+            </a:extLst>
+          </p:cNvPr>
           <p:cNvSpPr>
             <a:spLocks noGrp="1"/>
           </p:cNvSpPr>
@@ -1212,7 +2469,13 @@
       </p:sp>
       <p:sp>
         <p:nvSpPr>
-          <p:cNvPr id="4" name="投影片編號版面配置區 3"/>
+          <p:cNvPr id="4" name="投影片編號版面配置區 3">
+            <a:extLst>
+              <a:ext uri="{FF2B5EF4-FFF2-40B4-BE49-F238E27FC236}">
+                <a16:creationId xmlns:a16="http://schemas.microsoft.com/office/drawing/2014/main" id="{0D3C9E3F-6D23-8F72-6556-051C71A32DA4}"/>
+              </a:ext>
+            </a:extLst>
+          </p:cNvPr>
           <p:cNvSpPr>
             <a:spLocks noGrp="1"/>
           </p:cNvSpPr>
@@ -1296,7 +2559,7 @@
     </p:spTree>
     <p:extLst>
       <p:ext uri="{BB962C8B-B14F-4D97-AF65-F5344CB8AC3E}">
-        <p14:creationId xmlns:p14="http://schemas.microsoft.com/office/powerpoint/2010/main" val="673313408"/>
+        <p14:creationId xmlns:p14="http://schemas.microsoft.com/office/powerpoint/2010/main" val="966515029"/>
       </p:ext>
     </p:extLst>
   </p:cSld>
@@ -1311,7 +2574,13 @@
   <p:cSld>
     <p:spTree>
       <p:nvGrpSpPr>
-        <p:cNvPr id="1" name=""/>
+        <p:cNvPr id="1" name="">
+          <a:extLst>
+            <a:ext uri="{FF2B5EF4-FFF2-40B4-BE49-F238E27FC236}">
+              <a16:creationId xmlns:a16="http://schemas.microsoft.com/office/drawing/2014/main" id="{E692B84E-769F-D02F-2112-D95EEB3B8683}"/>
+            </a:ext>
+          </a:extLst>
+        </p:cNvPr>
         <p:cNvGrpSpPr/>
         <p:nvPr/>
       </p:nvGrpSpPr>
@@ -1325,7 +2594,13 @@
       </p:grpSpPr>
       <p:sp>
         <p:nvSpPr>
-          <p:cNvPr id="2" name="投影片圖像版面配置區 1"/>
+          <p:cNvPr id="2" name="投影片圖像版面配置區 1">
+            <a:extLst>
+              <a:ext uri="{FF2B5EF4-FFF2-40B4-BE49-F238E27FC236}">
+                <a16:creationId xmlns:a16="http://schemas.microsoft.com/office/drawing/2014/main" id="{012DE41B-3419-D766-8FE2-7EEC89C433D8}"/>
+              </a:ext>
+            </a:extLst>
+          </p:cNvPr>
           <p:cNvSpPr>
             <a:spLocks noGrp="1" noRot="1" noChangeAspect="1"/>
           </p:cNvSpPr>
@@ -1333,21 +2608,49 @@
             <p:ph type="sldImg"/>
           </p:nvPr>
         </p:nvSpPr>
-        <p:spPr>
-          <a:xfrm>
-            <a:off x="1371600" y="1143000"/>
-            <a:ext cx="4114800" cy="3086100"/>
-          </a:xfrm>
-        </p:spPr>
-      </p:sp>
-      <p:sp>
-        <p:nvSpPr>
-          <p:cNvPr id="3" name="備忘稿版面配置區 2"/>
+        <p:spPr/>
+      </p:sp>
+      <p:sp>
+        <p:nvSpPr>
+          <p:cNvPr id="3" name="備忘稿版面配置區 2">
+            <a:extLst>
+              <a:ext uri="{FF2B5EF4-FFF2-40B4-BE49-F238E27FC236}">
+                <a16:creationId xmlns:a16="http://schemas.microsoft.com/office/drawing/2014/main" id="{43F62D15-0C9E-2CB4-F5B3-C01D1DD0E1E8}"/>
+              </a:ext>
+            </a:extLst>
+          </p:cNvPr>
           <p:cNvSpPr>
             <a:spLocks noGrp="1"/>
           </p:cNvSpPr>
           <p:nvPr>
             <p:ph type="body" idx="1"/>
+          </p:nvPr>
+        </p:nvSpPr>
+        <p:spPr/>
+        <p:txBody>
+          <a:bodyPr>
+            <a:normAutofit/>
+          </a:bodyPr>
+          <a:lstStyle/>
+          <a:p>
+            <a:endParaRPr lang="zh-TW" altLang="en-US" dirty="0"/>
+          </a:p>
+        </p:txBody>
+      </p:sp>
+      <p:sp>
+        <p:nvSpPr>
+          <p:cNvPr id="4" name="投影片編號版面配置區 3">
+            <a:extLst>
+              <a:ext uri="{FF2B5EF4-FFF2-40B4-BE49-F238E27FC236}">
+                <a16:creationId xmlns:a16="http://schemas.microsoft.com/office/drawing/2014/main" id="{7914FC70-B1CB-A98E-04C5-280BD4648791}"/>
+              </a:ext>
+            </a:extLst>
+          </p:cNvPr>
+          <p:cNvSpPr>
+            <a:spLocks noGrp="1"/>
+          </p:cNvSpPr>
+          <p:nvPr>
+            <p:ph type="sldNum" sz="quarter" idx="10"/>
           </p:nvPr>
         </p:nvSpPr>
         <p:spPr/>
@@ -1355,97 +2658,19 @@
           <a:bodyPr/>
           <a:lstStyle/>
           <a:p>
-            <a:endParaRPr lang="zh-TW" altLang="en-US" dirty="0"/>
-          </a:p>
-        </p:txBody>
-      </p:sp>
-      <p:sp>
-        <p:nvSpPr>
-          <p:cNvPr id="4" name="投影片編號版面配置區 3"/>
-          <p:cNvSpPr>
-            <a:spLocks noGrp="1"/>
-          </p:cNvSpPr>
-          <p:nvPr>
-            <p:ph type="sldNum" sz="quarter" idx="10"/>
-          </p:nvPr>
-        </p:nvSpPr>
-        <p:spPr/>
-        <p:txBody>
-          <a:bodyPr/>
-          <a:lstStyle/>
-          <a:p>
-            <a:pPr marL="0" marR="0" lvl="0" indent="0" algn="r" defTabSz="914400" rtl="0" eaLnBrk="1" fontAlgn="auto" latinLnBrk="0" hangingPunct="1">
-              <a:lnSpc>
-                <a:spcPct val="100000"/>
-              </a:lnSpc>
-              <a:spcBef>
-                <a:spcPts val="0"/>
-              </a:spcBef>
-              <a:spcAft>
-                <a:spcPts val="0"/>
-              </a:spcAft>
-              <a:buClrTx/>
-              <a:buSzTx/>
-              <a:buFontTx/>
-              <a:buNone/>
-              <a:tabLst/>
-              <a:defRPr/>
-            </a:pPr>
             <a:fld id="{9B26CD33-4337-4529-948A-94F6960B2374}" type="slidenum">
-              <a:rPr kumimoji="0" lang="en-US" sz="1200" b="0" i="0" u="none" strike="noStrike" kern="1200" cap="none" spc="0" normalizeH="0" baseline="0" noProof="0" smtClean="0">
-                <a:ln>
-                  <a:noFill/>
-                </a:ln>
-                <a:solidFill>
-                  <a:prstClr val="black"/>
-                </a:solidFill>
-                <a:effectLst/>
-                <a:uLnTx/>
-                <a:uFillTx/>
-                <a:latin typeface="Calibri"/>
-                <a:ea typeface="+mn-ea"/>
-                <a:cs typeface="+mn-cs"/>
-              </a:rPr>
-              <a:pPr marL="0" marR="0" lvl="0" indent="0" algn="r" defTabSz="914400" rtl="0" eaLnBrk="1" fontAlgn="auto" latinLnBrk="0" hangingPunct="1">
-                <a:lnSpc>
-                  <a:spcPct val="100000"/>
-                </a:lnSpc>
-                <a:spcBef>
-                  <a:spcPts val="0"/>
-                </a:spcBef>
-                <a:spcAft>
-                  <a:spcPts val="0"/>
-                </a:spcAft>
-                <a:buClrTx/>
-                <a:buSzTx/>
-                <a:buFontTx/>
-                <a:buNone/>
-                <a:tabLst/>
-                <a:defRPr/>
-              </a:pPr>
-              <a:t>6</a:t>
+              <a:rPr lang="en-US" smtClean="0"/>
+              <a:pPr/>
+              <a:t>8</a:t>
             </a:fld>
-            <a:endParaRPr kumimoji="0" lang="en-US" sz="1200" b="0" i="0" u="none" strike="noStrike" kern="1200" cap="none" spc="0" normalizeH="0" baseline="0" noProof="0" dirty="0">
-              <a:ln>
-                <a:noFill/>
-              </a:ln>
-              <a:solidFill>
-                <a:prstClr val="black"/>
-              </a:solidFill>
-              <a:effectLst/>
-              <a:uLnTx/>
-              <a:uFillTx/>
-              <a:latin typeface="Calibri"/>
-              <a:ea typeface="+mn-ea"/>
-              <a:cs typeface="+mn-cs"/>
-            </a:endParaRPr>
+            <a:endParaRPr lang="en-US" dirty="0"/>
           </a:p>
         </p:txBody>
       </p:sp>
     </p:spTree>
     <p:extLst>
       <p:ext uri="{BB962C8B-B14F-4D97-AF65-F5344CB8AC3E}">
-        <p14:creationId xmlns:p14="http://schemas.microsoft.com/office/powerpoint/2010/main" val="3224360598"/>
+        <p14:creationId xmlns:p14="http://schemas.microsoft.com/office/powerpoint/2010/main" val="3569766729"/>
       </p:ext>
     </p:extLst>
   </p:cSld>
@@ -1460,7 +2685,13 @@
   <p:cSld>
     <p:spTree>
       <p:nvGrpSpPr>
-        <p:cNvPr id="1" name=""/>
+        <p:cNvPr id="1" name="">
+          <a:extLst>
+            <a:ext uri="{FF2B5EF4-FFF2-40B4-BE49-F238E27FC236}">
+              <a16:creationId xmlns:a16="http://schemas.microsoft.com/office/drawing/2014/main" id="{E9CC8E7B-3EED-4F80-853A-DFC694A18039}"/>
+            </a:ext>
+          </a:extLst>
+        </p:cNvPr>
         <p:cNvGrpSpPr/>
         <p:nvPr/>
       </p:nvGrpSpPr>
@@ -1474,7 +2705,13 @@
       </p:grpSpPr>
       <p:sp>
         <p:nvSpPr>
-          <p:cNvPr id="2" name="投影片圖像版面配置區 1"/>
+          <p:cNvPr id="2" name="投影片圖像版面配置區 1">
+            <a:extLst>
+              <a:ext uri="{FF2B5EF4-FFF2-40B4-BE49-F238E27FC236}">
+                <a16:creationId xmlns:a16="http://schemas.microsoft.com/office/drawing/2014/main" id="{49B89419-E064-F585-D89C-C9D1DBD351D7}"/>
+              </a:ext>
+            </a:extLst>
+          </p:cNvPr>
           <p:cNvSpPr>
             <a:spLocks noGrp="1" noRot="1" noChangeAspect="1"/>
           </p:cNvSpPr>
@@ -1491,7 +2728,13 @@
       </p:sp>
       <p:sp>
         <p:nvSpPr>
-          <p:cNvPr id="3" name="備忘稿版面配置區 2"/>
+          <p:cNvPr id="3" name="備忘稿版面配置區 2">
+            <a:extLst>
+              <a:ext uri="{FF2B5EF4-FFF2-40B4-BE49-F238E27FC236}">
+                <a16:creationId xmlns:a16="http://schemas.microsoft.com/office/drawing/2014/main" id="{F3D964F8-6533-9A14-DD5B-FDC281248EEF}"/>
+              </a:ext>
+            </a:extLst>
+          </p:cNvPr>
           <p:cNvSpPr>
             <a:spLocks noGrp="1"/>
           </p:cNvSpPr>
@@ -1510,305 +2753,13 @@
       </p:sp>
       <p:sp>
         <p:nvSpPr>
-          <p:cNvPr id="4" name="投影片編號版面配置區 3"/>
-          <p:cNvSpPr>
-            <a:spLocks noGrp="1"/>
-          </p:cNvSpPr>
-          <p:nvPr>
-            <p:ph type="sldNum" sz="quarter" idx="10"/>
-          </p:nvPr>
-        </p:nvSpPr>
-        <p:spPr/>
-        <p:txBody>
-          <a:bodyPr/>
-          <a:lstStyle/>
-          <a:p>
-            <a:pPr marL="0" marR="0" lvl="0" indent="0" algn="r" defTabSz="914400" rtl="0" eaLnBrk="1" fontAlgn="auto" latinLnBrk="0" hangingPunct="1">
-              <a:lnSpc>
-                <a:spcPct val="100000"/>
-              </a:lnSpc>
-              <a:spcBef>
-                <a:spcPts val="0"/>
-              </a:spcBef>
-              <a:spcAft>
-                <a:spcPts val="0"/>
-              </a:spcAft>
-              <a:buClrTx/>
-              <a:buSzTx/>
-              <a:buFontTx/>
-              <a:buNone/>
-              <a:tabLst/>
-              <a:defRPr/>
-            </a:pPr>
-            <a:fld id="{9B26CD33-4337-4529-948A-94F6960B2374}" type="slidenum">
-              <a:rPr kumimoji="0" lang="en-US" sz="1200" b="0" i="0" u="none" strike="noStrike" kern="1200" cap="none" spc="0" normalizeH="0" baseline="0" noProof="0" smtClean="0">
-                <a:ln>
-                  <a:noFill/>
-                </a:ln>
-                <a:solidFill>
-                  <a:prstClr val="black"/>
-                </a:solidFill>
-                <a:effectLst/>
-                <a:uLnTx/>
-                <a:uFillTx/>
-                <a:latin typeface="Calibri"/>
-                <a:ea typeface="+mn-ea"/>
-                <a:cs typeface="+mn-cs"/>
-              </a:rPr>
-              <a:pPr marL="0" marR="0" lvl="0" indent="0" algn="r" defTabSz="914400" rtl="0" eaLnBrk="1" fontAlgn="auto" latinLnBrk="0" hangingPunct="1">
-                <a:lnSpc>
-                  <a:spcPct val="100000"/>
-                </a:lnSpc>
-                <a:spcBef>
-                  <a:spcPts val="0"/>
-                </a:spcBef>
-                <a:spcAft>
-                  <a:spcPts val="0"/>
-                </a:spcAft>
-                <a:buClrTx/>
-                <a:buSzTx/>
-                <a:buFontTx/>
-                <a:buNone/>
-                <a:tabLst/>
-                <a:defRPr/>
-              </a:pPr>
-              <a:t>7</a:t>
-            </a:fld>
-            <a:endParaRPr kumimoji="0" lang="en-US" sz="1200" b="0" i="0" u="none" strike="noStrike" kern="1200" cap="none" spc="0" normalizeH="0" baseline="0" noProof="0" dirty="0">
-              <a:ln>
-                <a:noFill/>
-              </a:ln>
-              <a:solidFill>
-                <a:prstClr val="black"/>
-              </a:solidFill>
-              <a:effectLst/>
-              <a:uLnTx/>
-              <a:uFillTx/>
-              <a:latin typeface="Calibri"/>
-              <a:ea typeface="+mn-ea"/>
-              <a:cs typeface="+mn-cs"/>
-            </a:endParaRPr>
-          </a:p>
-        </p:txBody>
-      </p:sp>
-    </p:spTree>
-    <p:extLst>
-      <p:ext uri="{BB962C8B-B14F-4D97-AF65-F5344CB8AC3E}">
-        <p14:creationId xmlns:p14="http://schemas.microsoft.com/office/powerpoint/2010/main" val="3429393922"/>
-      </p:ext>
-    </p:extLst>
-  </p:cSld>
-  <p:clrMapOvr>
-    <a:masterClrMapping/>
-  </p:clrMapOvr>
-</p:notes>
-</file>
-
-<file path=ppt/notesSlides/notesSlide8.xml><?xml version="1.0" encoding="utf-8"?>
-<p:notes xmlns:a="http://schemas.openxmlformats.org/drawingml/2006/main" xmlns:r="http://schemas.openxmlformats.org/officeDocument/2006/relationships" xmlns:p="http://schemas.openxmlformats.org/presentationml/2006/main">
-  <p:cSld>
-    <p:spTree>
-      <p:nvGrpSpPr>
-        <p:cNvPr id="1" name=""/>
-        <p:cNvGrpSpPr/>
-        <p:nvPr/>
-      </p:nvGrpSpPr>
-      <p:grpSpPr>
-        <a:xfrm>
-          <a:off x="0" y="0"/>
-          <a:ext cx="0" cy="0"/>
-          <a:chOff x="0" y="0"/>
-          <a:chExt cx="0" cy="0"/>
-        </a:xfrm>
-      </p:grpSpPr>
-      <p:sp>
-        <p:nvSpPr>
-          <p:cNvPr id="2" name="投影片圖像版面配置區 1"/>
-          <p:cNvSpPr>
-            <a:spLocks noGrp="1" noRot="1" noChangeAspect="1"/>
-          </p:cNvSpPr>
-          <p:nvPr>
-            <p:ph type="sldImg"/>
-          </p:nvPr>
-        </p:nvSpPr>
-        <p:spPr>
-          <a:xfrm>
-            <a:off x="1371600" y="1143000"/>
-            <a:ext cx="4114800" cy="3086100"/>
-          </a:xfrm>
-        </p:spPr>
-      </p:sp>
-      <p:sp>
-        <p:nvSpPr>
-          <p:cNvPr id="3" name="備忘稿版面配置區 2"/>
-          <p:cNvSpPr>
-            <a:spLocks noGrp="1"/>
-          </p:cNvSpPr>
-          <p:nvPr>
-            <p:ph type="body" idx="1"/>
-          </p:nvPr>
-        </p:nvSpPr>
-        <p:spPr/>
-        <p:txBody>
-          <a:bodyPr/>
-          <a:lstStyle/>
-          <a:p>
-            <a:endParaRPr lang="zh-TW" altLang="en-US" dirty="0"/>
-          </a:p>
-        </p:txBody>
-      </p:sp>
-      <p:sp>
-        <p:nvSpPr>
-          <p:cNvPr id="4" name="投影片編號版面配置區 3"/>
-          <p:cNvSpPr>
-            <a:spLocks noGrp="1"/>
-          </p:cNvSpPr>
-          <p:nvPr>
-            <p:ph type="sldNum" sz="quarter" idx="10"/>
-          </p:nvPr>
-        </p:nvSpPr>
-        <p:spPr/>
-        <p:txBody>
-          <a:bodyPr/>
-          <a:lstStyle/>
-          <a:p>
-            <a:pPr marL="0" marR="0" lvl="0" indent="0" algn="r" defTabSz="914400" rtl="0" eaLnBrk="1" fontAlgn="auto" latinLnBrk="0" hangingPunct="1">
-              <a:lnSpc>
-                <a:spcPct val="100000"/>
-              </a:lnSpc>
-              <a:spcBef>
-                <a:spcPts val="0"/>
-              </a:spcBef>
-              <a:spcAft>
-                <a:spcPts val="0"/>
-              </a:spcAft>
-              <a:buClrTx/>
-              <a:buSzTx/>
-              <a:buFontTx/>
-              <a:buNone/>
-              <a:tabLst/>
-              <a:defRPr/>
-            </a:pPr>
-            <a:fld id="{9B26CD33-4337-4529-948A-94F6960B2374}" type="slidenum">
-              <a:rPr kumimoji="0" lang="en-US" sz="1200" b="0" i="0" u="none" strike="noStrike" kern="1200" cap="none" spc="0" normalizeH="0" baseline="0" noProof="0" smtClean="0">
-                <a:ln>
-                  <a:noFill/>
-                </a:ln>
-                <a:solidFill>
-                  <a:prstClr val="black"/>
-                </a:solidFill>
-                <a:effectLst/>
-                <a:uLnTx/>
-                <a:uFillTx/>
-                <a:latin typeface="Calibri"/>
-                <a:ea typeface="+mn-ea"/>
-                <a:cs typeface="+mn-cs"/>
-              </a:rPr>
-              <a:pPr marL="0" marR="0" lvl="0" indent="0" algn="r" defTabSz="914400" rtl="0" eaLnBrk="1" fontAlgn="auto" latinLnBrk="0" hangingPunct="1">
-                <a:lnSpc>
-                  <a:spcPct val="100000"/>
-                </a:lnSpc>
-                <a:spcBef>
-                  <a:spcPts val="0"/>
-                </a:spcBef>
-                <a:spcAft>
-                  <a:spcPts val="0"/>
-                </a:spcAft>
-                <a:buClrTx/>
-                <a:buSzTx/>
-                <a:buFontTx/>
-                <a:buNone/>
-                <a:tabLst/>
-                <a:defRPr/>
-              </a:pPr>
-              <a:t>8</a:t>
-            </a:fld>
-            <a:endParaRPr kumimoji="0" lang="en-US" sz="1200" b="0" i="0" u="none" strike="noStrike" kern="1200" cap="none" spc="0" normalizeH="0" baseline="0" noProof="0" dirty="0">
-              <a:ln>
-                <a:noFill/>
-              </a:ln>
-              <a:solidFill>
-                <a:prstClr val="black"/>
-              </a:solidFill>
-              <a:effectLst/>
-              <a:uLnTx/>
-              <a:uFillTx/>
-              <a:latin typeface="Calibri"/>
-              <a:ea typeface="+mn-ea"/>
-              <a:cs typeface="+mn-cs"/>
-            </a:endParaRPr>
-          </a:p>
-        </p:txBody>
-      </p:sp>
-    </p:spTree>
-    <p:extLst>
-      <p:ext uri="{BB962C8B-B14F-4D97-AF65-F5344CB8AC3E}">
-        <p14:creationId xmlns:p14="http://schemas.microsoft.com/office/powerpoint/2010/main" val="3380246969"/>
-      </p:ext>
-    </p:extLst>
-  </p:cSld>
-  <p:clrMapOvr>
-    <a:masterClrMapping/>
-  </p:clrMapOvr>
-</p:notes>
-</file>
-
-<file path=ppt/notesSlides/notesSlide9.xml><?xml version="1.0" encoding="utf-8"?>
-<p:notes xmlns:a="http://schemas.openxmlformats.org/drawingml/2006/main" xmlns:r="http://schemas.openxmlformats.org/officeDocument/2006/relationships" xmlns:p="http://schemas.openxmlformats.org/presentationml/2006/main">
-  <p:cSld>
-    <p:spTree>
-      <p:nvGrpSpPr>
-        <p:cNvPr id="1" name=""/>
-        <p:cNvGrpSpPr/>
-        <p:nvPr/>
-      </p:nvGrpSpPr>
-      <p:grpSpPr>
-        <a:xfrm>
-          <a:off x="0" y="0"/>
-          <a:ext cx="0" cy="0"/>
-          <a:chOff x="0" y="0"/>
-          <a:chExt cx="0" cy="0"/>
-        </a:xfrm>
-      </p:grpSpPr>
-      <p:sp>
-        <p:nvSpPr>
-          <p:cNvPr id="2" name="投影片圖像版面配置區 1"/>
-          <p:cNvSpPr>
-            <a:spLocks noGrp="1" noRot="1" noChangeAspect="1"/>
-          </p:cNvSpPr>
-          <p:nvPr>
-            <p:ph type="sldImg"/>
-          </p:nvPr>
-        </p:nvSpPr>
-        <p:spPr>
-          <a:xfrm>
-            <a:off x="1371600" y="1143000"/>
-            <a:ext cx="4114800" cy="3086100"/>
-          </a:xfrm>
-        </p:spPr>
-      </p:sp>
-      <p:sp>
-        <p:nvSpPr>
-          <p:cNvPr id="3" name="備忘稿版面配置區 2"/>
-          <p:cNvSpPr>
-            <a:spLocks noGrp="1"/>
-          </p:cNvSpPr>
-          <p:nvPr>
-            <p:ph type="body" idx="1"/>
-          </p:nvPr>
-        </p:nvSpPr>
-        <p:spPr/>
-        <p:txBody>
-          <a:bodyPr/>
-          <a:lstStyle/>
-          <a:p>
-            <a:endParaRPr lang="zh-TW" altLang="en-US" dirty="0"/>
-          </a:p>
-        </p:txBody>
-      </p:sp>
-      <p:sp>
-        <p:nvSpPr>
-          <p:cNvPr id="4" name="投影片編號版面配置區 3"/>
+          <p:cNvPr id="4" name="投影片編號版面配置區 3">
+            <a:extLst>
+              <a:ext uri="{FF2B5EF4-FFF2-40B4-BE49-F238E27FC236}">
+                <a16:creationId xmlns:a16="http://schemas.microsoft.com/office/drawing/2014/main" id="{FBD65AC1-5365-081A-A369-E585C8B16FD2}"/>
+              </a:ext>
+            </a:extLst>
+          </p:cNvPr>
           <p:cNvSpPr>
             <a:spLocks noGrp="1"/>
           </p:cNvSpPr>
@@ -1892,7 +2843,267 @@
     </p:spTree>
     <p:extLst>
       <p:ext uri="{BB962C8B-B14F-4D97-AF65-F5344CB8AC3E}">
-        <p14:creationId xmlns:p14="http://schemas.microsoft.com/office/powerpoint/2010/main" val="1475083261"/>
+        <p14:creationId xmlns:p14="http://schemas.microsoft.com/office/powerpoint/2010/main" val="3628333568"/>
+      </p:ext>
+    </p:extLst>
+  </p:cSld>
+  <p:clrMapOvr>
+    <a:masterClrMapping/>
+  </p:clrMapOvr>
+</p:notes>
+</file>
+
+<file path=ppt/notesSlides/notesSlide8.xml><?xml version="1.0" encoding="utf-8"?>
+<p:notes xmlns:a="http://schemas.openxmlformats.org/drawingml/2006/main" xmlns:r="http://schemas.openxmlformats.org/officeDocument/2006/relationships" xmlns:p="http://schemas.openxmlformats.org/presentationml/2006/main">
+  <p:cSld>
+    <p:spTree>
+      <p:nvGrpSpPr>
+        <p:cNvPr id="1" name="">
+          <a:extLst>
+            <a:ext uri="{FF2B5EF4-FFF2-40B4-BE49-F238E27FC236}">
+              <a16:creationId xmlns:a16="http://schemas.microsoft.com/office/drawing/2014/main" id="{1DD9D9A1-A333-C806-C005-4C0C506C998A}"/>
+            </a:ext>
+          </a:extLst>
+        </p:cNvPr>
+        <p:cNvGrpSpPr/>
+        <p:nvPr/>
+      </p:nvGrpSpPr>
+      <p:grpSpPr>
+        <a:xfrm>
+          <a:off x="0" y="0"/>
+          <a:ext cx="0" cy="0"/>
+          <a:chOff x="0" y="0"/>
+          <a:chExt cx="0" cy="0"/>
+        </a:xfrm>
+      </p:grpSpPr>
+      <p:sp>
+        <p:nvSpPr>
+          <p:cNvPr id="2" name="投影片圖像版面配置區 1">
+            <a:extLst>
+              <a:ext uri="{FF2B5EF4-FFF2-40B4-BE49-F238E27FC236}">
+                <a16:creationId xmlns:a16="http://schemas.microsoft.com/office/drawing/2014/main" id="{608601D3-042F-9863-3B25-CF01B5C396DA}"/>
+              </a:ext>
+            </a:extLst>
+          </p:cNvPr>
+          <p:cNvSpPr>
+            <a:spLocks noGrp="1" noRot="1" noChangeAspect="1"/>
+          </p:cNvSpPr>
+          <p:nvPr>
+            <p:ph type="sldImg"/>
+          </p:nvPr>
+        </p:nvSpPr>
+        <p:spPr/>
+      </p:sp>
+      <p:sp>
+        <p:nvSpPr>
+          <p:cNvPr id="3" name="備忘稿版面配置區 2">
+            <a:extLst>
+              <a:ext uri="{FF2B5EF4-FFF2-40B4-BE49-F238E27FC236}">
+                <a16:creationId xmlns:a16="http://schemas.microsoft.com/office/drawing/2014/main" id="{A7301CC5-F113-9F53-AC82-FC3993B563F4}"/>
+              </a:ext>
+            </a:extLst>
+          </p:cNvPr>
+          <p:cNvSpPr>
+            <a:spLocks noGrp="1"/>
+          </p:cNvSpPr>
+          <p:nvPr>
+            <p:ph type="body" idx="1"/>
+          </p:nvPr>
+        </p:nvSpPr>
+        <p:spPr/>
+        <p:txBody>
+          <a:bodyPr>
+            <a:normAutofit/>
+          </a:bodyPr>
+          <a:lstStyle/>
+          <a:p>
+            <a:endParaRPr lang="zh-TW" altLang="en-US" dirty="0"/>
+          </a:p>
+        </p:txBody>
+      </p:sp>
+      <p:sp>
+        <p:nvSpPr>
+          <p:cNvPr id="4" name="投影片編號版面配置區 3">
+            <a:extLst>
+              <a:ext uri="{FF2B5EF4-FFF2-40B4-BE49-F238E27FC236}">
+                <a16:creationId xmlns:a16="http://schemas.microsoft.com/office/drawing/2014/main" id="{E5D36F16-2803-3AAE-471E-E654B0BBACB8}"/>
+              </a:ext>
+            </a:extLst>
+          </p:cNvPr>
+          <p:cNvSpPr>
+            <a:spLocks noGrp="1"/>
+          </p:cNvSpPr>
+          <p:nvPr>
+            <p:ph type="sldNum" sz="quarter" idx="10"/>
+          </p:nvPr>
+        </p:nvSpPr>
+        <p:spPr/>
+        <p:txBody>
+          <a:bodyPr/>
+          <a:lstStyle/>
+          <a:p>
+            <a:fld id="{9B26CD33-4337-4529-948A-94F6960B2374}" type="slidenum">
+              <a:rPr lang="en-US" smtClean="0"/>
+              <a:pPr/>
+              <a:t>12</a:t>
+            </a:fld>
+            <a:endParaRPr lang="en-US" dirty="0"/>
+          </a:p>
+        </p:txBody>
+      </p:sp>
+    </p:spTree>
+    <p:extLst>
+      <p:ext uri="{BB962C8B-B14F-4D97-AF65-F5344CB8AC3E}">
+        <p14:creationId xmlns:p14="http://schemas.microsoft.com/office/powerpoint/2010/main" val="2590293761"/>
+      </p:ext>
+    </p:extLst>
+  </p:cSld>
+  <p:clrMapOvr>
+    <a:masterClrMapping/>
+  </p:clrMapOvr>
+</p:notes>
+</file>
+
+<file path=ppt/notesSlides/notesSlide9.xml><?xml version="1.0" encoding="utf-8"?>
+<p:notes xmlns:a="http://schemas.openxmlformats.org/drawingml/2006/main" xmlns:r="http://schemas.openxmlformats.org/officeDocument/2006/relationships" xmlns:p="http://schemas.openxmlformats.org/presentationml/2006/main">
+  <p:cSld>
+    <p:spTree>
+      <p:nvGrpSpPr>
+        <p:cNvPr id="1" name=""/>
+        <p:cNvGrpSpPr/>
+        <p:nvPr/>
+      </p:nvGrpSpPr>
+      <p:grpSpPr>
+        <a:xfrm>
+          <a:off x="0" y="0"/>
+          <a:ext cx="0" cy="0"/>
+          <a:chOff x="0" y="0"/>
+          <a:chExt cx="0" cy="0"/>
+        </a:xfrm>
+      </p:grpSpPr>
+      <p:sp>
+        <p:nvSpPr>
+          <p:cNvPr id="2" name="投影片圖像版面配置區 1"/>
+          <p:cNvSpPr>
+            <a:spLocks noGrp="1" noRot="1" noChangeAspect="1"/>
+          </p:cNvSpPr>
+          <p:nvPr>
+            <p:ph type="sldImg"/>
+          </p:nvPr>
+        </p:nvSpPr>
+        <p:spPr>
+          <a:xfrm>
+            <a:off x="1371600" y="1143000"/>
+            <a:ext cx="4114800" cy="3086100"/>
+          </a:xfrm>
+        </p:spPr>
+      </p:sp>
+      <p:sp>
+        <p:nvSpPr>
+          <p:cNvPr id="3" name="備忘稿版面配置區 2"/>
+          <p:cNvSpPr>
+            <a:spLocks noGrp="1"/>
+          </p:cNvSpPr>
+          <p:nvPr>
+            <p:ph type="body" idx="1"/>
+          </p:nvPr>
+        </p:nvSpPr>
+        <p:spPr/>
+        <p:txBody>
+          <a:bodyPr/>
+          <a:lstStyle/>
+          <a:p>
+            <a:endParaRPr lang="zh-TW" altLang="en-US" dirty="0"/>
+          </a:p>
+        </p:txBody>
+      </p:sp>
+      <p:sp>
+        <p:nvSpPr>
+          <p:cNvPr id="4" name="投影片編號版面配置區 3"/>
+          <p:cNvSpPr>
+            <a:spLocks noGrp="1"/>
+          </p:cNvSpPr>
+          <p:nvPr>
+            <p:ph type="sldNum" sz="quarter" idx="10"/>
+          </p:nvPr>
+        </p:nvSpPr>
+        <p:spPr/>
+        <p:txBody>
+          <a:bodyPr/>
+          <a:lstStyle/>
+          <a:p>
+            <a:pPr marL="0" marR="0" lvl="0" indent="0" algn="r" defTabSz="914400" rtl="0" eaLnBrk="1" fontAlgn="auto" latinLnBrk="0" hangingPunct="1">
+              <a:lnSpc>
+                <a:spcPct val="100000"/>
+              </a:lnSpc>
+              <a:spcBef>
+                <a:spcPts val="0"/>
+              </a:spcBef>
+              <a:spcAft>
+                <a:spcPts val="0"/>
+              </a:spcAft>
+              <a:buClrTx/>
+              <a:buSzTx/>
+              <a:buFontTx/>
+              <a:buNone/>
+              <a:tabLst/>
+              <a:defRPr/>
+            </a:pPr>
+            <a:fld id="{9B26CD33-4337-4529-948A-94F6960B2374}" type="slidenum">
+              <a:rPr kumimoji="0" lang="en-US" sz="1200" b="0" i="0" u="none" strike="noStrike" kern="1200" cap="none" spc="0" normalizeH="0" baseline="0" noProof="0" smtClean="0">
+                <a:ln>
+                  <a:noFill/>
+                </a:ln>
+                <a:solidFill>
+                  <a:prstClr val="black"/>
+                </a:solidFill>
+                <a:effectLst/>
+                <a:uLnTx/>
+                <a:uFillTx/>
+                <a:latin typeface="Calibri"/>
+                <a:ea typeface="+mn-ea"/>
+                <a:cs typeface="+mn-cs"/>
+              </a:rPr>
+              <a:pPr marL="0" marR="0" lvl="0" indent="0" algn="r" defTabSz="914400" rtl="0" eaLnBrk="1" fontAlgn="auto" latinLnBrk="0" hangingPunct="1">
+                <a:lnSpc>
+                  <a:spcPct val="100000"/>
+                </a:lnSpc>
+                <a:spcBef>
+                  <a:spcPts val="0"/>
+                </a:spcBef>
+                <a:spcAft>
+                  <a:spcPts val="0"/>
+                </a:spcAft>
+                <a:buClrTx/>
+                <a:buSzTx/>
+                <a:buFontTx/>
+                <a:buNone/>
+                <a:tabLst/>
+                <a:defRPr/>
+              </a:pPr>
+              <a:t>13</a:t>
+            </a:fld>
+            <a:endParaRPr kumimoji="0" lang="en-US" sz="1200" b="0" i="0" u="none" strike="noStrike" kern="1200" cap="none" spc="0" normalizeH="0" baseline="0" noProof="0" dirty="0">
+              <a:ln>
+                <a:noFill/>
+              </a:ln>
+              <a:solidFill>
+                <a:prstClr val="black"/>
+              </a:solidFill>
+              <a:effectLst/>
+              <a:uLnTx/>
+              <a:uFillTx/>
+              <a:latin typeface="Calibri"/>
+              <a:ea typeface="+mn-ea"/>
+              <a:cs typeface="+mn-cs"/>
+            </a:endParaRPr>
+          </a:p>
+        </p:txBody>
+      </p:sp>
+    </p:spTree>
+    <p:extLst>
+      <p:ext uri="{BB962C8B-B14F-4D97-AF65-F5344CB8AC3E}">
+        <p14:creationId xmlns:p14="http://schemas.microsoft.com/office/powerpoint/2010/main" val="1180290836"/>
       </p:ext>
     </p:extLst>
   </p:cSld>
@@ -2049,7 +3260,7 @@
           <a:p>
             <a:fld id="{C5A53396-52C0-405C-BBDC-73FF63BF6BF1}" type="datetimeFigureOut">
               <a:rPr lang="zh-TW" altLang="en-US" smtClean="0"/>
-              <a:t>2024/12/4</a:t>
+              <a:t>2024/12/10</a:t>
             </a:fld>
             <a:endParaRPr lang="zh-TW" altLang="en-US"/>
           </a:p>
@@ -2247,7 +3458,7 @@
           <a:p>
             <a:fld id="{C5A53396-52C0-405C-BBDC-73FF63BF6BF1}" type="datetimeFigureOut">
               <a:rPr lang="zh-TW" altLang="en-US" smtClean="0"/>
-              <a:t>2024/12/4</a:t>
+              <a:t>2024/12/10</a:t>
             </a:fld>
             <a:endParaRPr lang="zh-TW" altLang="en-US"/>
           </a:p>
@@ -2455,7 +3666,7 @@
           <a:p>
             <a:fld id="{C5A53396-52C0-405C-BBDC-73FF63BF6BF1}" type="datetimeFigureOut">
               <a:rPr lang="zh-TW" altLang="en-US" smtClean="0"/>
-              <a:t>2024/12/4</a:t>
+              <a:t>2024/12/10</a:t>
             </a:fld>
             <a:endParaRPr lang="zh-TW" altLang="en-US"/>
           </a:p>
@@ -2836,7 +4047,7 @@
                 </a:solidFill>
               </a:rPr>
               <a:pPr/>
-              <a:t>12/4/2024</a:t>
+              <a:t>12/10/2024</a:t>
             </a:fld>
             <a:endParaRPr kumimoji="0" lang="en-US" dirty="0"/>
           </a:p>
@@ -3067,7 +4278,7 @@
                 </a:solidFill>
               </a:rPr>
               <a:pPr/>
-              <a:t>12/4/2024</a:t>
+              <a:t>12/10/2024</a:t>
             </a:fld>
             <a:endParaRPr kumimoji="0" lang="en-US" dirty="0"/>
           </a:p>
@@ -3300,7 +4511,7 @@
                 </a:solidFill>
               </a:rPr>
               <a:pPr/>
-              <a:t>12/4/2024</a:t>
+              <a:t>12/10/2024</a:t>
             </a:fld>
             <a:endParaRPr kumimoji="0" lang="en-US" dirty="0"/>
           </a:p>
@@ -3782,7 +4993,7 @@
                 </a:solidFill>
               </a:rPr>
               <a:pPr/>
-              <a:t>12/4/2024</a:t>
+              <a:t>12/10/2024</a:t>
             </a:fld>
             <a:endParaRPr kumimoji="0" lang="en-US" dirty="0"/>
           </a:p>
@@ -4139,7 +5350,7 @@
                 </a:solidFill>
               </a:rPr>
               <a:pPr/>
-              <a:t>12/4/2024</a:t>
+              <a:t>12/10/2024</a:t>
             </a:fld>
             <a:endParaRPr kumimoji="0" lang="en-US" dirty="0"/>
           </a:p>
@@ -4502,7 +5713,7 @@
                 </a:solidFill>
               </a:rPr>
               <a:pPr/>
-              <a:t>12/4/2024</a:t>
+              <a:t>12/10/2024</a:t>
             </a:fld>
             <a:endParaRPr kumimoji="0" lang="en-US" dirty="0"/>
           </a:p>
@@ -4812,7 +6023,7 @@
                 </a:solidFill>
               </a:rPr>
               <a:pPr/>
-              <a:t>12/4/2024</a:t>
+              <a:t>12/10/2024</a:t>
             </a:fld>
             <a:endParaRPr kumimoji="0" lang="en-US" dirty="0"/>
           </a:p>
@@ -5007,7 +6218,7 @@
           <a:p>
             <a:fld id="{C5A53396-52C0-405C-BBDC-73FF63BF6BF1}" type="datetimeFigureOut">
               <a:rPr lang="zh-TW" altLang="en-US" smtClean="0"/>
-              <a:t>2024/12/4</a:t>
+              <a:t>2024/12/10</a:t>
             </a:fld>
             <a:endParaRPr lang="zh-TW" altLang="en-US"/>
           </a:p>
@@ -5491,7 +6702,7 @@
                 </a:solidFill>
               </a:rPr>
               <a:pPr/>
-              <a:t>12/4/2024</a:t>
+              <a:t>12/10/2024</a:t>
             </a:fld>
             <a:endParaRPr kumimoji="0" lang="en-US" dirty="0"/>
           </a:p>
@@ -5887,7 +7098,7 @@
                 </a:solidFill>
               </a:rPr>
               <a:pPr/>
-              <a:t>12/4/2024</a:t>
+              <a:t>12/10/2024</a:t>
             </a:fld>
             <a:endParaRPr kumimoji="0" lang="en-US" dirty="0"/>
           </a:p>
@@ -6227,7 +7438,7 @@
                 </a:solidFill>
               </a:rPr>
               <a:pPr/>
-              <a:t>12/4/2024</a:t>
+              <a:t>12/10/2024</a:t>
             </a:fld>
             <a:endParaRPr kumimoji="0" lang="en-US" dirty="0"/>
           </a:p>
@@ -6808,7 +8019,7 @@
                 </a:solidFill>
               </a:rPr>
               <a:pPr/>
-              <a:t>12/4/2024</a:t>
+              <a:t>12/10/2024</a:t>
             </a:fld>
             <a:endParaRPr kumimoji="0" lang="en-US" dirty="0"/>
           </a:p>
@@ -7377,7 +8588,7 @@
                 </a:solidFill>
               </a:rPr>
               <a:pPr/>
-              <a:t>12/4/2024</a:t>
+              <a:t>12/10/2024</a:t>
             </a:fld>
             <a:endParaRPr kumimoji="0" lang="en-US" dirty="0"/>
           </a:p>
@@ -7841,7 +9052,7 @@
                 </a:solidFill>
               </a:rPr>
               <a:pPr/>
-              <a:t>12/4/2024</a:t>
+              <a:t>12/10/2024</a:t>
             </a:fld>
             <a:endParaRPr kumimoji="0" lang="en-US" dirty="0"/>
           </a:p>
@@ -8270,7 +9481,7 @@
                 </a:solidFill>
               </a:rPr>
               <a:pPr/>
-              <a:t>12/4/2024</a:t>
+              <a:t>12/10/2024</a:t>
             </a:fld>
             <a:endParaRPr kumimoji="0" lang="en-US" dirty="0"/>
           </a:p>
@@ -8779,7 +9990,7 @@
                 </a:solidFill>
               </a:rPr>
               <a:pPr/>
-              <a:t>12/4/2024</a:t>
+              <a:t>12/10/2024</a:t>
             </a:fld>
             <a:endParaRPr kumimoji="0" lang="en-US" dirty="0"/>
           </a:p>
@@ -9288,7 +10499,7 @@
                 </a:solidFill>
               </a:rPr>
               <a:pPr/>
-              <a:t>12/4/2024</a:t>
+              <a:t>12/10/2024</a:t>
             </a:fld>
             <a:endParaRPr kumimoji="0" lang="en-US" dirty="0"/>
           </a:p>
@@ -9509,7 +10720,7 @@
                 </a:solidFill>
               </a:rPr>
               <a:pPr/>
-              <a:t>12/4/2024</a:t>
+              <a:t>12/10/2024</a:t>
             </a:fld>
             <a:endParaRPr kumimoji="0" lang="en-US" dirty="0"/>
           </a:p>
@@ -9781,7 +10992,7 @@
           <a:p>
             <a:fld id="{C5A53396-52C0-405C-BBDC-73FF63BF6BF1}" type="datetimeFigureOut">
               <a:rPr lang="zh-TW" altLang="en-US" smtClean="0"/>
-              <a:t>2024/12/4</a:t>
+              <a:t>2024/12/10</a:t>
             </a:fld>
             <a:endParaRPr lang="zh-TW" altLang="en-US"/>
           </a:p>
@@ -10117,7 +11328,7 @@
                 </a:solidFill>
               </a:rPr>
               <a:pPr/>
-              <a:t>12/4/2024</a:t>
+              <a:t>12/10/2024</a:t>
             </a:fld>
             <a:endParaRPr kumimoji="0" lang="en-US" dirty="0"/>
           </a:p>
@@ -10341,7 +11552,7 @@
                 </a:solidFill>
               </a:rPr>
               <a:pPr/>
-              <a:t>12/4/2024</a:t>
+              <a:t>12/10/2024</a:t>
             </a:fld>
             <a:endParaRPr kumimoji="0" lang="en-US" dirty="0"/>
           </a:p>
@@ -10522,7 +11733,7 @@
             <a:fld id="{ACB2EC6F-6501-4E04-BD6C-A8A6CABB2C5B}" type="datetimeFigureOut">
               <a:rPr kumimoji="0" lang="en-US" smtClean="0"/>
               <a:pPr/>
-              <a:t>12/4/2024</a:t>
+              <a:t>12/10/2024</a:t>
             </a:fld>
             <a:endParaRPr kumimoji="0" lang="en-US" dirty="0"/>
           </a:p>
@@ -10806,7 +12017,7 @@
           <a:p>
             <a:fld id="{C5A53396-52C0-405C-BBDC-73FF63BF6BF1}" type="datetimeFigureOut">
               <a:rPr lang="zh-TW" altLang="en-US" smtClean="0"/>
-              <a:t>2024/12/4</a:t>
+              <a:t>2024/12/10</a:t>
             </a:fld>
             <a:endParaRPr lang="zh-TW" altLang="en-US"/>
           </a:p>
@@ -11218,7 +12429,7 @@
           <a:p>
             <a:fld id="{C5A53396-52C0-405C-BBDC-73FF63BF6BF1}" type="datetimeFigureOut">
               <a:rPr lang="zh-TW" altLang="en-US" smtClean="0"/>
-              <a:t>2024/12/4</a:t>
+              <a:t>2024/12/10</a:t>
             </a:fld>
             <a:endParaRPr lang="zh-TW" altLang="en-US"/>
           </a:p>
@@ -11359,7 +12570,7 @@
           <a:p>
             <a:fld id="{C5A53396-52C0-405C-BBDC-73FF63BF6BF1}" type="datetimeFigureOut">
               <a:rPr lang="zh-TW" altLang="en-US" smtClean="0"/>
-              <a:t>2024/12/4</a:t>
+              <a:t>2024/12/10</a:t>
             </a:fld>
             <a:endParaRPr lang="zh-TW" altLang="en-US"/>
           </a:p>
@@ -11472,7 +12683,7 @@
           <a:p>
             <a:fld id="{C5A53396-52C0-405C-BBDC-73FF63BF6BF1}" type="datetimeFigureOut">
               <a:rPr lang="zh-TW" altLang="en-US" smtClean="0"/>
-              <a:t>2024/12/4</a:t>
+              <a:t>2024/12/10</a:t>
             </a:fld>
             <a:endParaRPr lang="zh-TW" altLang="en-US"/>
           </a:p>
@@ -11783,7 +12994,7 @@
           <a:p>
             <a:fld id="{C5A53396-52C0-405C-BBDC-73FF63BF6BF1}" type="datetimeFigureOut">
               <a:rPr lang="zh-TW" altLang="en-US" smtClean="0"/>
-              <a:t>2024/12/4</a:t>
+              <a:t>2024/12/10</a:t>
             </a:fld>
             <a:endParaRPr lang="zh-TW" altLang="en-US"/>
           </a:p>
@@ -12071,7 +13282,7 @@
           <a:p>
             <a:fld id="{C5A53396-52C0-405C-BBDC-73FF63BF6BF1}" type="datetimeFigureOut">
               <a:rPr lang="zh-TW" altLang="en-US" smtClean="0"/>
-              <a:t>2024/12/4</a:t>
+              <a:t>2024/12/10</a:t>
             </a:fld>
             <a:endParaRPr lang="zh-TW" altLang="en-US"/>
           </a:p>
@@ -12312,7 +13523,7 @@
           <a:p>
             <a:fld id="{C5A53396-52C0-405C-BBDC-73FF63BF6BF1}" type="datetimeFigureOut">
               <a:rPr lang="zh-TW" altLang="en-US" smtClean="0"/>
-              <a:t>2024/12/4</a:t>
+              <a:t>2024/12/10</a:t>
             </a:fld>
             <a:endParaRPr lang="zh-TW" altLang="en-US"/>
           </a:p>
@@ -12884,7 +14095,7 @@
                 </a:solidFill>
               </a:rPr>
               <a:pPr/>
-              <a:t>12/4/2024</a:t>
+              <a:t>12/10/2024</a:t>
             </a:fld>
             <a:endParaRPr kumimoji="0" lang="en-US" sz="1200" dirty="0">
               <a:solidFill>
@@ -13380,7 +14591,7 @@
                 <a:ea typeface="微軟正黑體" panose="020B0604030504040204" pitchFamily="34" charset="-120"/>
                 <a:cs typeface="Arial"/>
               </a:rPr>
-              <a:t>2. Transformers</a:t>
+              <a:t>2. transformers</a:t>
             </a:r>
           </a:p>
           <a:p>
@@ -13482,7 +14693,7 @@
                 <a:latin typeface="微軟正黑體" panose="020B0604030504040204" pitchFamily="34" charset="-120"/>
                 <a:ea typeface="微軟正黑體" panose="020B0604030504040204" pitchFamily="34" charset="-120"/>
               </a:rPr>
-              <a:t>3</a:t>
+              <a:t>11</a:t>
             </a:r>
             <a:r>
               <a:rPr lang="zh-TW" altLang="en-US" sz="2400" b="1" dirty="0">
@@ -13492,14 +14703,14 @@
               <a:t>月</a:t>
             </a:r>
             <a:r>
-              <a:rPr lang="en-US" altLang="zh-TW" sz="2400" b="1" dirty="0">
-                <a:latin typeface="微軟正黑體" panose="020B0604030504040204" pitchFamily="34" charset="-120"/>
-                <a:ea typeface="微軟正黑體" panose="020B0604030504040204" pitchFamily="34" charset="-120"/>
-              </a:rPr>
-              <a:t>-5</a:t>
-            </a:r>
-            <a:r>
-              <a:rPr lang="zh-TW" altLang="en-US" sz="2400" b="1" dirty="0">
+              <a:rPr lang="en-US" altLang="zh-TW" sz="2400" b="1">
+                <a:latin typeface="微軟正黑體" panose="020B0604030504040204" pitchFamily="34" charset="-120"/>
+                <a:ea typeface="微軟正黑體" panose="020B0604030504040204" pitchFamily="34" charset="-120"/>
+              </a:rPr>
+              <a:t>12</a:t>
+            </a:r>
+            <a:r>
+              <a:rPr lang="zh-TW" altLang="en-US" sz="2400" b="1">
                 <a:latin typeface="微軟正黑體" panose="020B0604030504040204" pitchFamily="34" charset="-120"/>
                 <a:ea typeface="微軟正黑體" panose="020B0604030504040204" pitchFamily="34" charset="-120"/>
               </a:rPr>
@@ -13538,6 +14749,3605 @@
 </file>
 
 <file path=ppt/slides/slide10.xml><?xml version="1.0" encoding="utf-8"?>
+<p:sld xmlns:a="http://schemas.openxmlformats.org/drawingml/2006/main" xmlns:r="http://schemas.openxmlformats.org/officeDocument/2006/relationships" xmlns:p="http://schemas.openxmlformats.org/presentationml/2006/main">
+  <p:cSld>
+    <p:spTree>
+      <p:nvGrpSpPr>
+        <p:cNvPr id="1" name=""/>
+        <p:cNvGrpSpPr/>
+        <p:nvPr/>
+      </p:nvGrpSpPr>
+      <p:grpSpPr>
+        <a:xfrm>
+          <a:off x="0" y="0"/>
+          <a:ext cx="0" cy="0"/>
+          <a:chOff x="0" y="0"/>
+          <a:chExt cx="0" cy="0"/>
+        </a:xfrm>
+      </p:grpSpPr>
+      <p:sp>
+        <p:nvSpPr>
+          <p:cNvPr id="2" name="圖片版面配置區 1">
+            <a:extLst>
+              <a:ext uri="{FF2B5EF4-FFF2-40B4-BE49-F238E27FC236}">
+                <a16:creationId xmlns:a16="http://schemas.microsoft.com/office/drawing/2014/main" id="{593DB2F1-E603-D89C-FBEC-64B492CEF473}"/>
+              </a:ext>
+            </a:extLst>
+          </p:cNvPr>
+          <p:cNvSpPr>
+            <a:spLocks noGrp="1"/>
+          </p:cNvSpPr>
+          <p:nvPr>
+            <p:ph type="pic" sz="quarter" idx="10"/>
+          </p:nvPr>
+        </p:nvSpPr>
+        <p:spPr/>
+      </p:sp>
+      <p:sp>
+        <p:nvSpPr>
+          <p:cNvPr id="3" name="文字版面配置區 2">
+            <a:extLst>
+              <a:ext uri="{FF2B5EF4-FFF2-40B4-BE49-F238E27FC236}">
+                <a16:creationId xmlns:a16="http://schemas.microsoft.com/office/drawing/2014/main" id="{5B99A362-FDE7-3999-4D89-B5F02CC8B508}"/>
+              </a:ext>
+            </a:extLst>
+          </p:cNvPr>
+          <p:cNvSpPr>
+            <a:spLocks noGrp="1"/>
+          </p:cNvSpPr>
+          <p:nvPr>
+            <p:ph type="body" sz="quarter" idx="11"/>
+          </p:nvPr>
+        </p:nvSpPr>
+        <p:spPr/>
+        <p:txBody>
+          <a:bodyPr/>
+          <a:lstStyle/>
+          <a:p>
+            <a:endParaRPr lang="zh-TW" altLang="en-US"/>
+          </a:p>
+        </p:txBody>
+      </p:sp>
+      <p:pic>
+        <p:nvPicPr>
+          <p:cNvPr id="5" name="圖片 4">
+            <a:extLst>
+              <a:ext uri="{FF2B5EF4-FFF2-40B4-BE49-F238E27FC236}">
+                <a16:creationId xmlns:a16="http://schemas.microsoft.com/office/drawing/2014/main" id="{007E0B2A-80B7-2CA0-ACB0-7E674895D024}"/>
+              </a:ext>
+            </a:extLst>
+          </p:cNvPr>
+          <p:cNvPicPr>
+            <a:picLocks noChangeAspect="1"/>
+          </p:cNvPicPr>
+          <p:nvPr/>
+        </p:nvPicPr>
+        <p:blipFill>
+          <a:blip r:embed="rId2"/>
+          <a:stretch>
+            <a:fillRect/>
+          </a:stretch>
+        </p:blipFill>
+        <p:spPr>
+          <a:xfrm>
+            <a:off x="175845" y="344147"/>
+            <a:ext cx="8902840" cy="6280612"/>
+          </a:xfrm>
+          <a:prstGeom prst="rect">
+            <a:avLst/>
+          </a:prstGeom>
+        </p:spPr>
+      </p:pic>
+    </p:spTree>
+    <p:extLst>
+      <p:ext uri="{BB962C8B-B14F-4D97-AF65-F5344CB8AC3E}">
+        <p14:creationId xmlns:p14="http://schemas.microsoft.com/office/powerpoint/2010/main" val="256201954"/>
+      </p:ext>
+    </p:extLst>
+  </p:cSld>
+  <p:clrMapOvr>
+    <a:masterClrMapping/>
+  </p:clrMapOvr>
+  <p:transition>
+    <p:fade/>
+  </p:transition>
+</p:sld>
+</file>
+
+<file path=ppt/slides/slide11.xml><?xml version="1.0" encoding="utf-8"?>
+<p:sld xmlns:a="http://schemas.openxmlformats.org/drawingml/2006/main" xmlns:r="http://schemas.openxmlformats.org/officeDocument/2006/relationships" xmlns:p="http://schemas.openxmlformats.org/presentationml/2006/main">
+  <p:cSld>
+    <p:spTree>
+      <p:nvGrpSpPr>
+        <p:cNvPr id="1" name=""/>
+        <p:cNvGrpSpPr/>
+        <p:nvPr/>
+      </p:nvGrpSpPr>
+      <p:grpSpPr>
+        <a:xfrm>
+          <a:off x="0" y="0"/>
+          <a:ext cx="0" cy="0"/>
+          <a:chOff x="0" y="0"/>
+          <a:chExt cx="0" cy="0"/>
+        </a:xfrm>
+      </p:grpSpPr>
+      <p:pic>
+        <p:nvPicPr>
+          <p:cNvPr id="5" name="圖片 4">
+            <a:extLst>
+              <a:ext uri="{FF2B5EF4-FFF2-40B4-BE49-F238E27FC236}">
+                <a16:creationId xmlns:a16="http://schemas.microsoft.com/office/drawing/2014/main" id="{6A6A22A5-F1F5-FF3A-CC38-1F50B33D48FA}"/>
+              </a:ext>
+            </a:extLst>
+          </p:cNvPr>
+          <p:cNvPicPr>
+            <a:picLocks noChangeAspect="1"/>
+          </p:cNvPicPr>
+          <p:nvPr/>
+        </p:nvPicPr>
+        <p:blipFill>
+          <a:blip r:embed="rId2"/>
+          <a:stretch>
+            <a:fillRect/>
+          </a:stretch>
+        </p:blipFill>
+        <p:spPr>
+          <a:xfrm>
+            <a:off x="0" y="782052"/>
+            <a:ext cx="9144000" cy="5293895"/>
+          </a:xfrm>
+          <a:prstGeom prst="rect">
+            <a:avLst/>
+          </a:prstGeom>
+        </p:spPr>
+      </p:pic>
+    </p:spTree>
+    <p:extLst>
+      <p:ext uri="{BB962C8B-B14F-4D97-AF65-F5344CB8AC3E}">
+        <p14:creationId xmlns:p14="http://schemas.microsoft.com/office/powerpoint/2010/main" val="1871280328"/>
+      </p:ext>
+    </p:extLst>
+  </p:cSld>
+  <p:clrMapOvr>
+    <a:masterClrMapping/>
+  </p:clrMapOvr>
+  <p:transition>
+    <p:fade/>
+  </p:transition>
+</p:sld>
+</file>
+
+<file path=ppt/slides/slide12.xml><?xml version="1.0" encoding="utf-8"?>
+<p:sld xmlns:a="http://schemas.openxmlformats.org/drawingml/2006/main" xmlns:r="http://schemas.openxmlformats.org/officeDocument/2006/relationships" xmlns:p="http://schemas.openxmlformats.org/presentationml/2006/main">
+  <p:cSld>
+    <p:spTree>
+      <p:nvGrpSpPr>
+        <p:cNvPr id="1" name="">
+          <a:extLst>
+            <a:ext uri="{FF2B5EF4-FFF2-40B4-BE49-F238E27FC236}">
+              <a16:creationId xmlns:a16="http://schemas.microsoft.com/office/drawing/2014/main" id="{5AE35D3C-32A8-45DC-9B1F-8503AEE321A3}"/>
+            </a:ext>
+          </a:extLst>
+        </p:cNvPr>
+        <p:cNvGrpSpPr/>
+        <p:nvPr/>
+      </p:nvGrpSpPr>
+      <p:grpSpPr>
+        <a:xfrm>
+          <a:off x="0" y="0"/>
+          <a:ext cx="0" cy="0"/>
+          <a:chOff x="0" y="0"/>
+          <a:chExt cx="0" cy="0"/>
+        </a:xfrm>
+      </p:grpSpPr>
+      <p:sp>
+        <p:nvSpPr>
+          <p:cNvPr id="4" name="文字方塊 3">
+            <a:extLst>
+              <a:ext uri="{FF2B5EF4-FFF2-40B4-BE49-F238E27FC236}">
+                <a16:creationId xmlns:a16="http://schemas.microsoft.com/office/drawing/2014/main" id="{E2AAD20A-CC01-E544-ACB7-DB1B1EBDFCD1}"/>
+              </a:ext>
+            </a:extLst>
+          </p:cNvPr>
+          <p:cNvSpPr txBox="1"/>
+          <p:nvPr/>
+        </p:nvSpPr>
+        <p:spPr>
+          <a:xfrm>
+            <a:off x="685800" y="2743200"/>
+            <a:ext cx="7772400" cy="830997"/>
+          </a:xfrm>
+          <a:prstGeom prst="rect">
+            <a:avLst/>
+          </a:prstGeom>
+          <a:noFill/>
+        </p:spPr>
+        <p:txBody>
+          <a:bodyPr wrap="square" rtlCol="0">
+            <a:spAutoFit/>
+          </a:bodyPr>
+          <a:lstStyle/>
+          <a:p>
+            <a:pPr algn="ctr"/>
+            <a:r>
+              <a:rPr kumimoji="1" lang="en-US" altLang="zh-TW" sz="4800" b="1" dirty="0" err="1">
+                <a:solidFill>
+                  <a:srgbClr val="FFFF00"/>
+                </a:solidFill>
+                <a:effectLst>
+                  <a:outerShdw blurRad="38100" dist="38100" dir="2700000" algn="tl">
+                    <a:srgbClr val="000000">
+                      <a:alpha val="43137"/>
+                    </a:srgbClr>
+                  </a:outerShdw>
+                </a:effectLst>
+                <a:latin typeface="微軟正黑體" panose="020B0604030504040204" pitchFamily="34" charset="-120"/>
+                <a:ea typeface="微軟正黑體" panose="020B0604030504040204" pitchFamily="34" charset="-120"/>
+                <a:cs typeface="Arial"/>
+              </a:rPr>
+              <a:t>Huggingface</a:t>
+            </a:r>
+            <a:r>
+              <a:rPr kumimoji="1" lang="zh-TW" altLang="en-US" sz="4800" b="1" dirty="0">
+                <a:solidFill>
+                  <a:srgbClr val="FFFF00"/>
+                </a:solidFill>
+                <a:effectLst>
+                  <a:outerShdw blurRad="38100" dist="38100" dir="2700000" algn="tl">
+                    <a:srgbClr val="000000">
+                      <a:alpha val="43137"/>
+                    </a:srgbClr>
+                  </a:outerShdw>
+                </a:effectLst>
+                <a:latin typeface="微軟正黑體" panose="020B0604030504040204" pitchFamily="34" charset="-120"/>
+                <a:ea typeface="微軟正黑體" panose="020B0604030504040204" pitchFamily="34" charset="-120"/>
+                <a:cs typeface="Arial"/>
+              </a:rPr>
+              <a:t>介紹</a:t>
+            </a:r>
+            <a:endParaRPr kumimoji="1" lang="en-US" altLang="zh-TW" sz="4800" b="1" dirty="0">
+              <a:solidFill>
+                <a:srgbClr val="FFFF00"/>
+              </a:solidFill>
+              <a:effectLst>
+                <a:outerShdw blurRad="38100" dist="38100" dir="2700000" algn="tl">
+                  <a:srgbClr val="000000">
+                    <a:alpha val="43137"/>
+                  </a:srgbClr>
+                </a:outerShdw>
+              </a:effectLst>
+              <a:latin typeface="微軟正黑體" panose="020B0604030504040204" pitchFamily="34" charset="-120"/>
+              <a:ea typeface="微軟正黑體" panose="020B0604030504040204" pitchFamily="34" charset="-120"/>
+              <a:cs typeface="Arial"/>
+            </a:endParaRPr>
+          </a:p>
+        </p:txBody>
+      </p:sp>
+    </p:spTree>
+    <p:extLst>
+      <p:ext uri="{BB962C8B-B14F-4D97-AF65-F5344CB8AC3E}">
+        <p14:creationId xmlns:p14="http://schemas.microsoft.com/office/powerpoint/2010/main" val="3234856462"/>
+      </p:ext>
+    </p:extLst>
+  </p:cSld>
+  <p:clrMapOvr>
+    <a:masterClrMapping/>
+  </p:clrMapOvr>
+  <p:transition>
+    <p:fade/>
+  </p:transition>
+</p:sld>
+</file>
+
+<file path=ppt/slides/slide13.xml><?xml version="1.0" encoding="utf-8"?>
+<p:sld xmlns:a="http://schemas.openxmlformats.org/drawingml/2006/main" xmlns:r="http://schemas.openxmlformats.org/officeDocument/2006/relationships" xmlns:p="http://schemas.openxmlformats.org/presentationml/2006/main">
+  <p:cSld>
+    <p:spTree>
+      <p:nvGrpSpPr>
+        <p:cNvPr id="1" name=""/>
+        <p:cNvGrpSpPr/>
+        <p:nvPr/>
+      </p:nvGrpSpPr>
+      <p:grpSpPr>
+        <a:xfrm>
+          <a:off x="0" y="0"/>
+          <a:ext cx="0" cy="0"/>
+          <a:chOff x="0" y="0"/>
+          <a:chExt cx="0" cy="0"/>
+        </a:xfrm>
+      </p:grpSpPr>
+      <p:sp>
+        <p:nvSpPr>
+          <p:cNvPr id="5" name="文字方塊 4"/>
+          <p:cNvSpPr txBox="1"/>
+          <p:nvPr/>
+        </p:nvSpPr>
+        <p:spPr>
+          <a:xfrm>
+            <a:off x="685800" y="1828802"/>
+            <a:ext cx="8077200" cy="4524315"/>
+          </a:xfrm>
+          <a:prstGeom prst="rect">
+            <a:avLst/>
+          </a:prstGeom>
+          <a:noFill/>
+        </p:spPr>
+        <p:txBody>
+          <a:bodyPr wrap="square" rtlCol="0">
+            <a:spAutoFit/>
+          </a:bodyPr>
+          <a:lstStyle/>
+          <a:p>
+            <a:pPr marL="514350" indent="-514350">
+              <a:buFont typeface="Arial" panose="020B0604020202020204" pitchFamily="34" charset="0"/>
+              <a:buChar char="•"/>
+            </a:pPr>
+            <a:r>
+              <a:rPr lang="en-US" altLang="zh-TW" sz="3200" dirty="0">
+                <a:solidFill>
+                  <a:prstClr val="white"/>
+                </a:solidFill>
+                <a:latin typeface="微軟正黑體" panose="020B0604030504040204" pitchFamily="34" charset="-120"/>
+                <a:ea typeface="微軟正黑體" panose="020B0604030504040204" pitchFamily="34" charset="-120"/>
+              </a:rPr>
+              <a:t>Transformers</a:t>
+            </a:r>
+            <a:r>
+              <a:rPr lang="zh-TW" altLang="en-US" sz="3200" dirty="0">
+                <a:solidFill>
+                  <a:prstClr val="white"/>
+                </a:solidFill>
+                <a:latin typeface="微軟正黑體" panose="020B0604030504040204" pitchFamily="34" charset="-120"/>
+                <a:ea typeface="微軟正黑體" panose="020B0604030504040204" pitchFamily="34" charset="-120"/>
+              </a:rPr>
+              <a:t>模型非常大，數億至數千億個的參數</a:t>
+            </a:r>
+            <a:endParaRPr lang="en-US" altLang="zh-TW" sz="3200" dirty="0">
+              <a:solidFill>
+                <a:prstClr val="white"/>
+              </a:solidFill>
+              <a:latin typeface="微軟正黑體" panose="020B0604030504040204" pitchFamily="34" charset="-120"/>
+              <a:ea typeface="微軟正黑體" panose="020B0604030504040204" pitchFamily="34" charset="-120"/>
+            </a:endParaRPr>
+          </a:p>
+          <a:p>
+            <a:pPr marL="514350" indent="-514350">
+              <a:buFont typeface="Arial" panose="020B0604020202020204" pitchFamily="34" charset="0"/>
+              <a:buChar char="•"/>
+            </a:pPr>
+            <a:r>
+              <a:rPr lang="zh-TW" altLang="en-US" sz="3200" dirty="0">
+                <a:solidFill>
+                  <a:prstClr val="white"/>
+                </a:solidFill>
+                <a:latin typeface="微軟正黑體" panose="020B0604030504040204" pitchFamily="34" charset="-120"/>
+                <a:ea typeface="微軟正黑體" panose="020B0604030504040204" pitchFamily="34" charset="-120"/>
+              </a:rPr>
+              <a:t>新模型不斷出來，每種模型都有自己的實現方法，實作很困難</a:t>
+            </a:r>
+            <a:endParaRPr lang="en-US" altLang="zh-TW" sz="3200" dirty="0">
+              <a:solidFill>
+                <a:prstClr val="white"/>
+              </a:solidFill>
+              <a:latin typeface="微軟正黑體" panose="020B0604030504040204" pitchFamily="34" charset="-120"/>
+              <a:ea typeface="微軟正黑體" panose="020B0604030504040204" pitchFamily="34" charset="-120"/>
+            </a:endParaRPr>
+          </a:p>
+          <a:p>
+            <a:pPr marL="514350" indent="-514350">
+              <a:buFont typeface="Arial" panose="020B0604020202020204" pitchFamily="34" charset="0"/>
+              <a:buChar char="•"/>
+            </a:pPr>
+            <a:r>
+              <a:rPr lang="zh-TW" altLang="en-US" sz="3200" dirty="0">
+                <a:solidFill>
+                  <a:prstClr val="white"/>
+                </a:solidFill>
+                <a:latin typeface="微軟正黑體" panose="020B0604030504040204" pitchFamily="34" charset="-120"/>
+                <a:ea typeface="微軟正黑體" panose="020B0604030504040204" pitchFamily="34" charset="-120"/>
+              </a:rPr>
+              <a:t>訓練、微調和部署模型也都不同方法</a:t>
+            </a:r>
+            <a:endParaRPr lang="en-US" altLang="zh-TW" sz="3200" dirty="0">
+              <a:solidFill>
+                <a:prstClr val="white"/>
+              </a:solidFill>
+              <a:latin typeface="微軟正黑體" panose="020B0604030504040204" pitchFamily="34" charset="-120"/>
+              <a:ea typeface="微軟正黑體" panose="020B0604030504040204" pitchFamily="34" charset="-120"/>
+            </a:endParaRPr>
+          </a:p>
+          <a:p>
+            <a:pPr marL="514350" indent="-514350">
+              <a:buFont typeface="Arial" panose="020B0604020202020204" pitchFamily="34" charset="0"/>
+              <a:buChar char="•"/>
+            </a:pPr>
+            <a:r>
+              <a:rPr lang="en-US" altLang="zh-TW" sz="3200" dirty="0" err="1">
+                <a:solidFill>
+                  <a:prstClr val="white"/>
+                </a:solidFill>
+                <a:latin typeface="微軟正黑體" panose="020B0604030504040204" pitchFamily="34" charset="-120"/>
+                <a:ea typeface="微軟正黑體" panose="020B0604030504040204" pitchFamily="34" charset="-120"/>
+              </a:rPr>
+              <a:t>HuggingFace</a:t>
+            </a:r>
+            <a:r>
+              <a:rPr lang="zh-TW" altLang="en-US" sz="3200" dirty="0">
+                <a:solidFill>
+                  <a:prstClr val="white"/>
+                </a:solidFill>
+                <a:latin typeface="微軟正黑體" panose="020B0604030504040204" pitchFamily="34" charset="-120"/>
+                <a:ea typeface="微軟正黑體" panose="020B0604030504040204" pitchFamily="34" charset="-120"/>
+              </a:rPr>
+              <a:t>就是一個模型的雲端平台</a:t>
+            </a:r>
+            <a:r>
+              <a:rPr lang="en-US" altLang="zh-TW" sz="3200" dirty="0">
+                <a:solidFill>
+                  <a:prstClr val="white"/>
+                </a:solidFill>
+                <a:latin typeface="微軟正黑體" panose="020B0604030504040204" pitchFamily="34" charset="-120"/>
+                <a:ea typeface="微軟正黑體" panose="020B0604030504040204" pitchFamily="34" charset="-120"/>
+              </a:rPr>
+              <a:t>(Hub)</a:t>
+            </a:r>
+            <a:r>
+              <a:rPr lang="zh-TW" altLang="en-US" sz="3200" dirty="0">
+                <a:solidFill>
+                  <a:prstClr val="white"/>
+                </a:solidFill>
+                <a:latin typeface="微軟正黑體" panose="020B0604030504040204" pitchFamily="34" charset="-120"/>
+                <a:ea typeface="微軟正黑體" panose="020B0604030504040204" pitchFamily="34" charset="-120"/>
+              </a:rPr>
+              <a:t>，搜集全球模型、資料集，並提</a:t>
+            </a:r>
+            <a:r>
+              <a:rPr lang="en-US" altLang="zh-TW" sz="3200" dirty="0">
+                <a:solidFill>
+                  <a:prstClr val="white"/>
+                </a:solidFill>
+                <a:latin typeface="微軟正黑體" panose="020B0604030504040204" pitchFamily="34" charset="-120"/>
+                <a:ea typeface="微軟正黑體" panose="020B0604030504040204" pitchFamily="34" charset="-120"/>
+              </a:rPr>
+              <a:t>API</a:t>
+            </a:r>
+            <a:r>
+              <a:rPr lang="zh-TW" altLang="en-US" sz="3200" dirty="0">
+                <a:solidFill>
+                  <a:prstClr val="white"/>
+                </a:solidFill>
+                <a:latin typeface="微軟正黑體" panose="020B0604030504040204" pitchFamily="34" charset="-120"/>
+                <a:ea typeface="微軟正黑體" panose="020B0604030504040204" pitchFamily="34" charset="-120"/>
+              </a:rPr>
+              <a:t>和函數庫來處理模型和資料集</a:t>
+            </a:r>
+            <a:endParaRPr lang="en-US" altLang="zh-TW" sz="3200" dirty="0">
+              <a:solidFill>
+                <a:prstClr val="white"/>
+              </a:solidFill>
+              <a:latin typeface="微軟正黑體" panose="020B0604030504040204" pitchFamily="34" charset="-120"/>
+              <a:ea typeface="微軟正黑體" panose="020B0604030504040204" pitchFamily="34" charset="-120"/>
+            </a:endParaRPr>
+          </a:p>
+          <a:p>
+            <a:pPr marL="514350" indent="-514350">
+              <a:buFont typeface="Arial" panose="020B0604020202020204" pitchFamily="34" charset="0"/>
+              <a:buChar char="•"/>
+            </a:pPr>
+            <a:r>
+              <a:rPr lang="zh-TW" altLang="en-US" sz="3200" dirty="0">
+                <a:solidFill>
+                  <a:prstClr val="white"/>
+                </a:solidFill>
+                <a:latin typeface="微軟正黑體" panose="020B0604030504040204" pitchFamily="34" charset="-120"/>
+                <a:ea typeface="微軟正黑體" panose="020B0604030504040204" pitchFamily="34" charset="-120"/>
+              </a:rPr>
+              <a:t>也有空間可以佈署自己的</a:t>
+            </a:r>
+            <a:r>
+              <a:rPr lang="en-US" altLang="zh-TW" sz="3200" dirty="0">
+                <a:solidFill>
+                  <a:prstClr val="white"/>
+                </a:solidFill>
+                <a:latin typeface="微軟正黑體" panose="020B0604030504040204" pitchFamily="34" charset="-120"/>
+                <a:ea typeface="微軟正黑體" panose="020B0604030504040204" pitchFamily="34" charset="-120"/>
+              </a:rPr>
+              <a:t>AI</a:t>
+            </a:r>
+            <a:r>
+              <a:rPr lang="zh-TW" altLang="en-US" sz="3200" dirty="0">
+                <a:solidFill>
+                  <a:prstClr val="white"/>
+                </a:solidFill>
+                <a:latin typeface="微軟正黑體" panose="020B0604030504040204" pitchFamily="34" charset="-120"/>
+                <a:ea typeface="微軟正黑體" panose="020B0604030504040204" pitchFamily="34" charset="-120"/>
+              </a:rPr>
+              <a:t>網路程式</a:t>
+            </a:r>
+            <a:endParaRPr lang="en-US" altLang="zh-TW" sz="3200" dirty="0">
+              <a:solidFill>
+                <a:prstClr val="white"/>
+              </a:solidFill>
+              <a:latin typeface="微軟正黑體" panose="020B0604030504040204" pitchFamily="34" charset="-120"/>
+              <a:ea typeface="微軟正黑體" panose="020B0604030504040204" pitchFamily="34" charset="-120"/>
+            </a:endParaRPr>
+          </a:p>
+        </p:txBody>
+      </p:sp>
+      <p:sp>
+        <p:nvSpPr>
+          <p:cNvPr id="4" name="文字版面配置區 2"/>
+          <p:cNvSpPr txBox="1">
+            <a:spLocks/>
+          </p:cNvSpPr>
+          <p:nvPr/>
+        </p:nvSpPr>
+        <p:spPr>
+          <a:xfrm>
+            <a:off x="990600" y="304800"/>
+            <a:ext cx="6705600" cy="990600"/>
+          </a:xfrm>
+          <a:prstGeom prst="rect">
+            <a:avLst/>
+          </a:prstGeom>
+        </p:spPr>
+        <p:txBody>
+          <a:bodyPr tIns="91440" bIns="91440" anchor="b" anchorCtr="0">
+            <a:noAutofit/>
+          </a:bodyPr>
+          <a:lstStyle/>
+          <a:p>
+            <a:pPr algn="just">
+              <a:spcBef>
+                <a:spcPct val="20000"/>
+              </a:spcBef>
+              <a:defRPr/>
+            </a:pPr>
+            <a:r>
+              <a:rPr lang="en-US" altLang="zh-TW" sz="4800" b="1" kern="0" dirty="0" err="1">
+                <a:solidFill>
+                  <a:srgbClr val="00B0F0"/>
+                </a:solidFill>
+                <a:effectLst>
+                  <a:outerShdw blurRad="38100" dist="38100" dir="2700000" algn="tl">
+                    <a:srgbClr val="000000">
+                      <a:alpha val="43137"/>
+                    </a:srgbClr>
+                  </a:outerShdw>
+                </a:effectLst>
+                <a:latin typeface="微軟正黑體" panose="020B0604030504040204" pitchFamily="34" charset="-120"/>
+                <a:ea typeface="微軟正黑體" panose="020B0604030504040204" pitchFamily="34" charset="-120"/>
+              </a:rPr>
+              <a:t>Huggingface</a:t>
+            </a:r>
+            <a:r>
+              <a:rPr lang="zh-TW" altLang="en-US" sz="4800" b="1" kern="0" dirty="0">
+                <a:solidFill>
+                  <a:srgbClr val="00B0F0"/>
+                </a:solidFill>
+                <a:effectLst>
+                  <a:outerShdw blurRad="38100" dist="38100" dir="2700000" algn="tl">
+                    <a:srgbClr val="000000">
+                      <a:alpha val="43137"/>
+                    </a:srgbClr>
+                  </a:outerShdw>
+                </a:effectLst>
+                <a:latin typeface="微軟正黑體" panose="020B0604030504040204" pitchFamily="34" charset="-120"/>
+                <a:ea typeface="微軟正黑體" panose="020B0604030504040204" pitchFamily="34" charset="-120"/>
+              </a:rPr>
+              <a:t>公司介紹</a:t>
+            </a:r>
+          </a:p>
+        </p:txBody>
+      </p:sp>
+    </p:spTree>
+    <p:extLst>
+      <p:ext uri="{BB962C8B-B14F-4D97-AF65-F5344CB8AC3E}">
+        <p14:creationId xmlns:p14="http://schemas.microsoft.com/office/powerpoint/2010/main" val="163242811"/>
+      </p:ext>
+    </p:extLst>
+  </p:cSld>
+  <p:clrMapOvr>
+    <a:masterClrMapping/>
+  </p:clrMapOvr>
+  <p:transition>
+    <p:fade/>
+  </p:transition>
+</p:sld>
+</file>
+
+<file path=ppt/slides/slide14.xml><?xml version="1.0" encoding="utf-8"?>
+<p:sld xmlns:a="http://schemas.openxmlformats.org/drawingml/2006/main" xmlns:r="http://schemas.openxmlformats.org/officeDocument/2006/relationships" xmlns:p="http://schemas.openxmlformats.org/presentationml/2006/main">
+  <p:cSld>
+    <p:spTree>
+      <p:nvGrpSpPr>
+        <p:cNvPr id="1" name=""/>
+        <p:cNvGrpSpPr/>
+        <p:nvPr/>
+      </p:nvGrpSpPr>
+      <p:grpSpPr>
+        <a:xfrm>
+          <a:off x="0" y="0"/>
+          <a:ext cx="0" cy="0"/>
+          <a:chOff x="0" y="0"/>
+          <a:chExt cx="0" cy="0"/>
+        </a:xfrm>
+      </p:grpSpPr>
+      <p:sp>
+        <p:nvSpPr>
+          <p:cNvPr id="5" name="文字方塊 4"/>
+          <p:cNvSpPr txBox="1"/>
+          <p:nvPr/>
+        </p:nvSpPr>
+        <p:spPr>
+          <a:xfrm>
+            <a:off x="685800" y="1828800"/>
+            <a:ext cx="8077200" cy="4031873"/>
+          </a:xfrm>
+          <a:prstGeom prst="rect">
+            <a:avLst/>
+          </a:prstGeom>
+          <a:noFill/>
+        </p:spPr>
+        <p:txBody>
+          <a:bodyPr wrap="square" rtlCol="0">
+            <a:spAutoFit/>
+          </a:bodyPr>
+          <a:lstStyle/>
+          <a:p>
+            <a:pPr marL="514350" indent="-514350">
+              <a:buFont typeface="Arial" panose="020B0604020202020204" pitchFamily="34" charset="0"/>
+              <a:buChar char="•"/>
+            </a:pPr>
+            <a:r>
+              <a:rPr lang="en-US" altLang="zh-TW" sz="3200" dirty="0" err="1">
+                <a:solidFill>
+                  <a:prstClr val="white"/>
+                </a:solidFill>
+                <a:latin typeface="微軟正黑體" panose="020B0604030504040204" pitchFamily="34" charset="-120"/>
+                <a:ea typeface="微軟正黑體" panose="020B0604030504040204" pitchFamily="34" charset="-120"/>
+              </a:rPr>
+              <a:t>Huggingface</a:t>
+            </a:r>
+            <a:r>
+              <a:rPr lang="zh-TW" altLang="en-US" sz="3200" dirty="0">
+                <a:solidFill>
+                  <a:prstClr val="white"/>
+                </a:solidFill>
+                <a:latin typeface="微軟正黑體" panose="020B0604030504040204" pitchFamily="34" charset="-120"/>
+                <a:ea typeface="微軟正黑體" panose="020B0604030504040204" pitchFamily="34" charset="-120"/>
+              </a:rPr>
+              <a:t>最重要的就是</a:t>
+            </a:r>
+            <a:r>
+              <a:rPr lang="en-US" altLang="zh-TW" sz="3200" dirty="0">
+                <a:solidFill>
+                  <a:prstClr val="white"/>
+                </a:solidFill>
+                <a:latin typeface="微軟正黑體" panose="020B0604030504040204" pitchFamily="34" charset="-120"/>
+                <a:ea typeface="微軟正黑體" panose="020B0604030504040204" pitchFamily="34" charset="-120"/>
+              </a:rPr>
+              <a:t>transformers</a:t>
+            </a:r>
+            <a:r>
+              <a:rPr lang="zh-TW" altLang="en-US" sz="3200" dirty="0">
+                <a:solidFill>
+                  <a:prstClr val="white"/>
+                </a:solidFill>
+                <a:latin typeface="微軟正黑體" panose="020B0604030504040204" pitchFamily="34" charset="-120"/>
+                <a:ea typeface="微軟正黑體" panose="020B0604030504040204" pitchFamily="34" charset="-120"/>
+              </a:rPr>
+              <a:t>函式庫，提供</a:t>
+            </a:r>
+            <a:r>
+              <a:rPr lang="en-US" altLang="zh-TW" sz="3200" dirty="0">
+                <a:solidFill>
+                  <a:prstClr val="white"/>
+                </a:solidFill>
+                <a:latin typeface="微軟正黑體" panose="020B0604030504040204" pitchFamily="34" charset="-120"/>
+                <a:ea typeface="微軟正黑體" panose="020B0604030504040204" pitchFamily="34" charset="-120"/>
+              </a:rPr>
+              <a:t>API</a:t>
+            </a:r>
+            <a:r>
+              <a:rPr lang="zh-TW" altLang="en-US" sz="3200" dirty="0">
+                <a:solidFill>
+                  <a:prstClr val="white"/>
+                </a:solidFill>
+                <a:latin typeface="微軟正黑體" panose="020B0604030504040204" pitchFamily="34" charset="-120"/>
+                <a:ea typeface="微軟正黑體" panose="020B0604030504040204" pitchFamily="34" charset="-120"/>
+              </a:rPr>
+              <a:t>可加載、訓練和儲存開源模型</a:t>
+            </a:r>
+            <a:endParaRPr lang="en-US" altLang="zh-TW" sz="3200" dirty="0">
+              <a:solidFill>
+                <a:prstClr val="white"/>
+              </a:solidFill>
+              <a:latin typeface="微軟正黑體" panose="020B0604030504040204" pitchFamily="34" charset="-120"/>
+              <a:ea typeface="微軟正黑體" panose="020B0604030504040204" pitchFamily="34" charset="-120"/>
+            </a:endParaRPr>
+          </a:p>
+          <a:p>
+            <a:pPr marL="514350" indent="-514350">
+              <a:buFont typeface="Arial" panose="020B0604020202020204" pitchFamily="34" charset="0"/>
+              <a:buChar char="•"/>
+            </a:pPr>
+            <a:r>
+              <a:rPr lang="zh-TW" altLang="en-US" sz="3200" dirty="0">
+                <a:solidFill>
+                  <a:prstClr val="white"/>
+                </a:solidFill>
+                <a:latin typeface="微軟正黑體" panose="020B0604030504040204" pitchFamily="34" charset="-120"/>
+                <a:ea typeface="微軟正黑體" panose="020B0604030504040204" pitchFamily="34" charset="-120"/>
+              </a:rPr>
+              <a:t>所有型號的核心都是簡單的 </a:t>
+            </a:r>
+            <a:r>
+              <a:rPr lang="en-US" altLang="zh-TW" sz="3200" dirty="0" err="1">
+                <a:solidFill>
+                  <a:prstClr val="white"/>
+                </a:solidFill>
+                <a:latin typeface="微軟正黑體" panose="020B0604030504040204" pitchFamily="34" charset="-120"/>
+                <a:ea typeface="微軟正黑體" panose="020B0604030504040204" pitchFamily="34" charset="-120"/>
+              </a:rPr>
+              <a:t>PyTorch</a:t>
+            </a:r>
+            <a:r>
+              <a:rPr lang="en-US" altLang="zh-TW" sz="3200" dirty="0">
+                <a:solidFill>
+                  <a:prstClr val="white"/>
+                </a:solidFill>
+                <a:latin typeface="微軟正黑體" panose="020B0604030504040204" pitchFamily="34" charset="-120"/>
+                <a:ea typeface="微軟正黑體" panose="020B0604030504040204" pitchFamily="34" charset="-120"/>
+              </a:rPr>
+              <a:t> </a:t>
+            </a:r>
+            <a:r>
+              <a:rPr lang="en-US" altLang="zh-TW" sz="3200" dirty="0" err="1">
+                <a:solidFill>
+                  <a:prstClr val="white"/>
+                </a:solidFill>
+                <a:latin typeface="微軟正黑體" panose="020B0604030504040204" pitchFamily="34" charset="-120"/>
+                <a:ea typeface="微軟正黑體" panose="020B0604030504040204" pitchFamily="34" charset="-120"/>
+              </a:rPr>
+              <a:t>nn.Module</a:t>
+            </a:r>
+            <a:r>
+              <a:rPr lang="zh-TW" altLang="en-US" sz="3200" dirty="0">
+                <a:solidFill>
+                  <a:prstClr val="white"/>
+                </a:solidFill>
+                <a:latin typeface="微軟正黑體" panose="020B0604030504040204" pitchFamily="34" charset="-120"/>
+                <a:ea typeface="微軟正黑體" panose="020B0604030504040204" pitchFamily="34" charset="-120"/>
+              </a:rPr>
+              <a:t>，相容性高</a:t>
+            </a:r>
+            <a:endParaRPr lang="en-US" altLang="zh-TW" sz="3200" dirty="0">
+              <a:solidFill>
+                <a:prstClr val="white"/>
+              </a:solidFill>
+              <a:latin typeface="微軟正黑體" panose="020B0604030504040204" pitchFamily="34" charset="-120"/>
+              <a:ea typeface="微軟正黑體" panose="020B0604030504040204" pitchFamily="34" charset="-120"/>
+            </a:endParaRPr>
+          </a:p>
+          <a:p>
+            <a:pPr marL="514350" indent="-514350">
+              <a:buFont typeface="Arial" panose="020B0604020202020204" pitchFamily="34" charset="0"/>
+              <a:buChar char="•"/>
+            </a:pPr>
+            <a:r>
+              <a:rPr lang="zh-TW" altLang="en-US" sz="3200" dirty="0">
+                <a:solidFill>
+                  <a:prstClr val="white"/>
+                </a:solidFill>
+                <a:latin typeface="微軟正黑體" panose="020B0604030504040204" pitchFamily="34" charset="-120"/>
+                <a:ea typeface="微軟正黑體" panose="020B0604030504040204" pitchFamily="34" charset="-120"/>
+              </a:rPr>
+              <a:t>程式碼量為使用單純的</a:t>
+            </a:r>
+            <a:r>
+              <a:rPr lang="en-US" altLang="zh-TW" sz="3200" dirty="0" err="1">
+                <a:solidFill>
+                  <a:prstClr val="white"/>
+                </a:solidFill>
+                <a:latin typeface="微軟正黑體" panose="020B0604030504040204" pitchFamily="34" charset="-120"/>
+                <a:ea typeface="微軟正黑體" panose="020B0604030504040204" pitchFamily="34" charset="-120"/>
+              </a:rPr>
+              <a:t>PyTorch</a:t>
+            </a:r>
+            <a:r>
+              <a:rPr lang="zh-TW" altLang="en-US" sz="3200" dirty="0">
+                <a:solidFill>
+                  <a:prstClr val="white"/>
+                </a:solidFill>
+                <a:latin typeface="微軟正黑體" panose="020B0604030504040204" pitchFamily="34" charset="-120"/>
+                <a:ea typeface="微軟正黑體" panose="020B0604030504040204" pitchFamily="34" charset="-120"/>
+              </a:rPr>
+              <a:t>的</a:t>
+            </a:r>
+            <a:r>
+              <a:rPr lang="en-US" altLang="zh-TW" sz="3200" dirty="0">
+                <a:solidFill>
+                  <a:prstClr val="white"/>
+                </a:solidFill>
+                <a:latin typeface="微軟正黑體" panose="020B0604030504040204" pitchFamily="34" charset="-120"/>
+                <a:ea typeface="微軟正黑體" panose="020B0604030504040204" pitchFamily="34" charset="-120"/>
+              </a:rPr>
+              <a:t>1/10</a:t>
+            </a:r>
+          </a:p>
+          <a:p>
+            <a:pPr marL="514350" indent="-514350">
+              <a:buFont typeface="Arial" panose="020B0604020202020204" pitchFamily="34" charset="0"/>
+              <a:buChar char="•"/>
+            </a:pPr>
+            <a:r>
+              <a:rPr lang="zh-TW" altLang="en-US" sz="3200" dirty="0">
+                <a:solidFill>
+                  <a:prstClr val="white"/>
+                </a:solidFill>
+                <a:latin typeface="微軟正黑體" panose="020B0604030504040204" pitchFamily="34" charset="-120"/>
+                <a:ea typeface="微軟正黑體" panose="020B0604030504040204" pitchFamily="34" charset="-120"/>
+              </a:rPr>
+              <a:t>最新的技術在發佈後也會馬上加入</a:t>
+            </a:r>
+            <a:endParaRPr lang="en-US" altLang="zh-TW" sz="3200" dirty="0">
+              <a:solidFill>
+                <a:prstClr val="white"/>
+              </a:solidFill>
+              <a:latin typeface="微軟正黑體" panose="020B0604030504040204" pitchFamily="34" charset="-120"/>
+              <a:ea typeface="微軟正黑體" panose="020B0604030504040204" pitchFamily="34" charset="-120"/>
+            </a:endParaRPr>
+          </a:p>
+          <a:p>
+            <a:pPr marL="514350" indent="-514350">
+              <a:buFont typeface="Arial" panose="020B0604020202020204" pitchFamily="34" charset="0"/>
+              <a:buChar char="•"/>
+            </a:pPr>
+            <a:endParaRPr lang="en-US" altLang="zh-TW" sz="3200" dirty="0">
+              <a:solidFill>
+                <a:prstClr val="white"/>
+              </a:solidFill>
+              <a:latin typeface="微軟正黑體" panose="020B0604030504040204" pitchFamily="34" charset="-120"/>
+              <a:ea typeface="微軟正黑體" panose="020B0604030504040204" pitchFamily="34" charset="-120"/>
+            </a:endParaRPr>
+          </a:p>
+        </p:txBody>
+      </p:sp>
+      <p:sp>
+        <p:nvSpPr>
+          <p:cNvPr id="4" name="文字版面配置區 2"/>
+          <p:cNvSpPr txBox="1">
+            <a:spLocks/>
+          </p:cNvSpPr>
+          <p:nvPr/>
+        </p:nvSpPr>
+        <p:spPr>
+          <a:xfrm>
+            <a:off x="990600" y="304800"/>
+            <a:ext cx="7696200" cy="990600"/>
+          </a:xfrm>
+          <a:prstGeom prst="rect">
+            <a:avLst/>
+          </a:prstGeom>
+        </p:spPr>
+        <p:txBody>
+          <a:bodyPr tIns="91440" bIns="91440" anchor="b" anchorCtr="0">
+            <a:noAutofit/>
+          </a:bodyPr>
+          <a:lstStyle/>
+          <a:p>
+            <a:pPr algn="just">
+              <a:spcBef>
+                <a:spcPct val="20000"/>
+              </a:spcBef>
+              <a:defRPr/>
+            </a:pPr>
+            <a:r>
+              <a:rPr lang="en-US" altLang="zh-TW" sz="4800" b="1" kern="0" dirty="0">
+                <a:solidFill>
+                  <a:srgbClr val="00B0F0"/>
+                </a:solidFill>
+                <a:effectLst>
+                  <a:outerShdw blurRad="38100" dist="38100" dir="2700000" algn="tl">
+                    <a:srgbClr val="000000">
+                      <a:alpha val="43137"/>
+                    </a:srgbClr>
+                  </a:outerShdw>
+                </a:effectLst>
+                <a:latin typeface="微軟正黑體" panose="020B0604030504040204" pitchFamily="34" charset="-120"/>
+                <a:ea typeface="微軟正黑體" panose="020B0604030504040204" pitchFamily="34" charset="-120"/>
+              </a:rPr>
+              <a:t>transformers</a:t>
+            </a:r>
+            <a:r>
+              <a:rPr lang="zh-TW" altLang="en-US" sz="4800" b="1" kern="0" dirty="0">
+                <a:solidFill>
+                  <a:srgbClr val="00B0F0"/>
+                </a:solidFill>
+                <a:effectLst>
+                  <a:outerShdw blurRad="38100" dist="38100" dir="2700000" algn="tl">
+                    <a:srgbClr val="000000">
+                      <a:alpha val="43137"/>
+                    </a:srgbClr>
+                  </a:outerShdw>
+                </a:effectLst>
+                <a:latin typeface="微軟正黑體" panose="020B0604030504040204" pitchFamily="34" charset="-120"/>
+                <a:ea typeface="微軟正黑體" panose="020B0604030504040204" pitchFamily="34" charset="-120"/>
+              </a:rPr>
+              <a:t>函數庫介紹</a:t>
+            </a:r>
+          </a:p>
+        </p:txBody>
+      </p:sp>
+    </p:spTree>
+    <p:extLst>
+      <p:ext uri="{BB962C8B-B14F-4D97-AF65-F5344CB8AC3E}">
+        <p14:creationId xmlns:p14="http://schemas.microsoft.com/office/powerpoint/2010/main" val="2884476007"/>
+      </p:ext>
+    </p:extLst>
+  </p:cSld>
+  <p:clrMapOvr>
+    <a:masterClrMapping/>
+  </p:clrMapOvr>
+  <p:transition>
+    <p:fade/>
+  </p:transition>
+</p:sld>
+</file>
+
+<file path=ppt/slides/slide15.xml><?xml version="1.0" encoding="utf-8"?>
+<p:sld xmlns:a="http://schemas.openxmlformats.org/drawingml/2006/main" xmlns:r="http://schemas.openxmlformats.org/officeDocument/2006/relationships" xmlns:p="http://schemas.openxmlformats.org/presentationml/2006/main">
+  <p:cSld>
+    <p:spTree>
+      <p:nvGrpSpPr>
+        <p:cNvPr id="1" name="">
+          <a:extLst>
+            <a:ext uri="{FF2B5EF4-FFF2-40B4-BE49-F238E27FC236}">
+              <a16:creationId xmlns:a16="http://schemas.microsoft.com/office/drawing/2014/main" id="{5C47105C-6E22-D4E8-151A-180090A73D0C}"/>
+            </a:ext>
+          </a:extLst>
+        </p:cNvPr>
+        <p:cNvGrpSpPr/>
+        <p:nvPr/>
+      </p:nvGrpSpPr>
+      <p:grpSpPr>
+        <a:xfrm>
+          <a:off x="0" y="0"/>
+          <a:ext cx="0" cy="0"/>
+          <a:chOff x="0" y="0"/>
+          <a:chExt cx="0" cy="0"/>
+        </a:xfrm>
+      </p:grpSpPr>
+      <p:sp>
+        <p:nvSpPr>
+          <p:cNvPr id="5" name="文字方塊 4">
+            <a:extLst>
+              <a:ext uri="{FF2B5EF4-FFF2-40B4-BE49-F238E27FC236}">
+                <a16:creationId xmlns:a16="http://schemas.microsoft.com/office/drawing/2014/main" id="{0B695EB9-3088-AFA3-19CD-9F29D4D2EFB7}"/>
+              </a:ext>
+            </a:extLst>
+          </p:cNvPr>
+          <p:cNvSpPr txBox="1"/>
+          <p:nvPr/>
+        </p:nvSpPr>
+        <p:spPr>
+          <a:xfrm>
+            <a:off x="685800" y="1828800"/>
+            <a:ext cx="8077200" cy="4524315"/>
+          </a:xfrm>
+          <a:prstGeom prst="rect">
+            <a:avLst/>
+          </a:prstGeom>
+          <a:noFill/>
+        </p:spPr>
+        <p:txBody>
+          <a:bodyPr wrap="square" rtlCol="0">
+            <a:spAutoFit/>
+          </a:bodyPr>
+          <a:lstStyle/>
+          <a:p>
+            <a:pPr marL="514350" indent="-514350">
+              <a:buFont typeface="Arial" panose="020B0604020202020204" pitchFamily="34" charset="0"/>
+              <a:buChar char="•"/>
+            </a:pPr>
+            <a:r>
+              <a:rPr lang="en-US" altLang="zh-TW" sz="3200" dirty="0" err="1">
+                <a:solidFill>
+                  <a:prstClr val="white"/>
+                </a:solidFill>
+                <a:latin typeface="微軟正黑體" panose="020B0604030504040204" pitchFamily="34" charset="-120"/>
+                <a:ea typeface="微軟正黑體" panose="020B0604030504040204" pitchFamily="34" charset="-120"/>
+              </a:rPr>
+              <a:t>Huggingface</a:t>
+            </a:r>
+            <a:r>
+              <a:rPr lang="zh-TW" altLang="en-US" sz="3200" dirty="0">
+                <a:solidFill>
+                  <a:prstClr val="white"/>
+                </a:solidFill>
+                <a:latin typeface="微軟正黑體" panose="020B0604030504040204" pitchFamily="34" charset="-120"/>
+                <a:ea typeface="微軟正黑體" panose="020B0604030504040204" pitchFamily="34" charset="-120"/>
+              </a:rPr>
+              <a:t>次重要的就是</a:t>
+            </a:r>
+            <a:r>
+              <a:rPr lang="en-US" altLang="zh-TW" sz="3200" dirty="0">
+                <a:solidFill>
+                  <a:prstClr val="white"/>
+                </a:solidFill>
+                <a:latin typeface="微軟正黑體" panose="020B0604030504040204" pitchFamily="34" charset="-120"/>
+                <a:ea typeface="微軟正黑體" panose="020B0604030504040204" pitchFamily="34" charset="-120"/>
+              </a:rPr>
+              <a:t>datasets</a:t>
+            </a:r>
+            <a:r>
+              <a:rPr lang="zh-TW" altLang="en-US" sz="3200" dirty="0">
+                <a:solidFill>
+                  <a:prstClr val="white"/>
+                </a:solidFill>
+                <a:latin typeface="微軟正黑體" panose="020B0604030504040204" pitchFamily="34" charset="-120"/>
+                <a:ea typeface="微軟正黑體" panose="020B0604030504040204" pitchFamily="34" charset="-120"/>
+              </a:rPr>
+              <a:t>函式庫，提供</a:t>
+            </a:r>
+            <a:r>
+              <a:rPr lang="en-US" altLang="zh-TW" sz="3200" dirty="0">
+                <a:solidFill>
+                  <a:prstClr val="white"/>
+                </a:solidFill>
+                <a:latin typeface="微軟正黑體" panose="020B0604030504040204" pitchFamily="34" charset="-120"/>
+                <a:ea typeface="微軟正黑體" panose="020B0604030504040204" pitchFamily="34" charset="-120"/>
+              </a:rPr>
+              <a:t>API</a:t>
+            </a:r>
+            <a:r>
+              <a:rPr lang="zh-TW" altLang="en-US" sz="3200" dirty="0">
+                <a:solidFill>
+                  <a:prstClr val="white"/>
+                </a:solidFill>
+                <a:latin typeface="微軟正黑體" panose="020B0604030504040204" pitchFamily="34" charset="-120"/>
+                <a:ea typeface="微軟正黑體" panose="020B0604030504040204" pitchFamily="34" charset="-120"/>
+              </a:rPr>
+              <a:t>可加載、建立、處理和儲存開源資料集</a:t>
+            </a:r>
+            <a:endParaRPr lang="en-US" altLang="zh-TW" sz="3200" dirty="0">
+              <a:solidFill>
+                <a:prstClr val="white"/>
+              </a:solidFill>
+              <a:latin typeface="微軟正黑體" panose="020B0604030504040204" pitchFamily="34" charset="-120"/>
+              <a:ea typeface="微軟正黑體" panose="020B0604030504040204" pitchFamily="34" charset="-120"/>
+            </a:endParaRPr>
+          </a:p>
+          <a:p>
+            <a:pPr marL="514350" indent="-514350">
+              <a:buFont typeface="Arial" panose="020B0604020202020204" pitchFamily="34" charset="0"/>
+              <a:buChar char="•"/>
+            </a:pPr>
+            <a:r>
+              <a:rPr lang="zh-TW" altLang="en-US" sz="3200" dirty="0">
+                <a:solidFill>
+                  <a:prstClr val="white"/>
+                </a:solidFill>
+                <a:latin typeface="微軟正黑體" panose="020B0604030504040204" pitchFamily="34" charset="-120"/>
+                <a:ea typeface="微軟正黑體" panose="020B0604030504040204" pitchFamily="34" charset="-120"/>
+              </a:rPr>
+              <a:t>使用標準的</a:t>
+            </a:r>
+            <a:r>
+              <a:rPr lang="en-US" altLang="zh-TW" sz="3200" dirty="0">
+                <a:solidFill>
+                  <a:prstClr val="white"/>
+                </a:solidFill>
+                <a:latin typeface="微軟正黑體" panose="020B0604030504040204" pitchFamily="34" charset="-120"/>
+                <a:ea typeface="微軟正黑體" panose="020B0604030504040204" pitchFamily="34" charset="-120"/>
+              </a:rPr>
+              <a:t>Python Arrow</a:t>
+            </a:r>
+            <a:r>
+              <a:rPr lang="zh-TW" altLang="en-US" sz="3200" dirty="0">
+                <a:solidFill>
+                  <a:prstClr val="white"/>
+                </a:solidFill>
+                <a:latin typeface="微軟正黑體" panose="020B0604030504040204" pitchFamily="34" charset="-120"/>
+                <a:ea typeface="微軟正黑體" panose="020B0604030504040204" pitchFamily="34" charset="-120"/>
+              </a:rPr>
+              <a:t>格式，也可以直接使用</a:t>
+            </a:r>
+            <a:r>
+              <a:rPr lang="en-US" altLang="zh-TW" sz="3200" dirty="0">
+                <a:solidFill>
+                  <a:prstClr val="white"/>
+                </a:solidFill>
+                <a:latin typeface="微軟正黑體" panose="020B0604030504040204" pitchFamily="34" charset="-120"/>
+                <a:ea typeface="微軟正黑體" panose="020B0604030504040204" pitchFamily="34" charset="-120"/>
+              </a:rPr>
+              <a:t>csv</a:t>
+            </a:r>
+            <a:r>
+              <a:rPr lang="zh-TW" altLang="en-US" sz="3200" dirty="0">
+                <a:solidFill>
+                  <a:prstClr val="white"/>
+                </a:solidFill>
+                <a:latin typeface="微軟正黑體" panose="020B0604030504040204" pitchFamily="34" charset="-120"/>
+                <a:ea typeface="微軟正黑體" panose="020B0604030504040204" pitchFamily="34" charset="-120"/>
+              </a:rPr>
+              <a:t>、</a:t>
+            </a:r>
+            <a:r>
+              <a:rPr lang="en-US" altLang="zh-TW" sz="3200" dirty="0" err="1">
+                <a:solidFill>
+                  <a:prstClr val="white"/>
+                </a:solidFill>
+                <a:latin typeface="微軟正黑體" panose="020B0604030504040204" pitchFamily="34" charset="-120"/>
+                <a:ea typeface="微軟正黑體" panose="020B0604030504040204" pitchFamily="34" charset="-120"/>
+              </a:rPr>
+              <a:t>json</a:t>
+            </a:r>
+            <a:r>
+              <a:rPr lang="zh-TW" altLang="en-US" sz="3200" dirty="0">
+                <a:solidFill>
+                  <a:prstClr val="white"/>
+                </a:solidFill>
+                <a:latin typeface="微軟正黑體" panose="020B0604030504040204" pitchFamily="34" charset="-120"/>
+                <a:ea typeface="微軟正黑體" panose="020B0604030504040204" pitchFamily="34" charset="-120"/>
+              </a:rPr>
+              <a:t>、</a:t>
+            </a:r>
+            <a:r>
+              <a:rPr lang="en-US" altLang="zh-TW" sz="3200" dirty="0">
+                <a:solidFill>
+                  <a:prstClr val="white"/>
+                </a:solidFill>
+                <a:latin typeface="微軟正黑體" panose="020B0604030504040204" pitchFamily="34" charset="-120"/>
+                <a:ea typeface="微軟正黑體" panose="020B0604030504040204" pitchFamily="34" charset="-120"/>
+              </a:rPr>
+              <a:t>txt</a:t>
+            </a:r>
+          </a:p>
+          <a:p>
+            <a:pPr marL="514350" indent="-514350">
+              <a:buFont typeface="Arial" panose="020B0604020202020204" pitchFamily="34" charset="0"/>
+              <a:buChar char="•"/>
+            </a:pPr>
+            <a:r>
+              <a:rPr lang="zh-TW" altLang="en-US" sz="3200" dirty="0">
+                <a:solidFill>
+                  <a:prstClr val="white"/>
+                </a:solidFill>
+                <a:latin typeface="微軟正黑體" panose="020B0604030504040204" pitchFamily="34" charset="-120"/>
+                <a:ea typeface="微軟正黑體" panose="020B0604030504040204" pitchFamily="34" charset="-120"/>
+              </a:rPr>
+              <a:t>可從</a:t>
+            </a:r>
+            <a:r>
+              <a:rPr lang="en-US" altLang="zh-TW" sz="3200" dirty="0">
+                <a:solidFill>
+                  <a:prstClr val="white"/>
+                </a:solidFill>
+                <a:latin typeface="微軟正黑體" panose="020B0604030504040204" pitchFamily="34" charset="-120"/>
+                <a:ea typeface="微軟正黑體" panose="020B0604030504040204" pitchFamily="34" charset="-120"/>
+              </a:rPr>
+              <a:t>Hub</a:t>
+            </a:r>
+            <a:r>
+              <a:rPr lang="zh-TW" altLang="en-US" sz="3200" dirty="0">
+                <a:solidFill>
+                  <a:prstClr val="white"/>
+                </a:solidFill>
+                <a:latin typeface="微軟正黑體" panose="020B0604030504040204" pitchFamily="34" charset="-120"/>
+                <a:ea typeface="微軟正黑體" panose="020B0604030504040204" pitchFamily="34" charset="-120"/>
+              </a:rPr>
+              <a:t>下載最新的資料集，也可以用來處理自己的資料集</a:t>
+            </a:r>
+            <a:endParaRPr lang="en-US" altLang="zh-TW" sz="3200" dirty="0">
+              <a:solidFill>
+                <a:prstClr val="white"/>
+              </a:solidFill>
+              <a:latin typeface="微軟正黑體" panose="020B0604030504040204" pitchFamily="34" charset="-120"/>
+              <a:ea typeface="微軟正黑體" panose="020B0604030504040204" pitchFamily="34" charset="-120"/>
+            </a:endParaRPr>
+          </a:p>
+          <a:p>
+            <a:pPr marL="514350" indent="-514350">
+              <a:buFont typeface="Arial" panose="020B0604020202020204" pitchFamily="34" charset="0"/>
+              <a:buChar char="•"/>
+            </a:pPr>
+            <a:endParaRPr lang="en-US" altLang="zh-TW" sz="3200" dirty="0">
+              <a:solidFill>
+                <a:prstClr val="white"/>
+              </a:solidFill>
+              <a:latin typeface="微軟正黑體" panose="020B0604030504040204" pitchFamily="34" charset="-120"/>
+              <a:ea typeface="微軟正黑體" panose="020B0604030504040204" pitchFamily="34" charset="-120"/>
+            </a:endParaRPr>
+          </a:p>
+          <a:p>
+            <a:pPr marL="514350" indent="-514350">
+              <a:buFont typeface="Arial" panose="020B0604020202020204" pitchFamily="34" charset="0"/>
+              <a:buChar char="•"/>
+            </a:pPr>
+            <a:endParaRPr lang="en-US" altLang="zh-TW" sz="3200" dirty="0">
+              <a:solidFill>
+                <a:prstClr val="white"/>
+              </a:solidFill>
+              <a:latin typeface="微軟正黑體" panose="020B0604030504040204" pitchFamily="34" charset="-120"/>
+              <a:ea typeface="微軟正黑體" panose="020B0604030504040204" pitchFamily="34" charset="-120"/>
+            </a:endParaRPr>
+          </a:p>
+        </p:txBody>
+      </p:sp>
+      <p:sp>
+        <p:nvSpPr>
+          <p:cNvPr id="4" name="文字版面配置區 2">
+            <a:extLst>
+              <a:ext uri="{FF2B5EF4-FFF2-40B4-BE49-F238E27FC236}">
+                <a16:creationId xmlns:a16="http://schemas.microsoft.com/office/drawing/2014/main" id="{F59EFA1F-3421-E8B3-0FA1-9027EA950D16}"/>
+              </a:ext>
+            </a:extLst>
+          </p:cNvPr>
+          <p:cNvSpPr txBox="1">
+            <a:spLocks/>
+          </p:cNvSpPr>
+          <p:nvPr/>
+        </p:nvSpPr>
+        <p:spPr>
+          <a:xfrm>
+            <a:off x="1793212" y="294752"/>
+            <a:ext cx="5862376" cy="990600"/>
+          </a:xfrm>
+          <a:prstGeom prst="rect">
+            <a:avLst/>
+          </a:prstGeom>
+        </p:spPr>
+        <p:txBody>
+          <a:bodyPr tIns="91440" bIns="91440" anchor="b" anchorCtr="0">
+            <a:noAutofit/>
+          </a:bodyPr>
+          <a:lstStyle/>
+          <a:p>
+            <a:pPr algn="just">
+              <a:spcBef>
+                <a:spcPct val="20000"/>
+              </a:spcBef>
+              <a:defRPr/>
+            </a:pPr>
+            <a:r>
+              <a:rPr lang="en-US" altLang="zh-TW" sz="4800" b="1" kern="0" dirty="0">
+                <a:solidFill>
+                  <a:srgbClr val="00B0F0"/>
+                </a:solidFill>
+                <a:effectLst>
+                  <a:outerShdw blurRad="38100" dist="38100" dir="2700000" algn="tl">
+                    <a:srgbClr val="000000">
+                      <a:alpha val="43137"/>
+                    </a:srgbClr>
+                  </a:outerShdw>
+                </a:effectLst>
+                <a:latin typeface="微軟正黑體" panose="020B0604030504040204" pitchFamily="34" charset="-120"/>
+                <a:ea typeface="微軟正黑體" panose="020B0604030504040204" pitchFamily="34" charset="-120"/>
+              </a:rPr>
+              <a:t>datasets</a:t>
+            </a:r>
+            <a:r>
+              <a:rPr lang="zh-TW" altLang="en-US" sz="4800" b="1" kern="0" dirty="0">
+                <a:solidFill>
+                  <a:srgbClr val="00B0F0"/>
+                </a:solidFill>
+                <a:effectLst>
+                  <a:outerShdw blurRad="38100" dist="38100" dir="2700000" algn="tl">
+                    <a:srgbClr val="000000">
+                      <a:alpha val="43137"/>
+                    </a:srgbClr>
+                  </a:outerShdw>
+                </a:effectLst>
+                <a:latin typeface="微軟正黑體" panose="020B0604030504040204" pitchFamily="34" charset="-120"/>
+                <a:ea typeface="微軟正黑體" panose="020B0604030504040204" pitchFamily="34" charset="-120"/>
+              </a:rPr>
+              <a:t>函數庫介紹</a:t>
+            </a:r>
+          </a:p>
+        </p:txBody>
+      </p:sp>
+    </p:spTree>
+    <p:extLst>
+      <p:ext uri="{BB962C8B-B14F-4D97-AF65-F5344CB8AC3E}">
+        <p14:creationId xmlns:p14="http://schemas.microsoft.com/office/powerpoint/2010/main" val="390964603"/>
+      </p:ext>
+    </p:extLst>
+  </p:cSld>
+  <p:clrMapOvr>
+    <a:masterClrMapping/>
+  </p:clrMapOvr>
+  <p:transition>
+    <p:fade/>
+  </p:transition>
+</p:sld>
+</file>
+
+<file path=ppt/slides/slide16.xml><?xml version="1.0" encoding="utf-8"?>
+<p:sld xmlns:a="http://schemas.openxmlformats.org/drawingml/2006/main" xmlns:r="http://schemas.openxmlformats.org/officeDocument/2006/relationships" xmlns:p="http://schemas.openxmlformats.org/presentationml/2006/main">
+  <p:cSld>
+    <p:spTree>
+      <p:nvGrpSpPr>
+        <p:cNvPr id="1" name="">
+          <a:extLst>
+            <a:ext uri="{FF2B5EF4-FFF2-40B4-BE49-F238E27FC236}">
+              <a16:creationId xmlns:a16="http://schemas.microsoft.com/office/drawing/2014/main" id="{C5570AFD-1B05-7C9E-BF79-E84DA3FFFDC5}"/>
+            </a:ext>
+          </a:extLst>
+        </p:cNvPr>
+        <p:cNvGrpSpPr/>
+        <p:nvPr/>
+      </p:nvGrpSpPr>
+      <p:grpSpPr>
+        <a:xfrm>
+          <a:off x="0" y="0"/>
+          <a:ext cx="0" cy="0"/>
+          <a:chOff x="0" y="0"/>
+          <a:chExt cx="0" cy="0"/>
+        </a:xfrm>
+      </p:grpSpPr>
+      <p:sp>
+        <p:nvSpPr>
+          <p:cNvPr id="5" name="文字方塊 4">
+            <a:extLst>
+              <a:ext uri="{FF2B5EF4-FFF2-40B4-BE49-F238E27FC236}">
+                <a16:creationId xmlns:a16="http://schemas.microsoft.com/office/drawing/2014/main" id="{34575AC1-9735-D15B-B9AC-61BDA0E1016D}"/>
+              </a:ext>
+            </a:extLst>
+          </p:cNvPr>
+          <p:cNvSpPr txBox="1"/>
+          <p:nvPr/>
+        </p:nvSpPr>
+        <p:spPr>
+          <a:xfrm>
+            <a:off x="685800" y="1828800"/>
+            <a:ext cx="8077200" cy="2554545"/>
+          </a:xfrm>
+          <a:prstGeom prst="rect">
+            <a:avLst/>
+          </a:prstGeom>
+          <a:noFill/>
+        </p:spPr>
+        <p:txBody>
+          <a:bodyPr wrap="square" rtlCol="0">
+            <a:spAutoFit/>
+          </a:bodyPr>
+          <a:lstStyle/>
+          <a:p>
+            <a:pPr marL="514350" indent="-514350">
+              <a:buFont typeface="Arial" panose="020B0604020202020204" pitchFamily="34" charset="0"/>
+              <a:buChar char="•"/>
+            </a:pPr>
+            <a:r>
+              <a:rPr lang="en-US" altLang="zh-TW" sz="3200" dirty="0">
+                <a:solidFill>
+                  <a:prstClr val="white"/>
+                </a:solidFill>
+                <a:latin typeface="微軟正黑體" panose="020B0604030504040204" pitchFamily="34" charset="-120"/>
+                <a:ea typeface="微軟正黑體" panose="020B0604030504040204" pitchFamily="34" charset="-120"/>
+              </a:rPr>
+              <a:t>tokenizers</a:t>
+            </a:r>
+            <a:r>
+              <a:rPr lang="zh-TW" altLang="en-US" sz="3200" dirty="0">
+                <a:solidFill>
+                  <a:prstClr val="white"/>
+                </a:solidFill>
+                <a:latin typeface="微軟正黑體" panose="020B0604030504040204" pitchFamily="34" charset="-120"/>
+                <a:ea typeface="微軟正黑體" panose="020B0604030504040204" pitchFamily="34" charset="-120"/>
+              </a:rPr>
+              <a:t>函式庫，提供</a:t>
+            </a:r>
+            <a:r>
+              <a:rPr lang="en-US" altLang="zh-TW" sz="3200" dirty="0">
+                <a:solidFill>
+                  <a:prstClr val="white"/>
+                </a:solidFill>
+                <a:latin typeface="微軟正黑體" panose="020B0604030504040204" pitchFamily="34" charset="-120"/>
+                <a:ea typeface="微軟正黑體" panose="020B0604030504040204" pitchFamily="34" charset="-120"/>
+              </a:rPr>
+              <a:t>API</a:t>
+            </a:r>
+            <a:r>
+              <a:rPr lang="zh-TW" altLang="en-US" sz="3200" dirty="0">
+                <a:solidFill>
+                  <a:prstClr val="white"/>
+                </a:solidFill>
+                <a:latin typeface="微軟正黑體" panose="020B0604030504040204" pitchFamily="34" charset="-120"/>
+                <a:ea typeface="微軟正黑體" panose="020B0604030504040204" pitchFamily="34" charset="-120"/>
+              </a:rPr>
+              <a:t>可訓練、載入標準的分詞器</a:t>
+            </a:r>
+            <a:endParaRPr lang="en-US" altLang="zh-TW" sz="3200" dirty="0">
+              <a:solidFill>
+                <a:prstClr val="white"/>
+              </a:solidFill>
+              <a:latin typeface="微軟正黑體" panose="020B0604030504040204" pitchFamily="34" charset="-120"/>
+              <a:ea typeface="微軟正黑體" panose="020B0604030504040204" pitchFamily="34" charset="-120"/>
+            </a:endParaRPr>
+          </a:p>
+          <a:p>
+            <a:pPr marL="514350" indent="-514350">
+              <a:buFont typeface="Arial" panose="020B0604020202020204" pitchFamily="34" charset="0"/>
+              <a:buChar char="•"/>
+            </a:pPr>
+            <a:r>
+              <a:rPr lang="zh-TW" altLang="en-US" sz="3200" dirty="0">
+                <a:solidFill>
+                  <a:prstClr val="white"/>
+                </a:solidFill>
+                <a:latin typeface="微軟正黑體" panose="020B0604030504040204" pitchFamily="34" charset="-120"/>
+                <a:ea typeface="微軟正黑體" panose="020B0604030504040204" pitchFamily="34" charset="-120"/>
+              </a:rPr>
+              <a:t>每個模型均對應到使用的分詞器</a:t>
+            </a:r>
+            <a:endParaRPr lang="en-US" altLang="zh-TW" sz="3200" dirty="0">
+              <a:solidFill>
+                <a:prstClr val="white"/>
+              </a:solidFill>
+              <a:latin typeface="微軟正黑體" panose="020B0604030504040204" pitchFamily="34" charset="-120"/>
+              <a:ea typeface="微軟正黑體" panose="020B0604030504040204" pitchFamily="34" charset="-120"/>
+            </a:endParaRPr>
+          </a:p>
+          <a:p>
+            <a:pPr marL="514350" indent="-514350">
+              <a:buFont typeface="Arial" panose="020B0604020202020204" pitchFamily="34" charset="0"/>
+              <a:buChar char="•"/>
+            </a:pPr>
+            <a:r>
+              <a:rPr lang="zh-TW" altLang="en-US" sz="3200" dirty="0">
+                <a:solidFill>
+                  <a:prstClr val="white"/>
+                </a:solidFill>
+                <a:latin typeface="微軟正黑體" panose="020B0604030504040204" pitchFamily="34" charset="-120"/>
+                <a:ea typeface="微軟正黑體" panose="020B0604030504040204" pitchFamily="34" charset="-120"/>
+              </a:rPr>
+              <a:t>可使用</a:t>
+            </a:r>
+            <a:r>
+              <a:rPr lang="en-US" altLang="zh-TW" sz="3200" dirty="0">
+                <a:solidFill>
+                  <a:prstClr val="white"/>
+                </a:solidFill>
+                <a:latin typeface="微軟正黑體" panose="020B0604030504040204" pitchFamily="34" charset="-120"/>
+                <a:ea typeface="微軟正黑體" panose="020B0604030504040204" pitchFamily="34" charset="-120"/>
+              </a:rPr>
+              <a:t>BPE</a:t>
+            </a:r>
+            <a:r>
+              <a:rPr lang="zh-TW" altLang="en-US" sz="3200" dirty="0">
+                <a:solidFill>
+                  <a:prstClr val="white"/>
+                </a:solidFill>
+                <a:latin typeface="微軟正黑體" panose="020B0604030504040204" pitchFamily="34" charset="-120"/>
+                <a:ea typeface="微軟正黑體" panose="020B0604030504040204" pitchFamily="34" charset="-120"/>
+              </a:rPr>
+              <a:t>或</a:t>
+            </a:r>
+            <a:r>
+              <a:rPr lang="en-US" altLang="zh-TW" sz="3200" dirty="0" err="1">
+                <a:solidFill>
+                  <a:prstClr val="white"/>
+                </a:solidFill>
+                <a:latin typeface="微軟正黑體" panose="020B0604030504040204" pitchFamily="34" charset="-120"/>
+                <a:ea typeface="微軟正黑體" panose="020B0604030504040204" pitchFamily="34" charset="-120"/>
+              </a:rPr>
+              <a:t>Wordpiece</a:t>
+            </a:r>
+            <a:endParaRPr lang="en-US" altLang="zh-TW" sz="3200" dirty="0">
+              <a:solidFill>
+                <a:prstClr val="white"/>
+              </a:solidFill>
+              <a:latin typeface="微軟正黑體" panose="020B0604030504040204" pitchFamily="34" charset="-120"/>
+              <a:ea typeface="微軟正黑體" panose="020B0604030504040204" pitchFamily="34" charset="-120"/>
+            </a:endParaRPr>
+          </a:p>
+          <a:p>
+            <a:pPr marL="514350" indent="-514350">
+              <a:buFont typeface="Arial" panose="020B0604020202020204" pitchFamily="34" charset="0"/>
+              <a:buChar char="•"/>
+            </a:pPr>
+            <a:r>
+              <a:rPr lang="zh-TW" altLang="en-US" sz="3200" dirty="0">
+                <a:solidFill>
+                  <a:prstClr val="white"/>
+                </a:solidFill>
+                <a:latin typeface="微軟正黑體" panose="020B0604030504040204" pitchFamily="34" charset="-120"/>
+                <a:ea typeface="微軟正黑體" panose="020B0604030504040204" pitchFamily="34" charset="-120"/>
+              </a:rPr>
+              <a:t>也可套用最新的分詞器架構</a:t>
+            </a:r>
+            <a:endParaRPr lang="en-US" altLang="zh-TW" sz="3200" dirty="0">
+              <a:solidFill>
+                <a:prstClr val="white"/>
+              </a:solidFill>
+              <a:latin typeface="微軟正黑體" panose="020B0604030504040204" pitchFamily="34" charset="-120"/>
+              <a:ea typeface="微軟正黑體" panose="020B0604030504040204" pitchFamily="34" charset="-120"/>
+            </a:endParaRPr>
+          </a:p>
+        </p:txBody>
+      </p:sp>
+      <p:sp>
+        <p:nvSpPr>
+          <p:cNvPr id="4" name="文字版面配置區 2">
+            <a:extLst>
+              <a:ext uri="{FF2B5EF4-FFF2-40B4-BE49-F238E27FC236}">
+                <a16:creationId xmlns:a16="http://schemas.microsoft.com/office/drawing/2014/main" id="{1793BCB7-1E35-9580-B548-10B9BCF8811B}"/>
+              </a:ext>
+            </a:extLst>
+          </p:cNvPr>
+          <p:cNvSpPr txBox="1">
+            <a:spLocks/>
+          </p:cNvSpPr>
+          <p:nvPr/>
+        </p:nvSpPr>
+        <p:spPr>
+          <a:xfrm>
+            <a:off x="1798654" y="314849"/>
+            <a:ext cx="6424665" cy="990600"/>
+          </a:xfrm>
+          <a:prstGeom prst="rect">
+            <a:avLst/>
+          </a:prstGeom>
+        </p:spPr>
+        <p:txBody>
+          <a:bodyPr tIns="91440" bIns="91440" anchor="b" anchorCtr="0">
+            <a:noAutofit/>
+          </a:bodyPr>
+          <a:lstStyle/>
+          <a:p>
+            <a:pPr algn="just">
+              <a:spcBef>
+                <a:spcPct val="20000"/>
+              </a:spcBef>
+              <a:defRPr/>
+            </a:pPr>
+            <a:r>
+              <a:rPr lang="en-US" altLang="zh-TW" sz="4800" b="1" kern="0" dirty="0">
+                <a:solidFill>
+                  <a:srgbClr val="00B0F0"/>
+                </a:solidFill>
+                <a:effectLst>
+                  <a:outerShdw blurRad="38100" dist="38100" dir="2700000" algn="tl">
+                    <a:srgbClr val="000000">
+                      <a:alpha val="43137"/>
+                    </a:srgbClr>
+                  </a:outerShdw>
+                </a:effectLst>
+                <a:latin typeface="微軟正黑體" panose="020B0604030504040204" pitchFamily="34" charset="-120"/>
+                <a:ea typeface="微軟正黑體" panose="020B0604030504040204" pitchFamily="34" charset="-120"/>
+              </a:rPr>
+              <a:t>tokenizer</a:t>
+            </a:r>
+            <a:r>
+              <a:rPr lang="zh-TW" altLang="en-US" sz="4800" b="1" kern="0" dirty="0">
+                <a:solidFill>
+                  <a:srgbClr val="00B0F0"/>
+                </a:solidFill>
+                <a:effectLst>
+                  <a:outerShdw blurRad="38100" dist="38100" dir="2700000" algn="tl">
+                    <a:srgbClr val="000000">
+                      <a:alpha val="43137"/>
+                    </a:srgbClr>
+                  </a:outerShdw>
+                </a:effectLst>
+                <a:latin typeface="微軟正黑體" panose="020B0604030504040204" pitchFamily="34" charset="-120"/>
+                <a:ea typeface="微軟正黑體" panose="020B0604030504040204" pitchFamily="34" charset="-120"/>
+              </a:rPr>
+              <a:t>函數庫介紹</a:t>
+            </a:r>
+          </a:p>
+        </p:txBody>
+      </p:sp>
+    </p:spTree>
+    <p:extLst>
+      <p:ext uri="{BB962C8B-B14F-4D97-AF65-F5344CB8AC3E}">
+        <p14:creationId xmlns:p14="http://schemas.microsoft.com/office/powerpoint/2010/main" val="3639544696"/>
+      </p:ext>
+    </p:extLst>
+  </p:cSld>
+  <p:clrMapOvr>
+    <a:masterClrMapping/>
+  </p:clrMapOvr>
+  <p:transition>
+    <p:fade/>
+  </p:transition>
+</p:sld>
+</file>
+
+<file path=ppt/slides/slide17.xml><?xml version="1.0" encoding="utf-8"?>
+<p:sld xmlns:a="http://schemas.openxmlformats.org/drawingml/2006/main" xmlns:r="http://schemas.openxmlformats.org/officeDocument/2006/relationships" xmlns:p="http://schemas.openxmlformats.org/presentationml/2006/main">
+  <p:cSld>
+    <p:spTree>
+      <p:nvGrpSpPr>
+        <p:cNvPr id="1" name=""/>
+        <p:cNvGrpSpPr/>
+        <p:nvPr/>
+      </p:nvGrpSpPr>
+      <p:grpSpPr>
+        <a:xfrm>
+          <a:off x="0" y="0"/>
+          <a:ext cx="0" cy="0"/>
+          <a:chOff x="0" y="0"/>
+          <a:chExt cx="0" cy="0"/>
+        </a:xfrm>
+      </p:grpSpPr>
+      <p:pic>
+        <p:nvPicPr>
+          <p:cNvPr id="5" name="圖片 4">
+            <a:extLst>
+              <a:ext uri="{FF2B5EF4-FFF2-40B4-BE49-F238E27FC236}">
+                <a16:creationId xmlns:a16="http://schemas.microsoft.com/office/drawing/2014/main" id="{74CE2504-2917-B90F-6336-D24589BB095F}"/>
+              </a:ext>
+            </a:extLst>
+          </p:cNvPr>
+          <p:cNvPicPr>
+            <a:picLocks noChangeAspect="1"/>
+          </p:cNvPicPr>
+          <p:nvPr/>
+        </p:nvPicPr>
+        <p:blipFill>
+          <a:blip r:embed="rId2"/>
+          <a:stretch>
+            <a:fillRect/>
+          </a:stretch>
+        </p:blipFill>
+        <p:spPr>
+          <a:xfrm>
+            <a:off x="0" y="2091748"/>
+            <a:ext cx="9144000" cy="2674503"/>
+          </a:xfrm>
+          <a:prstGeom prst="rect">
+            <a:avLst/>
+          </a:prstGeom>
+        </p:spPr>
+      </p:pic>
+    </p:spTree>
+    <p:extLst>
+      <p:ext uri="{BB962C8B-B14F-4D97-AF65-F5344CB8AC3E}">
+        <p14:creationId xmlns:p14="http://schemas.microsoft.com/office/powerpoint/2010/main" val="584496949"/>
+      </p:ext>
+    </p:extLst>
+  </p:cSld>
+  <p:clrMapOvr>
+    <a:masterClrMapping/>
+  </p:clrMapOvr>
+  <p:transition>
+    <p:fade/>
+  </p:transition>
+</p:sld>
+</file>
+
+<file path=ppt/slides/slide18.xml><?xml version="1.0" encoding="utf-8"?>
+<p:sld xmlns:a="http://schemas.openxmlformats.org/drawingml/2006/main" xmlns:r="http://schemas.openxmlformats.org/officeDocument/2006/relationships" xmlns:p="http://schemas.openxmlformats.org/presentationml/2006/main">
+  <p:cSld>
+    <p:spTree>
+      <p:nvGrpSpPr>
+        <p:cNvPr id="1" name=""/>
+        <p:cNvGrpSpPr/>
+        <p:nvPr/>
+      </p:nvGrpSpPr>
+      <p:grpSpPr>
+        <a:xfrm>
+          <a:off x="0" y="0"/>
+          <a:ext cx="0" cy="0"/>
+          <a:chOff x="0" y="0"/>
+          <a:chExt cx="0" cy="0"/>
+        </a:xfrm>
+      </p:grpSpPr>
+      <p:sp>
+        <p:nvSpPr>
+          <p:cNvPr id="5" name="文字方塊 4"/>
+          <p:cNvSpPr txBox="1"/>
+          <p:nvPr/>
+        </p:nvSpPr>
+        <p:spPr>
+          <a:xfrm>
+            <a:off x="685800" y="1828802"/>
+            <a:ext cx="8077200" cy="584775"/>
+          </a:xfrm>
+          <a:prstGeom prst="rect">
+            <a:avLst/>
+          </a:prstGeom>
+          <a:noFill/>
+        </p:spPr>
+        <p:txBody>
+          <a:bodyPr wrap="square" rtlCol="0">
+            <a:spAutoFit/>
+          </a:bodyPr>
+          <a:lstStyle/>
+          <a:p>
+            <a:pPr marL="514350" indent="-514350">
+              <a:buFont typeface="Arial" panose="020B0604020202020204" pitchFamily="34" charset="0"/>
+              <a:buChar char="•"/>
+            </a:pPr>
+            <a:r>
+              <a:rPr lang="zh-TW" altLang="en-US" sz="3200" dirty="0">
+                <a:solidFill>
+                  <a:prstClr val="white"/>
+                </a:solidFill>
+                <a:latin typeface="微軟正黑體" panose="020B0604030504040204" pitchFamily="34" charset="-120"/>
+                <a:ea typeface="微軟正黑體" panose="020B0604030504040204" pitchFamily="34" charset="-120"/>
+              </a:rPr>
+              <a:t>程式</a:t>
+            </a:r>
+            <a:r>
+              <a:rPr lang="en-US" altLang="zh-TW" sz="3200" dirty="0">
+                <a:solidFill>
+                  <a:prstClr val="white"/>
+                </a:solidFill>
+                <a:latin typeface="微軟正黑體" panose="020B0604030504040204" pitchFamily="34" charset="-120"/>
+                <a:ea typeface="微軟正黑體" panose="020B0604030504040204" pitchFamily="34" charset="-120"/>
+              </a:rPr>
+              <a:t>02. </a:t>
+            </a:r>
+            <a:r>
+              <a:rPr lang="en-US" altLang="zh-TW" sz="3200" dirty="0" err="1">
+                <a:solidFill>
+                  <a:prstClr val="white"/>
+                </a:solidFill>
+                <a:latin typeface="微軟正黑體" panose="020B0604030504040204" pitchFamily="34" charset="-120"/>
+                <a:ea typeface="微軟正黑體" panose="020B0604030504040204" pitchFamily="34" charset="-120"/>
+              </a:rPr>
+              <a:t>Pipeline.ipynb</a:t>
+            </a:r>
+            <a:endParaRPr lang="en-US" altLang="zh-TW" sz="3200" dirty="0">
+              <a:solidFill>
+                <a:prstClr val="white"/>
+              </a:solidFill>
+              <a:latin typeface="微軟正黑體" panose="020B0604030504040204" pitchFamily="34" charset="-120"/>
+              <a:ea typeface="微軟正黑體" panose="020B0604030504040204" pitchFamily="34" charset="-120"/>
+            </a:endParaRPr>
+          </a:p>
+        </p:txBody>
+      </p:sp>
+      <p:sp>
+        <p:nvSpPr>
+          <p:cNvPr id="4" name="文字版面配置區 2"/>
+          <p:cNvSpPr txBox="1">
+            <a:spLocks/>
+          </p:cNvSpPr>
+          <p:nvPr/>
+        </p:nvSpPr>
+        <p:spPr>
+          <a:xfrm>
+            <a:off x="990600" y="304800"/>
+            <a:ext cx="7696200" cy="990600"/>
+          </a:xfrm>
+          <a:prstGeom prst="rect">
+            <a:avLst/>
+          </a:prstGeom>
+        </p:spPr>
+        <p:txBody>
+          <a:bodyPr tIns="91440" bIns="91440" anchor="b" anchorCtr="0">
+            <a:noAutofit/>
+          </a:bodyPr>
+          <a:lstStyle/>
+          <a:p>
+            <a:pPr algn="just">
+              <a:spcBef>
+                <a:spcPct val="20000"/>
+              </a:spcBef>
+              <a:defRPr/>
+            </a:pPr>
+            <a:r>
+              <a:rPr lang="en-US" altLang="zh-TW" sz="4800" b="1" kern="0" dirty="0">
+                <a:solidFill>
+                  <a:srgbClr val="00B0F0"/>
+                </a:solidFill>
+                <a:effectLst>
+                  <a:outerShdw blurRad="38100" dist="38100" dir="2700000" algn="tl">
+                    <a:srgbClr val="000000">
+                      <a:alpha val="43137"/>
+                    </a:srgbClr>
+                  </a:outerShdw>
+                </a:effectLst>
+                <a:latin typeface="微軟正黑體" panose="020B0604030504040204" pitchFamily="34" charset="-120"/>
+                <a:ea typeface="微軟正黑體" panose="020B0604030504040204" pitchFamily="34" charset="-120"/>
+              </a:rPr>
+              <a:t>Pipeline</a:t>
+            </a:r>
+            <a:r>
+              <a:rPr lang="zh-TW" altLang="en-US" sz="4800" b="1" kern="0" dirty="0">
+                <a:solidFill>
+                  <a:srgbClr val="00B0F0"/>
+                </a:solidFill>
+                <a:effectLst>
+                  <a:outerShdw blurRad="38100" dist="38100" dir="2700000" algn="tl">
+                    <a:srgbClr val="000000">
+                      <a:alpha val="43137"/>
+                    </a:srgbClr>
+                  </a:outerShdw>
+                </a:effectLst>
+                <a:latin typeface="微軟正黑體" panose="020B0604030504040204" pitchFamily="34" charset="-120"/>
+                <a:ea typeface="微軟正黑體" panose="020B0604030504040204" pitchFamily="34" charset="-120"/>
+              </a:rPr>
+              <a:t>的使用</a:t>
+            </a:r>
+          </a:p>
+        </p:txBody>
+      </p:sp>
+    </p:spTree>
+    <p:extLst>
+      <p:ext uri="{BB962C8B-B14F-4D97-AF65-F5344CB8AC3E}">
+        <p14:creationId xmlns:p14="http://schemas.microsoft.com/office/powerpoint/2010/main" val="3552614529"/>
+      </p:ext>
+    </p:extLst>
+  </p:cSld>
+  <p:clrMapOvr>
+    <a:masterClrMapping/>
+  </p:clrMapOvr>
+  <p:transition>
+    <p:fade/>
+  </p:transition>
+</p:sld>
+</file>
+
+<file path=ppt/slides/slide19.xml><?xml version="1.0" encoding="utf-8"?>
+<p:sld xmlns:a="http://schemas.openxmlformats.org/drawingml/2006/main" xmlns:r="http://schemas.openxmlformats.org/officeDocument/2006/relationships" xmlns:p="http://schemas.openxmlformats.org/presentationml/2006/main">
+  <p:cSld>
+    <p:spTree>
+      <p:nvGrpSpPr>
+        <p:cNvPr id="1" name=""/>
+        <p:cNvGrpSpPr/>
+        <p:nvPr/>
+      </p:nvGrpSpPr>
+      <p:grpSpPr>
+        <a:xfrm>
+          <a:off x="0" y="0"/>
+          <a:ext cx="0" cy="0"/>
+          <a:chOff x="0" y="0"/>
+          <a:chExt cx="0" cy="0"/>
+        </a:xfrm>
+      </p:grpSpPr>
+      <p:sp>
+        <p:nvSpPr>
+          <p:cNvPr id="5" name="文字方塊 4"/>
+          <p:cNvSpPr txBox="1"/>
+          <p:nvPr/>
+        </p:nvSpPr>
+        <p:spPr>
+          <a:xfrm>
+            <a:off x="609600" y="1600202"/>
+            <a:ext cx="8077200" cy="4031873"/>
+          </a:xfrm>
+          <a:prstGeom prst="rect">
+            <a:avLst/>
+          </a:prstGeom>
+          <a:noFill/>
+        </p:spPr>
+        <p:txBody>
+          <a:bodyPr wrap="square" rtlCol="0">
+            <a:spAutoFit/>
+          </a:bodyPr>
+          <a:lstStyle/>
+          <a:p>
+            <a:pPr marL="514350" indent="-514350">
+              <a:buFont typeface="Arial" panose="020B0604020202020204" pitchFamily="34" charset="0"/>
+              <a:buChar char="•"/>
+            </a:pPr>
+            <a:r>
+              <a:rPr lang="en-US" altLang="zh-TW" sz="3200" dirty="0">
+                <a:solidFill>
+                  <a:prstClr val="white"/>
+                </a:solidFill>
+                <a:latin typeface="微軟正黑體" panose="020B0604030504040204" pitchFamily="34" charset="-120"/>
+                <a:ea typeface="微軟正黑體" panose="020B0604030504040204" pitchFamily="34" charset="-120"/>
+              </a:rPr>
+              <a:t>Transformer </a:t>
+            </a:r>
+            <a:r>
+              <a:rPr lang="zh-TW" altLang="en-US" sz="3200" dirty="0">
+                <a:solidFill>
+                  <a:prstClr val="white"/>
+                </a:solidFill>
+                <a:latin typeface="微軟正黑體" panose="020B0604030504040204" pitchFamily="34" charset="-120"/>
+                <a:ea typeface="微軟正黑體" panose="020B0604030504040204" pitchFamily="34" charset="-120"/>
+              </a:rPr>
+              <a:t>架構 於 </a:t>
+            </a:r>
+            <a:r>
+              <a:rPr lang="en-US" altLang="zh-TW" sz="3200" dirty="0">
+                <a:solidFill>
+                  <a:prstClr val="white"/>
+                </a:solidFill>
+                <a:latin typeface="微軟正黑體" panose="020B0604030504040204" pitchFamily="34" charset="-120"/>
+                <a:ea typeface="微軟正黑體" panose="020B0604030504040204" pitchFamily="34" charset="-120"/>
+              </a:rPr>
+              <a:t>2017 </a:t>
+            </a:r>
+            <a:r>
+              <a:rPr lang="zh-TW" altLang="en-US" sz="3200" dirty="0">
+                <a:solidFill>
+                  <a:prstClr val="white"/>
+                </a:solidFill>
+                <a:latin typeface="微軟正黑體" panose="020B0604030504040204" pitchFamily="34" charset="-120"/>
+                <a:ea typeface="微軟正黑體" panose="020B0604030504040204" pitchFamily="34" charset="-120"/>
+              </a:rPr>
+              <a:t>年 </a:t>
+            </a:r>
+            <a:r>
+              <a:rPr lang="en-US" altLang="zh-TW" sz="3200" dirty="0">
+                <a:solidFill>
+                  <a:prstClr val="white"/>
+                </a:solidFill>
+                <a:latin typeface="微軟正黑體" panose="020B0604030504040204" pitchFamily="34" charset="-120"/>
+                <a:ea typeface="微軟正黑體" panose="020B0604030504040204" pitchFamily="34" charset="-120"/>
+              </a:rPr>
+              <a:t>6 </a:t>
+            </a:r>
+            <a:r>
+              <a:rPr lang="zh-TW" altLang="en-US" sz="3200" dirty="0">
+                <a:solidFill>
+                  <a:prstClr val="white"/>
+                </a:solidFill>
+                <a:latin typeface="微軟正黑體" panose="020B0604030504040204" pitchFamily="34" charset="-120"/>
+                <a:ea typeface="微軟正黑體" panose="020B0604030504040204" pitchFamily="34" charset="-120"/>
+              </a:rPr>
+              <a:t>月推出。原本研究的重點是翻譯任務。隨後推出了幾個有影響力的模型</a:t>
+            </a:r>
+          </a:p>
+          <a:p>
+            <a:pPr marL="514350" indent="-514350">
+              <a:buFont typeface="Arial" panose="020B0604020202020204" pitchFamily="34" charset="0"/>
+              <a:buChar char="•"/>
+            </a:pPr>
+            <a:r>
+              <a:rPr lang="en-US" altLang="zh-TW" sz="3200" dirty="0">
+                <a:solidFill>
+                  <a:prstClr val="white"/>
+                </a:solidFill>
+                <a:latin typeface="微軟正黑體" panose="020B0604030504040204" pitchFamily="34" charset="-120"/>
+                <a:ea typeface="微軟正黑體" panose="020B0604030504040204" pitchFamily="34" charset="-120"/>
+              </a:rPr>
+              <a:t>2018 </a:t>
+            </a:r>
+            <a:r>
+              <a:rPr lang="zh-TW" altLang="en-US" sz="3200" dirty="0">
+                <a:solidFill>
+                  <a:prstClr val="white"/>
+                </a:solidFill>
+                <a:latin typeface="微軟正黑體" panose="020B0604030504040204" pitchFamily="34" charset="-120"/>
+                <a:ea typeface="微軟正黑體" panose="020B0604030504040204" pitchFamily="34" charset="-120"/>
+              </a:rPr>
+              <a:t>年 </a:t>
+            </a:r>
+            <a:r>
+              <a:rPr lang="en-US" altLang="zh-TW" sz="3200" dirty="0">
+                <a:solidFill>
+                  <a:prstClr val="white"/>
+                </a:solidFill>
+                <a:latin typeface="微軟正黑體" panose="020B0604030504040204" pitchFamily="34" charset="-120"/>
+                <a:ea typeface="微軟正黑體" panose="020B0604030504040204" pitchFamily="34" charset="-120"/>
+              </a:rPr>
+              <a:t>6 </a:t>
+            </a:r>
+            <a:r>
+              <a:rPr lang="zh-TW" altLang="en-US" sz="3200" dirty="0">
+                <a:solidFill>
+                  <a:prstClr val="white"/>
+                </a:solidFill>
+                <a:latin typeface="微軟正黑體" panose="020B0604030504040204" pitchFamily="34" charset="-120"/>
+                <a:ea typeface="微軟正黑體" panose="020B0604030504040204" pitchFamily="34" charset="-120"/>
+              </a:rPr>
+              <a:t>月</a:t>
+            </a:r>
+            <a:r>
+              <a:rPr lang="en-US" altLang="zh-TW" sz="3200" dirty="0">
+                <a:solidFill>
+                  <a:prstClr val="white"/>
+                </a:solidFill>
+                <a:latin typeface="微軟正黑體" panose="020B0604030504040204" pitchFamily="34" charset="-120"/>
+                <a:ea typeface="微軟正黑體" panose="020B0604030504040204" pitchFamily="34" charset="-120"/>
+              </a:rPr>
+              <a:t>: GPT, </a:t>
+            </a:r>
+            <a:r>
+              <a:rPr lang="zh-TW" altLang="en-US" sz="3200" dirty="0">
+                <a:solidFill>
+                  <a:prstClr val="white"/>
+                </a:solidFill>
+                <a:latin typeface="微軟正黑體" panose="020B0604030504040204" pitchFamily="34" charset="-120"/>
+                <a:ea typeface="微軟正黑體" panose="020B0604030504040204" pitchFamily="34" charset="-120"/>
+              </a:rPr>
+              <a:t>第一個預訓練的 </a:t>
+            </a:r>
+            <a:r>
+              <a:rPr lang="en-US" altLang="zh-TW" sz="3200" dirty="0">
+                <a:solidFill>
+                  <a:prstClr val="white"/>
+                </a:solidFill>
+                <a:latin typeface="微軟正黑體" panose="020B0604030504040204" pitchFamily="34" charset="-120"/>
+                <a:ea typeface="微軟正黑體" panose="020B0604030504040204" pitchFamily="34" charset="-120"/>
+              </a:rPr>
+              <a:t>Transformer </a:t>
+            </a:r>
+            <a:r>
+              <a:rPr lang="zh-TW" altLang="en-US" sz="3200" dirty="0">
+                <a:solidFill>
+                  <a:prstClr val="white"/>
+                </a:solidFill>
+                <a:latin typeface="微軟正黑體" panose="020B0604030504040204" pitchFamily="34" charset="-120"/>
+                <a:ea typeface="微軟正黑體" panose="020B0604030504040204" pitchFamily="34" charset="-120"/>
+              </a:rPr>
+              <a:t>模型，用於各種 </a:t>
+            </a:r>
+            <a:r>
+              <a:rPr lang="en-US" altLang="zh-TW" sz="3200" dirty="0">
+                <a:solidFill>
+                  <a:prstClr val="white"/>
+                </a:solidFill>
+                <a:latin typeface="微軟正黑體" panose="020B0604030504040204" pitchFamily="34" charset="-120"/>
+                <a:ea typeface="微軟正黑體" panose="020B0604030504040204" pitchFamily="34" charset="-120"/>
+              </a:rPr>
+              <a:t>NLP </a:t>
+            </a:r>
+            <a:r>
+              <a:rPr lang="zh-TW" altLang="en-US" sz="3200" dirty="0">
+                <a:solidFill>
+                  <a:prstClr val="white"/>
+                </a:solidFill>
+                <a:latin typeface="微軟正黑體" panose="020B0604030504040204" pitchFamily="34" charset="-120"/>
+                <a:ea typeface="微軟正黑體" panose="020B0604030504040204" pitchFamily="34" charset="-120"/>
+              </a:rPr>
+              <a:t>任務並獲得極好的結果</a:t>
+            </a:r>
+          </a:p>
+          <a:p>
+            <a:pPr marL="514350" indent="-514350">
+              <a:buFont typeface="Arial" panose="020B0604020202020204" pitchFamily="34" charset="0"/>
+              <a:buChar char="•"/>
+            </a:pPr>
+            <a:r>
+              <a:rPr lang="en-US" altLang="zh-TW" sz="3200" dirty="0">
+                <a:solidFill>
+                  <a:prstClr val="white"/>
+                </a:solidFill>
+                <a:latin typeface="微軟正黑體" panose="020B0604030504040204" pitchFamily="34" charset="-120"/>
+                <a:ea typeface="微軟正黑體" panose="020B0604030504040204" pitchFamily="34" charset="-120"/>
+              </a:rPr>
+              <a:t>2018 </a:t>
+            </a:r>
+            <a:r>
+              <a:rPr lang="zh-TW" altLang="en-US" sz="3200" dirty="0">
+                <a:solidFill>
+                  <a:prstClr val="white"/>
+                </a:solidFill>
+                <a:latin typeface="微軟正黑體" panose="020B0604030504040204" pitchFamily="34" charset="-120"/>
+                <a:ea typeface="微軟正黑體" panose="020B0604030504040204" pitchFamily="34" charset="-120"/>
+              </a:rPr>
+              <a:t>年 </a:t>
+            </a:r>
+            <a:r>
+              <a:rPr lang="en-US" altLang="zh-TW" sz="3200" dirty="0">
+                <a:solidFill>
+                  <a:prstClr val="white"/>
+                </a:solidFill>
+                <a:latin typeface="微軟正黑體" panose="020B0604030504040204" pitchFamily="34" charset="-120"/>
+                <a:ea typeface="微軟正黑體" panose="020B0604030504040204" pitchFamily="34" charset="-120"/>
+              </a:rPr>
+              <a:t>10 </a:t>
+            </a:r>
+            <a:r>
+              <a:rPr lang="zh-TW" altLang="en-US" sz="3200" dirty="0">
+                <a:solidFill>
+                  <a:prstClr val="white"/>
+                </a:solidFill>
+                <a:latin typeface="微軟正黑體" panose="020B0604030504040204" pitchFamily="34" charset="-120"/>
+                <a:ea typeface="微軟正黑體" panose="020B0604030504040204" pitchFamily="34" charset="-120"/>
+              </a:rPr>
+              <a:t>月</a:t>
+            </a:r>
+            <a:r>
+              <a:rPr lang="en-US" altLang="zh-TW" sz="3200" dirty="0">
+                <a:solidFill>
+                  <a:prstClr val="white"/>
+                </a:solidFill>
+                <a:latin typeface="微軟正黑體" panose="020B0604030504040204" pitchFamily="34" charset="-120"/>
+                <a:ea typeface="微軟正黑體" panose="020B0604030504040204" pitchFamily="34" charset="-120"/>
+              </a:rPr>
+              <a:t>: BERT, </a:t>
+            </a:r>
+            <a:r>
+              <a:rPr lang="zh-TW" altLang="en-US" sz="3200" dirty="0">
+                <a:solidFill>
+                  <a:prstClr val="white"/>
+                </a:solidFill>
+                <a:latin typeface="微軟正黑體" panose="020B0604030504040204" pitchFamily="34" charset="-120"/>
+                <a:ea typeface="微軟正黑體" panose="020B0604030504040204" pitchFamily="34" charset="-120"/>
+              </a:rPr>
+              <a:t>另一個大型預訓練模型，該模型旨在生成更好的句子摘要</a:t>
+            </a:r>
+          </a:p>
+        </p:txBody>
+      </p:sp>
+      <p:sp>
+        <p:nvSpPr>
+          <p:cNvPr id="4" name="文字版面配置區 2"/>
+          <p:cNvSpPr txBox="1">
+            <a:spLocks/>
+          </p:cNvSpPr>
+          <p:nvPr/>
+        </p:nvSpPr>
+        <p:spPr>
+          <a:xfrm>
+            <a:off x="990600" y="304800"/>
+            <a:ext cx="7696200" cy="990600"/>
+          </a:xfrm>
+          <a:prstGeom prst="rect">
+            <a:avLst/>
+          </a:prstGeom>
+        </p:spPr>
+        <p:txBody>
+          <a:bodyPr tIns="91440" bIns="91440" anchor="b" anchorCtr="0">
+            <a:noAutofit/>
+          </a:bodyPr>
+          <a:lstStyle/>
+          <a:p>
+            <a:pPr algn="just">
+              <a:spcBef>
+                <a:spcPct val="20000"/>
+              </a:spcBef>
+              <a:defRPr/>
+            </a:pPr>
+            <a:r>
+              <a:rPr lang="en-US" altLang="zh-TW" sz="4800" b="1" kern="0" dirty="0">
+                <a:solidFill>
+                  <a:srgbClr val="00B0F0"/>
+                </a:solidFill>
+                <a:effectLst>
+                  <a:outerShdw blurRad="38100" dist="38100" dir="2700000" algn="tl">
+                    <a:srgbClr val="000000">
+                      <a:alpha val="43137"/>
+                    </a:srgbClr>
+                  </a:outerShdw>
+                </a:effectLst>
+                <a:latin typeface="微軟正黑體" panose="020B0604030504040204" pitchFamily="34" charset="-120"/>
+                <a:ea typeface="微軟正黑體" panose="020B0604030504040204" pitchFamily="34" charset="-120"/>
+              </a:rPr>
+              <a:t>Transformer </a:t>
+            </a:r>
+            <a:r>
+              <a:rPr lang="zh-TW" altLang="en-US" sz="4800" b="1" kern="0" dirty="0">
+                <a:solidFill>
+                  <a:srgbClr val="00B0F0"/>
+                </a:solidFill>
+                <a:effectLst>
+                  <a:outerShdw blurRad="38100" dist="38100" dir="2700000" algn="tl">
+                    <a:srgbClr val="000000">
+                      <a:alpha val="43137"/>
+                    </a:srgbClr>
+                  </a:outerShdw>
+                </a:effectLst>
+                <a:latin typeface="微軟正黑體" panose="020B0604030504040204" pitchFamily="34" charset="-120"/>
+                <a:ea typeface="微軟正黑體" panose="020B0604030504040204" pitchFamily="34" charset="-120"/>
+              </a:rPr>
+              <a:t>架構 </a:t>
+            </a:r>
+          </a:p>
+        </p:txBody>
+      </p:sp>
+    </p:spTree>
+    <p:extLst>
+      <p:ext uri="{BB962C8B-B14F-4D97-AF65-F5344CB8AC3E}">
+        <p14:creationId xmlns:p14="http://schemas.microsoft.com/office/powerpoint/2010/main" val="108379556"/>
+      </p:ext>
+    </p:extLst>
+  </p:cSld>
+  <p:clrMapOvr>
+    <a:masterClrMapping/>
+  </p:clrMapOvr>
+  <p:transition>
+    <p:fade/>
+  </p:transition>
+</p:sld>
+</file>
+
+<file path=ppt/slides/slide2.xml><?xml version="1.0" encoding="utf-8"?>
+<p:sld xmlns:a="http://schemas.openxmlformats.org/drawingml/2006/main" xmlns:r="http://schemas.openxmlformats.org/officeDocument/2006/relationships" xmlns:p="http://schemas.openxmlformats.org/presentationml/2006/main">
+  <p:cSld>
+    <p:spTree>
+      <p:nvGrpSpPr>
+        <p:cNvPr id="1" name=""/>
+        <p:cNvGrpSpPr/>
+        <p:nvPr/>
+      </p:nvGrpSpPr>
+      <p:grpSpPr>
+        <a:xfrm>
+          <a:off x="0" y="0"/>
+          <a:ext cx="0" cy="0"/>
+          <a:chOff x="0" y="0"/>
+          <a:chExt cx="0" cy="0"/>
+        </a:xfrm>
+      </p:grpSpPr>
+      <p:sp>
+        <p:nvSpPr>
+          <p:cNvPr id="5" name="文字方塊 4"/>
+          <p:cNvSpPr txBox="1"/>
+          <p:nvPr/>
+        </p:nvSpPr>
+        <p:spPr>
+          <a:xfrm>
+            <a:off x="685800" y="1828802"/>
+            <a:ext cx="8077200" cy="2554545"/>
+          </a:xfrm>
+          <a:prstGeom prst="rect">
+            <a:avLst/>
+          </a:prstGeom>
+          <a:noFill/>
+        </p:spPr>
+        <p:txBody>
+          <a:bodyPr wrap="square" rtlCol="0">
+            <a:spAutoFit/>
+          </a:bodyPr>
+          <a:lstStyle/>
+          <a:p>
+            <a:pPr marL="514350" indent="-514350">
+              <a:buFont typeface="Arial" panose="020B0604020202020204" pitchFamily="34" charset="0"/>
+              <a:buChar char="•"/>
+            </a:pPr>
+            <a:r>
+              <a:rPr lang="en-US" altLang="zh-TW" sz="3200" dirty="0" err="1">
+                <a:solidFill>
+                  <a:prstClr val="white"/>
+                </a:solidFill>
+                <a:latin typeface="微軟正黑體" panose="020B0604030504040204" pitchFamily="34" charset="-120"/>
+                <a:ea typeface="微軟正黑體" panose="020B0604030504040204" pitchFamily="34" charset="-120"/>
+              </a:rPr>
+              <a:t>Huggingface</a:t>
+            </a:r>
+            <a:r>
+              <a:rPr lang="zh-TW" altLang="en-US" sz="3200" dirty="0">
+                <a:solidFill>
+                  <a:prstClr val="white"/>
+                </a:solidFill>
+                <a:latin typeface="微軟正黑體" panose="020B0604030504040204" pitchFamily="34" charset="-120"/>
+                <a:ea typeface="微軟正黑體" panose="020B0604030504040204" pitchFamily="34" charset="-120"/>
+              </a:rPr>
+              <a:t>公司介紹</a:t>
+            </a:r>
+            <a:endParaRPr lang="en-US" altLang="zh-TW" sz="3200" dirty="0">
+              <a:solidFill>
+                <a:prstClr val="white"/>
+              </a:solidFill>
+              <a:latin typeface="微軟正黑體" panose="020B0604030504040204" pitchFamily="34" charset="-120"/>
+              <a:ea typeface="微軟正黑體" panose="020B0604030504040204" pitchFamily="34" charset="-120"/>
+            </a:endParaRPr>
+          </a:p>
+          <a:p>
+            <a:pPr marL="514350" indent="-514350">
+              <a:buFont typeface="Arial" panose="020B0604020202020204" pitchFamily="34" charset="0"/>
+              <a:buChar char="•"/>
+            </a:pPr>
+            <a:r>
+              <a:rPr lang="en-US" altLang="zh-TW" sz="3200" dirty="0">
+                <a:solidFill>
+                  <a:prstClr val="white"/>
+                </a:solidFill>
+                <a:latin typeface="微軟正黑體" panose="020B0604030504040204" pitchFamily="34" charset="-120"/>
+                <a:ea typeface="微軟正黑體" panose="020B0604030504040204" pitchFamily="34" charset="-120"/>
+              </a:rPr>
+              <a:t>Transformers</a:t>
+            </a:r>
+            <a:r>
+              <a:rPr lang="zh-TW" altLang="en-US" sz="3200" dirty="0">
+                <a:solidFill>
+                  <a:prstClr val="white"/>
+                </a:solidFill>
+                <a:latin typeface="微軟正黑體" panose="020B0604030504040204" pitchFamily="34" charset="-120"/>
+                <a:ea typeface="微軟正黑體" panose="020B0604030504040204" pitchFamily="34" charset="-120"/>
+              </a:rPr>
+              <a:t>函數庫介紹</a:t>
+            </a:r>
+            <a:endParaRPr lang="en-US" altLang="zh-TW" sz="3200" dirty="0">
+              <a:solidFill>
+                <a:prstClr val="white"/>
+              </a:solidFill>
+              <a:latin typeface="微軟正黑體" panose="020B0604030504040204" pitchFamily="34" charset="-120"/>
+              <a:ea typeface="微軟正黑體" panose="020B0604030504040204" pitchFamily="34" charset="-120"/>
+            </a:endParaRPr>
+          </a:p>
+          <a:p>
+            <a:pPr marL="514350" indent="-514350">
+              <a:buFont typeface="Arial" panose="020B0604020202020204" pitchFamily="34" charset="0"/>
+              <a:buChar char="•"/>
+            </a:pPr>
+            <a:r>
+              <a:rPr lang="en-US" altLang="zh-TW" sz="3200" dirty="0">
+                <a:solidFill>
+                  <a:prstClr val="white"/>
+                </a:solidFill>
+                <a:latin typeface="微軟正黑體" panose="020B0604030504040204" pitchFamily="34" charset="-120"/>
+                <a:ea typeface="微軟正黑體" panose="020B0604030504040204" pitchFamily="34" charset="-120"/>
+              </a:rPr>
+              <a:t>Pipeline</a:t>
+            </a:r>
+            <a:r>
+              <a:rPr lang="zh-TW" altLang="en-US" sz="3200" dirty="0">
+                <a:solidFill>
+                  <a:prstClr val="white"/>
+                </a:solidFill>
+                <a:latin typeface="微軟正黑體" panose="020B0604030504040204" pitchFamily="34" charset="-120"/>
+                <a:ea typeface="微軟正黑體" panose="020B0604030504040204" pitchFamily="34" charset="-120"/>
+              </a:rPr>
+              <a:t>的使用</a:t>
+            </a:r>
+            <a:endParaRPr lang="en-US" altLang="zh-TW" sz="3200" dirty="0">
+              <a:solidFill>
+                <a:prstClr val="white"/>
+              </a:solidFill>
+              <a:latin typeface="微軟正黑體" panose="020B0604030504040204" pitchFamily="34" charset="-120"/>
+              <a:ea typeface="微軟正黑體" panose="020B0604030504040204" pitchFamily="34" charset="-120"/>
+            </a:endParaRPr>
+          </a:p>
+          <a:p>
+            <a:pPr marL="514350" indent="-514350">
+              <a:buFont typeface="Arial" panose="020B0604020202020204" pitchFamily="34" charset="0"/>
+              <a:buChar char="•"/>
+            </a:pPr>
+            <a:r>
+              <a:rPr lang="en-US" altLang="zh-TW" sz="3200" dirty="0">
+                <a:solidFill>
+                  <a:prstClr val="white"/>
+                </a:solidFill>
+                <a:latin typeface="微軟正黑體" panose="020B0604030504040204" pitchFamily="34" charset="-120"/>
+                <a:ea typeface="微軟正黑體" panose="020B0604030504040204" pitchFamily="34" charset="-120"/>
+              </a:rPr>
+              <a:t>Transformers</a:t>
+            </a:r>
+            <a:r>
+              <a:rPr lang="zh-TW" altLang="en-US" sz="3200" dirty="0">
+                <a:solidFill>
+                  <a:prstClr val="white"/>
+                </a:solidFill>
+                <a:latin typeface="微軟正黑體" panose="020B0604030504040204" pitchFamily="34" charset="-120"/>
+                <a:ea typeface="微軟正黑體" panose="020B0604030504040204" pitchFamily="34" charset="-120"/>
+              </a:rPr>
+              <a:t>的架構</a:t>
+            </a:r>
+            <a:endParaRPr lang="en-US" altLang="zh-TW" sz="3200" dirty="0">
+              <a:solidFill>
+                <a:prstClr val="white"/>
+              </a:solidFill>
+              <a:latin typeface="微軟正黑體" panose="020B0604030504040204" pitchFamily="34" charset="-120"/>
+              <a:ea typeface="微軟正黑體" panose="020B0604030504040204" pitchFamily="34" charset="-120"/>
+            </a:endParaRPr>
+          </a:p>
+          <a:p>
+            <a:pPr marL="514350" indent="-514350">
+              <a:buFont typeface="Arial" panose="020B0604020202020204" pitchFamily="34" charset="0"/>
+              <a:buChar char="•"/>
+            </a:pPr>
+            <a:endParaRPr lang="en-US" altLang="zh-TW" sz="3200" dirty="0">
+              <a:solidFill>
+                <a:prstClr val="white"/>
+              </a:solidFill>
+              <a:latin typeface="微軟正黑體" panose="020B0604030504040204" pitchFamily="34" charset="-120"/>
+              <a:ea typeface="微軟正黑體" panose="020B0604030504040204" pitchFamily="34" charset="-120"/>
+            </a:endParaRPr>
+          </a:p>
+        </p:txBody>
+      </p:sp>
+      <p:sp>
+        <p:nvSpPr>
+          <p:cNvPr id="4" name="文字版面配置區 2"/>
+          <p:cNvSpPr txBox="1">
+            <a:spLocks/>
+          </p:cNvSpPr>
+          <p:nvPr/>
+        </p:nvSpPr>
+        <p:spPr>
+          <a:xfrm>
+            <a:off x="990600" y="304800"/>
+            <a:ext cx="6705600" cy="990600"/>
+          </a:xfrm>
+          <a:prstGeom prst="rect">
+            <a:avLst/>
+          </a:prstGeom>
+        </p:spPr>
+        <p:txBody>
+          <a:bodyPr tIns="91440" bIns="91440" anchor="b" anchorCtr="0">
+            <a:noAutofit/>
+          </a:bodyPr>
+          <a:lstStyle/>
+          <a:p>
+            <a:pPr algn="just">
+              <a:spcBef>
+                <a:spcPct val="20000"/>
+              </a:spcBef>
+              <a:defRPr/>
+            </a:pPr>
+            <a:r>
+              <a:rPr lang="en-US" altLang="zh-TW" sz="4800" b="1" kern="0" dirty="0">
+                <a:solidFill>
+                  <a:srgbClr val="00B0F0"/>
+                </a:solidFill>
+                <a:effectLst>
+                  <a:outerShdw blurRad="38100" dist="38100" dir="2700000" algn="tl">
+                    <a:srgbClr val="000000">
+                      <a:alpha val="43137"/>
+                    </a:srgbClr>
+                  </a:outerShdw>
+                </a:effectLst>
+                <a:latin typeface="微軟正黑體" panose="020B0604030504040204" pitchFamily="34" charset="-120"/>
+                <a:ea typeface="微軟正黑體" panose="020B0604030504040204" pitchFamily="34" charset="-120"/>
+              </a:rPr>
+              <a:t>2. Transformers</a:t>
+            </a:r>
+            <a:r>
+              <a:rPr lang="zh-TW" altLang="en-US" sz="4800" b="1" kern="0" dirty="0">
+                <a:solidFill>
+                  <a:srgbClr val="00B0F0"/>
+                </a:solidFill>
+                <a:effectLst>
+                  <a:outerShdw blurRad="38100" dist="38100" dir="2700000" algn="tl">
+                    <a:srgbClr val="000000">
+                      <a:alpha val="43137"/>
+                    </a:srgbClr>
+                  </a:outerShdw>
+                </a:effectLst>
+                <a:latin typeface="微軟正黑體" panose="020B0604030504040204" pitchFamily="34" charset="-120"/>
+                <a:ea typeface="微軟正黑體" panose="020B0604030504040204" pitchFamily="34" charset="-120"/>
+              </a:rPr>
+              <a:t>函數庫</a:t>
+            </a:r>
+          </a:p>
+        </p:txBody>
+      </p:sp>
+    </p:spTree>
+    <p:extLst>
+      <p:ext uri="{BB962C8B-B14F-4D97-AF65-F5344CB8AC3E}">
+        <p14:creationId xmlns:p14="http://schemas.microsoft.com/office/powerpoint/2010/main" val="1350932474"/>
+      </p:ext>
+    </p:extLst>
+  </p:cSld>
+  <p:clrMapOvr>
+    <a:masterClrMapping/>
+  </p:clrMapOvr>
+  <p:transition>
+    <p:fade/>
+  </p:transition>
+</p:sld>
+</file>
+
+<file path=ppt/slides/slide20.xml><?xml version="1.0" encoding="utf-8"?>
+<p:sld xmlns:a="http://schemas.openxmlformats.org/drawingml/2006/main" xmlns:r="http://schemas.openxmlformats.org/officeDocument/2006/relationships" xmlns:p="http://schemas.openxmlformats.org/presentationml/2006/main">
+  <p:cSld>
+    <p:spTree>
+      <p:nvGrpSpPr>
+        <p:cNvPr id="1" name=""/>
+        <p:cNvGrpSpPr/>
+        <p:nvPr/>
+      </p:nvGrpSpPr>
+      <p:grpSpPr>
+        <a:xfrm>
+          <a:off x="0" y="0"/>
+          <a:ext cx="0" cy="0"/>
+          <a:chOff x="0" y="0"/>
+          <a:chExt cx="0" cy="0"/>
+        </a:xfrm>
+      </p:grpSpPr>
+      <p:sp>
+        <p:nvSpPr>
+          <p:cNvPr id="5" name="文字方塊 4"/>
+          <p:cNvSpPr txBox="1"/>
+          <p:nvPr/>
+        </p:nvSpPr>
+        <p:spPr>
+          <a:xfrm>
+            <a:off x="609600" y="1295400"/>
+            <a:ext cx="8077200" cy="5509200"/>
+          </a:xfrm>
+          <a:prstGeom prst="rect">
+            <a:avLst/>
+          </a:prstGeom>
+          <a:noFill/>
+        </p:spPr>
+        <p:txBody>
+          <a:bodyPr wrap="square" rtlCol="0">
+            <a:spAutoFit/>
+          </a:bodyPr>
+          <a:lstStyle/>
+          <a:p>
+            <a:pPr marL="514350" indent="-514350">
+              <a:buFont typeface="Arial" panose="020B0604020202020204" pitchFamily="34" charset="0"/>
+              <a:buChar char="•"/>
+            </a:pPr>
+            <a:r>
+              <a:rPr lang="en-US" altLang="zh-TW" sz="3200" dirty="0">
+                <a:solidFill>
+                  <a:prstClr val="white"/>
+                </a:solidFill>
+                <a:latin typeface="微軟正黑體" panose="020B0604030504040204" pitchFamily="34" charset="-120"/>
+                <a:ea typeface="微軟正黑體" panose="020B0604030504040204" pitchFamily="34" charset="-120"/>
+              </a:rPr>
+              <a:t>2019 </a:t>
+            </a:r>
+            <a:r>
+              <a:rPr lang="zh-TW" altLang="en-US" sz="3200" dirty="0">
+                <a:solidFill>
+                  <a:prstClr val="white"/>
+                </a:solidFill>
+                <a:latin typeface="微軟正黑體" panose="020B0604030504040204" pitchFamily="34" charset="-120"/>
+                <a:ea typeface="微軟正黑體" panose="020B0604030504040204" pitchFamily="34" charset="-120"/>
+              </a:rPr>
+              <a:t>年 </a:t>
+            </a:r>
+            <a:r>
+              <a:rPr lang="en-US" altLang="zh-TW" sz="3200" dirty="0">
+                <a:solidFill>
+                  <a:prstClr val="white"/>
+                </a:solidFill>
+                <a:latin typeface="微軟正黑體" panose="020B0604030504040204" pitchFamily="34" charset="-120"/>
+                <a:ea typeface="微軟正黑體" panose="020B0604030504040204" pitchFamily="34" charset="-120"/>
+              </a:rPr>
+              <a:t>2 </a:t>
+            </a:r>
+            <a:r>
+              <a:rPr lang="zh-TW" altLang="en-US" sz="3200" dirty="0">
+                <a:solidFill>
+                  <a:prstClr val="white"/>
+                </a:solidFill>
+                <a:latin typeface="微軟正黑體" panose="020B0604030504040204" pitchFamily="34" charset="-120"/>
+                <a:ea typeface="微軟正黑體" panose="020B0604030504040204" pitchFamily="34" charset="-120"/>
+              </a:rPr>
+              <a:t>月</a:t>
+            </a:r>
+            <a:r>
+              <a:rPr lang="en-US" altLang="zh-TW" sz="3200" dirty="0">
+                <a:solidFill>
+                  <a:prstClr val="white"/>
+                </a:solidFill>
+                <a:latin typeface="微軟正黑體" panose="020B0604030504040204" pitchFamily="34" charset="-120"/>
+                <a:ea typeface="微軟正黑體" panose="020B0604030504040204" pitchFamily="34" charset="-120"/>
+              </a:rPr>
+              <a:t>: GPT-2, GPT </a:t>
+            </a:r>
+            <a:r>
+              <a:rPr lang="zh-TW" altLang="en-US" sz="3200" dirty="0">
+                <a:solidFill>
+                  <a:prstClr val="white"/>
+                </a:solidFill>
+                <a:latin typeface="微軟正黑體" panose="020B0604030504040204" pitchFamily="34" charset="-120"/>
+                <a:ea typeface="微軟正黑體" panose="020B0604030504040204" pitchFamily="34" charset="-120"/>
+              </a:rPr>
+              <a:t>的改進版本，由於道德問題沒有立即公開發布</a:t>
+            </a:r>
+          </a:p>
+          <a:p>
+            <a:pPr marL="514350" indent="-514350">
+              <a:buFont typeface="Arial" panose="020B0604020202020204" pitchFamily="34" charset="0"/>
+              <a:buChar char="•"/>
+            </a:pPr>
+            <a:r>
+              <a:rPr lang="en-US" altLang="zh-TW" sz="3200" dirty="0">
+                <a:solidFill>
+                  <a:prstClr val="white"/>
+                </a:solidFill>
+                <a:latin typeface="微軟正黑體" panose="020B0604030504040204" pitchFamily="34" charset="-120"/>
+                <a:ea typeface="微軟正黑體" panose="020B0604030504040204" pitchFamily="34" charset="-120"/>
+              </a:rPr>
+              <a:t>2019 </a:t>
+            </a:r>
+            <a:r>
+              <a:rPr lang="zh-TW" altLang="en-US" sz="3200" dirty="0">
+                <a:solidFill>
+                  <a:prstClr val="white"/>
+                </a:solidFill>
+                <a:latin typeface="微軟正黑體" panose="020B0604030504040204" pitchFamily="34" charset="-120"/>
+                <a:ea typeface="微軟正黑體" panose="020B0604030504040204" pitchFamily="34" charset="-120"/>
+              </a:rPr>
+              <a:t>年 </a:t>
+            </a:r>
+            <a:r>
+              <a:rPr lang="en-US" altLang="zh-TW" sz="3200" dirty="0">
+                <a:solidFill>
+                  <a:prstClr val="white"/>
+                </a:solidFill>
+                <a:latin typeface="微軟正黑體" panose="020B0604030504040204" pitchFamily="34" charset="-120"/>
+                <a:ea typeface="微軟正黑體" panose="020B0604030504040204" pitchFamily="34" charset="-120"/>
+              </a:rPr>
+              <a:t>10 </a:t>
+            </a:r>
+            <a:r>
+              <a:rPr lang="zh-TW" altLang="en-US" sz="3200" dirty="0">
+                <a:solidFill>
+                  <a:prstClr val="white"/>
+                </a:solidFill>
+                <a:latin typeface="微軟正黑體" panose="020B0604030504040204" pitchFamily="34" charset="-120"/>
+                <a:ea typeface="微軟正黑體" panose="020B0604030504040204" pitchFamily="34" charset="-120"/>
+              </a:rPr>
+              <a:t>月</a:t>
+            </a:r>
+            <a:r>
+              <a:rPr lang="en-US" altLang="zh-TW" sz="3200" dirty="0">
+                <a:solidFill>
+                  <a:prstClr val="white"/>
+                </a:solidFill>
+                <a:latin typeface="微軟正黑體" panose="020B0604030504040204" pitchFamily="34" charset="-120"/>
+                <a:ea typeface="微軟正黑體" panose="020B0604030504040204" pitchFamily="34" charset="-120"/>
+              </a:rPr>
+              <a:t>: </a:t>
+            </a:r>
+            <a:r>
+              <a:rPr lang="en-US" altLang="zh-TW" sz="3200" dirty="0" err="1">
+                <a:solidFill>
+                  <a:prstClr val="white"/>
+                </a:solidFill>
+                <a:latin typeface="微軟正黑體" panose="020B0604030504040204" pitchFamily="34" charset="-120"/>
+                <a:ea typeface="微軟正黑體" panose="020B0604030504040204" pitchFamily="34" charset="-120"/>
+              </a:rPr>
+              <a:t>DistilBERT</a:t>
+            </a:r>
+            <a:r>
+              <a:rPr lang="en-US" altLang="zh-TW" sz="3200" dirty="0">
+                <a:solidFill>
+                  <a:prstClr val="white"/>
+                </a:solidFill>
+                <a:latin typeface="微軟正黑體" panose="020B0604030504040204" pitchFamily="34" charset="-120"/>
+                <a:ea typeface="微軟正黑體" panose="020B0604030504040204" pitchFamily="34" charset="-120"/>
+              </a:rPr>
+              <a:t>, BERT </a:t>
+            </a:r>
+            <a:r>
+              <a:rPr lang="zh-TW" altLang="en-US" sz="3200" dirty="0">
+                <a:solidFill>
+                  <a:prstClr val="white"/>
+                </a:solidFill>
+                <a:latin typeface="微軟正黑體" panose="020B0604030504040204" pitchFamily="34" charset="-120"/>
+                <a:ea typeface="微軟正黑體" panose="020B0604030504040204" pitchFamily="34" charset="-120"/>
+              </a:rPr>
+              <a:t>的提煉版本，速度提高 </a:t>
+            </a:r>
+            <a:r>
+              <a:rPr lang="en-US" altLang="zh-TW" sz="3200" dirty="0">
+                <a:solidFill>
+                  <a:prstClr val="white"/>
+                </a:solidFill>
+                <a:latin typeface="微軟正黑體" panose="020B0604030504040204" pitchFamily="34" charset="-120"/>
+                <a:ea typeface="微軟正黑體" panose="020B0604030504040204" pitchFamily="34" charset="-120"/>
+              </a:rPr>
+              <a:t>60%</a:t>
+            </a:r>
+            <a:r>
+              <a:rPr lang="zh-TW" altLang="en-US" sz="3200" dirty="0">
+                <a:solidFill>
+                  <a:prstClr val="white"/>
+                </a:solidFill>
+                <a:latin typeface="微軟正黑體" panose="020B0604030504040204" pitchFamily="34" charset="-120"/>
+                <a:ea typeface="微軟正黑體" panose="020B0604030504040204" pitchFamily="34" charset="-120"/>
+              </a:rPr>
+              <a:t>，記憶體減輕 </a:t>
+            </a:r>
+            <a:r>
+              <a:rPr lang="en-US" altLang="zh-TW" sz="3200" dirty="0">
+                <a:solidFill>
+                  <a:prstClr val="white"/>
+                </a:solidFill>
+                <a:latin typeface="微軟正黑體" panose="020B0604030504040204" pitchFamily="34" charset="-120"/>
+                <a:ea typeface="微軟正黑體" panose="020B0604030504040204" pitchFamily="34" charset="-120"/>
+              </a:rPr>
+              <a:t>40%</a:t>
+            </a:r>
+            <a:r>
+              <a:rPr lang="zh-TW" altLang="en-US" sz="3200" dirty="0">
+                <a:solidFill>
+                  <a:prstClr val="white"/>
+                </a:solidFill>
+                <a:latin typeface="微軟正黑體" panose="020B0604030504040204" pitchFamily="34" charset="-120"/>
+                <a:ea typeface="微軟正黑體" panose="020B0604030504040204" pitchFamily="34" charset="-120"/>
+              </a:rPr>
+              <a:t>，但仍保留 </a:t>
+            </a:r>
+            <a:r>
+              <a:rPr lang="en-US" altLang="zh-TW" sz="3200" dirty="0">
+                <a:solidFill>
+                  <a:prstClr val="white"/>
+                </a:solidFill>
+                <a:latin typeface="微軟正黑體" panose="020B0604030504040204" pitchFamily="34" charset="-120"/>
+                <a:ea typeface="微軟正黑體" panose="020B0604030504040204" pitchFamily="34" charset="-120"/>
+              </a:rPr>
+              <a:t>BERT 97% </a:t>
+            </a:r>
+            <a:r>
+              <a:rPr lang="zh-TW" altLang="en-US" sz="3200" dirty="0">
+                <a:solidFill>
+                  <a:prstClr val="white"/>
+                </a:solidFill>
+                <a:latin typeface="微軟正黑體" panose="020B0604030504040204" pitchFamily="34" charset="-120"/>
+                <a:ea typeface="微軟正黑體" panose="020B0604030504040204" pitchFamily="34" charset="-120"/>
+              </a:rPr>
+              <a:t>的性能</a:t>
+            </a:r>
+          </a:p>
+          <a:p>
+            <a:pPr marL="514350" indent="-514350">
+              <a:buFont typeface="Arial" panose="020B0604020202020204" pitchFamily="34" charset="0"/>
+              <a:buChar char="•"/>
+            </a:pPr>
+            <a:r>
+              <a:rPr lang="en-US" altLang="zh-TW" sz="3200" dirty="0">
+                <a:solidFill>
+                  <a:prstClr val="white"/>
+                </a:solidFill>
+                <a:latin typeface="微軟正黑體" panose="020B0604030504040204" pitchFamily="34" charset="-120"/>
+                <a:ea typeface="微軟正黑體" panose="020B0604030504040204" pitchFamily="34" charset="-120"/>
+              </a:rPr>
+              <a:t>2019 </a:t>
+            </a:r>
+            <a:r>
+              <a:rPr lang="zh-TW" altLang="en-US" sz="3200" dirty="0">
+                <a:solidFill>
+                  <a:prstClr val="white"/>
+                </a:solidFill>
+                <a:latin typeface="微軟正黑體" panose="020B0604030504040204" pitchFamily="34" charset="-120"/>
+                <a:ea typeface="微軟正黑體" panose="020B0604030504040204" pitchFamily="34" charset="-120"/>
+              </a:rPr>
+              <a:t>年 </a:t>
+            </a:r>
+            <a:r>
+              <a:rPr lang="en-US" altLang="zh-TW" sz="3200" dirty="0">
+                <a:solidFill>
+                  <a:prstClr val="white"/>
+                </a:solidFill>
+                <a:latin typeface="微軟正黑體" panose="020B0604030504040204" pitchFamily="34" charset="-120"/>
+                <a:ea typeface="微軟正黑體" panose="020B0604030504040204" pitchFamily="34" charset="-120"/>
+              </a:rPr>
+              <a:t>10 </a:t>
+            </a:r>
+            <a:r>
+              <a:rPr lang="zh-TW" altLang="en-US" sz="3200" dirty="0">
+                <a:solidFill>
+                  <a:prstClr val="white"/>
+                </a:solidFill>
+                <a:latin typeface="微軟正黑體" panose="020B0604030504040204" pitchFamily="34" charset="-120"/>
+                <a:ea typeface="微軟正黑體" panose="020B0604030504040204" pitchFamily="34" charset="-120"/>
+              </a:rPr>
+              <a:t>月</a:t>
+            </a:r>
+            <a:r>
+              <a:rPr lang="en-US" altLang="zh-TW" sz="3200" dirty="0">
+                <a:solidFill>
+                  <a:prstClr val="white"/>
+                </a:solidFill>
+                <a:latin typeface="微軟正黑體" panose="020B0604030504040204" pitchFamily="34" charset="-120"/>
+                <a:ea typeface="微軟正黑體" panose="020B0604030504040204" pitchFamily="34" charset="-120"/>
+              </a:rPr>
+              <a:t>: BART </a:t>
+            </a:r>
+            <a:r>
+              <a:rPr lang="zh-TW" altLang="en-US" sz="3200" dirty="0">
+                <a:solidFill>
+                  <a:prstClr val="white"/>
+                </a:solidFill>
+                <a:latin typeface="微軟正黑體" panose="020B0604030504040204" pitchFamily="34" charset="-120"/>
+                <a:ea typeface="微軟正黑體" panose="020B0604030504040204" pitchFamily="34" charset="-120"/>
+              </a:rPr>
+              <a:t>和 </a:t>
+            </a:r>
+            <a:r>
+              <a:rPr lang="en-US" altLang="zh-TW" sz="3200" dirty="0">
+                <a:solidFill>
+                  <a:prstClr val="white"/>
+                </a:solidFill>
+                <a:latin typeface="微軟正黑體" panose="020B0604030504040204" pitchFamily="34" charset="-120"/>
+                <a:ea typeface="微軟正黑體" panose="020B0604030504040204" pitchFamily="34" charset="-120"/>
+              </a:rPr>
+              <a:t>T5, </a:t>
+            </a:r>
+            <a:r>
+              <a:rPr lang="zh-TW" altLang="en-US" sz="3200" dirty="0">
+                <a:solidFill>
+                  <a:prstClr val="white"/>
+                </a:solidFill>
+                <a:latin typeface="微軟正黑體" panose="020B0604030504040204" pitchFamily="34" charset="-120"/>
+                <a:ea typeface="微軟正黑體" panose="020B0604030504040204" pitchFamily="34" charset="-120"/>
+              </a:rPr>
+              <a:t>兩個使用與原始 </a:t>
+            </a:r>
+            <a:r>
+              <a:rPr lang="en-US" altLang="zh-TW" sz="3200" dirty="0">
+                <a:solidFill>
+                  <a:prstClr val="white"/>
+                </a:solidFill>
+                <a:latin typeface="微軟正黑體" panose="020B0604030504040204" pitchFamily="34" charset="-120"/>
+                <a:ea typeface="微軟正黑體" panose="020B0604030504040204" pitchFamily="34" charset="-120"/>
+              </a:rPr>
+              <a:t>Transformer </a:t>
+            </a:r>
+            <a:r>
+              <a:rPr lang="zh-TW" altLang="en-US" sz="3200" dirty="0">
+                <a:solidFill>
+                  <a:prstClr val="white"/>
+                </a:solidFill>
+                <a:latin typeface="微軟正黑體" panose="020B0604030504040204" pitchFamily="34" charset="-120"/>
+                <a:ea typeface="微軟正黑體" panose="020B0604030504040204" pitchFamily="34" charset="-120"/>
+              </a:rPr>
+              <a:t>模型相同架構的大型預訓練模型</a:t>
+            </a:r>
+            <a:endParaRPr lang="en-US" altLang="zh-TW" sz="3200" dirty="0">
+              <a:solidFill>
+                <a:prstClr val="white"/>
+              </a:solidFill>
+              <a:latin typeface="微軟正黑體" panose="020B0604030504040204" pitchFamily="34" charset="-120"/>
+              <a:ea typeface="微軟正黑體" panose="020B0604030504040204" pitchFamily="34" charset="-120"/>
+            </a:endParaRPr>
+          </a:p>
+          <a:p>
+            <a:pPr marL="514350" indent="-514350">
+              <a:buFont typeface="Arial" panose="020B0604020202020204" pitchFamily="34" charset="0"/>
+              <a:buChar char="•"/>
+            </a:pPr>
+            <a:r>
+              <a:rPr lang="en-US" altLang="zh-TW" sz="3200" dirty="0">
+                <a:solidFill>
+                  <a:prstClr val="white"/>
+                </a:solidFill>
+                <a:latin typeface="微軟正黑體" panose="020B0604030504040204" pitchFamily="34" charset="-120"/>
+                <a:ea typeface="微軟正黑體" panose="020B0604030504040204" pitchFamily="34" charset="-120"/>
+              </a:rPr>
+              <a:t>2020 </a:t>
+            </a:r>
+            <a:r>
+              <a:rPr lang="zh-TW" altLang="en-US" sz="3200" dirty="0">
+                <a:solidFill>
+                  <a:prstClr val="white"/>
+                </a:solidFill>
+                <a:latin typeface="微軟正黑體" panose="020B0604030504040204" pitchFamily="34" charset="-120"/>
+                <a:ea typeface="微軟正黑體" panose="020B0604030504040204" pitchFamily="34" charset="-120"/>
+              </a:rPr>
+              <a:t>年 </a:t>
+            </a:r>
+            <a:r>
+              <a:rPr lang="en-US" altLang="zh-TW" sz="3200" dirty="0">
+                <a:solidFill>
+                  <a:prstClr val="white"/>
+                </a:solidFill>
+                <a:latin typeface="微軟正黑體" panose="020B0604030504040204" pitchFamily="34" charset="-120"/>
+                <a:ea typeface="微軟正黑體" panose="020B0604030504040204" pitchFamily="34" charset="-120"/>
+              </a:rPr>
+              <a:t>5 </a:t>
+            </a:r>
+            <a:r>
+              <a:rPr lang="zh-TW" altLang="en-US" sz="3200" dirty="0">
+                <a:solidFill>
+                  <a:prstClr val="white"/>
+                </a:solidFill>
+                <a:latin typeface="微軟正黑體" panose="020B0604030504040204" pitchFamily="34" charset="-120"/>
+                <a:ea typeface="微軟正黑體" panose="020B0604030504040204" pitchFamily="34" charset="-120"/>
+              </a:rPr>
+              <a:t>月</a:t>
+            </a:r>
+            <a:r>
+              <a:rPr lang="en-US" altLang="zh-TW" sz="3200" dirty="0">
+                <a:solidFill>
+                  <a:prstClr val="white"/>
+                </a:solidFill>
+                <a:latin typeface="微軟正黑體" panose="020B0604030504040204" pitchFamily="34" charset="-120"/>
+                <a:ea typeface="微軟正黑體" panose="020B0604030504040204" pitchFamily="34" charset="-120"/>
+              </a:rPr>
+              <a:t>, GPT-3, GPT-2 </a:t>
+            </a:r>
+            <a:r>
+              <a:rPr lang="zh-TW" altLang="en-US" sz="3200" dirty="0">
+                <a:solidFill>
+                  <a:prstClr val="white"/>
+                </a:solidFill>
+                <a:latin typeface="微軟正黑體" panose="020B0604030504040204" pitchFamily="34" charset="-120"/>
+                <a:ea typeface="微軟正黑體" panose="020B0604030504040204" pitchFamily="34" charset="-120"/>
+              </a:rPr>
+              <a:t>的更大版本，無需微調即可在各種任務上表現良好（稱爲零樣本學習）</a:t>
+            </a:r>
+            <a:endParaRPr lang="en-US" altLang="zh-TW" sz="3200" dirty="0">
+              <a:solidFill>
+                <a:prstClr val="white"/>
+              </a:solidFill>
+              <a:latin typeface="微軟正黑體" panose="020B0604030504040204" pitchFamily="34" charset="-120"/>
+              <a:ea typeface="微軟正黑體" panose="020B0604030504040204" pitchFamily="34" charset="-120"/>
+            </a:endParaRPr>
+          </a:p>
+        </p:txBody>
+      </p:sp>
+      <p:sp>
+        <p:nvSpPr>
+          <p:cNvPr id="4" name="文字版面配置區 2"/>
+          <p:cNvSpPr txBox="1">
+            <a:spLocks/>
+          </p:cNvSpPr>
+          <p:nvPr/>
+        </p:nvSpPr>
+        <p:spPr>
+          <a:xfrm>
+            <a:off x="990600" y="152400"/>
+            <a:ext cx="7696200" cy="990600"/>
+          </a:xfrm>
+          <a:prstGeom prst="rect">
+            <a:avLst/>
+          </a:prstGeom>
+        </p:spPr>
+        <p:txBody>
+          <a:bodyPr tIns="91440" bIns="91440" anchor="b" anchorCtr="0">
+            <a:noAutofit/>
+          </a:bodyPr>
+          <a:lstStyle/>
+          <a:p>
+            <a:pPr algn="just">
+              <a:spcBef>
+                <a:spcPct val="20000"/>
+              </a:spcBef>
+              <a:defRPr/>
+            </a:pPr>
+            <a:r>
+              <a:rPr lang="en-US" altLang="zh-TW" sz="4800" b="1" kern="0" dirty="0">
+                <a:solidFill>
+                  <a:srgbClr val="00B0F0"/>
+                </a:solidFill>
+                <a:effectLst>
+                  <a:outerShdw blurRad="38100" dist="38100" dir="2700000" algn="tl">
+                    <a:srgbClr val="000000">
+                      <a:alpha val="43137"/>
+                    </a:srgbClr>
+                  </a:outerShdw>
+                </a:effectLst>
+                <a:latin typeface="微軟正黑體" panose="020B0604030504040204" pitchFamily="34" charset="-120"/>
+                <a:ea typeface="微軟正黑體" panose="020B0604030504040204" pitchFamily="34" charset="-120"/>
+              </a:rPr>
+              <a:t>Transformer </a:t>
+            </a:r>
+            <a:r>
+              <a:rPr lang="zh-TW" altLang="en-US" sz="4800" b="1" kern="0" dirty="0">
+                <a:solidFill>
+                  <a:srgbClr val="00B0F0"/>
+                </a:solidFill>
+                <a:effectLst>
+                  <a:outerShdw blurRad="38100" dist="38100" dir="2700000" algn="tl">
+                    <a:srgbClr val="000000">
+                      <a:alpha val="43137"/>
+                    </a:srgbClr>
+                  </a:outerShdw>
+                </a:effectLst>
+                <a:latin typeface="微軟正黑體" panose="020B0604030504040204" pitchFamily="34" charset="-120"/>
+                <a:ea typeface="微軟正黑體" panose="020B0604030504040204" pitchFamily="34" charset="-120"/>
+              </a:rPr>
+              <a:t>架構 </a:t>
+            </a:r>
+          </a:p>
+        </p:txBody>
+      </p:sp>
+    </p:spTree>
+    <p:extLst>
+      <p:ext uri="{BB962C8B-B14F-4D97-AF65-F5344CB8AC3E}">
+        <p14:creationId xmlns:p14="http://schemas.microsoft.com/office/powerpoint/2010/main" val="502793792"/>
+      </p:ext>
+    </p:extLst>
+  </p:cSld>
+  <p:clrMapOvr>
+    <a:masterClrMapping/>
+  </p:clrMapOvr>
+  <p:transition>
+    <p:fade/>
+  </p:transition>
+</p:sld>
+</file>
+
+<file path=ppt/slides/slide21.xml><?xml version="1.0" encoding="utf-8"?>
+<p:sld xmlns:a="http://schemas.openxmlformats.org/drawingml/2006/main" xmlns:r="http://schemas.openxmlformats.org/officeDocument/2006/relationships" xmlns:p="http://schemas.openxmlformats.org/presentationml/2006/main">
+  <p:cSld>
+    <p:spTree>
+      <p:nvGrpSpPr>
+        <p:cNvPr id="1" name=""/>
+        <p:cNvGrpSpPr/>
+        <p:nvPr/>
+      </p:nvGrpSpPr>
+      <p:grpSpPr>
+        <a:xfrm>
+          <a:off x="0" y="0"/>
+          <a:ext cx="0" cy="0"/>
+          <a:chOff x="0" y="0"/>
+          <a:chExt cx="0" cy="0"/>
+        </a:xfrm>
+      </p:grpSpPr>
+      <p:sp>
+        <p:nvSpPr>
+          <p:cNvPr id="5" name="文字方塊 4"/>
+          <p:cNvSpPr txBox="1"/>
+          <p:nvPr/>
+        </p:nvSpPr>
+        <p:spPr>
+          <a:xfrm>
+            <a:off x="386862" y="1600202"/>
+            <a:ext cx="8299938" cy="2554545"/>
+          </a:xfrm>
+          <a:prstGeom prst="rect">
+            <a:avLst/>
+          </a:prstGeom>
+          <a:noFill/>
+        </p:spPr>
+        <p:txBody>
+          <a:bodyPr wrap="square" rtlCol="0">
+            <a:spAutoFit/>
+          </a:bodyPr>
+          <a:lstStyle/>
+          <a:p>
+            <a:pPr marL="514350" indent="-514350">
+              <a:buFont typeface="Arial" panose="020B0604020202020204" pitchFamily="34" charset="0"/>
+              <a:buChar char="•"/>
+            </a:pPr>
+            <a:r>
+              <a:rPr lang="zh-TW" altLang="en-US" sz="3200" dirty="0">
+                <a:solidFill>
+                  <a:prstClr val="white"/>
+                </a:solidFill>
+                <a:latin typeface="微軟正黑體" panose="020B0604030504040204" pitchFamily="34" charset="-120"/>
+                <a:ea typeface="微軟正黑體" panose="020B0604030504040204" pitchFamily="34" charset="-120"/>
+              </a:rPr>
+              <a:t>大致分爲三類：</a:t>
+            </a:r>
+          </a:p>
+          <a:p>
+            <a:pPr marL="514350" indent="-514350">
+              <a:buFont typeface="Arial" panose="020B0604020202020204" pitchFamily="34" charset="0"/>
+              <a:buChar char="•"/>
+            </a:pPr>
+            <a:endParaRPr lang="zh-TW" altLang="en-US" sz="3200" dirty="0">
+              <a:solidFill>
+                <a:prstClr val="white"/>
+              </a:solidFill>
+              <a:latin typeface="微軟正黑體" panose="020B0604030504040204" pitchFamily="34" charset="-120"/>
+              <a:ea typeface="微軟正黑體" panose="020B0604030504040204" pitchFamily="34" charset="-120"/>
+            </a:endParaRPr>
+          </a:p>
+          <a:p>
+            <a:pPr marL="514350" indent="-514350">
+              <a:buFont typeface="Arial" panose="020B0604020202020204" pitchFamily="34" charset="0"/>
+              <a:buChar char="•"/>
+            </a:pPr>
+            <a:r>
+              <a:rPr lang="en-US" altLang="zh-TW" sz="3200" dirty="0">
+                <a:solidFill>
+                  <a:prstClr val="white"/>
+                </a:solidFill>
+                <a:latin typeface="微軟正黑體" panose="020B0604030504040204" pitchFamily="34" charset="-120"/>
+                <a:ea typeface="微軟正黑體" panose="020B0604030504040204" pitchFamily="34" charset="-120"/>
+              </a:rPr>
+              <a:t>GPT-like (</a:t>
+            </a:r>
+            <a:r>
+              <a:rPr lang="zh-TW" altLang="en-US" sz="3200" dirty="0">
+                <a:solidFill>
+                  <a:prstClr val="white"/>
+                </a:solidFill>
+                <a:latin typeface="微軟正黑體" panose="020B0604030504040204" pitchFamily="34" charset="-120"/>
+                <a:ea typeface="微軟正黑體" panose="020B0604030504040204" pitchFamily="34" charset="-120"/>
+              </a:rPr>
+              <a:t>自迴歸模型，生成，極大</a:t>
+            </a:r>
+            <a:r>
+              <a:rPr lang="en-US" altLang="zh-TW" sz="3200" dirty="0">
+                <a:solidFill>
+                  <a:prstClr val="white"/>
+                </a:solidFill>
+                <a:latin typeface="微軟正黑體" panose="020B0604030504040204" pitchFamily="34" charset="-120"/>
+                <a:ea typeface="微軟正黑體" panose="020B0604030504040204" pitchFamily="34" charset="-120"/>
+              </a:rPr>
+              <a:t>)</a:t>
+            </a:r>
+          </a:p>
+          <a:p>
+            <a:pPr marL="514350" indent="-514350">
+              <a:buFont typeface="Arial" panose="020B0604020202020204" pitchFamily="34" charset="0"/>
+              <a:buChar char="•"/>
+            </a:pPr>
+            <a:r>
+              <a:rPr lang="en-US" altLang="zh-TW" sz="3200" dirty="0">
+                <a:solidFill>
+                  <a:prstClr val="white"/>
+                </a:solidFill>
+                <a:latin typeface="微軟正黑體" panose="020B0604030504040204" pitchFamily="34" charset="-120"/>
+                <a:ea typeface="微軟正黑體" panose="020B0604030504040204" pitchFamily="34" charset="-120"/>
+              </a:rPr>
+              <a:t>BERT-like (</a:t>
+            </a:r>
+            <a:r>
+              <a:rPr lang="zh-TW" altLang="en-US" sz="3200" dirty="0">
+                <a:solidFill>
+                  <a:prstClr val="white"/>
+                </a:solidFill>
+                <a:latin typeface="微軟正黑體" panose="020B0604030504040204" pitchFamily="34" charset="-120"/>
+                <a:ea typeface="微軟正黑體" panose="020B0604030504040204" pitchFamily="34" charset="-120"/>
+              </a:rPr>
+              <a:t>自動編碼模型，理解，極小</a:t>
+            </a:r>
+            <a:r>
+              <a:rPr lang="en-US" altLang="zh-TW" sz="3200" dirty="0">
+                <a:solidFill>
+                  <a:prstClr val="white"/>
+                </a:solidFill>
+                <a:latin typeface="微軟正黑體" panose="020B0604030504040204" pitchFamily="34" charset="-120"/>
+                <a:ea typeface="微軟正黑體" panose="020B0604030504040204" pitchFamily="34" charset="-120"/>
+              </a:rPr>
+              <a:t>)</a:t>
+            </a:r>
+          </a:p>
+          <a:p>
+            <a:pPr marL="514350" indent="-514350">
+              <a:buFont typeface="Arial" panose="020B0604020202020204" pitchFamily="34" charset="0"/>
+              <a:buChar char="•"/>
+            </a:pPr>
+            <a:r>
+              <a:rPr lang="en-US" altLang="zh-TW" sz="3200" dirty="0">
+                <a:solidFill>
+                  <a:prstClr val="white"/>
+                </a:solidFill>
+                <a:latin typeface="微軟正黑體" panose="020B0604030504040204" pitchFamily="34" charset="-120"/>
+                <a:ea typeface="微軟正黑體" panose="020B0604030504040204" pitchFamily="34" charset="-120"/>
+              </a:rPr>
+              <a:t>BART/T5-like (</a:t>
+            </a:r>
+            <a:r>
+              <a:rPr lang="zh-TW" altLang="en-US" sz="3200" dirty="0">
+                <a:solidFill>
+                  <a:prstClr val="white"/>
+                </a:solidFill>
+                <a:latin typeface="微軟正黑體" panose="020B0604030504040204" pitchFamily="34" charset="-120"/>
+                <a:ea typeface="微軟正黑體" panose="020B0604030504040204" pitchFamily="34" charset="-120"/>
+              </a:rPr>
+              <a:t>序列到序列模型，翻譯，大</a:t>
+            </a:r>
+            <a:r>
+              <a:rPr lang="en-US" altLang="zh-TW" sz="3200" dirty="0">
+                <a:solidFill>
+                  <a:prstClr val="white"/>
+                </a:solidFill>
+                <a:latin typeface="微軟正黑體" panose="020B0604030504040204" pitchFamily="34" charset="-120"/>
+                <a:ea typeface="微軟正黑體" panose="020B0604030504040204" pitchFamily="34" charset="-120"/>
+              </a:rPr>
+              <a:t>)</a:t>
+            </a:r>
+            <a:endParaRPr lang="zh-TW" altLang="en-US" sz="3200" dirty="0">
+              <a:solidFill>
+                <a:prstClr val="white"/>
+              </a:solidFill>
+              <a:latin typeface="微軟正黑體" panose="020B0604030504040204" pitchFamily="34" charset="-120"/>
+              <a:ea typeface="微軟正黑體" panose="020B0604030504040204" pitchFamily="34" charset="-120"/>
+            </a:endParaRPr>
+          </a:p>
+        </p:txBody>
+      </p:sp>
+      <p:sp>
+        <p:nvSpPr>
+          <p:cNvPr id="4" name="文字版面配置區 2"/>
+          <p:cNvSpPr txBox="1">
+            <a:spLocks/>
+          </p:cNvSpPr>
+          <p:nvPr/>
+        </p:nvSpPr>
+        <p:spPr>
+          <a:xfrm>
+            <a:off x="990600" y="304800"/>
+            <a:ext cx="7696200" cy="990600"/>
+          </a:xfrm>
+          <a:prstGeom prst="rect">
+            <a:avLst/>
+          </a:prstGeom>
+        </p:spPr>
+        <p:txBody>
+          <a:bodyPr tIns="91440" bIns="91440" anchor="b" anchorCtr="0">
+            <a:noAutofit/>
+          </a:bodyPr>
+          <a:lstStyle/>
+          <a:p>
+            <a:pPr algn="just">
+              <a:spcBef>
+                <a:spcPct val="20000"/>
+              </a:spcBef>
+              <a:defRPr/>
+            </a:pPr>
+            <a:r>
+              <a:rPr lang="en-US" altLang="zh-TW" sz="4800" b="1" kern="0" dirty="0">
+                <a:solidFill>
+                  <a:srgbClr val="00B0F0"/>
+                </a:solidFill>
+                <a:effectLst>
+                  <a:outerShdw blurRad="38100" dist="38100" dir="2700000" algn="tl">
+                    <a:srgbClr val="000000">
+                      <a:alpha val="43137"/>
+                    </a:srgbClr>
+                  </a:outerShdw>
+                </a:effectLst>
+                <a:latin typeface="微軟正黑體" panose="020B0604030504040204" pitchFamily="34" charset="-120"/>
+                <a:ea typeface="微軟正黑體" panose="020B0604030504040204" pitchFamily="34" charset="-120"/>
+              </a:rPr>
+              <a:t>Transformer </a:t>
+            </a:r>
+            <a:r>
+              <a:rPr lang="zh-TW" altLang="en-US" sz="4800" b="1" kern="0" dirty="0">
+                <a:solidFill>
+                  <a:srgbClr val="00B0F0"/>
+                </a:solidFill>
+                <a:effectLst>
+                  <a:outerShdw blurRad="38100" dist="38100" dir="2700000" algn="tl">
+                    <a:srgbClr val="000000">
+                      <a:alpha val="43137"/>
+                    </a:srgbClr>
+                  </a:outerShdw>
+                </a:effectLst>
+                <a:latin typeface="微軟正黑體" panose="020B0604030504040204" pitchFamily="34" charset="-120"/>
+                <a:ea typeface="微軟正黑體" panose="020B0604030504040204" pitchFamily="34" charset="-120"/>
+              </a:rPr>
+              <a:t>架構 </a:t>
+            </a:r>
+          </a:p>
+        </p:txBody>
+      </p:sp>
+    </p:spTree>
+    <p:extLst>
+      <p:ext uri="{BB962C8B-B14F-4D97-AF65-F5344CB8AC3E}">
+        <p14:creationId xmlns:p14="http://schemas.microsoft.com/office/powerpoint/2010/main" val="4008650663"/>
+      </p:ext>
+    </p:extLst>
+  </p:cSld>
+  <p:clrMapOvr>
+    <a:masterClrMapping/>
+  </p:clrMapOvr>
+  <p:transition>
+    <p:fade/>
+  </p:transition>
+</p:sld>
+</file>
+
+<file path=ppt/slides/slide22.xml><?xml version="1.0" encoding="utf-8"?>
+<p:sld xmlns:a="http://schemas.openxmlformats.org/drawingml/2006/main" xmlns:r="http://schemas.openxmlformats.org/officeDocument/2006/relationships" xmlns:p="http://schemas.openxmlformats.org/presentationml/2006/main">
+  <p:cSld>
+    <p:spTree>
+      <p:nvGrpSpPr>
+        <p:cNvPr id="1" name=""/>
+        <p:cNvGrpSpPr/>
+        <p:nvPr/>
+      </p:nvGrpSpPr>
+      <p:grpSpPr>
+        <a:xfrm>
+          <a:off x="0" y="0"/>
+          <a:ext cx="0" cy="0"/>
+          <a:chOff x="0" y="0"/>
+          <a:chExt cx="0" cy="0"/>
+        </a:xfrm>
+      </p:grpSpPr>
+      <p:sp>
+        <p:nvSpPr>
+          <p:cNvPr id="5" name="文字方塊 4"/>
+          <p:cNvSpPr txBox="1"/>
+          <p:nvPr/>
+        </p:nvSpPr>
+        <p:spPr>
+          <a:xfrm>
+            <a:off x="609600" y="1600200"/>
+            <a:ext cx="8077200" cy="3539430"/>
+          </a:xfrm>
+          <a:prstGeom prst="rect">
+            <a:avLst/>
+          </a:prstGeom>
+          <a:noFill/>
+        </p:spPr>
+        <p:txBody>
+          <a:bodyPr wrap="square" rtlCol="0">
+            <a:spAutoFit/>
+          </a:bodyPr>
+          <a:lstStyle/>
+          <a:p>
+            <a:pPr marL="514350" indent="-514350">
+              <a:buFont typeface="Arial" panose="020B0604020202020204" pitchFamily="34" charset="0"/>
+              <a:buChar char="•"/>
+            </a:pPr>
+            <a:r>
+              <a:rPr lang="zh-TW" altLang="en-US" sz="3200" dirty="0">
+                <a:solidFill>
+                  <a:prstClr val="white"/>
+                </a:solidFill>
+                <a:latin typeface="微軟正黑體" panose="020B0604030504040204" pitchFamily="34" charset="-120"/>
+                <a:ea typeface="微軟正黑體" panose="020B0604030504040204" pitchFamily="34" charset="-120"/>
+              </a:rPr>
+              <a:t>所有 </a:t>
+            </a:r>
+            <a:r>
+              <a:rPr lang="en-US" altLang="zh-TW" sz="3200" dirty="0">
+                <a:solidFill>
+                  <a:prstClr val="white"/>
+                </a:solidFill>
+                <a:latin typeface="微軟正黑體" panose="020B0604030504040204" pitchFamily="34" charset="-120"/>
+                <a:ea typeface="微軟正黑體" panose="020B0604030504040204" pitchFamily="34" charset="-120"/>
+              </a:rPr>
+              <a:t>Transformer </a:t>
+            </a:r>
+            <a:r>
+              <a:rPr lang="zh-TW" altLang="en-US" sz="3200" dirty="0">
+                <a:solidFill>
+                  <a:prstClr val="white"/>
+                </a:solidFill>
+                <a:latin typeface="微軟正黑體" panose="020B0604030504040204" pitchFamily="34" charset="-120"/>
+                <a:ea typeface="微軟正黑體" panose="020B0604030504040204" pitchFamily="34" charset="-120"/>
+              </a:rPr>
+              <a:t>模型（</a:t>
+            </a:r>
+            <a:r>
+              <a:rPr lang="en-US" altLang="zh-TW" sz="3200" dirty="0">
+                <a:solidFill>
+                  <a:prstClr val="white"/>
+                </a:solidFill>
+                <a:latin typeface="微軟正黑體" panose="020B0604030504040204" pitchFamily="34" charset="-120"/>
+                <a:ea typeface="微軟正黑體" panose="020B0604030504040204" pitchFamily="34" charset="-120"/>
+              </a:rPr>
+              <a:t>GPT</a:t>
+            </a:r>
+            <a:r>
+              <a:rPr lang="zh-TW" altLang="en-US" sz="3200" dirty="0">
+                <a:solidFill>
+                  <a:prstClr val="white"/>
+                </a:solidFill>
+                <a:latin typeface="微軟正黑體" panose="020B0604030504040204" pitchFamily="34" charset="-120"/>
+                <a:ea typeface="微軟正黑體" panose="020B0604030504040204" pitchFamily="34" charset="-120"/>
+              </a:rPr>
+              <a:t>、</a:t>
+            </a:r>
+            <a:r>
+              <a:rPr lang="en-US" altLang="zh-TW" sz="3200" dirty="0">
+                <a:solidFill>
+                  <a:prstClr val="white"/>
+                </a:solidFill>
+                <a:latin typeface="微軟正黑體" panose="020B0604030504040204" pitchFamily="34" charset="-120"/>
+                <a:ea typeface="微軟正黑體" panose="020B0604030504040204" pitchFamily="34" charset="-120"/>
+              </a:rPr>
+              <a:t>BERT</a:t>
+            </a:r>
+            <a:r>
+              <a:rPr lang="zh-TW" altLang="en-US" sz="3200" dirty="0">
+                <a:solidFill>
+                  <a:prstClr val="white"/>
+                </a:solidFill>
+                <a:latin typeface="微軟正黑體" panose="020B0604030504040204" pitchFamily="34" charset="-120"/>
+                <a:ea typeface="微軟正黑體" panose="020B0604030504040204" pitchFamily="34" charset="-120"/>
+              </a:rPr>
+              <a:t>、</a:t>
+            </a:r>
+            <a:r>
+              <a:rPr lang="en-US" altLang="zh-TW" sz="3200" dirty="0">
+                <a:solidFill>
+                  <a:prstClr val="white"/>
+                </a:solidFill>
+                <a:latin typeface="微軟正黑體" panose="020B0604030504040204" pitchFamily="34" charset="-120"/>
+                <a:ea typeface="微軟正黑體" panose="020B0604030504040204" pitchFamily="34" charset="-120"/>
+              </a:rPr>
+              <a:t>BART</a:t>
+            </a:r>
+            <a:r>
+              <a:rPr lang="zh-TW" altLang="en-US" sz="3200" dirty="0">
+                <a:solidFill>
+                  <a:prstClr val="white"/>
+                </a:solidFill>
+                <a:latin typeface="微軟正黑體" panose="020B0604030504040204" pitchFamily="34" charset="-120"/>
+                <a:ea typeface="微軟正黑體" panose="020B0604030504040204" pitchFamily="34" charset="-120"/>
+              </a:rPr>
+              <a:t>、</a:t>
+            </a:r>
+            <a:r>
+              <a:rPr lang="en-US" altLang="zh-TW" sz="3200" dirty="0">
+                <a:solidFill>
+                  <a:prstClr val="white"/>
+                </a:solidFill>
+                <a:latin typeface="微軟正黑體" panose="020B0604030504040204" pitchFamily="34" charset="-120"/>
+                <a:ea typeface="微軟正黑體" panose="020B0604030504040204" pitchFamily="34" charset="-120"/>
+              </a:rPr>
+              <a:t>T5 </a:t>
+            </a:r>
+            <a:r>
+              <a:rPr lang="zh-TW" altLang="en-US" sz="3200" dirty="0">
+                <a:solidFill>
+                  <a:prstClr val="white"/>
+                </a:solidFill>
+                <a:latin typeface="微軟正黑體" panose="020B0604030504040204" pitchFamily="34" charset="-120"/>
+                <a:ea typeface="微軟正黑體" panose="020B0604030504040204" pitchFamily="34" charset="-120"/>
+              </a:rPr>
+              <a:t>等）都被訓練爲語言模型</a:t>
+            </a:r>
+            <a:endParaRPr lang="en-US" altLang="zh-TW" sz="3200" dirty="0">
+              <a:solidFill>
+                <a:prstClr val="white"/>
+              </a:solidFill>
+              <a:latin typeface="微軟正黑體" panose="020B0604030504040204" pitchFamily="34" charset="-120"/>
+              <a:ea typeface="微軟正黑體" panose="020B0604030504040204" pitchFamily="34" charset="-120"/>
+            </a:endParaRPr>
+          </a:p>
+          <a:p>
+            <a:pPr marL="514350" indent="-514350">
+              <a:buFont typeface="Arial" panose="020B0604020202020204" pitchFamily="34" charset="0"/>
+              <a:buChar char="•"/>
+            </a:pPr>
+            <a:r>
+              <a:rPr lang="zh-TW" altLang="en-US" sz="3200" dirty="0">
+                <a:solidFill>
+                  <a:prstClr val="white"/>
+                </a:solidFill>
+                <a:latin typeface="微軟正黑體" panose="020B0604030504040204" pitchFamily="34" charset="-120"/>
+                <a:ea typeface="微軟正黑體" panose="020B0604030504040204" pitchFamily="34" charset="-120"/>
+              </a:rPr>
+              <a:t>經以自監督學習的方式接受了大量原始文字的訓練，不需要人工來標記</a:t>
+            </a:r>
+            <a:endParaRPr lang="en-US" altLang="zh-TW" sz="3200" dirty="0">
+              <a:solidFill>
+                <a:prstClr val="white"/>
+              </a:solidFill>
+              <a:latin typeface="微軟正黑體" panose="020B0604030504040204" pitchFamily="34" charset="-120"/>
+              <a:ea typeface="微軟正黑體" panose="020B0604030504040204" pitchFamily="34" charset="-120"/>
+            </a:endParaRPr>
+          </a:p>
+          <a:p>
+            <a:pPr marL="514350" indent="-514350">
+              <a:buFont typeface="Arial" panose="020B0604020202020204" pitchFamily="34" charset="0"/>
+              <a:buChar char="•"/>
+            </a:pPr>
+            <a:r>
+              <a:rPr lang="zh-TW" altLang="en-US" sz="3200" dirty="0">
+                <a:solidFill>
+                  <a:prstClr val="white"/>
+                </a:solidFill>
+                <a:latin typeface="微軟正黑體" panose="020B0604030504040204" pitchFamily="34" charset="-120"/>
+                <a:ea typeface="微軟正黑體" panose="020B0604030504040204" pitchFamily="34" charset="-120"/>
+              </a:rPr>
+              <a:t>對其訓練過的語言進行統計理解</a:t>
+            </a:r>
+            <a:endParaRPr lang="en-US" altLang="zh-TW" sz="3200" dirty="0">
+              <a:solidFill>
+                <a:prstClr val="white"/>
+              </a:solidFill>
+              <a:latin typeface="微軟正黑體" panose="020B0604030504040204" pitchFamily="34" charset="-120"/>
+              <a:ea typeface="微軟正黑體" panose="020B0604030504040204" pitchFamily="34" charset="-120"/>
+            </a:endParaRPr>
+          </a:p>
+          <a:p>
+            <a:pPr marL="514350" indent="-514350">
+              <a:buFont typeface="Arial" panose="020B0604020202020204" pitchFamily="34" charset="0"/>
+              <a:buChar char="•"/>
+            </a:pPr>
+            <a:r>
+              <a:rPr lang="zh-TW" altLang="en-US" sz="3200" dirty="0">
+                <a:solidFill>
+                  <a:prstClr val="white"/>
+                </a:solidFill>
+                <a:latin typeface="微軟正黑體" panose="020B0604030504040204" pitchFamily="34" charset="-120"/>
+                <a:ea typeface="微軟正黑體" panose="020B0604030504040204" pitchFamily="34" charset="-120"/>
+              </a:rPr>
+              <a:t>對於特定的實際任務並不是很有用</a:t>
+            </a:r>
+            <a:endParaRPr lang="en-US" altLang="zh-TW" sz="3200" dirty="0">
+              <a:solidFill>
+                <a:prstClr val="white"/>
+              </a:solidFill>
+              <a:latin typeface="微軟正黑體" panose="020B0604030504040204" pitchFamily="34" charset="-120"/>
+              <a:ea typeface="微軟正黑體" panose="020B0604030504040204" pitchFamily="34" charset="-120"/>
+            </a:endParaRPr>
+          </a:p>
+          <a:p>
+            <a:pPr marL="514350" indent="-514350">
+              <a:buFont typeface="Arial" panose="020B0604020202020204" pitchFamily="34" charset="0"/>
+              <a:buChar char="•"/>
+            </a:pPr>
+            <a:r>
+              <a:rPr lang="zh-TW" altLang="en-US" sz="3200" dirty="0">
+                <a:solidFill>
+                  <a:prstClr val="white"/>
+                </a:solidFill>
+                <a:latin typeface="微軟正黑體" panose="020B0604030504040204" pitchFamily="34" charset="-120"/>
+                <a:ea typeface="微軟正黑體" panose="020B0604030504040204" pitchFamily="34" charset="-120"/>
+              </a:rPr>
+              <a:t>經歷一個稱爲</a:t>
+            </a:r>
+            <a:r>
+              <a:rPr lang="zh-TW" altLang="en-US" sz="3200" dirty="0">
+                <a:solidFill>
+                  <a:srgbClr val="FF0000"/>
+                </a:solidFill>
+                <a:latin typeface="微軟正黑體" panose="020B0604030504040204" pitchFamily="34" charset="-120"/>
+                <a:ea typeface="微軟正黑體" panose="020B0604030504040204" pitchFamily="34" charset="-120"/>
+              </a:rPr>
+              <a:t>遷移學習</a:t>
+            </a:r>
+            <a:r>
+              <a:rPr lang="zh-TW" altLang="en-US" sz="3200" dirty="0">
+                <a:solidFill>
+                  <a:prstClr val="white"/>
+                </a:solidFill>
+                <a:latin typeface="微軟正黑體" panose="020B0604030504040204" pitchFamily="34" charset="-120"/>
+                <a:ea typeface="微軟正黑體" panose="020B0604030504040204" pitchFamily="34" charset="-120"/>
+              </a:rPr>
+              <a:t>的過程</a:t>
+            </a:r>
+          </a:p>
+        </p:txBody>
+      </p:sp>
+      <p:sp>
+        <p:nvSpPr>
+          <p:cNvPr id="4" name="文字版面配置區 2"/>
+          <p:cNvSpPr txBox="1">
+            <a:spLocks/>
+          </p:cNvSpPr>
+          <p:nvPr/>
+        </p:nvSpPr>
+        <p:spPr>
+          <a:xfrm>
+            <a:off x="990600" y="304800"/>
+            <a:ext cx="7696200" cy="990600"/>
+          </a:xfrm>
+          <a:prstGeom prst="rect">
+            <a:avLst/>
+          </a:prstGeom>
+        </p:spPr>
+        <p:txBody>
+          <a:bodyPr tIns="91440" bIns="91440" anchor="b" anchorCtr="0">
+            <a:noAutofit/>
+          </a:bodyPr>
+          <a:lstStyle/>
+          <a:p>
+            <a:pPr algn="just">
+              <a:spcBef>
+                <a:spcPct val="20000"/>
+              </a:spcBef>
+              <a:defRPr/>
+            </a:pPr>
+            <a:r>
+              <a:rPr lang="en-US" altLang="zh-TW" sz="4800" b="1" kern="0" dirty="0">
+                <a:solidFill>
+                  <a:srgbClr val="00B0F0"/>
+                </a:solidFill>
+                <a:effectLst>
+                  <a:outerShdw blurRad="38100" dist="38100" dir="2700000" algn="tl">
+                    <a:srgbClr val="000000">
+                      <a:alpha val="43137"/>
+                    </a:srgbClr>
+                  </a:outerShdw>
+                </a:effectLst>
+                <a:latin typeface="微軟正黑體" panose="020B0604030504040204" pitchFamily="34" charset="-120"/>
+                <a:ea typeface="微軟正黑體" panose="020B0604030504040204" pitchFamily="34" charset="-120"/>
+              </a:rPr>
+              <a:t>Transformer </a:t>
+            </a:r>
+            <a:r>
+              <a:rPr lang="zh-TW" altLang="en-US" sz="4800" b="1" kern="0" dirty="0">
+                <a:solidFill>
+                  <a:srgbClr val="00B0F0"/>
+                </a:solidFill>
+                <a:effectLst>
+                  <a:outerShdw blurRad="38100" dist="38100" dir="2700000" algn="tl">
+                    <a:srgbClr val="000000">
+                      <a:alpha val="43137"/>
+                    </a:srgbClr>
+                  </a:outerShdw>
+                </a:effectLst>
+                <a:latin typeface="微軟正黑體" panose="020B0604030504040204" pitchFamily="34" charset="-120"/>
+                <a:ea typeface="微軟正黑體" panose="020B0604030504040204" pitchFamily="34" charset="-120"/>
+              </a:rPr>
+              <a:t>架構 </a:t>
+            </a:r>
+          </a:p>
+        </p:txBody>
+      </p:sp>
+    </p:spTree>
+    <p:extLst>
+      <p:ext uri="{BB962C8B-B14F-4D97-AF65-F5344CB8AC3E}">
+        <p14:creationId xmlns:p14="http://schemas.microsoft.com/office/powerpoint/2010/main" val="3120591296"/>
+      </p:ext>
+    </p:extLst>
+  </p:cSld>
+  <p:clrMapOvr>
+    <a:masterClrMapping/>
+  </p:clrMapOvr>
+  <p:transition>
+    <p:fade/>
+  </p:transition>
+</p:sld>
+</file>
+
+<file path=ppt/slides/slide23.xml><?xml version="1.0" encoding="utf-8"?>
 <p:sld xmlns:a="http://schemas.openxmlformats.org/drawingml/2006/main" xmlns:r="http://schemas.openxmlformats.org/officeDocument/2006/relationships" xmlns:p="http://schemas.openxmlformats.org/presentationml/2006/main">
   <p:cSld>
     <p:spTree>
@@ -13741,12 +18551,18 @@
 </p:sld>
 </file>
 
-<file path=ppt/slides/slide2.xml><?xml version="1.0" encoding="utf-8"?>
+<file path=ppt/slides/slide3.xml><?xml version="1.0" encoding="utf-8"?>
 <p:sld xmlns:a="http://schemas.openxmlformats.org/drawingml/2006/main" xmlns:r="http://schemas.openxmlformats.org/officeDocument/2006/relationships" xmlns:p="http://schemas.openxmlformats.org/presentationml/2006/main">
   <p:cSld>
     <p:spTree>
       <p:nvGrpSpPr>
-        <p:cNvPr id="1" name=""/>
+        <p:cNvPr id="1" name="">
+          <a:extLst>
+            <a:ext uri="{FF2B5EF4-FFF2-40B4-BE49-F238E27FC236}">
+              <a16:creationId xmlns:a16="http://schemas.microsoft.com/office/drawing/2014/main" id="{C2A13043-1138-73DE-C5A2-9743AC6F7239}"/>
+            </a:ext>
+          </a:extLst>
+        </p:cNvPr>
         <p:cNvGrpSpPr/>
         <p:nvPr/>
       </p:nvGrpSpPr>
@@ -13760,14 +18576,20 @@
       </p:grpSpPr>
       <p:sp>
         <p:nvSpPr>
-          <p:cNvPr id="5" name="文字方塊 4"/>
+          <p:cNvPr id="4" name="文字方塊 3">
+            <a:extLst>
+              <a:ext uri="{FF2B5EF4-FFF2-40B4-BE49-F238E27FC236}">
+                <a16:creationId xmlns:a16="http://schemas.microsoft.com/office/drawing/2014/main" id="{1C87149C-8161-9D92-B854-AF0B7D6115E8}"/>
+              </a:ext>
+            </a:extLst>
+          </p:cNvPr>
           <p:cNvSpPr txBox="1"/>
           <p:nvPr/>
         </p:nvSpPr>
         <p:spPr>
           <a:xfrm>
-            <a:off x="685800" y="1828802"/>
-            <a:ext cx="8077200" cy="2554545"/>
+            <a:off x="685800" y="2743200"/>
+            <a:ext cx="7772400" cy="830997"/>
           </a:xfrm>
           <a:prstGeom prst="rect">
             <a:avLst/>
@@ -13780,185 +18602,11 @@
           </a:bodyPr>
           <a:lstStyle/>
           <a:p>
-            <a:pPr marL="514350" indent="-514350">
-              <a:buFont typeface="Arial" panose="020B0604020202020204" pitchFamily="34" charset="0"/>
-              <a:buChar char="•"/>
-            </a:pPr>
-            <a:r>
-              <a:rPr lang="en-US" altLang="zh-TW" sz="3200" dirty="0" err="1">
-                <a:solidFill>
-                  <a:prstClr val="white"/>
-                </a:solidFill>
-                <a:latin typeface="微軟正黑體" panose="020B0604030504040204" pitchFamily="34" charset="-120"/>
-                <a:ea typeface="微軟正黑體" panose="020B0604030504040204" pitchFamily="34" charset="-120"/>
-              </a:rPr>
-              <a:t>Huggingface</a:t>
-            </a:r>
-            <a:r>
-              <a:rPr lang="zh-TW" altLang="en-US" sz="3200" dirty="0">
-                <a:solidFill>
-                  <a:prstClr val="white"/>
-                </a:solidFill>
-                <a:latin typeface="微軟正黑體" panose="020B0604030504040204" pitchFamily="34" charset="-120"/>
-                <a:ea typeface="微軟正黑體" panose="020B0604030504040204" pitchFamily="34" charset="-120"/>
-              </a:rPr>
-              <a:t>公司介紹</a:t>
-            </a:r>
-            <a:endParaRPr lang="en-US" altLang="zh-TW" sz="3200" dirty="0">
-              <a:solidFill>
-                <a:prstClr val="white"/>
-              </a:solidFill>
-              <a:latin typeface="微軟正黑體" panose="020B0604030504040204" pitchFamily="34" charset="-120"/>
-              <a:ea typeface="微軟正黑體" panose="020B0604030504040204" pitchFamily="34" charset="-120"/>
-            </a:endParaRPr>
-          </a:p>
-          <a:p>
-            <a:pPr marL="514350" indent="-514350">
-              <a:buFont typeface="Arial" panose="020B0604020202020204" pitchFamily="34" charset="0"/>
-              <a:buChar char="•"/>
-            </a:pPr>
-            <a:r>
-              <a:rPr lang="en-US" altLang="zh-TW" sz="3200" dirty="0">
-                <a:solidFill>
-                  <a:prstClr val="white"/>
-                </a:solidFill>
-                <a:latin typeface="微軟正黑體" panose="020B0604030504040204" pitchFamily="34" charset="-120"/>
-                <a:ea typeface="微軟正黑體" panose="020B0604030504040204" pitchFamily="34" charset="-120"/>
-              </a:rPr>
-              <a:t>Transformers</a:t>
-            </a:r>
-            <a:r>
-              <a:rPr lang="zh-TW" altLang="en-US" sz="3200" dirty="0">
-                <a:solidFill>
-                  <a:prstClr val="white"/>
-                </a:solidFill>
-                <a:latin typeface="微軟正黑體" panose="020B0604030504040204" pitchFamily="34" charset="-120"/>
-                <a:ea typeface="微軟正黑體" panose="020B0604030504040204" pitchFamily="34" charset="-120"/>
-              </a:rPr>
-              <a:t>函數庫介紹</a:t>
-            </a:r>
-            <a:endParaRPr lang="en-US" altLang="zh-TW" sz="3200" dirty="0">
-              <a:solidFill>
-                <a:prstClr val="white"/>
-              </a:solidFill>
-              <a:latin typeface="微軟正黑體" panose="020B0604030504040204" pitchFamily="34" charset="-120"/>
-              <a:ea typeface="微軟正黑體" panose="020B0604030504040204" pitchFamily="34" charset="-120"/>
-            </a:endParaRPr>
-          </a:p>
-          <a:p>
-            <a:pPr marL="514350" indent="-514350">
-              <a:buFont typeface="Arial" panose="020B0604020202020204" pitchFamily="34" charset="0"/>
-              <a:buChar char="•"/>
-            </a:pPr>
-            <a:r>
-              <a:rPr lang="en-US" altLang="zh-TW" sz="3200" dirty="0">
-                <a:solidFill>
-                  <a:prstClr val="white"/>
-                </a:solidFill>
-                <a:latin typeface="微軟正黑體" panose="020B0604030504040204" pitchFamily="34" charset="-120"/>
-                <a:ea typeface="微軟正黑體" panose="020B0604030504040204" pitchFamily="34" charset="-120"/>
-              </a:rPr>
-              <a:t>Pipeline</a:t>
-            </a:r>
-            <a:r>
-              <a:rPr lang="zh-TW" altLang="en-US" sz="3200" dirty="0">
-                <a:solidFill>
-                  <a:prstClr val="white"/>
-                </a:solidFill>
-                <a:latin typeface="微軟正黑體" panose="020B0604030504040204" pitchFamily="34" charset="-120"/>
-                <a:ea typeface="微軟正黑體" panose="020B0604030504040204" pitchFamily="34" charset="-120"/>
-              </a:rPr>
-              <a:t>的使用</a:t>
-            </a:r>
-            <a:endParaRPr lang="en-US" altLang="zh-TW" sz="3200" dirty="0">
-              <a:solidFill>
-                <a:prstClr val="white"/>
-              </a:solidFill>
-              <a:latin typeface="微軟正黑體" panose="020B0604030504040204" pitchFamily="34" charset="-120"/>
-              <a:ea typeface="微軟正黑體" panose="020B0604030504040204" pitchFamily="34" charset="-120"/>
-            </a:endParaRPr>
-          </a:p>
-          <a:p>
-            <a:pPr marL="514350" indent="-514350">
-              <a:buFont typeface="Arial" panose="020B0604020202020204" pitchFamily="34" charset="0"/>
-              <a:buChar char="•"/>
-            </a:pPr>
-            <a:r>
-              <a:rPr lang="en-US" altLang="zh-TW" sz="3200" dirty="0">
-                <a:solidFill>
-                  <a:prstClr val="white"/>
-                </a:solidFill>
-                <a:latin typeface="微軟正黑體" panose="020B0604030504040204" pitchFamily="34" charset="-120"/>
-                <a:ea typeface="微軟正黑體" panose="020B0604030504040204" pitchFamily="34" charset="-120"/>
-              </a:rPr>
-              <a:t>Transformers</a:t>
-            </a:r>
-            <a:r>
-              <a:rPr lang="zh-TW" altLang="en-US" sz="3200" dirty="0">
-                <a:solidFill>
-                  <a:prstClr val="white"/>
-                </a:solidFill>
-                <a:latin typeface="微軟正黑體" panose="020B0604030504040204" pitchFamily="34" charset="-120"/>
-                <a:ea typeface="微軟正黑體" panose="020B0604030504040204" pitchFamily="34" charset="-120"/>
-              </a:rPr>
-              <a:t>的架構</a:t>
-            </a:r>
-            <a:endParaRPr lang="en-US" altLang="zh-TW" sz="3200" dirty="0">
-              <a:solidFill>
-                <a:prstClr val="white"/>
-              </a:solidFill>
-              <a:latin typeface="微軟正黑體" panose="020B0604030504040204" pitchFamily="34" charset="-120"/>
-              <a:ea typeface="微軟正黑體" panose="020B0604030504040204" pitchFamily="34" charset="-120"/>
-            </a:endParaRPr>
-          </a:p>
-          <a:p>
-            <a:pPr marL="514350" indent="-514350">
-              <a:buFont typeface="Arial" panose="020B0604020202020204" pitchFamily="34" charset="0"/>
-              <a:buChar char="•"/>
-            </a:pPr>
-            <a:endParaRPr lang="en-US" altLang="zh-TW" sz="3200" dirty="0">
-              <a:solidFill>
-                <a:prstClr val="white"/>
-              </a:solidFill>
-              <a:latin typeface="微軟正黑體" panose="020B0604030504040204" pitchFamily="34" charset="-120"/>
-              <a:ea typeface="微軟正黑體" panose="020B0604030504040204" pitchFamily="34" charset="-120"/>
-            </a:endParaRPr>
-          </a:p>
-        </p:txBody>
-      </p:sp>
-      <p:sp>
-        <p:nvSpPr>
-          <p:cNvPr id="4" name="文字版面配置區 2"/>
-          <p:cNvSpPr txBox="1">
-            <a:spLocks/>
-          </p:cNvSpPr>
-          <p:nvPr/>
-        </p:nvSpPr>
-        <p:spPr>
-          <a:xfrm>
-            <a:off x="990600" y="304800"/>
-            <a:ext cx="6705600" cy="990600"/>
-          </a:xfrm>
-          <a:prstGeom prst="rect">
-            <a:avLst/>
-          </a:prstGeom>
-        </p:spPr>
-        <p:txBody>
-          <a:bodyPr tIns="91440" bIns="91440" anchor="b" anchorCtr="0">
-            <a:noAutofit/>
-          </a:bodyPr>
-          <a:lstStyle/>
-          <a:p>
-            <a:pPr algn="just">
-              <a:spcBef>
-                <a:spcPct val="20000"/>
-              </a:spcBef>
-              <a:defRPr/>
-            </a:pPr>
-            <a:r>
-              <a:rPr lang="en-US" altLang="zh-TW" sz="4800" b="1" kern="0" dirty="0">
-                <a:solidFill>
-                  <a:srgbClr val="00B0F0"/>
+            <a:pPr algn="ctr"/>
+            <a:r>
+              <a:rPr kumimoji="1" lang="zh-TW" altLang="en-US" sz="4800" b="1" dirty="0">
+                <a:solidFill>
+                  <a:srgbClr val="FFFF00"/>
                 </a:solidFill>
                 <a:effectLst>
                   <a:outerShdw blurRad="38100" dist="38100" dir="2700000" algn="tl">
@@ -13969,353 +18617,32 @@
                 </a:effectLst>
                 <a:latin typeface="微軟正黑體" panose="020B0604030504040204" pitchFamily="34" charset="-120"/>
                 <a:ea typeface="微軟正黑體" panose="020B0604030504040204" pitchFamily="34" charset="-120"/>
-              </a:rPr>
-              <a:t>2. Transformers</a:t>
-            </a:r>
-            <a:r>
-              <a:rPr lang="zh-TW" altLang="en-US" sz="4800" b="1" kern="0" dirty="0">
-                <a:solidFill>
-                  <a:srgbClr val="00B0F0"/>
-                </a:solidFill>
-                <a:effectLst>
-                  <a:outerShdw blurRad="38100" dist="38100" dir="2700000" algn="tl">
-                    <a:srgbClr val="000000">
-                      <a:alpha val="43137"/>
-                    </a:srgbClr>
-                  </a:outerShdw>
-                </a:effectLst>
-                <a:latin typeface="微軟正黑體" panose="020B0604030504040204" pitchFamily="34" charset="-120"/>
-                <a:ea typeface="微軟正黑體" panose="020B0604030504040204" pitchFamily="34" charset="-120"/>
-              </a:rPr>
-              <a:t>函數庫</a:t>
-            </a:r>
+                <a:cs typeface="Arial"/>
+              </a:rPr>
+              <a:t>什麼是模型</a:t>
+            </a:r>
+            <a:endParaRPr kumimoji="1" lang="en-US" altLang="zh-TW" sz="4800" b="1" dirty="0">
+              <a:solidFill>
+                <a:srgbClr val="FFFF00"/>
+              </a:solidFill>
+              <a:effectLst>
+                <a:outerShdw blurRad="38100" dist="38100" dir="2700000" algn="tl">
+                  <a:srgbClr val="000000">
+                    <a:alpha val="43137"/>
+                  </a:srgbClr>
+                </a:outerShdw>
+              </a:effectLst>
+              <a:latin typeface="微軟正黑體" panose="020B0604030504040204" pitchFamily="34" charset="-120"/>
+              <a:ea typeface="微軟正黑體" panose="020B0604030504040204" pitchFamily="34" charset="-120"/>
+              <a:cs typeface="Arial"/>
+            </a:endParaRPr>
           </a:p>
         </p:txBody>
       </p:sp>
     </p:spTree>
     <p:extLst>
       <p:ext uri="{BB962C8B-B14F-4D97-AF65-F5344CB8AC3E}">
-        <p14:creationId xmlns:p14="http://schemas.microsoft.com/office/powerpoint/2010/main" val="1350932474"/>
-      </p:ext>
-    </p:extLst>
-  </p:cSld>
-  <p:clrMapOvr>
-    <a:masterClrMapping/>
-  </p:clrMapOvr>
-  <p:transition>
-    <p:fade/>
-  </p:transition>
-</p:sld>
-</file>
-
-<file path=ppt/slides/slide3.xml><?xml version="1.0" encoding="utf-8"?>
-<p:sld xmlns:a="http://schemas.openxmlformats.org/drawingml/2006/main" xmlns:r="http://schemas.openxmlformats.org/officeDocument/2006/relationships" xmlns:p="http://schemas.openxmlformats.org/presentationml/2006/main">
-  <p:cSld>
-    <p:spTree>
-      <p:nvGrpSpPr>
-        <p:cNvPr id="1" name=""/>
-        <p:cNvGrpSpPr/>
-        <p:nvPr/>
-      </p:nvGrpSpPr>
-      <p:grpSpPr>
-        <a:xfrm>
-          <a:off x="0" y="0"/>
-          <a:ext cx="0" cy="0"/>
-          <a:chOff x="0" y="0"/>
-          <a:chExt cx="0" cy="0"/>
-        </a:xfrm>
-      </p:grpSpPr>
-      <p:sp>
-        <p:nvSpPr>
-          <p:cNvPr id="5" name="文字方塊 4"/>
-          <p:cNvSpPr txBox="1"/>
-          <p:nvPr/>
-        </p:nvSpPr>
-        <p:spPr>
-          <a:xfrm>
-            <a:off x="685800" y="1828802"/>
-            <a:ext cx="8077200" cy="4031873"/>
-          </a:xfrm>
-          <a:prstGeom prst="rect">
-            <a:avLst/>
-          </a:prstGeom>
-          <a:noFill/>
-        </p:spPr>
-        <p:txBody>
-          <a:bodyPr wrap="square" rtlCol="0">
-            <a:spAutoFit/>
-          </a:bodyPr>
-          <a:lstStyle/>
-          <a:p>
-            <a:pPr marL="514350" indent="-514350">
-              <a:buFont typeface="Arial" panose="020B0604020202020204" pitchFamily="34" charset="0"/>
-              <a:buChar char="•"/>
-            </a:pPr>
-            <a:r>
-              <a:rPr lang="en-US" altLang="zh-TW" sz="3200" dirty="0">
-                <a:solidFill>
-                  <a:prstClr val="white"/>
-                </a:solidFill>
-                <a:latin typeface="微軟正黑體" panose="020B0604030504040204" pitchFamily="34" charset="-120"/>
-                <a:ea typeface="微軟正黑體" panose="020B0604030504040204" pitchFamily="34" charset="-120"/>
-              </a:rPr>
-              <a:t>Transformers</a:t>
-            </a:r>
-            <a:r>
-              <a:rPr lang="zh-TW" altLang="en-US" sz="3200" dirty="0">
-                <a:solidFill>
-                  <a:prstClr val="white"/>
-                </a:solidFill>
-                <a:latin typeface="微軟正黑體" panose="020B0604030504040204" pitchFamily="34" charset="-120"/>
-                <a:ea typeface="微軟正黑體" panose="020B0604030504040204" pitchFamily="34" charset="-120"/>
-              </a:rPr>
-              <a:t>模型非常大，數十億的參數</a:t>
-            </a:r>
-            <a:endParaRPr lang="en-US" altLang="zh-TW" sz="3200" dirty="0">
-              <a:solidFill>
-                <a:prstClr val="white"/>
-              </a:solidFill>
-              <a:latin typeface="微軟正黑體" panose="020B0604030504040204" pitchFamily="34" charset="-120"/>
-              <a:ea typeface="微軟正黑體" panose="020B0604030504040204" pitchFamily="34" charset="-120"/>
-            </a:endParaRPr>
-          </a:p>
-          <a:p>
-            <a:pPr marL="514350" indent="-514350">
-              <a:buFont typeface="Arial" panose="020B0604020202020204" pitchFamily="34" charset="0"/>
-              <a:buChar char="•"/>
-            </a:pPr>
-            <a:r>
-              <a:rPr lang="zh-TW" altLang="en-US" sz="3200" dirty="0">
-                <a:solidFill>
-                  <a:prstClr val="white"/>
-                </a:solidFill>
-                <a:latin typeface="微軟正黑體" panose="020B0604030504040204" pitchFamily="34" charset="-120"/>
-                <a:ea typeface="微軟正黑體" panose="020B0604030504040204" pitchFamily="34" charset="-120"/>
-              </a:rPr>
-              <a:t>訓練和部署這些模型</a:t>
-            </a:r>
-            <a:endParaRPr lang="en-US" altLang="zh-TW" sz="3200" dirty="0">
-              <a:solidFill>
-                <a:prstClr val="white"/>
-              </a:solidFill>
-              <a:latin typeface="微軟正黑體" panose="020B0604030504040204" pitchFamily="34" charset="-120"/>
-              <a:ea typeface="微軟正黑體" panose="020B0604030504040204" pitchFamily="34" charset="-120"/>
-            </a:endParaRPr>
-          </a:p>
-          <a:p>
-            <a:pPr marL="514350" indent="-514350">
-              <a:buFont typeface="Arial" panose="020B0604020202020204" pitchFamily="34" charset="0"/>
-              <a:buChar char="•"/>
-            </a:pPr>
-            <a:r>
-              <a:rPr lang="zh-TW" altLang="en-US" sz="3200" dirty="0">
-                <a:solidFill>
-                  <a:prstClr val="white"/>
-                </a:solidFill>
-                <a:latin typeface="微軟正黑體" panose="020B0604030504040204" pitchFamily="34" charset="-120"/>
-                <a:ea typeface="微軟正黑體" panose="020B0604030504040204" pitchFamily="34" charset="-120"/>
-              </a:rPr>
-              <a:t>每天都在發佈新模型</a:t>
-            </a:r>
-            <a:endParaRPr lang="en-US" altLang="zh-TW" sz="3200" dirty="0">
-              <a:solidFill>
-                <a:prstClr val="white"/>
-              </a:solidFill>
-              <a:latin typeface="微軟正黑體" panose="020B0604030504040204" pitchFamily="34" charset="-120"/>
-              <a:ea typeface="微軟正黑體" panose="020B0604030504040204" pitchFamily="34" charset="-120"/>
-            </a:endParaRPr>
-          </a:p>
-          <a:p>
-            <a:pPr marL="514350" indent="-514350">
-              <a:buFont typeface="Arial" panose="020B0604020202020204" pitchFamily="34" charset="0"/>
-              <a:buChar char="•"/>
-            </a:pPr>
-            <a:r>
-              <a:rPr lang="zh-TW" altLang="en-US" sz="3200" dirty="0">
-                <a:solidFill>
-                  <a:prstClr val="white"/>
-                </a:solidFill>
-                <a:latin typeface="微軟正黑體" panose="020B0604030504040204" pitchFamily="34" charset="-120"/>
-                <a:ea typeface="微軟正黑體" panose="020B0604030504040204" pitchFamily="34" charset="-120"/>
-              </a:rPr>
-              <a:t>每種模型都有自己的實現</a:t>
-            </a:r>
-            <a:endParaRPr lang="en-US" altLang="zh-TW" sz="3200" dirty="0">
-              <a:solidFill>
-                <a:prstClr val="white"/>
-              </a:solidFill>
-              <a:latin typeface="微軟正黑體" panose="020B0604030504040204" pitchFamily="34" charset="-120"/>
-              <a:ea typeface="微軟正黑體" panose="020B0604030504040204" pitchFamily="34" charset="-120"/>
-            </a:endParaRPr>
-          </a:p>
-          <a:p>
-            <a:pPr marL="514350" indent="-514350">
-              <a:buFont typeface="Arial" panose="020B0604020202020204" pitchFamily="34" charset="0"/>
-              <a:buChar char="•"/>
-            </a:pPr>
-            <a:r>
-              <a:rPr lang="en-US" altLang="zh-TW" sz="3200" dirty="0" err="1">
-                <a:solidFill>
-                  <a:prstClr val="white"/>
-                </a:solidFill>
-                <a:latin typeface="微軟正黑體" panose="020B0604030504040204" pitchFamily="34" charset="-120"/>
-                <a:ea typeface="微軟正黑體" panose="020B0604030504040204" pitchFamily="34" charset="-120"/>
-              </a:rPr>
-              <a:t>HuggingFace</a:t>
-            </a:r>
-            <a:r>
-              <a:rPr lang="zh-TW" altLang="en-US" sz="3200" dirty="0">
-                <a:solidFill>
-                  <a:prstClr val="white"/>
-                </a:solidFill>
-                <a:latin typeface="微軟正黑體" panose="020B0604030504040204" pitchFamily="34" charset="-120"/>
-                <a:ea typeface="微軟正黑體" panose="020B0604030504040204" pitchFamily="34" charset="-120"/>
-              </a:rPr>
-              <a:t>就是一個模型的雲端平台</a:t>
-            </a:r>
-            <a:r>
-              <a:rPr lang="en-US" altLang="zh-TW" sz="3200" dirty="0">
-                <a:solidFill>
-                  <a:prstClr val="white"/>
-                </a:solidFill>
-                <a:latin typeface="微軟正黑體" panose="020B0604030504040204" pitchFamily="34" charset="-120"/>
-                <a:ea typeface="微軟正黑體" panose="020B0604030504040204" pitchFamily="34" charset="-120"/>
-              </a:rPr>
-              <a:t>(Hub)</a:t>
-            </a:r>
-            <a:r>
-              <a:rPr lang="zh-TW" altLang="en-US" sz="3200" dirty="0">
-                <a:solidFill>
-                  <a:prstClr val="white"/>
-                </a:solidFill>
-                <a:latin typeface="微軟正黑體" panose="020B0604030504040204" pitchFamily="34" charset="-120"/>
-                <a:ea typeface="微軟正黑體" panose="020B0604030504040204" pitchFamily="34" charset="-120"/>
-              </a:rPr>
-              <a:t>，提供了模型、資料集，</a:t>
-            </a:r>
-            <a:r>
-              <a:rPr lang="en-US" altLang="zh-TW" sz="3200" dirty="0">
-                <a:solidFill>
-                  <a:prstClr val="white"/>
-                </a:solidFill>
-                <a:latin typeface="微軟正黑體" panose="020B0604030504040204" pitchFamily="34" charset="-120"/>
-                <a:ea typeface="微軟正黑體" panose="020B0604030504040204" pitchFamily="34" charset="-120"/>
-              </a:rPr>
-              <a:t>API</a:t>
-            </a:r>
-            <a:r>
-              <a:rPr lang="zh-TW" altLang="en-US" sz="3200" dirty="0">
-                <a:solidFill>
-                  <a:prstClr val="white"/>
-                </a:solidFill>
-                <a:latin typeface="微軟正黑體" panose="020B0604030504040204" pitchFamily="34" charset="-120"/>
-                <a:ea typeface="微軟正黑體" panose="020B0604030504040204" pitchFamily="34" charset="-120"/>
-              </a:rPr>
-              <a:t>和函數庫來處理模型和資料集</a:t>
-            </a:r>
-            <a:endParaRPr lang="en-US" altLang="zh-TW" sz="3200" dirty="0">
-              <a:solidFill>
-                <a:prstClr val="white"/>
-              </a:solidFill>
-              <a:latin typeface="微軟正黑體" panose="020B0604030504040204" pitchFamily="34" charset="-120"/>
-              <a:ea typeface="微軟正黑體" panose="020B0604030504040204" pitchFamily="34" charset="-120"/>
-            </a:endParaRPr>
-          </a:p>
-          <a:p>
-            <a:pPr marL="514350" indent="-514350">
-              <a:buFont typeface="Arial" panose="020B0604020202020204" pitchFamily="34" charset="0"/>
-              <a:buChar char="•"/>
-            </a:pPr>
-            <a:r>
-              <a:rPr lang="zh-TW" altLang="en-US" sz="3200" dirty="0">
-                <a:solidFill>
-                  <a:prstClr val="white"/>
-                </a:solidFill>
-                <a:latin typeface="微軟正黑體" panose="020B0604030504040204" pitchFamily="34" charset="-120"/>
-                <a:ea typeface="微軟正黑體" panose="020B0604030504040204" pitchFamily="34" charset="-120"/>
-              </a:rPr>
-              <a:t>擁有全世界的開源模型，資料集</a:t>
-            </a:r>
-            <a:endParaRPr lang="en-US" altLang="zh-TW" sz="3200" dirty="0">
-              <a:solidFill>
-                <a:prstClr val="white"/>
-              </a:solidFill>
-              <a:latin typeface="微軟正黑體" panose="020B0604030504040204" pitchFamily="34" charset="-120"/>
-              <a:ea typeface="微軟正黑體" panose="020B0604030504040204" pitchFamily="34" charset="-120"/>
-            </a:endParaRPr>
-          </a:p>
-        </p:txBody>
-      </p:sp>
-      <p:sp>
-        <p:nvSpPr>
-          <p:cNvPr id="4" name="文字版面配置區 2"/>
-          <p:cNvSpPr txBox="1">
-            <a:spLocks/>
-          </p:cNvSpPr>
-          <p:nvPr/>
-        </p:nvSpPr>
-        <p:spPr>
-          <a:xfrm>
-            <a:off x="990600" y="304800"/>
-            <a:ext cx="6705600" cy="990600"/>
-          </a:xfrm>
-          <a:prstGeom prst="rect">
-            <a:avLst/>
-          </a:prstGeom>
-        </p:spPr>
-        <p:txBody>
-          <a:bodyPr tIns="91440" bIns="91440" anchor="b" anchorCtr="0">
-            <a:noAutofit/>
-          </a:bodyPr>
-          <a:lstStyle/>
-          <a:p>
-            <a:pPr algn="just">
-              <a:spcBef>
-                <a:spcPct val="20000"/>
-              </a:spcBef>
-              <a:defRPr/>
-            </a:pPr>
-            <a:r>
-              <a:rPr lang="en-US" altLang="zh-TW" sz="4800" b="1" kern="0" dirty="0" err="1">
-                <a:solidFill>
-                  <a:srgbClr val="00B0F0"/>
-                </a:solidFill>
-                <a:effectLst>
-                  <a:outerShdw blurRad="38100" dist="38100" dir="2700000" algn="tl">
-                    <a:srgbClr val="000000">
-                      <a:alpha val="43137"/>
-                    </a:srgbClr>
-                  </a:outerShdw>
-                </a:effectLst>
-                <a:latin typeface="微軟正黑體" panose="020B0604030504040204" pitchFamily="34" charset="-120"/>
-                <a:ea typeface="微軟正黑體" panose="020B0604030504040204" pitchFamily="34" charset="-120"/>
-              </a:rPr>
-              <a:t>Huggingface</a:t>
-            </a:r>
-            <a:r>
-              <a:rPr lang="zh-TW" altLang="en-US" sz="4800" b="1" kern="0" dirty="0">
-                <a:solidFill>
-                  <a:srgbClr val="00B0F0"/>
-                </a:solidFill>
-                <a:effectLst>
-                  <a:outerShdw blurRad="38100" dist="38100" dir="2700000" algn="tl">
-                    <a:srgbClr val="000000">
-                      <a:alpha val="43137"/>
-                    </a:srgbClr>
-                  </a:outerShdw>
-                </a:effectLst>
-                <a:latin typeface="微軟正黑體" panose="020B0604030504040204" pitchFamily="34" charset="-120"/>
-                <a:ea typeface="微軟正黑體" panose="020B0604030504040204" pitchFamily="34" charset="-120"/>
-              </a:rPr>
-              <a:t>公司介紹</a:t>
-            </a:r>
-          </a:p>
-        </p:txBody>
-      </p:sp>
-    </p:spTree>
-    <p:extLst>
-      <p:ext uri="{BB962C8B-B14F-4D97-AF65-F5344CB8AC3E}">
-        <p14:creationId xmlns:p14="http://schemas.microsoft.com/office/powerpoint/2010/main" val="163242811"/>
+        <p14:creationId xmlns:p14="http://schemas.microsoft.com/office/powerpoint/2010/main" val="882609421"/>
       </p:ext>
     </p:extLst>
   </p:cSld>
@@ -14333,7 +18660,13 @@
   <p:cSld>
     <p:spTree>
       <p:nvGrpSpPr>
-        <p:cNvPr id="1" name=""/>
+        <p:cNvPr id="1" name="">
+          <a:extLst>
+            <a:ext uri="{FF2B5EF4-FFF2-40B4-BE49-F238E27FC236}">
+              <a16:creationId xmlns:a16="http://schemas.microsoft.com/office/drawing/2014/main" id="{D5E41C22-5EB8-0758-B661-9D3DAE128514}"/>
+            </a:ext>
+          </a:extLst>
+        </p:cNvPr>
         <p:cNvGrpSpPr/>
         <p:nvPr/>
       </p:nvGrpSpPr>
@@ -14347,14 +18680,20 @@
       </p:grpSpPr>
       <p:sp>
         <p:nvSpPr>
-          <p:cNvPr id="5" name="文字方塊 4"/>
+          <p:cNvPr id="5" name="文字方塊 4">
+            <a:extLst>
+              <a:ext uri="{FF2B5EF4-FFF2-40B4-BE49-F238E27FC236}">
+                <a16:creationId xmlns:a16="http://schemas.microsoft.com/office/drawing/2014/main" id="{FB338FC7-2B6E-39AC-6F1F-BE3828255F53}"/>
+              </a:ext>
+            </a:extLst>
+          </p:cNvPr>
           <p:cNvSpPr txBox="1"/>
           <p:nvPr/>
         </p:nvSpPr>
         <p:spPr>
           <a:xfrm>
-            <a:off x="685800" y="1828800"/>
-            <a:ext cx="8077200" cy="4031873"/>
+            <a:off x="533399" y="1356529"/>
+            <a:ext cx="8349343" cy="5016758"/>
           </a:xfrm>
           <a:prstGeom prst="rect">
             <a:avLst/>
@@ -14372,6 +18711,16 @@
               <a:buChar char="•"/>
             </a:pPr>
             <a:r>
+              <a:rPr lang="zh-TW" altLang="en-US" sz="3200" dirty="0">
+                <a:solidFill>
+                  <a:prstClr val="white"/>
+                </a:solidFill>
+                <a:latin typeface="微軟正黑體" panose="020B0604030504040204" pitchFamily="34" charset="-120"/>
+                <a:ea typeface="微軟正黑體" panose="020B0604030504040204" pitchFamily="34" charset="-120"/>
+              </a:rPr>
+              <a:t>如</a:t>
+            </a:r>
+            <a:r>
               <a:rPr lang="en-US" altLang="zh-TW" sz="3200" dirty="0">
                 <a:solidFill>
                   <a:prstClr val="white"/>
@@ -14379,7 +18728,7 @@
                 <a:latin typeface="微軟正黑體" panose="020B0604030504040204" pitchFamily="34" charset="-120"/>
                 <a:ea typeface="微軟正黑體" panose="020B0604030504040204" pitchFamily="34" charset="-120"/>
               </a:rPr>
-              <a:t>Transformers </a:t>
+              <a:t>ChatGPT</a:t>
             </a:r>
             <a:r>
               <a:rPr lang="zh-TW" altLang="en-US" sz="3200" dirty="0">
@@ -14389,7 +18738,159 @@
                 <a:latin typeface="微軟正黑體" panose="020B0604030504040204" pitchFamily="34" charset="-120"/>
                 <a:ea typeface="微軟正黑體" panose="020B0604030504040204" pitchFamily="34" charset="-120"/>
               </a:rPr>
-              <a:t>函式庫就是為了解決這個問題</a:t>
+              <a:t>，</a:t>
+            </a:r>
+            <a:r>
+              <a:rPr lang="en-US" altLang="zh-TW" sz="3200" dirty="0">
+                <a:solidFill>
+                  <a:prstClr val="white"/>
+                </a:solidFill>
+                <a:latin typeface="微軟正黑體" panose="020B0604030504040204" pitchFamily="34" charset="-120"/>
+                <a:ea typeface="微軟正黑體" panose="020B0604030504040204" pitchFamily="34" charset="-120"/>
+              </a:rPr>
+              <a:t>Bert</a:t>
+            </a:r>
+            <a:r>
+              <a:rPr lang="zh-TW" altLang="en-US" sz="3200" dirty="0">
+                <a:solidFill>
+                  <a:prstClr val="white"/>
+                </a:solidFill>
+                <a:latin typeface="微軟正黑體" panose="020B0604030504040204" pitchFamily="34" charset="-120"/>
+                <a:ea typeface="微軟正黑體" panose="020B0604030504040204" pitchFamily="34" charset="-120"/>
+              </a:rPr>
+              <a:t>、</a:t>
+            </a:r>
+            <a:r>
+              <a:rPr lang="en-US" altLang="zh-TW" sz="3200" dirty="0">
+                <a:solidFill>
+                  <a:prstClr val="white"/>
+                </a:solidFill>
+                <a:latin typeface="微軟正黑體" panose="020B0604030504040204" pitchFamily="34" charset="-120"/>
+                <a:ea typeface="微軟正黑體" panose="020B0604030504040204" pitchFamily="34" charset="-120"/>
+              </a:rPr>
+              <a:t>Llama3</a:t>
+            </a:r>
+            <a:r>
+              <a:rPr lang="zh-TW" altLang="en-US" sz="3200" dirty="0">
+                <a:solidFill>
+                  <a:prstClr val="white"/>
+                </a:solidFill>
+                <a:latin typeface="微軟正黑體" panose="020B0604030504040204" pitchFamily="34" charset="-120"/>
+                <a:ea typeface="微軟正黑體" panose="020B0604030504040204" pitchFamily="34" charset="-120"/>
+              </a:rPr>
+              <a:t>等，都稱為語言模型</a:t>
+            </a:r>
+            <a:r>
+              <a:rPr lang="en-US" altLang="zh-TW" sz="3200" dirty="0">
+                <a:solidFill>
+                  <a:prstClr val="white"/>
+                </a:solidFill>
+                <a:latin typeface="微軟正黑體" panose="020B0604030504040204" pitchFamily="34" charset="-120"/>
+                <a:ea typeface="微軟正黑體" panose="020B0604030504040204" pitchFamily="34" charset="-120"/>
+              </a:rPr>
+              <a:t>(Model)</a:t>
+            </a:r>
+          </a:p>
+          <a:p>
+            <a:pPr marL="514350" indent="-514350">
+              <a:buFont typeface="Arial" panose="020B0604020202020204" pitchFamily="34" charset="0"/>
+              <a:buChar char="•"/>
+            </a:pPr>
+            <a:r>
+              <a:rPr lang="zh-TW" altLang="en-US" sz="3200" dirty="0">
+                <a:solidFill>
+                  <a:prstClr val="white"/>
+                </a:solidFill>
+                <a:latin typeface="微軟正黑體" panose="020B0604030504040204" pitchFamily="34" charset="-120"/>
+                <a:ea typeface="微軟正黑體" panose="020B0604030504040204" pitchFamily="34" charset="-120"/>
+              </a:rPr>
+              <a:t>語言模型包括兩部分，</a:t>
+            </a:r>
+            <a:r>
+              <a:rPr lang="en-US" altLang="zh-TW" sz="3200" dirty="0">
+                <a:solidFill>
+                  <a:prstClr val="white"/>
+                </a:solidFill>
+                <a:latin typeface="微軟正黑體" panose="020B0604030504040204" pitchFamily="34" charset="-120"/>
+                <a:ea typeface="微軟正黑體" panose="020B0604030504040204" pitchFamily="34" charset="-120"/>
+              </a:rPr>
+              <a:t>1</a:t>
+            </a:r>
+            <a:r>
+              <a:rPr lang="zh-TW" altLang="en-US" sz="3200" dirty="0">
+                <a:solidFill>
+                  <a:prstClr val="white"/>
+                </a:solidFill>
+                <a:latin typeface="微軟正黑體" panose="020B0604030504040204" pitchFamily="34" charset="-120"/>
+                <a:ea typeface="微軟正黑體" panose="020B0604030504040204" pitchFamily="34" charset="-120"/>
+              </a:rPr>
+              <a:t>為模型的架構，</a:t>
+            </a:r>
+            <a:r>
+              <a:rPr lang="en-US" altLang="zh-TW" sz="3200" dirty="0">
+                <a:solidFill>
+                  <a:prstClr val="white"/>
+                </a:solidFill>
+                <a:latin typeface="微軟正黑體" panose="020B0604030504040204" pitchFamily="34" charset="-120"/>
+                <a:ea typeface="微軟正黑體" panose="020B0604030504040204" pitchFamily="34" charset="-120"/>
+              </a:rPr>
+              <a:t>2</a:t>
+            </a:r>
+            <a:r>
+              <a:rPr lang="zh-TW" altLang="en-US" sz="3200" dirty="0">
+                <a:solidFill>
+                  <a:prstClr val="white"/>
+                </a:solidFill>
+                <a:latin typeface="微軟正黑體" panose="020B0604030504040204" pitchFamily="34" charset="-120"/>
+                <a:ea typeface="微軟正黑體" panose="020B0604030504040204" pitchFamily="34" charset="-120"/>
+              </a:rPr>
+              <a:t>為模型的參數值</a:t>
+            </a:r>
+            <a:r>
+              <a:rPr lang="en-US" altLang="zh-TW" sz="3200" dirty="0">
+                <a:solidFill>
+                  <a:prstClr val="white"/>
+                </a:solidFill>
+                <a:latin typeface="微軟正黑體" panose="020B0604030504040204" pitchFamily="34" charset="-120"/>
+                <a:ea typeface="微軟正黑體" panose="020B0604030504040204" pitchFamily="34" charset="-120"/>
+              </a:rPr>
+              <a:t>(</a:t>
+            </a:r>
+            <a:r>
+              <a:rPr lang="zh-TW" altLang="en-US" sz="3200" dirty="0">
+                <a:solidFill>
+                  <a:prstClr val="white"/>
+                </a:solidFill>
+                <a:latin typeface="微軟正黑體" panose="020B0604030504040204" pitchFamily="34" charset="-120"/>
+                <a:ea typeface="微軟正黑體" panose="020B0604030504040204" pitchFamily="34" charset="-120"/>
+              </a:rPr>
+              <a:t>權重及偏置</a:t>
+            </a:r>
+            <a:r>
+              <a:rPr lang="en-US" altLang="zh-TW" sz="3200" dirty="0">
+                <a:solidFill>
+                  <a:prstClr val="white"/>
+                </a:solidFill>
+                <a:latin typeface="微軟正黑體" panose="020B0604030504040204" pitchFamily="34" charset="-120"/>
+                <a:ea typeface="微軟正黑體" panose="020B0604030504040204" pitchFamily="34" charset="-120"/>
+              </a:rPr>
+              <a:t>)</a:t>
+            </a:r>
+          </a:p>
+          <a:p>
+            <a:pPr marL="514350" indent="-514350">
+              <a:buFont typeface="Arial" panose="020B0604020202020204" pitchFamily="34" charset="0"/>
+              <a:buChar char="•"/>
+            </a:pPr>
+            <a:r>
+              <a:rPr lang="zh-TW" altLang="en-US" sz="3200" dirty="0">
+                <a:solidFill>
+                  <a:prstClr val="white"/>
+                </a:solidFill>
+                <a:latin typeface="微軟正黑體" panose="020B0604030504040204" pitchFamily="34" charset="-120"/>
+                <a:ea typeface="微軟正黑體" panose="020B0604030504040204" pitchFamily="34" charset="-120"/>
+              </a:rPr>
+              <a:t>訓練模型，即利用資料集通過這個架構時，利用反向傳播更新參數</a:t>
             </a:r>
             <a:endParaRPr lang="en-US" altLang="zh-TW" sz="3200" dirty="0">
               <a:solidFill>
@@ -14412,47 +18913,7 @@
                 <a:latin typeface="微軟正黑體" panose="020B0604030504040204" pitchFamily="34" charset="-120"/>
                 <a:ea typeface="微軟正黑體" panose="020B0604030504040204" pitchFamily="34" charset="-120"/>
               </a:rPr>
-              <a:t>提供一個</a:t>
-            </a:r>
-            <a:r>
-              <a:rPr lang="en-US" altLang="zh-TW" sz="3200" dirty="0">
-                <a:solidFill>
-                  <a:prstClr val="white"/>
-                </a:solidFill>
-                <a:latin typeface="微軟正黑體" panose="020B0604030504040204" pitchFamily="34" charset="-120"/>
-                <a:ea typeface="微軟正黑體" panose="020B0604030504040204" pitchFamily="34" charset="-120"/>
-              </a:rPr>
-              <a:t>API</a:t>
-            </a:r>
-            <a:r>
-              <a:rPr lang="zh-TW" altLang="en-US" sz="3200" dirty="0">
-                <a:solidFill>
-                  <a:prstClr val="white"/>
-                </a:solidFill>
-                <a:latin typeface="微軟正黑體" panose="020B0604030504040204" pitchFamily="34" charset="-120"/>
-                <a:ea typeface="微軟正黑體" panose="020B0604030504040204" pitchFamily="34" charset="-120"/>
-              </a:rPr>
-              <a:t>，透過它可以加載、訓練和保存任何</a:t>
-            </a:r>
-            <a:r>
-              <a:rPr lang="en-US" altLang="zh-TW" sz="3200" dirty="0">
-                <a:solidFill>
-                  <a:prstClr val="white"/>
-                </a:solidFill>
-                <a:latin typeface="微軟正黑體" panose="020B0604030504040204" pitchFamily="34" charset="-120"/>
-                <a:ea typeface="微軟正黑體" panose="020B0604030504040204" pitchFamily="34" charset="-120"/>
-              </a:rPr>
-              <a:t>Transformer</a:t>
-            </a:r>
-            <a:r>
-              <a:rPr lang="zh-TW" altLang="en-US" sz="3200" dirty="0">
-                <a:solidFill>
-                  <a:prstClr val="white"/>
-                </a:solidFill>
-                <a:latin typeface="微軟正黑體" panose="020B0604030504040204" pitchFamily="34" charset="-120"/>
-                <a:ea typeface="微軟正黑體" panose="020B0604030504040204" pitchFamily="34" charset="-120"/>
-              </a:rPr>
-              <a:t>模型</a:t>
+              <a:t>當所有的參數都被調整到一個固定值時，即將這個參數儲存到一個檔案中</a:t>
             </a:r>
             <a:endParaRPr lang="en-US" altLang="zh-TW" sz="3200" dirty="0">
               <a:solidFill>
@@ -14475,27 +18936,7 @@
                 <a:latin typeface="微軟正黑體" panose="020B0604030504040204" pitchFamily="34" charset="-120"/>
                 <a:ea typeface="微軟正黑體" panose="020B0604030504040204" pitchFamily="34" charset="-120"/>
               </a:rPr>
-              <a:t>易於使用：下載、加載和使用最先進的</a:t>
-            </a:r>
-            <a:r>
-              <a:rPr lang="en-US" altLang="zh-TW" sz="3200" dirty="0">
-                <a:solidFill>
-                  <a:prstClr val="white"/>
-                </a:solidFill>
-                <a:latin typeface="微軟正黑體" panose="020B0604030504040204" pitchFamily="34" charset="-120"/>
-                <a:ea typeface="微軟正黑體" panose="020B0604030504040204" pitchFamily="34" charset="-120"/>
-              </a:rPr>
-              <a:t>NLP</a:t>
-            </a:r>
-            <a:r>
-              <a:rPr lang="zh-TW" altLang="en-US" sz="3200" dirty="0">
-                <a:solidFill>
-                  <a:prstClr val="white"/>
-                </a:solidFill>
-                <a:latin typeface="微軟正黑體" panose="020B0604030504040204" pitchFamily="34" charset="-120"/>
-                <a:ea typeface="微軟正黑體" panose="020B0604030504040204" pitchFamily="34" charset="-120"/>
-              </a:rPr>
-              <a:t>模型進行推理</a:t>
+              <a:t>有了這個檔案，就可以將新的資料用完全一樣的方法通過模型</a:t>
             </a:r>
             <a:endParaRPr lang="en-US" altLang="zh-TW" sz="3200" dirty="0">
               <a:solidFill>
@@ -14505,67 +18946,17 @@
               <a:ea typeface="微軟正黑體" panose="020B0604030504040204" pitchFamily="34" charset="-120"/>
             </a:endParaRPr>
           </a:p>
-          <a:p>
-            <a:pPr marL="514350" indent="-514350">
-              <a:buFont typeface="Arial" panose="020B0604020202020204" pitchFamily="34" charset="0"/>
-              <a:buChar char="•"/>
-            </a:pPr>
-            <a:r>
-              <a:rPr lang="zh-TW" altLang="en-US" sz="3200" dirty="0">
-                <a:solidFill>
-                  <a:prstClr val="white"/>
-                </a:solidFill>
-                <a:latin typeface="微軟正黑體" panose="020B0604030504040204" pitchFamily="34" charset="-120"/>
-                <a:ea typeface="微軟正黑體" panose="020B0604030504040204" pitchFamily="34" charset="-120"/>
-              </a:rPr>
-              <a:t>所有型號的核心都是簡單的 </a:t>
-            </a:r>
-            <a:r>
-              <a:rPr lang="en-US" altLang="zh-TW" sz="3200" dirty="0" err="1">
-                <a:solidFill>
-                  <a:prstClr val="white"/>
-                </a:solidFill>
-                <a:latin typeface="微軟正黑體" panose="020B0604030504040204" pitchFamily="34" charset="-120"/>
-                <a:ea typeface="微軟正黑體" panose="020B0604030504040204" pitchFamily="34" charset="-120"/>
-              </a:rPr>
-              <a:t>PyTorch</a:t>
-            </a:r>
-            <a:r>
-              <a:rPr lang="en-US" altLang="zh-TW" sz="3200" dirty="0">
-                <a:solidFill>
-                  <a:prstClr val="white"/>
-                </a:solidFill>
-                <a:latin typeface="微軟正黑體" panose="020B0604030504040204" pitchFamily="34" charset="-120"/>
-                <a:ea typeface="微軟正黑體" panose="020B0604030504040204" pitchFamily="34" charset="-120"/>
-              </a:rPr>
-              <a:t> </a:t>
-            </a:r>
-            <a:r>
-              <a:rPr lang="en-US" altLang="zh-TW" sz="3200" dirty="0" err="1">
-                <a:solidFill>
-                  <a:prstClr val="white"/>
-                </a:solidFill>
-                <a:latin typeface="微軟正黑體" panose="020B0604030504040204" pitchFamily="34" charset="-120"/>
-                <a:ea typeface="微軟正黑體" panose="020B0604030504040204" pitchFamily="34" charset="-120"/>
-              </a:rPr>
-              <a:t>nn.Module</a:t>
-            </a:r>
-            <a:r>
-              <a:rPr lang="en-US" altLang="zh-TW" sz="3200" dirty="0">
-                <a:solidFill>
-                  <a:prstClr val="white"/>
-                </a:solidFill>
-                <a:latin typeface="微軟正黑體" panose="020B0604030504040204" pitchFamily="34" charset="-120"/>
-                <a:ea typeface="微軟正黑體" panose="020B0604030504040204" pitchFamily="34" charset="-120"/>
-              </a:rPr>
-              <a:t> </a:t>
-            </a:r>
-          </a:p>
-        </p:txBody>
-      </p:sp>
-      <p:sp>
-        <p:nvSpPr>
-          <p:cNvPr id="4" name="文字版面配置區 2"/>
+        </p:txBody>
+      </p:sp>
+      <p:sp>
+        <p:nvSpPr>
+          <p:cNvPr id="4" name="文字版面配置區 2">
+            <a:extLst>
+              <a:ext uri="{FF2B5EF4-FFF2-40B4-BE49-F238E27FC236}">
+                <a16:creationId xmlns:a16="http://schemas.microsoft.com/office/drawing/2014/main" id="{D80B6E57-5980-2DAE-6B80-B91CA4F5076E}"/>
+              </a:ext>
+            </a:extLst>
+          </p:cNvPr>
           <p:cNvSpPr txBox="1">
             <a:spLocks/>
           </p:cNvSpPr>
@@ -14573,8 +18964,8 @@
         </p:nvSpPr>
         <p:spPr>
           <a:xfrm>
-            <a:off x="990600" y="304800"/>
-            <a:ext cx="7696200" cy="990600"/>
+            <a:off x="3025391" y="219389"/>
+            <a:ext cx="3707004" cy="990600"/>
           </a:xfrm>
           <a:prstGeom prst="rect">
             <a:avLst/>
@@ -14593,7 +18984,7 @@
               <a:defRPr/>
             </a:pPr>
             <a:r>
-              <a:rPr lang="en-US" altLang="zh-TW" sz="4800" b="1" kern="0" dirty="0">
+              <a:rPr lang="zh-TW" altLang="en-US" sz="4800" b="1" kern="0" dirty="0">
                 <a:solidFill>
                   <a:srgbClr val="00B0F0"/>
                 </a:solidFill>
@@ -14607,24 +18998,7 @@
                 <a:latin typeface="微軟正黑體" panose="020B0604030504040204" pitchFamily="34" charset="-120"/>
                 <a:ea typeface="微軟正黑體" panose="020B0604030504040204" pitchFamily="34" charset="-120"/>
               </a:rPr>
-              <a:t>Transformers</a:t>
-            </a:r>
-            <a:r>
-              <a:rPr lang="zh-TW" altLang="en-US" sz="4800" b="1" kern="0" dirty="0">
-                <a:solidFill>
-                  <a:srgbClr val="00B0F0"/>
-                </a:solidFill>
-                <a:effectLst>
-                  <a:outerShdw blurRad="38100" dist="38100" dir="2700000" algn="tl">
-                    <a:srgbClr val="000000">
-                      <a:alpha val="43137"/>
-                    </a:srgbClr>
-                  </a:outerShdw>
-                </a:effectLst>
-                <a:latin typeface="微軟正黑體" panose="020B0604030504040204" pitchFamily="34" charset="-120"/>
-                <a:ea typeface="微軟正黑體" panose="020B0604030504040204" pitchFamily="34" charset="-120"/>
-              </a:rPr>
-              <a:t>函數庫介紹</a:t>
+              <a:t>什麼是模型</a:t>
             </a:r>
           </a:p>
         </p:txBody>
@@ -14632,7 +19006,7 @@
     </p:spTree>
     <p:extLst>
       <p:ext uri="{BB962C8B-B14F-4D97-AF65-F5344CB8AC3E}">
-        <p14:creationId xmlns:p14="http://schemas.microsoft.com/office/powerpoint/2010/main" val="2884476007"/>
+        <p14:creationId xmlns:p14="http://schemas.microsoft.com/office/powerpoint/2010/main" val="2281421775"/>
       </p:ext>
     </p:extLst>
   </p:cSld>
@@ -14650,7 +19024,13 @@
   <p:cSld>
     <p:spTree>
       <p:nvGrpSpPr>
-        <p:cNvPr id="1" name=""/>
+        <p:cNvPr id="1" name="">
+          <a:extLst>
+            <a:ext uri="{FF2B5EF4-FFF2-40B4-BE49-F238E27FC236}">
+              <a16:creationId xmlns:a16="http://schemas.microsoft.com/office/drawing/2014/main" id="{2669F989-4DDC-EFB8-DEDB-AF4BD9E7C5D9}"/>
+            </a:ext>
+          </a:extLst>
+        </p:cNvPr>
         <p:cNvGrpSpPr/>
         <p:nvPr/>
       </p:nvGrpSpPr>
@@ -14664,14 +19044,20 @@
       </p:grpSpPr>
       <p:sp>
         <p:nvSpPr>
-          <p:cNvPr id="5" name="文字方塊 4"/>
+          <p:cNvPr id="5" name="文字方塊 4">
+            <a:extLst>
+              <a:ext uri="{FF2B5EF4-FFF2-40B4-BE49-F238E27FC236}">
+                <a16:creationId xmlns:a16="http://schemas.microsoft.com/office/drawing/2014/main" id="{84573ABD-EA65-42AA-4DE0-A1C979C4C7CE}"/>
+              </a:ext>
+            </a:extLst>
+          </p:cNvPr>
           <p:cNvSpPr txBox="1"/>
           <p:nvPr/>
         </p:nvSpPr>
         <p:spPr>
           <a:xfrm>
-            <a:off x="685800" y="1828802"/>
-            <a:ext cx="8077200" cy="584775"/>
+            <a:off x="533399" y="1356529"/>
+            <a:ext cx="8349343" cy="5016758"/>
           </a:xfrm>
           <a:prstGeom prst="rect">
             <a:avLst/>
@@ -14696,7 +19082,7 @@
                 <a:latin typeface="微軟正黑體" panose="020B0604030504040204" pitchFamily="34" charset="-120"/>
                 <a:ea typeface="微軟正黑體" panose="020B0604030504040204" pitchFamily="34" charset="-120"/>
               </a:rPr>
-              <a:t>程式</a:t>
+              <a:t>通過模型時，數值被現存的參數值運算</a:t>
             </a:r>
             <a:r>
               <a:rPr lang="en-US" altLang="zh-TW" sz="3200" dirty="0">
@@ -14706,17 +19092,37 @@
                 <a:latin typeface="微軟正黑體" panose="020B0604030504040204" pitchFamily="34" charset="-120"/>
                 <a:ea typeface="微軟正黑體" panose="020B0604030504040204" pitchFamily="34" charset="-120"/>
               </a:rPr>
-              <a:t>02. </a:t>
-            </a:r>
-            <a:r>
-              <a:rPr lang="en-US" altLang="zh-TW" sz="3200" dirty="0" err="1">
+              <a:t>(</a:t>
+            </a:r>
+            <a:r>
+              <a:rPr lang="zh-TW" altLang="en-US" sz="3200" dirty="0">
                 <a:solidFill>
                   <a:prstClr val="white"/>
                 </a:solidFill>
                 <a:latin typeface="微軟正黑體" panose="020B0604030504040204" pitchFamily="34" charset="-120"/>
                 <a:ea typeface="微軟正黑體" panose="020B0604030504040204" pitchFamily="34" charset="-120"/>
               </a:rPr>
-              <a:t>Pipeline.ipynb</a:t>
+              <a:t>通常是矩陣相乘</a:t>
+            </a:r>
+            <a:r>
+              <a:rPr lang="en-US" altLang="zh-TW" sz="3200" dirty="0">
+                <a:solidFill>
+                  <a:prstClr val="white"/>
+                </a:solidFill>
+                <a:latin typeface="微軟正黑體" panose="020B0604030504040204" pitchFamily="34" charset="-120"/>
+                <a:ea typeface="微軟正黑體" panose="020B0604030504040204" pitchFamily="34" charset="-120"/>
+              </a:rPr>
+              <a:t>)</a:t>
+            </a:r>
+            <a:r>
+              <a:rPr lang="zh-TW" altLang="en-US" sz="3200" dirty="0">
+                <a:solidFill>
+                  <a:prstClr val="white"/>
+                </a:solidFill>
+                <a:latin typeface="微軟正黑體" panose="020B0604030504040204" pitchFamily="34" charset="-120"/>
+                <a:ea typeface="微軟正黑體" panose="020B0604030504040204" pitchFamily="34" charset="-120"/>
+              </a:rPr>
+              <a:t>，得到輸出值</a:t>
             </a:r>
             <a:endParaRPr lang="en-US" altLang="zh-TW" sz="3200" dirty="0">
               <a:solidFill>
@@ -14726,11 +19132,158 @@
               <a:ea typeface="微軟正黑體" panose="020B0604030504040204" pitchFamily="34" charset="-120"/>
             </a:endParaRPr>
           </a:p>
-        </p:txBody>
-      </p:sp>
-      <p:sp>
-        <p:nvSpPr>
-          <p:cNvPr id="4" name="文字版面配置區 2"/>
+          <a:p>
+            <a:pPr marL="514350" indent="-514350">
+              <a:buFont typeface="Arial" panose="020B0604020202020204" pitchFamily="34" charset="0"/>
+              <a:buChar char="•"/>
+            </a:pPr>
+            <a:r>
+              <a:rPr lang="zh-TW" altLang="en-US" sz="3200" dirty="0">
+                <a:solidFill>
+                  <a:prstClr val="white"/>
+                </a:solidFill>
+                <a:latin typeface="微軟正黑體" panose="020B0604030504040204" pitchFamily="34" charset="-120"/>
+                <a:ea typeface="微軟正黑體" panose="020B0604030504040204" pitchFamily="34" charset="-120"/>
+              </a:rPr>
+              <a:t>以上的動作稱為「推理」</a:t>
+            </a:r>
+            <a:endParaRPr lang="en-US" altLang="zh-TW" sz="3200" dirty="0">
+              <a:solidFill>
+                <a:prstClr val="white"/>
+              </a:solidFill>
+              <a:latin typeface="微軟正黑體" panose="020B0604030504040204" pitchFamily="34" charset="-120"/>
+              <a:ea typeface="微軟正黑體" panose="020B0604030504040204" pitchFamily="34" charset="-120"/>
+            </a:endParaRPr>
+          </a:p>
+          <a:p>
+            <a:pPr marL="514350" indent="-514350">
+              <a:buFont typeface="Arial" panose="020B0604020202020204" pitchFamily="34" charset="0"/>
+              <a:buChar char="•"/>
+            </a:pPr>
+            <a:r>
+              <a:rPr lang="zh-TW" altLang="en-US" sz="3200" dirty="0">
+                <a:solidFill>
+                  <a:prstClr val="white"/>
+                </a:solidFill>
+                <a:latin typeface="微軟正黑體" panose="020B0604030504040204" pitchFamily="34" charset="-120"/>
+                <a:ea typeface="微軟正黑體" panose="020B0604030504040204" pitchFamily="34" charset="-120"/>
+              </a:rPr>
+              <a:t>訓練模型的目的，就是為了在推理時能得到最正確的輸出</a:t>
+            </a:r>
+            <a:endParaRPr lang="en-US" altLang="zh-TW" sz="3200" dirty="0">
+              <a:solidFill>
+                <a:prstClr val="white"/>
+              </a:solidFill>
+              <a:latin typeface="微軟正黑體" panose="020B0604030504040204" pitchFamily="34" charset="-120"/>
+              <a:ea typeface="微軟正黑體" panose="020B0604030504040204" pitchFamily="34" charset="-120"/>
+            </a:endParaRPr>
+          </a:p>
+          <a:p>
+            <a:pPr marL="514350" indent="-514350">
+              <a:buFont typeface="Arial" panose="020B0604020202020204" pitchFamily="34" charset="0"/>
+              <a:buChar char="•"/>
+            </a:pPr>
+            <a:r>
+              <a:rPr lang="zh-TW" altLang="en-US" sz="3200" dirty="0">
+                <a:solidFill>
+                  <a:prstClr val="white"/>
+                </a:solidFill>
+                <a:latin typeface="微軟正黑體" panose="020B0604030504040204" pitchFamily="34" charset="-120"/>
+                <a:ea typeface="微軟正黑體" panose="020B0604030504040204" pitchFamily="34" charset="-120"/>
+              </a:rPr>
+              <a:t>模型的架構和模型的參數，儲存在檔案中</a:t>
+            </a:r>
+            <a:endParaRPr lang="en-US" altLang="zh-TW" sz="3200" dirty="0">
+              <a:solidFill>
+                <a:prstClr val="white"/>
+              </a:solidFill>
+              <a:latin typeface="微軟正黑體" panose="020B0604030504040204" pitchFamily="34" charset="-120"/>
+              <a:ea typeface="微軟正黑體" panose="020B0604030504040204" pitchFamily="34" charset="-120"/>
+            </a:endParaRPr>
+          </a:p>
+          <a:p>
+            <a:pPr marL="514350" indent="-514350">
+              <a:buFont typeface="Arial" panose="020B0604020202020204" pitchFamily="34" charset="0"/>
+              <a:buChar char="•"/>
+            </a:pPr>
+            <a:r>
+              <a:rPr lang="zh-TW" altLang="en-US" sz="3200" dirty="0">
+                <a:solidFill>
+                  <a:prstClr val="white"/>
+                </a:solidFill>
+                <a:latin typeface="微軟正黑體" panose="020B0604030504040204" pitchFamily="34" charset="-120"/>
+                <a:ea typeface="微軟正黑體" panose="020B0604030504040204" pitchFamily="34" charset="-120"/>
+              </a:rPr>
+              <a:t>可以使用別人訓練好的模型來推理，必須上述的兩個檔案下載回來</a:t>
+            </a:r>
+            <a:endParaRPr lang="en-US" altLang="zh-TW" sz="3200" dirty="0">
+              <a:solidFill>
+                <a:prstClr val="white"/>
+              </a:solidFill>
+              <a:latin typeface="微軟正黑體" panose="020B0604030504040204" pitchFamily="34" charset="-120"/>
+              <a:ea typeface="微軟正黑體" panose="020B0604030504040204" pitchFamily="34" charset="-120"/>
+            </a:endParaRPr>
+          </a:p>
+          <a:p>
+            <a:pPr marL="514350" indent="-514350">
+              <a:buFont typeface="Arial" panose="020B0604020202020204" pitchFamily="34" charset="0"/>
+              <a:buChar char="•"/>
+            </a:pPr>
+            <a:r>
+              <a:rPr lang="zh-TW" altLang="en-US" sz="3200" dirty="0">
+                <a:solidFill>
+                  <a:prstClr val="white"/>
+                </a:solidFill>
+                <a:latin typeface="微軟正黑體" panose="020B0604030504040204" pitchFamily="34" charset="-120"/>
+                <a:ea typeface="微軟正黑體" panose="020B0604030504040204" pitchFamily="34" charset="-120"/>
+              </a:rPr>
+              <a:t>參數量較大的模型，其檔案可能有幾百</a:t>
+            </a:r>
+            <a:r>
+              <a:rPr lang="en-US" altLang="zh-TW" sz="3200" dirty="0">
+                <a:solidFill>
+                  <a:prstClr val="white"/>
+                </a:solidFill>
+                <a:latin typeface="微軟正黑體" panose="020B0604030504040204" pitchFamily="34" charset="-120"/>
+                <a:ea typeface="微軟正黑體" panose="020B0604030504040204" pitchFamily="34" charset="-120"/>
+              </a:rPr>
+              <a:t>GB</a:t>
+            </a:r>
+          </a:p>
+          <a:p>
+            <a:pPr marL="514350" indent="-514350">
+              <a:buFont typeface="Arial" panose="020B0604020202020204" pitchFamily="34" charset="0"/>
+              <a:buChar char="•"/>
+            </a:pPr>
+            <a:r>
+              <a:rPr lang="zh-TW" altLang="en-US" sz="3200" dirty="0">
+                <a:solidFill>
+                  <a:prstClr val="white"/>
+                </a:solidFill>
+                <a:latin typeface="微軟正黑體" panose="020B0604030504040204" pitchFamily="34" charset="-120"/>
+                <a:ea typeface="微軟正黑體" panose="020B0604030504040204" pitchFamily="34" charset="-120"/>
+              </a:rPr>
+              <a:t>閉源模型無法下載，能推理無法訓練微調</a:t>
+            </a:r>
+            <a:endParaRPr lang="en-US" altLang="zh-TW" sz="3200" dirty="0">
+              <a:solidFill>
+                <a:prstClr val="white"/>
+              </a:solidFill>
+              <a:latin typeface="微軟正黑體" panose="020B0604030504040204" pitchFamily="34" charset="-120"/>
+              <a:ea typeface="微軟正黑體" panose="020B0604030504040204" pitchFamily="34" charset="-120"/>
+            </a:endParaRPr>
+          </a:p>
+        </p:txBody>
+      </p:sp>
+      <p:sp>
+        <p:nvSpPr>
+          <p:cNvPr id="4" name="文字版面配置區 2">
+            <a:extLst>
+              <a:ext uri="{FF2B5EF4-FFF2-40B4-BE49-F238E27FC236}">
+                <a16:creationId xmlns:a16="http://schemas.microsoft.com/office/drawing/2014/main" id="{8DC39938-5089-2B40-4219-B12CE2D8DEF7}"/>
+              </a:ext>
+            </a:extLst>
+          </p:cNvPr>
           <p:cNvSpPr txBox="1">
             <a:spLocks/>
           </p:cNvSpPr>
@@ -14738,8 +19291,8 @@
         </p:nvSpPr>
         <p:spPr>
           <a:xfrm>
-            <a:off x="990600" y="304800"/>
-            <a:ext cx="7696200" cy="990600"/>
+            <a:off x="3025391" y="219389"/>
+            <a:ext cx="3707004" cy="990600"/>
           </a:xfrm>
           <a:prstGeom prst="rect">
             <a:avLst/>
@@ -14758,7 +19311,7 @@
               <a:defRPr/>
             </a:pPr>
             <a:r>
-              <a:rPr lang="en-US" altLang="zh-TW" sz="4800" b="1" kern="0" dirty="0">
+              <a:rPr lang="zh-TW" altLang="en-US" sz="4800" b="1" kern="0" dirty="0">
                 <a:solidFill>
                   <a:srgbClr val="00B0F0"/>
                 </a:solidFill>
@@ -14772,24 +19325,7 @@
                 <a:latin typeface="微軟正黑體" panose="020B0604030504040204" pitchFamily="34" charset="-120"/>
                 <a:ea typeface="微軟正黑體" panose="020B0604030504040204" pitchFamily="34" charset="-120"/>
               </a:rPr>
-              <a:t>Pipeline</a:t>
-            </a:r>
-            <a:r>
-              <a:rPr lang="zh-TW" altLang="en-US" sz="4800" b="1" kern="0" dirty="0">
-                <a:solidFill>
-                  <a:srgbClr val="00B0F0"/>
-                </a:solidFill>
-                <a:effectLst>
-                  <a:outerShdw blurRad="38100" dist="38100" dir="2700000" algn="tl">
-                    <a:srgbClr val="000000">
-                      <a:alpha val="43137"/>
-                    </a:srgbClr>
-                  </a:outerShdw>
-                </a:effectLst>
-                <a:latin typeface="微軟正黑體" panose="020B0604030504040204" pitchFamily="34" charset="-120"/>
-                <a:ea typeface="微軟正黑體" panose="020B0604030504040204" pitchFamily="34" charset="-120"/>
-              </a:rPr>
-              <a:t>的使用</a:t>
+              <a:t>什麼是模型</a:t>
             </a:r>
           </a:p>
         </p:txBody>
@@ -14797,7 +19333,7 @@
     </p:spTree>
     <p:extLst>
       <p:ext uri="{BB962C8B-B14F-4D97-AF65-F5344CB8AC3E}">
-        <p14:creationId xmlns:p14="http://schemas.microsoft.com/office/powerpoint/2010/main" val="3552614529"/>
+        <p14:creationId xmlns:p14="http://schemas.microsoft.com/office/powerpoint/2010/main" val="2493343381"/>
       </p:ext>
     </p:extLst>
   </p:cSld>
@@ -14827,337 +19363,57 @@
           <a:chExt cx="0" cy="0"/>
         </a:xfrm>
       </p:grpSpPr>
-      <p:sp>
-        <p:nvSpPr>
-          <p:cNvPr id="5" name="文字方塊 4"/>
-          <p:cNvSpPr txBox="1"/>
+      <p:pic>
+        <p:nvPicPr>
+          <p:cNvPr id="1026" name="Picture 2" descr="Llama architecture diagram">
+            <a:extLst>
+              <a:ext uri="{FF2B5EF4-FFF2-40B4-BE49-F238E27FC236}">
+                <a16:creationId xmlns:a16="http://schemas.microsoft.com/office/drawing/2014/main" id="{6D066493-F09C-4604-EC37-659786A85F97}"/>
+              </a:ext>
+            </a:extLst>
+          </p:cNvPr>
+          <p:cNvPicPr>
+            <a:picLocks noChangeAspect="1" noChangeArrowheads="1"/>
+          </p:cNvPicPr>
           <p:nvPr/>
-        </p:nvSpPr>
-        <p:spPr>
+        </p:nvPicPr>
+        <p:blipFill>
+          <a:blip r:embed="rId2">
+            <a:extLst>
+              <a:ext uri="{28A0092B-C50C-407E-A947-70E740481C1C}">
+                <a14:useLocalDpi xmlns:a14="http://schemas.microsoft.com/office/drawing/2010/main" val="0"/>
+              </a:ext>
+            </a:extLst>
+          </a:blip>
+          <a:srcRect/>
+          <a:stretch>
+            <a:fillRect/>
+          </a:stretch>
+        </p:blipFill>
+        <p:spPr bwMode="auto">
           <a:xfrm>
-            <a:off x="609600" y="1600202"/>
-            <a:ext cx="8077200" cy="4031873"/>
+            <a:off x="190918" y="634104"/>
+            <a:ext cx="8762163" cy="5844484"/>
           </a:xfrm>
           <a:prstGeom prst="rect">
             <a:avLst/>
           </a:prstGeom>
           <a:noFill/>
+          <a:extLst>
+            <a:ext uri="{909E8E84-426E-40DD-AFC4-6F175D3DCCD1}">
+              <a14:hiddenFill xmlns:a14="http://schemas.microsoft.com/office/drawing/2010/main">
+                <a:solidFill>
+                  <a:srgbClr val="FFFFFF"/>
+                </a:solidFill>
+              </a14:hiddenFill>
+            </a:ext>
+          </a:extLst>
         </p:spPr>
-        <p:txBody>
-          <a:bodyPr wrap="square" rtlCol="0">
-            <a:spAutoFit/>
-          </a:bodyPr>
-          <a:lstStyle/>
-          <a:p>
-            <a:pPr marL="514350" indent="-514350">
-              <a:buFont typeface="Arial" panose="020B0604020202020204" pitchFamily="34" charset="0"/>
-              <a:buChar char="•"/>
-            </a:pPr>
-            <a:r>
-              <a:rPr lang="en-US" altLang="zh-TW" sz="3200" dirty="0">
-                <a:solidFill>
-                  <a:prstClr val="white"/>
-                </a:solidFill>
-                <a:latin typeface="微軟正黑體" panose="020B0604030504040204" pitchFamily="34" charset="-120"/>
-                <a:ea typeface="微軟正黑體" panose="020B0604030504040204" pitchFamily="34" charset="-120"/>
-              </a:rPr>
-              <a:t>Transformer </a:t>
-            </a:r>
-            <a:r>
-              <a:rPr lang="zh-TW" altLang="en-US" sz="3200" dirty="0">
-                <a:solidFill>
-                  <a:prstClr val="white"/>
-                </a:solidFill>
-                <a:latin typeface="微軟正黑體" panose="020B0604030504040204" pitchFamily="34" charset="-120"/>
-                <a:ea typeface="微軟正黑體" panose="020B0604030504040204" pitchFamily="34" charset="-120"/>
-              </a:rPr>
-              <a:t>架構 於 </a:t>
-            </a:r>
-            <a:r>
-              <a:rPr lang="en-US" altLang="zh-TW" sz="3200" dirty="0">
-                <a:solidFill>
-                  <a:prstClr val="white"/>
-                </a:solidFill>
-                <a:latin typeface="微軟正黑體" panose="020B0604030504040204" pitchFamily="34" charset="-120"/>
-                <a:ea typeface="微軟正黑體" panose="020B0604030504040204" pitchFamily="34" charset="-120"/>
-              </a:rPr>
-              <a:t>2017 </a:t>
-            </a:r>
-            <a:r>
-              <a:rPr lang="zh-TW" altLang="en-US" sz="3200" dirty="0">
-                <a:solidFill>
-                  <a:prstClr val="white"/>
-                </a:solidFill>
-                <a:latin typeface="微軟正黑體" panose="020B0604030504040204" pitchFamily="34" charset="-120"/>
-                <a:ea typeface="微軟正黑體" panose="020B0604030504040204" pitchFamily="34" charset="-120"/>
-              </a:rPr>
-              <a:t>年 </a:t>
-            </a:r>
-            <a:r>
-              <a:rPr lang="en-US" altLang="zh-TW" sz="3200" dirty="0">
-                <a:solidFill>
-                  <a:prstClr val="white"/>
-                </a:solidFill>
-                <a:latin typeface="微軟正黑體" panose="020B0604030504040204" pitchFamily="34" charset="-120"/>
-                <a:ea typeface="微軟正黑體" panose="020B0604030504040204" pitchFamily="34" charset="-120"/>
-              </a:rPr>
-              <a:t>6 </a:t>
-            </a:r>
-            <a:r>
-              <a:rPr lang="zh-TW" altLang="en-US" sz="3200" dirty="0">
-                <a:solidFill>
-                  <a:prstClr val="white"/>
-                </a:solidFill>
-                <a:latin typeface="微軟正黑體" panose="020B0604030504040204" pitchFamily="34" charset="-120"/>
-                <a:ea typeface="微軟正黑體" panose="020B0604030504040204" pitchFamily="34" charset="-120"/>
-              </a:rPr>
-              <a:t>月推出。原本研究的重點是翻譯任務。隨後推出了幾個有影響力的模型</a:t>
-            </a:r>
-          </a:p>
-          <a:p>
-            <a:pPr marL="514350" indent="-514350">
-              <a:buFont typeface="Arial" panose="020B0604020202020204" pitchFamily="34" charset="0"/>
-              <a:buChar char="•"/>
-            </a:pPr>
-            <a:r>
-              <a:rPr lang="en-US" altLang="zh-TW" sz="3200" dirty="0">
-                <a:solidFill>
-                  <a:prstClr val="white"/>
-                </a:solidFill>
-                <a:latin typeface="微軟正黑體" panose="020B0604030504040204" pitchFamily="34" charset="-120"/>
-                <a:ea typeface="微軟正黑體" panose="020B0604030504040204" pitchFamily="34" charset="-120"/>
-              </a:rPr>
-              <a:t>2018 </a:t>
-            </a:r>
-            <a:r>
-              <a:rPr lang="zh-TW" altLang="en-US" sz="3200" dirty="0">
-                <a:solidFill>
-                  <a:prstClr val="white"/>
-                </a:solidFill>
-                <a:latin typeface="微軟正黑體" panose="020B0604030504040204" pitchFamily="34" charset="-120"/>
-                <a:ea typeface="微軟正黑體" panose="020B0604030504040204" pitchFamily="34" charset="-120"/>
-              </a:rPr>
-              <a:t>年 </a:t>
-            </a:r>
-            <a:r>
-              <a:rPr lang="en-US" altLang="zh-TW" sz="3200" dirty="0">
-                <a:solidFill>
-                  <a:prstClr val="white"/>
-                </a:solidFill>
-                <a:latin typeface="微軟正黑體" panose="020B0604030504040204" pitchFamily="34" charset="-120"/>
-                <a:ea typeface="微軟正黑體" panose="020B0604030504040204" pitchFamily="34" charset="-120"/>
-              </a:rPr>
-              <a:t>6 </a:t>
-            </a:r>
-            <a:r>
-              <a:rPr lang="zh-TW" altLang="en-US" sz="3200" dirty="0">
-                <a:solidFill>
-                  <a:prstClr val="white"/>
-                </a:solidFill>
-                <a:latin typeface="微軟正黑體" panose="020B0604030504040204" pitchFamily="34" charset="-120"/>
-                <a:ea typeface="微軟正黑體" panose="020B0604030504040204" pitchFamily="34" charset="-120"/>
-              </a:rPr>
-              <a:t>月</a:t>
-            </a:r>
-            <a:r>
-              <a:rPr lang="en-US" altLang="zh-TW" sz="3200" dirty="0">
-                <a:solidFill>
-                  <a:prstClr val="white"/>
-                </a:solidFill>
-                <a:latin typeface="微軟正黑體" panose="020B0604030504040204" pitchFamily="34" charset="-120"/>
-                <a:ea typeface="微軟正黑體" panose="020B0604030504040204" pitchFamily="34" charset="-120"/>
-              </a:rPr>
-              <a:t>: GPT, </a:t>
-            </a:r>
-            <a:r>
-              <a:rPr lang="zh-TW" altLang="en-US" sz="3200" dirty="0">
-                <a:solidFill>
-                  <a:prstClr val="white"/>
-                </a:solidFill>
-                <a:latin typeface="微軟正黑體" panose="020B0604030504040204" pitchFamily="34" charset="-120"/>
-                <a:ea typeface="微軟正黑體" panose="020B0604030504040204" pitchFamily="34" charset="-120"/>
-              </a:rPr>
-              <a:t>第一個預訓練的 </a:t>
-            </a:r>
-            <a:r>
-              <a:rPr lang="en-US" altLang="zh-TW" sz="3200" dirty="0">
-                <a:solidFill>
-                  <a:prstClr val="white"/>
-                </a:solidFill>
-                <a:latin typeface="微軟正黑體" panose="020B0604030504040204" pitchFamily="34" charset="-120"/>
-                <a:ea typeface="微軟正黑體" panose="020B0604030504040204" pitchFamily="34" charset="-120"/>
-              </a:rPr>
-              <a:t>Transformer </a:t>
-            </a:r>
-            <a:r>
-              <a:rPr lang="zh-TW" altLang="en-US" sz="3200" dirty="0">
-                <a:solidFill>
-                  <a:prstClr val="white"/>
-                </a:solidFill>
-                <a:latin typeface="微軟正黑體" panose="020B0604030504040204" pitchFamily="34" charset="-120"/>
-                <a:ea typeface="微軟正黑體" panose="020B0604030504040204" pitchFamily="34" charset="-120"/>
-              </a:rPr>
-              <a:t>模型，用於各種 </a:t>
-            </a:r>
-            <a:r>
-              <a:rPr lang="en-US" altLang="zh-TW" sz="3200" dirty="0">
-                <a:solidFill>
-                  <a:prstClr val="white"/>
-                </a:solidFill>
-                <a:latin typeface="微軟正黑體" panose="020B0604030504040204" pitchFamily="34" charset="-120"/>
-                <a:ea typeface="微軟正黑體" panose="020B0604030504040204" pitchFamily="34" charset="-120"/>
-              </a:rPr>
-              <a:t>NLP </a:t>
-            </a:r>
-            <a:r>
-              <a:rPr lang="zh-TW" altLang="en-US" sz="3200" dirty="0">
-                <a:solidFill>
-                  <a:prstClr val="white"/>
-                </a:solidFill>
-                <a:latin typeface="微軟正黑體" panose="020B0604030504040204" pitchFamily="34" charset="-120"/>
-                <a:ea typeface="微軟正黑體" panose="020B0604030504040204" pitchFamily="34" charset="-120"/>
-              </a:rPr>
-              <a:t>任務並獲得極好的結果</a:t>
-            </a:r>
-          </a:p>
-          <a:p>
-            <a:pPr marL="514350" indent="-514350">
-              <a:buFont typeface="Arial" panose="020B0604020202020204" pitchFamily="34" charset="0"/>
-              <a:buChar char="•"/>
-            </a:pPr>
-            <a:r>
-              <a:rPr lang="en-US" altLang="zh-TW" sz="3200" dirty="0">
-                <a:solidFill>
-                  <a:prstClr val="white"/>
-                </a:solidFill>
-                <a:latin typeface="微軟正黑體" panose="020B0604030504040204" pitchFamily="34" charset="-120"/>
-                <a:ea typeface="微軟正黑體" panose="020B0604030504040204" pitchFamily="34" charset="-120"/>
-              </a:rPr>
-              <a:t>2018 </a:t>
-            </a:r>
-            <a:r>
-              <a:rPr lang="zh-TW" altLang="en-US" sz="3200" dirty="0">
-                <a:solidFill>
-                  <a:prstClr val="white"/>
-                </a:solidFill>
-                <a:latin typeface="微軟正黑體" panose="020B0604030504040204" pitchFamily="34" charset="-120"/>
-                <a:ea typeface="微軟正黑體" panose="020B0604030504040204" pitchFamily="34" charset="-120"/>
-              </a:rPr>
-              <a:t>年 </a:t>
-            </a:r>
-            <a:r>
-              <a:rPr lang="en-US" altLang="zh-TW" sz="3200" dirty="0">
-                <a:solidFill>
-                  <a:prstClr val="white"/>
-                </a:solidFill>
-                <a:latin typeface="微軟正黑體" panose="020B0604030504040204" pitchFamily="34" charset="-120"/>
-                <a:ea typeface="微軟正黑體" panose="020B0604030504040204" pitchFamily="34" charset="-120"/>
-              </a:rPr>
-              <a:t>10 </a:t>
-            </a:r>
-            <a:r>
-              <a:rPr lang="zh-TW" altLang="en-US" sz="3200" dirty="0">
-                <a:solidFill>
-                  <a:prstClr val="white"/>
-                </a:solidFill>
-                <a:latin typeface="微軟正黑體" panose="020B0604030504040204" pitchFamily="34" charset="-120"/>
-                <a:ea typeface="微軟正黑體" panose="020B0604030504040204" pitchFamily="34" charset="-120"/>
-              </a:rPr>
-              <a:t>月</a:t>
-            </a:r>
-            <a:r>
-              <a:rPr lang="en-US" altLang="zh-TW" sz="3200" dirty="0">
-                <a:solidFill>
-                  <a:prstClr val="white"/>
-                </a:solidFill>
-                <a:latin typeface="微軟正黑體" panose="020B0604030504040204" pitchFamily="34" charset="-120"/>
-                <a:ea typeface="微軟正黑體" panose="020B0604030504040204" pitchFamily="34" charset="-120"/>
-              </a:rPr>
-              <a:t>: BERT, </a:t>
-            </a:r>
-            <a:r>
-              <a:rPr lang="zh-TW" altLang="en-US" sz="3200" dirty="0">
-                <a:solidFill>
-                  <a:prstClr val="white"/>
-                </a:solidFill>
-                <a:latin typeface="微軟正黑體" panose="020B0604030504040204" pitchFamily="34" charset="-120"/>
-                <a:ea typeface="微軟正黑體" panose="020B0604030504040204" pitchFamily="34" charset="-120"/>
-              </a:rPr>
-              <a:t>另一個大型預訓練模型，該模型旨在生成更好的句子摘要</a:t>
-            </a:r>
-          </a:p>
-        </p:txBody>
-      </p:sp>
-      <p:sp>
-        <p:nvSpPr>
-          <p:cNvPr id="4" name="文字版面配置區 2"/>
-          <p:cNvSpPr txBox="1">
-            <a:spLocks/>
-          </p:cNvSpPr>
-          <p:nvPr/>
-        </p:nvSpPr>
-        <p:spPr>
-          <a:xfrm>
-            <a:off x="990600" y="304800"/>
-            <a:ext cx="7696200" cy="990600"/>
-          </a:xfrm>
-          <a:prstGeom prst="rect">
-            <a:avLst/>
-          </a:prstGeom>
-        </p:spPr>
-        <p:txBody>
-          <a:bodyPr tIns="91440" bIns="91440" anchor="b" anchorCtr="0">
-            <a:noAutofit/>
-          </a:bodyPr>
-          <a:lstStyle/>
-          <a:p>
-            <a:pPr algn="just">
-              <a:spcBef>
-                <a:spcPct val="20000"/>
-              </a:spcBef>
-              <a:defRPr/>
-            </a:pPr>
-            <a:r>
-              <a:rPr lang="en-US" altLang="zh-TW" sz="4800" b="1" kern="0" dirty="0">
-                <a:solidFill>
-                  <a:srgbClr val="00B0F0"/>
-                </a:solidFill>
-                <a:effectLst>
-                  <a:outerShdw blurRad="38100" dist="38100" dir="2700000" algn="tl">
-                    <a:srgbClr val="000000">
-                      <a:alpha val="43137"/>
-                    </a:srgbClr>
-                  </a:outerShdw>
-                </a:effectLst>
-                <a:latin typeface="微軟正黑體" panose="020B0604030504040204" pitchFamily="34" charset="-120"/>
-                <a:ea typeface="微軟正黑體" panose="020B0604030504040204" pitchFamily="34" charset="-120"/>
-              </a:rPr>
-              <a:t>Transformer </a:t>
-            </a:r>
-            <a:r>
-              <a:rPr lang="zh-TW" altLang="en-US" sz="4800" b="1" kern="0" dirty="0">
-                <a:solidFill>
-                  <a:srgbClr val="00B0F0"/>
-                </a:solidFill>
-                <a:effectLst>
-                  <a:outerShdw blurRad="38100" dist="38100" dir="2700000" algn="tl">
-                    <a:srgbClr val="000000">
-                      <a:alpha val="43137"/>
-                    </a:srgbClr>
-                  </a:outerShdw>
-                </a:effectLst>
-                <a:latin typeface="微軟正黑體" panose="020B0604030504040204" pitchFamily="34" charset="-120"/>
-                <a:ea typeface="微軟正黑體" panose="020B0604030504040204" pitchFamily="34" charset="-120"/>
-              </a:rPr>
-              <a:t>架構 </a:t>
-            </a:r>
-          </a:p>
-        </p:txBody>
-      </p:sp>
+      </p:pic>
     </p:spTree>
     <p:extLst>
       <p:ext uri="{BB962C8B-B14F-4D97-AF65-F5344CB8AC3E}">
-        <p14:creationId xmlns:p14="http://schemas.microsoft.com/office/powerpoint/2010/main" val="108379556"/>
+        <p14:creationId xmlns:p14="http://schemas.microsoft.com/office/powerpoint/2010/main" val="2202911614"/>
       </p:ext>
     </p:extLst>
   </p:cSld>
@@ -15187,497 +19443,40 @@
           <a:chExt cx="0" cy="0"/>
         </a:xfrm>
       </p:grpSpPr>
-      <p:sp>
-        <p:nvSpPr>
-          <p:cNvPr id="5" name="文字方塊 4"/>
-          <p:cNvSpPr txBox="1"/>
+      <p:pic>
+        <p:nvPicPr>
+          <p:cNvPr id="5" name="圖片 4">
+            <a:extLst>
+              <a:ext uri="{FF2B5EF4-FFF2-40B4-BE49-F238E27FC236}">
+                <a16:creationId xmlns:a16="http://schemas.microsoft.com/office/drawing/2014/main" id="{2436EDE8-6C26-CEE0-6C7E-428448793B72}"/>
+              </a:ext>
+            </a:extLst>
+          </p:cNvPr>
+          <p:cNvPicPr>
+            <a:picLocks noChangeAspect="1"/>
+          </p:cNvPicPr>
           <p:nvPr/>
-        </p:nvSpPr>
+        </p:nvPicPr>
+        <p:blipFill>
+          <a:blip r:embed="rId2"/>
+          <a:stretch>
+            <a:fillRect/>
+          </a:stretch>
+        </p:blipFill>
         <p:spPr>
           <a:xfrm>
-            <a:off x="609600" y="1295400"/>
-            <a:ext cx="8077200" cy="5509200"/>
-          </a:xfrm>
-          <a:prstGeom prst="rect">
-            <a:avLst/>
-          </a:prstGeom>
-          <a:noFill/>
-        </p:spPr>
-        <p:txBody>
-          <a:bodyPr wrap="square" rtlCol="0">
-            <a:spAutoFit/>
-          </a:bodyPr>
-          <a:lstStyle/>
-          <a:p>
-            <a:pPr marL="514350" indent="-514350">
-              <a:buFont typeface="Arial" panose="020B0604020202020204" pitchFamily="34" charset="0"/>
-              <a:buChar char="•"/>
-            </a:pPr>
-            <a:r>
-              <a:rPr lang="en-US" altLang="zh-TW" sz="3200" dirty="0">
-                <a:solidFill>
-                  <a:prstClr val="white"/>
-                </a:solidFill>
-                <a:latin typeface="微軟正黑體" panose="020B0604030504040204" pitchFamily="34" charset="-120"/>
-                <a:ea typeface="微軟正黑體" panose="020B0604030504040204" pitchFamily="34" charset="-120"/>
-              </a:rPr>
-              <a:t>2019 </a:t>
-            </a:r>
-            <a:r>
-              <a:rPr lang="zh-TW" altLang="en-US" sz="3200" dirty="0">
-                <a:solidFill>
-                  <a:prstClr val="white"/>
-                </a:solidFill>
-                <a:latin typeface="微軟正黑體" panose="020B0604030504040204" pitchFamily="34" charset="-120"/>
-                <a:ea typeface="微軟正黑體" panose="020B0604030504040204" pitchFamily="34" charset="-120"/>
-              </a:rPr>
-              <a:t>年 </a:t>
-            </a:r>
-            <a:r>
-              <a:rPr lang="en-US" altLang="zh-TW" sz="3200" dirty="0">
-                <a:solidFill>
-                  <a:prstClr val="white"/>
-                </a:solidFill>
-                <a:latin typeface="微軟正黑體" panose="020B0604030504040204" pitchFamily="34" charset="-120"/>
-                <a:ea typeface="微軟正黑體" panose="020B0604030504040204" pitchFamily="34" charset="-120"/>
-              </a:rPr>
-              <a:t>2 </a:t>
-            </a:r>
-            <a:r>
-              <a:rPr lang="zh-TW" altLang="en-US" sz="3200" dirty="0">
-                <a:solidFill>
-                  <a:prstClr val="white"/>
-                </a:solidFill>
-                <a:latin typeface="微軟正黑體" panose="020B0604030504040204" pitchFamily="34" charset="-120"/>
-                <a:ea typeface="微軟正黑體" panose="020B0604030504040204" pitchFamily="34" charset="-120"/>
-              </a:rPr>
-              <a:t>月</a:t>
-            </a:r>
-            <a:r>
-              <a:rPr lang="en-US" altLang="zh-TW" sz="3200" dirty="0">
-                <a:solidFill>
-                  <a:prstClr val="white"/>
-                </a:solidFill>
-                <a:latin typeface="微軟正黑體" panose="020B0604030504040204" pitchFamily="34" charset="-120"/>
-                <a:ea typeface="微軟正黑體" panose="020B0604030504040204" pitchFamily="34" charset="-120"/>
-              </a:rPr>
-              <a:t>: GPT-2, GPT </a:t>
-            </a:r>
-            <a:r>
-              <a:rPr lang="zh-TW" altLang="en-US" sz="3200" dirty="0">
-                <a:solidFill>
-                  <a:prstClr val="white"/>
-                </a:solidFill>
-                <a:latin typeface="微軟正黑體" panose="020B0604030504040204" pitchFamily="34" charset="-120"/>
-                <a:ea typeface="微軟正黑體" panose="020B0604030504040204" pitchFamily="34" charset="-120"/>
-              </a:rPr>
-              <a:t>的改進版本，由於道德問題沒有立即公開發布</a:t>
-            </a:r>
-          </a:p>
-          <a:p>
-            <a:pPr marL="514350" indent="-514350">
-              <a:buFont typeface="Arial" panose="020B0604020202020204" pitchFamily="34" charset="0"/>
-              <a:buChar char="•"/>
-            </a:pPr>
-            <a:r>
-              <a:rPr lang="en-US" altLang="zh-TW" sz="3200" dirty="0">
-                <a:solidFill>
-                  <a:prstClr val="white"/>
-                </a:solidFill>
-                <a:latin typeface="微軟正黑體" panose="020B0604030504040204" pitchFamily="34" charset="-120"/>
-                <a:ea typeface="微軟正黑體" panose="020B0604030504040204" pitchFamily="34" charset="-120"/>
-              </a:rPr>
-              <a:t>2019 </a:t>
-            </a:r>
-            <a:r>
-              <a:rPr lang="zh-TW" altLang="en-US" sz="3200" dirty="0">
-                <a:solidFill>
-                  <a:prstClr val="white"/>
-                </a:solidFill>
-                <a:latin typeface="微軟正黑體" panose="020B0604030504040204" pitchFamily="34" charset="-120"/>
-                <a:ea typeface="微軟正黑體" panose="020B0604030504040204" pitchFamily="34" charset="-120"/>
-              </a:rPr>
-              <a:t>年 </a:t>
-            </a:r>
-            <a:r>
-              <a:rPr lang="en-US" altLang="zh-TW" sz="3200" dirty="0">
-                <a:solidFill>
-                  <a:prstClr val="white"/>
-                </a:solidFill>
-                <a:latin typeface="微軟正黑體" panose="020B0604030504040204" pitchFamily="34" charset="-120"/>
-                <a:ea typeface="微軟正黑體" panose="020B0604030504040204" pitchFamily="34" charset="-120"/>
-              </a:rPr>
-              <a:t>10 </a:t>
-            </a:r>
-            <a:r>
-              <a:rPr lang="zh-TW" altLang="en-US" sz="3200" dirty="0">
-                <a:solidFill>
-                  <a:prstClr val="white"/>
-                </a:solidFill>
-                <a:latin typeface="微軟正黑體" panose="020B0604030504040204" pitchFamily="34" charset="-120"/>
-                <a:ea typeface="微軟正黑體" panose="020B0604030504040204" pitchFamily="34" charset="-120"/>
-              </a:rPr>
-              <a:t>月</a:t>
-            </a:r>
-            <a:r>
-              <a:rPr lang="en-US" altLang="zh-TW" sz="3200" dirty="0">
-                <a:solidFill>
-                  <a:prstClr val="white"/>
-                </a:solidFill>
-                <a:latin typeface="微軟正黑體" panose="020B0604030504040204" pitchFamily="34" charset="-120"/>
-                <a:ea typeface="微軟正黑體" panose="020B0604030504040204" pitchFamily="34" charset="-120"/>
-              </a:rPr>
-              <a:t>: </a:t>
-            </a:r>
-            <a:r>
-              <a:rPr lang="en-US" altLang="zh-TW" sz="3200" dirty="0" err="1">
-                <a:solidFill>
-                  <a:prstClr val="white"/>
-                </a:solidFill>
-                <a:latin typeface="微軟正黑體" panose="020B0604030504040204" pitchFamily="34" charset="-120"/>
-                <a:ea typeface="微軟正黑體" panose="020B0604030504040204" pitchFamily="34" charset="-120"/>
-              </a:rPr>
-              <a:t>DistilBERT</a:t>
-            </a:r>
-            <a:r>
-              <a:rPr lang="en-US" altLang="zh-TW" sz="3200" dirty="0">
-                <a:solidFill>
-                  <a:prstClr val="white"/>
-                </a:solidFill>
-                <a:latin typeface="微軟正黑體" panose="020B0604030504040204" pitchFamily="34" charset="-120"/>
-                <a:ea typeface="微軟正黑體" panose="020B0604030504040204" pitchFamily="34" charset="-120"/>
-              </a:rPr>
-              <a:t>, BERT </a:t>
-            </a:r>
-            <a:r>
-              <a:rPr lang="zh-TW" altLang="en-US" sz="3200" dirty="0">
-                <a:solidFill>
-                  <a:prstClr val="white"/>
-                </a:solidFill>
-                <a:latin typeface="微軟正黑體" panose="020B0604030504040204" pitchFamily="34" charset="-120"/>
-                <a:ea typeface="微軟正黑體" panose="020B0604030504040204" pitchFamily="34" charset="-120"/>
-              </a:rPr>
-              <a:t>的提煉版本，速度提高 </a:t>
-            </a:r>
-            <a:r>
-              <a:rPr lang="en-US" altLang="zh-TW" sz="3200" dirty="0">
-                <a:solidFill>
-                  <a:prstClr val="white"/>
-                </a:solidFill>
-                <a:latin typeface="微軟正黑體" panose="020B0604030504040204" pitchFamily="34" charset="-120"/>
-                <a:ea typeface="微軟正黑體" panose="020B0604030504040204" pitchFamily="34" charset="-120"/>
-              </a:rPr>
-              <a:t>60%</a:t>
-            </a:r>
-            <a:r>
-              <a:rPr lang="zh-TW" altLang="en-US" sz="3200" dirty="0">
-                <a:solidFill>
-                  <a:prstClr val="white"/>
-                </a:solidFill>
-                <a:latin typeface="微軟正黑體" panose="020B0604030504040204" pitchFamily="34" charset="-120"/>
-                <a:ea typeface="微軟正黑體" panose="020B0604030504040204" pitchFamily="34" charset="-120"/>
-              </a:rPr>
-              <a:t>，記憶體減輕 </a:t>
-            </a:r>
-            <a:r>
-              <a:rPr lang="en-US" altLang="zh-TW" sz="3200" dirty="0">
-                <a:solidFill>
-                  <a:prstClr val="white"/>
-                </a:solidFill>
-                <a:latin typeface="微軟正黑體" panose="020B0604030504040204" pitchFamily="34" charset="-120"/>
-                <a:ea typeface="微軟正黑體" panose="020B0604030504040204" pitchFamily="34" charset="-120"/>
-              </a:rPr>
-              <a:t>40%</a:t>
-            </a:r>
-            <a:r>
-              <a:rPr lang="zh-TW" altLang="en-US" sz="3200" dirty="0">
-                <a:solidFill>
-                  <a:prstClr val="white"/>
-                </a:solidFill>
-                <a:latin typeface="微軟正黑體" panose="020B0604030504040204" pitchFamily="34" charset="-120"/>
-                <a:ea typeface="微軟正黑體" panose="020B0604030504040204" pitchFamily="34" charset="-120"/>
-              </a:rPr>
-              <a:t>，但仍保留 </a:t>
-            </a:r>
-            <a:r>
-              <a:rPr lang="en-US" altLang="zh-TW" sz="3200" dirty="0">
-                <a:solidFill>
-                  <a:prstClr val="white"/>
-                </a:solidFill>
-                <a:latin typeface="微軟正黑體" panose="020B0604030504040204" pitchFamily="34" charset="-120"/>
-                <a:ea typeface="微軟正黑體" panose="020B0604030504040204" pitchFamily="34" charset="-120"/>
-              </a:rPr>
-              <a:t>BERT 97% </a:t>
-            </a:r>
-            <a:r>
-              <a:rPr lang="zh-TW" altLang="en-US" sz="3200" dirty="0">
-                <a:solidFill>
-                  <a:prstClr val="white"/>
-                </a:solidFill>
-                <a:latin typeface="微軟正黑體" panose="020B0604030504040204" pitchFamily="34" charset="-120"/>
-                <a:ea typeface="微軟正黑體" panose="020B0604030504040204" pitchFamily="34" charset="-120"/>
-              </a:rPr>
-              <a:t>的性能</a:t>
-            </a:r>
-          </a:p>
-          <a:p>
-            <a:pPr marL="514350" indent="-514350">
-              <a:buFont typeface="Arial" panose="020B0604020202020204" pitchFamily="34" charset="0"/>
-              <a:buChar char="•"/>
-            </a:pPr>
-            <a:r>
-              <a:rPr lang="en-US" altLang="zh-TW" sz="3200" dirty="0">
-                <a:solidFill>
-                  <a:prstClr val="white"/>
-                </a:solidFill>
-                <a:latin typeface="微軟正黑體" panose="020B0604030504040204" pitchFamily="34" charset="-120"/>
-                <a:ea typeface="微軟正黑體" panose="020B0604030504040204" pitchFamily="34" charset="-120"/>
-              </a:rPr>
-              <a:t>2019 </a:t>
-            </a:r>
-            <a:r>
-              <a:rPr lang="zh-TW" altLang="en-US" sz="3200" dirty="0">
-                <a:solidFill>
-                  <a:prstClr val="white"/>
-                </a:solidFill>
-                <a:latin typeface="微軟正黑體" panose="020B0604030504040204" pitchFamily="34" charset="-120"/>
-                <a:ea typeface="微軟正黑體" panose="020B0604030504040204" pitchFamily="34" charset="-120"/>
-              </a:rPr>
-              <a:t>年 </a:t>
-            </a:r>
-            <a:r>
-              <a:rPr lang="en-US" altLang="zh-TW" sz="3200" dirty="0">
-                <a:solidFill>
-                  <a:prstClr val="white"/>
-                </a:solidFill>
-                <a:latin typeface="微軟正黑體" panose="020B0604030504040204" pitchFamily="34" charset="-120"/>
-                <a:ea typeface="微軟正黑體" panose="020B0604030504040204" pitchFamily="34" charset="-120"/>
-              </a:rPr>
-              <a:t>10 </a:t>
-            </a:r>
-            <a:r>
-              <a:rPr lang="zh-TW" altLang="en-US" sz="3200" dirty="0">
-                <a:solidFill>
-                  <a:prstClr val="white"/>
-                </a:solidFill>
-                <a:latin typeface="微軟正黑體" panose="020B0604030504040204" pitchFamily="34" charset="-120"/>
-                <a:ea typeface="微軟正黑體" panose="020B0604030504040204" pitchFamily="34" charset="-120"/>
-              </a:rPr>
-              <a:t>月</a:t>
-            </a:r>
-            <a:r>
-              <a:rPr lang="en-US" altLang="zh-TW" sz="3200" dirty="0">
-                <a:solidFill>
-                  <a:prstClr val="white"/>
-                </a:solidFill>
-                <a:latin typeface="微軟正黑體" panose="020B0604030504040204" pitchFamily="34" charset="-120"/>
-                <a:ea typeface="微軟正黑體" panose="020B0604030504040204" pitchFamily="34" charset="-120"/>
-              </a:rPr>
-              <a:t>: BART </a:t>
-            </a:r>
-            <a:r>
-              <a:rPr lang="zh-TW" altLang="en-US" sz="3200" dirty="0">
-                <a:solidFill>
-                  <a:prstClr val="white"/>
-                </a:solidFill>
-                <a:latin typeface="微軟正黑體" panose="020B0604030504040204" pitchFamily="34" charset="-120"/>
-                <a:ea typeface="微軟正黑體" panose="020B0604030504040204" pitchFamily="34" charset="-120"/>
-              </a:rPr>
-              <a:t>和 </a:t>
-            </a:r>
-            <a:r>
-              <a:rPr lang="en-US" altLang="zh-TW" sz="3200" dirty="0">
-                <a:solidFill>
-                  <a:prstClr val="white"/>
-                </a:solidFill>
-                <a:latin typeface="微軟正黑體" panose="020B0604030504040204" pitchFamily="34" charset="-120"/>
-                <a:ea typeface="微軟正黑體" panose="020B0604030504040204" pitchFamily="34" charset="-120"/>
-              </a:rPr>
-              <a:t>T5, </a:t>
-            </a:r>
-            <a:r>
-              <a:rPr lang="zh-TW" altLang="en-US" sz="3200" dirty="0">
-                <a:solidFill>
-                  <a:prstClr val="white"/>
-                </a:solidFill>
-                <a:latin typeface="微軟正黑體" panose="020B0604030504040204" pitchFamily="34" charset="-120"/>
-                <a:ea typeface="微軟正黑體" panose="020B0604030504040204" pitchFamily="34" charset="-120"/>
-              </a:rPr>
-              <a:t>兩個使用與原始 </a:t>
-            </a:r>
-            <a:r>
-              <a:rPr lang="en-US" altLang="zh-TW" sz="3200" dirty="0">
-                <a:solidFill>
-                  <a:prstClr val="white"/>
-                </a:solidFill>
-                <a:latin typeface="微軟正黑體" panose="020B0604030504040204" pitchFamily="34" charset="-120"/>
-                <a:ea typeface="微軟正黑體" panose="020B0604030504040204" pitchFamily="34" charset="-120"/>
-              </a:rPr>
-              <a:t>Transformer </a:t>
-            </a:r>
-            <a:r>
-              <a:rPr lang="zh-TW" altLang="en-US" sz="3200" dirty="0">
-                <a:solidFill>
-                  <a:prstClr val="white"/>
-                </a:solidFill>
-                <a:latin typeface="微軟正黑體" panose="020B0604030504040204" pitchFamily="34" charset="-120"/>
-                <a:ea typeface="微軟正黑體" panose="020B0604030504040204" pitchFamily="34" charset="-120"/>
-              </a:rPr>
-              <a:t>模型相同架構的大型預訓練模型</a:t>
-            </a:r>
-            <a:endParaRPr lang="en-US" altLang="zh-TW" sz="3200" dirty="0">
-              <a:solidFill>
-                <a:prstClr val="white"/>
-              </a:solidFill>
-              <a:latin typeface="微軟正黑體" panose="020B0604030504040204" pitchFamily="34" charset="-120"/>
-              <a:ea typeface="微軟正黑體" panose="020B0604030504040204" pitchFamily="34" charset="-120"/>
-            </a:endParaRPr>
-          </a:p>
-          <a:p>
-            <a:pPr marL="514350" indent="-514350">
-              <a:buFont typeface="Arial" panose="020B0604020202020204" pitchFamily="34" charset="0"/>
-              <a:buChar char="•"/>
-            </a:pPr>
-            <a:r>
-              <a:rPr lang="en-US" altLang="zh-TW" sz="3200" dirty="0">
-                <a:solidFill>
-                  <a:prstClr val="white"/>
-                </a:solidFill>
-                <a:latin typeface="微軟正黑體" panose="020B0604030504040204" pitchFamily="34" charset="-120"/>
-                <a:ea typeface="微軟正黑體" panose="020B0604030504040204" pitchFamily="34" charset="-120"/>
-              </a:rPr>
-              <a:t>2020 </a:t>
-            </a:r>
-            <a:r>
-              <a:rPr lang="zh-TW" altLang="en-US" sz="3200" dirty="0">
-                <a:solidFill>
-                  <a:prstClr val="white"/>
-                </a:solidFill>
-                <a:latin typeface="微軟正黑體" panose="020B0604030504040204" pitchFamily="34" charset="-120"/>
-                <a:ea typeface="微軟正黑體" panose="020B0604030504040204" pitchFamily="34" charset="-120"/>
-              </a:rPr>
-              <a:t>年 </a:t>
-            </a:r>
-            <a:r>
-              <a:rPr lang="en-US" altLang="zh-TW" sz="3200" dirty="0">
-                <a:solidFill>
-                  <a:prstClr val="white"/>
-                </a:solidFill>
-                <a:latin typeface="微軟正黑體" panose="020B0604030504040204" pitchFamily="34" charset="-120"/>
-                <a:ea typeface="微軟正黑體" panose="020B0604030504040204" pitchFamily="34" charset="-120"/>
-              </a:rPr>
-              <a:t>5 </a:t>
-            </a:r>
-            <a:r>
-              <a:rPr lang="zh-TW" altLang="en-US" sz="3200" dirty="0">
-                <a:solidFill>
-                  <a:prstClr val="white"/>
-                </a:solidFill>
-                <a:latin typeface="微軟正黑體" panose="020B0604030504040204" pitchFamily="34" charset="-120"/>
-                <a:ea typeface="微軟正黑體" panose="020B0604030504040204" pitchFamily="34" charset="-120"/>
-              </a:rPr>
-              <a:t>月</a:t>
-            </a:r>
-            <a:r>
-              <a:rPr lang="en-US" altLang="zh-TW" sz="3200" dirty="0">
-                <a:solidFill>
-                  <a:prstClr val="white"/>
-                </a:solidFill>
-                <a:latin typeface="微軟正黑體" panose="020B0604030504040204" pitchFamily="34" charset="-120"/>
-                <a:ea typeface="微軟正黑體" panose="020B0604030504040204" pitchFamily="34" charset="-120"/>
-              </a:rPr>
-              <a:t>, GPT-3, GPT-2 </a:t>
-            </a:r>
-            <a:r>
-              <a:rPr lang="zh-TW" altLang="en-US" sz="3200" dirty="0">
-                <a:solidFill>
-                  <a:prstClr val="white"/>
-                </a:solidFill>
-                <a:latin typeface="微軟正黑體" panose="020B0604030504040204" pitchFamily="34" charset="-120"/>
-                <a:ea typeface="微軟正黑體" panose="020B0604030504040204" pitchFamily="34" charset="-120"/>
-              </a:rPr>
-              <a:t>的更大版本，無需微調即可在各種任務上表現良好（稱爲零樣本學習）</a:t>
-            </a:r>
-            <a:endParaRPr lang="en-US" altLang="zh-TW" sz="3200" dirty="0">
-              <a:solidFill>
-                <a:prstClr val="white"/>
-              </a:solidFill>
-              <a:latin typeface="微軟正黑體" panose="020B0604030504040204" pitchFamily="34" charset="-120"/>
-              <a:ea typeface="微軟正黑體" panose="020B0604030504040204" pitchFamily="34" charset="-120"/>
-            </a:endParaRPr>
-          </a:p>
-        </p:txBody>
-      </p:sp>
-      <p:sp>
-        <p:nvSpPr>
-          <p:cNvPr id="4" name="文字版面配置區 2"/>
-          <p:cNvSpPr txBox="1">
-            <a:spLocks/>
-          </p:cNvSpPr>
-          <p:nvPr/>
-        </p:nvSpPr>
-        <p:spPr>
-          <a:xfrm>
-            <a:off x="990600" y="152400"/>
-            <a:ext cx="7696200" cy="990600"/>
+            <a:off x="0" y="789751"/>
+            <a:ext cx="9144000" cy="5278497"/>
           </a:xfrm>
           <a:prstGeom prst="rect">
             <a:avLst/>
           </a:prstGeom>
         </p:spPr>
-        <p:txBody>
-          <a:bodyPr tIns="91440" bIns="91440" anchor="b" anchorCtr="0">
-            <a:noAutofit/>
-          </a:bodyPr>
-          <a:lstStyle/>
-          <a:p>
-            <a:pPr algn="just">
-              <a:spcBef>
-                <a:spcPct val="20000"/>
-              </a:spcBef>
-              <a:defRPr/>
-            </a:pPr>
-            <a:r>
-              <a:rPr lang="en-US" altLang="zh-TW" sz="4800" b="1" kern="0" dirty="0">
-                <a:solidFill>
-                  <a:srgbClr val="00B0F0"/>
-                </a:solidFill>
-                <a:effectLst>
-                  <a:outerShdw blurRad="38100" dist="38100" dir="2700000" algn="tl">
-                    <a:srgbClr val="000000">
-                      <a:alpha val="43137"/>
-                    </a:srgbClr>
-                  </a:outerShdw>
-                </a:effectLst>
-                <a:latin typeface="微軟正黑體" panose="020B0604030504040204" pitchFamily="34" charset="-120"/>
-                <a:ea typeface="微軟正黑體" panose="020B0604030504040204" pitchFamily="34" charset="-120"/>
-              </a:rPr>
-              <a:t>Transformer </a:t>
-            </a:r>
-            <a:r>
-              <a:rPr lang="zh-TW" altLang="en-US" sz="4800" b="1" kern="0" dirty="0">
-                <a:solidFill>
-                  <a:srgbClr val="00B0F0"/>
-                </a:solidFill>
-                <a:effectLst>
-                  <a:outerShdw blurRad="38100" dist="38100" dir="2700000" algn="tl">
-                    <a:srgbClr val="000000">
-                      <a:alpha val="43137"/>
-                    </a:srgbClr>
-                  </a:outerShdw>
-                </a:effectLst>
-                <a:latin typeface="微軟正黑體" panose="020B0604030504040204" pitchFamily="34" charset="-120"/>
-                <a:ea typeface="微軟正黑體" panose="020B0604030504040204" pitchFamily="34" charset="-120"/>
-              </a:rPr>
-              <a:t>架構 </a:t>
-            </a:r>
-          </a:p>
-        </p:txBody>
-      </p:sp>
+      </p:pic>
     </p:spTree>
     <p:extLst>
       <p:ext uri="{BB962C8B-B14F-4D97-AF65-F5344CB8AC3E}">
-        <p14:creationId xmlns:p14="http://schemas.microsoft.com/office/powerpoint/2010/main" val="502793792"/>
+        <p14:creationId xmlns:p14="http://schemas.microsoft.com/office/powerpoint/2010/main" val="3302277282"/>
       </p:ext>
     </p:extLst>
   </p:cSld>
@@ -15695,7 +19494,13 @@
   <p:cSld>
     <p:spTree>
       <p:nvGrpSpPr>
-        <p:cNvPr id="1" name=""/>
+        <p:cNvPr id="1" name="">
+          <a:extLst>
+            <a:ext uri="{FF2B5EF4-FFF2-40B4-BE49-F238E27FC236}">
+              <a16:creationId xmlns:a16="http://schemas.microsoft.com/office/drawing/2014/main" id="{827BDCBB-D2DF-0A02-7775-8CCB0B64B2AE}"/>
+            </a:ext>
+          </a:extLst>
+        </p:cNvPr>
         <p:cNvGrpSpPr/>
         <p:nvPr/>
       </p:nvGrpSpPr>
@@ -15709,14 +19514,20 @@
       </p:grpSpPr>
       <p:sp>
         <p:nvSpPr>
-          <p:cNvPr id="5" name="文字方塊 4"/>
+          <p:cNvPr id="4" name="文字方塊 3">
+            <a:extLst>
+              <a:ext uri="{FF2B5EF4-FFF2-40B4-BE49-F238E27FC236}">
+                <a16:creationId xmlns:a16="http://schemas.microsoft.com/office/drawing/2014/main" id="{4C50E342-E3B4-FC86-72F1-0E901AAE9D78}"/>
+              </a:ext>
+            </a:extLst>
+          </p:cNvPr>
           <p:cNvSpPr txBox="1"/>
           <p:nvPr/>
         </p:nvSpPr>
         <p:spPr>
           <a:xfrm>
-            <a:off x="609600" y="1600202"/>
-            <a:ext cx="8077200" cy="2554545"/>
+            <a:off x="685800" y="2743200"/>
+            <a:ext cx="7772400" cy="830997"/>
           </a:xfrm>
           <a:prstGeom prst="rect">
             <a:avLst/>
@@ -15729,184 +19540,11 @@
           </a:bodyPr>
           <a:lstStyle/>
           <a:p>
-            <a:pPr marL="514350" indent="-514350">
-              <a:buFont typeface="Arial" panose="020B0604020202020204" pitchFamily="34" charset="0"/>
-              <a:buChar char="•"/>
-            </a:pPr>
-            <a:r>
-              <a:rPr lang="zh-TW" altLang="en-US" sz="3200" dirty="0">
-                <a:solidFill>
-                  <a:prstClr val="white"/>
-                </a:solidFill>
-                <a:latin typeface="微軟正黑體" panose="020B0604030504040204" pitchFamily="34" charset="-120"/>
-                <a:ea typeface="微軟正黑體" panose="020B0604030504040204" pitchFamily="34" charset="-120"/>
-              </a:rPr>
-              <a:t>大致分爲三類：</a:t>
-            </a:r>
-          </a:p>
-          <a:p>
-            <a:pPr marL="514350" indent="-514350">
-              <a:buFont typeface="Arial" panose="020B0604020202020204" pitchFamily="34" charset="0"/>
-              <a:buChar char="•"/>
-            </a:pPr>
-            <a:endParaRPr lang="zh-TW" altLang="en-US" sz="3200" dirty="0">
-              <a:solidFill>
-                <a:prstClr val="white"/>
-              </a:solidFill>
-              <a:latin typeface="微軟正黑體" panose="020B0604030504040204" pitchFamily="34" charset="-120"/>
-              <a:ea typeface="微軟正黑體" panose="020B0604030504040204" pitchFamily="34" charset="-120"/>
-            </a:endParaRPr>
-          </a:p>
-          <a:p>
-            <a:pPr marL="514350" indent="-514350">
-              <a:buFont typeface="Arial" panose="020B0604020202020204" pitchFamily="34" charset="0"/>
-              <a:buChar char="•"/>
-            </a:pPr>
-            <a:r>
-              <a:rPr lang="en-US" altLang="zh-TW" sz="3200" dirty="0">
-                <a:solidFill>
-                  <a:prstClr val="white"/>
-                </a:solidFill>
-                <a:latin typeface="微軟正黑體" panose="020B0604030504040204" pitchFamily="34" charset="-120"/>
-                <a:ea typeface="微軟正黑體" panose="020B0604030504040204" pitchFamily="34" charset="-120"/>
-              </a:rPr>
-              <a:t>GPT-like (</a:t>
-            </a:r>
-            <a:r>
-              <a:rPr lang="zh-TW" altLang="en-US" sz="3200" dirty="0">
-                <a:solidFill>
-                  <a:prstClr val="white"/>
-                </a:solidFill>
-                <a:latin typeface="微軟正黑體" panose="020B0604030504040204" pitchFamily="34" charset="-120"/>
-                <a:ea typeface="微軟正黑體" panose="020B0604030504040204" pitchFamily="34" charset="-120"/>
-              </a:rPr>
-              <a:t>自迴歸模型，生成</a:t>
-            </a:r>
-            <a:r>
-              <a:rPr lang="en-US" altLang="zh-TW" sz="3200" dirty="0">
-                <a:solidFill>
-                  <a:prstClr val="white"/>
-                </a:solidFill>
-                <a:latin typeface="微軟正黑體" panose="020B0604030504040204" pitchFamily="34" charset="-120"/>
-                <a:ea typeface="微軟正黑體" panose="020B0604030504040204" pitchFamily="34" charset="-120"/>
-              </a:rPr>
-              <a:t>)</a:t>
-            </a:r>
-          </a:p>
-          <a:p>
-            <a:pPr marL="514350" indent="-514350">
-              <a:buFont typeface="Arial" panose="020B0604020202020204" pitchFamily="34" charset="0"/>
-              <a:buChar char="•"/>
-            </a:pPr>
-            <a:r>
-              <a:rPr lang="en-US" altLang="zh-TW" sz="3200" dirty="0">
-                <a:solidFill>
-                  <a:prstClr val="white"/>
-                </a:solidFill>
-                <a:latin typeface="微軟正黑體" panose="020B0604030504040204" pitchFamily="34" charset="-120"/>
-                <a:ea typeface="微軟正黑體" panose="020B0604030504040204" pitchFamily="34" charset="-120"/>
-              </a:rPr>
-              <a:t>BERT-like (</a:t>
-            </a:r>
-            <a:r>
-              <a:rPr lang="zh-TW" altLang="en-US" sz="3200" dirty="0">
-                <a:solidFill>
-                  <a:prstClr val="white"/>
-                </a:solidFill>
-                <a:latin typeface="微軟正黑體" panose="020B0604030504040204" pitchFamily="34" charset="-120"/>
-                <a:ea typeface="微軟正黑體" panose="020B0604030504040204" pitchFamily="34" charset="-120"/>
-              </a:rPr>
-              <a:t>自動編碼模型，理解</a:t>
-            </a:r>
-            <a:r>
-              <a:rPr lang="en-US" altLang="zh-TW" sz="3200" dirty="0">
-                <a:solidFill>
-                  <a:prstClr val="white"/>
-                </a:solidFill>
-                <a:latin typeface="微軟正黑體" panose="020B0604030504040204" pitchFamily="34" charset="-120"/>
-                <a:ea typeface="微軟正黑體" panose="020B0604030504040204" pitchFamily="34" charset="-120"/>
-              </a:rPr>
-              <a:t>)</a:t>
-            </a:r>
-          </a:p>
-          <a:p>
-            <a:pPr marL="514350" indent="-514350">
-              <a:buFont typeface="Arial" panose="020B0604020202020204" pitchFamily="34" charset="0"/>
-              <a:buChar char="•"/>
-            </a:pPr>
-            <a:r>
-              <a:rPr lang="en-US" altLang="zh-TW" sz="3200" dirty="0">
-                <a:solidFill>
-                  <a:prstClr val="white"/>
-                </a:solidFill>
-                <a:latin typeface="微軟正黑體" panose="020B0604030504040204" pitchFamily="34" charset="-120"/>
-                <a:ea typeface="微軟正黑體" panose="020B0604030504040204" pitchFamily="34" charset="-120"/>
-              </a:rPr>
-              <a:t>BART/T5-like (</a:t>
-            </a:r>
-            <a:r>
-              <a:rPr lang="zh-TW" altLang="en-US" sz="3200" dirty="0">
-                <a:solidFill>
-                  <a:prstClr val="white"/>
-                </a:solidFill>
-                <a:latin typeface="微軟正黑體" panose="020B0604030504040204" pitchFamily="34" charset="-120"/>
-                <a:ea typeface="微軟正黑體" panose="020B0604030504040204" pitchFamily="34" charset="-120"/>
-              </a:rPr>
-              <a:t>序列到序列模型，翻譯</a:t>
-            </a:r>
-            <a:r>
-              <a:rPr lang="en-US" altLang="zh-TW" sz="3200" dirty="0">
-                <a:solidFill>
-                  <a:prstClr val="white"/>
-                </a:solidFill>
-                <a:latin typeface="微軟正黑體" panose="020B0604030504040204" pitchFamily="34" charset="-120"/>
-                <a:ea typeface="微軟正黑體" panose="020B0604030504040204" pitchFamily="34" charset="-120"/>
-              </a:rPr>
-              <a:t>)</a:t>
-            </a:r>
-            <a:endParaRPr lang="zh-TW" altLang="en-US" sz="3200" dirty="0">
-              <a:solidFill>
-                <a:prstClr val="white"/>
-              </a:solidFill>
-              <a:latin typeface="微軟正黑體" panose="020B0604030504040204" pitchFamily="34" charset="-120"/>
-              <a:ea typeface="微軟正黑體" panose="020B0604030504040204" pitchFamily="34" charset="-120"/>
-            </a:endParaRPr>
-          </a:p>
-        </p:txBody>
-      </p:sp>
-      <p:sp>
-        <p:nvSpPr>
-          <p:cNvPr id="4" name="文字版面配置區 2"/>
-          <p:cNvSpPr txBox="1">
-            <a:spLocks/>
-          </p:cNvSpPr>
-          <p:nvPr/>
-        </p:nvSpPr>
-        <p:spPr>
-          <a:xfrm>
-            <a:off x="990600" y="304800"/>
-            <a:ext cx="7696200" cy="990600"/>
-          </a:xfrm>
-          <a:prstGeom prst="rect">
-            <a:avLst/>
-          </a:prstGeom>
-        </p:spPr>
-        <p:txBody>
-          <a:bodyPr tIns="91440" bIns="91440" anchor="b" anchorCtr="0">
-            <a:noAutofit/>
-          </a:bodyPr>
-          <a:lstStyle/>
-          <a:p>
-            <a:pPr algn="just">
-              <a:spcBef>
-                <a:spcPct val="20000"/>
-              </a:spcBef>
-              <a:defRPr/>
-            </a:pPr>
-            <a:r>
-              <a:rPr lang="en-US" altLang="zh-TW" sz="4800" b="1" kern="0" dirty="0">
-                <a:solidFill>
-                  <a:srgbClr val="00B0F0"/>
+            <a:pPr algn="ctr"/>
+            <a:r>
+              <a:rPr kumimoji="1" lang="zh-TW" altLang="en-US" sz="4800" b="1" dirty="0">
+                <a:solidFill>
+                  <a:srgbClr val="FFFF00"/>
                 </a:solidFill>
                 <a:effectLst>
                   <a:outerShdw blurRad="38100" dist="38100" dir="2700000" algn="tl">
@@ -15917,33 +19555,32 @@
                 </a:effectLst>
                 <a:latin typeface="微軟正黑體" panose="020B0604030504040204" pitchFamily="34" charset="-120"/>
                 <a:ea typeface="微軟正黑體" panose="020B0604030504040204" pitchFamily="34" charset="-120"/>
-              </a:rPr>
-              <a:t>Transformer </a:t>
-            </a:r>
-            <a:r>
-              <a:rPr lang="zh-TW" altLang="en-US" sz="4800" b="1" kern="0" dirty="0">
-                <a:solidFill>
-                  <a:srgbClr val="00B0F0"/>
-                </a:solidFill>
-                <a:effectLst>
-                  <a:outerShdw blurRad="38100" dist="38100" dir="2700000" algn="tl">
-                    <a:srgbClr val="000000">
-                      <a:alpha val="43137"/>
-                    </a:srgbClr>
-                  </a:outerShdw>
-                </a:effectLst>
-                <a:latin typeface="微軟正黑體" panose="020B0604030504040204" pitchFamily="34" charset="-120"/>
-                <a:ea typeface="微軟正黑體" panose="020B0604030504040204" pitchFamily="34" charset="-120"/>
-              </a:rPr>
-              <a:t>架構 </a:t>
-            </a:r>
+                <a:cs typeface="Arial"/>
+              </a:rPr>
+              <a:t>什麼是資料集</a:t>
+            </a:r>
+            <a:endParaRPr kumimoji="1" lang="en-US" altLang="zh-TW" sz="4800" b="1" dirty="0">
+              <a:solidFill>
+                <a:srgbClr val="FFFF00"/>
+              </a:solidFill>
+              <a:effectLst>
+                <a:outerShdw blurRad="38100" dist="38100" dir="2700000" algn="tl">
+                  <a:srgbClr val="000000">
+                    <a:alpha val="43137"/>
+                  </a:srgbClr>
+                </a:outerShdw>
+              </a:effectLst>
+              <a:latin typeface="微軟正黑體" panose="020B0604030504040204" pitchFamily="34" charset="-120"/>
+              <a:ea typeface="微軟正黑體" panose="020B0604030504040204" pitchFamily="34" charset="-120"/>
+              <a:cs typeface="Arial"/>
+            </a:endParaRPr>
           </a:p>
         </p:txBody>
       </p:sp>
     </p:spTree>
     <p:extLst>
       <p:ext uri="{BB962C8B-B14F-4D97-AF65-F5344CB8AC3E}">
-        <p14:creationId xmlns:p14="http://schemas.microsoft.com/office/powerpoint/2010/main" val="4008650663"/>
+        <p14:creationId xmlns:p14="http://schemas.microsoft.com/office/powerpoint/2010/main" val="4104305801"/>
       </p:ext>
     </p:extLst>
   </p:cSld>
@@ -15961,7 +19598,13 @@
   <p:cSld>
     <p:spTree>
       <p:nvGrpSpPr>
-        <p:cNvPr id="1" name=""/>
+        <p:cNvPr id="1" name="">
+          <a:extLst>
+            <a:ext uri="{FF2B5EF4-FFF2-40B4-BE49-F238E27FC236}">
+              <a16:creationId xmlns:a16="http://schemas.microsoft.com/office/drawing/2014/main" id="{D9F3EDB0-65EA-F52D-317F-28C7EB2D1EA0}"/>
+            </a:ext>
+          </a:extLst>
+        </p:cNvPr>
         <p:cNvGrpSpPr/>
         <p:nvPr/>
       </p:nvGrpSpPr>
@@ -15975,14 +19618,20 @@
       </p:grpSpPr>
       <p:sp>
         <p:nvSpPr>
-          <p:cNvPr id="5" name="文字方塊 4"/>
+          <p:cNvPr id="5" name="文字方塊 4">
+            <a:extLst>
+              <a:ext uri="{FF2B5EF4-FFF2-40B4-BE49-F238E27FC236}">
+                <a16:creationId xmlns:a16="http://schemas.microsoft.com/office/drawing/2014/main" id="{A5EE697F-9086-8A68-BF1C-EB42198F7DF7}"/>
+              </a:ext>
+            </a:extLst>
+          </p:cNvPr>
           <p:cNvSpPr txBox="1"/>
           <p:nvPr/>
         </p:nvSpPr>
         <p:spPr>
           <a:xfrm>
-            <a:off x="609600" y="1600200"/>
-            <a:ext cx="8077200" cy="3539430"/>
+            <a:off x="533399" y="1356529"/>
+            <a:ext cx="8349343" cy="5016758"/>
           </a:xfrm>
           <a:prstGeom prst="rect">
             <a:avLst/>
@@ -16007,107 +19656,7 @@
                 <a:latin typeface="微軟正黑體" panose="020B0604030504040204" pitchFamily="34" charset="-120"/>
                 <a:ea typeface="微軟正黑體" panose="020B0604030504040204" pitchFamily="34" charset="-120"/>
               </a:rPr>
-              <a:t>所有 </a:t>
-            </a:r>
-            <a:r>
-              <a:rPr lang="en-US" altLang="zh-TW" sz="3200" dirty="0">
-                <a:solidFill>
-                  <a:prstClr val="white"/>
-                </a:solidFill>
-                <a:latin typeface="微軟正黑體" panose="020B0604030504040204" pitchFamily="34" charset="-120"/>
-                <a:ea typeface="微軟正黑體" panose="020B0604030504040204" pitchFamily="34" charset="-120"/>
-              </a:rPr>
-              <a:t>Transformer </a:t>
-            </a:r>
-            <a:r>
-              <a:rPr lang="zh-TW" altLang="en-US" sz="3200" dirty="0">
-                <a:solidFill>
-                  <a:prstClr val="white"/>
-                </a:solidFill>
-                <a:latin typeface="微軟正黑體" panose="020B0604030504040204" pitchFamily="34" charset="-120"/>
-                <a:ea typeface="微軟正黑體" panose="020B0604030504040204" pitchFamily="34" charset="-120"/>
-              </a:rPr>
-              <a:t>模型（</a:t>
-            </a:r>
-            <a:r>
-              <a:rPr lang="en-US" altLang="zh-TW" sz="3200" dirty="0">
-                <a:solidFill>
-                  <a:prstClr val="white"/>
-                </a:solidFill>
-                <a:latin typeface="微軟正黑體" panose="020B0604030504040204" pitchFamily="34" charset="-120"/>
-                <a:ea typeface="微軟正黑體" panose="020B0604030504040204" pitchFamily="34" charset="-120"/>
-              </a:rPr>
-              <a:t>GPT</a:t>
-            </a:r>
-            <a:r>
-              <a:rPr lang="zh-TW" altLang="en-US" sz="3200" dirty="0">
-                <a:solidFill>
-                  <a:prstClr val="white"/>
-                </a:solidFill>
-                <a:latin typeface="微軟正黑體" panose="020B0604030504040204" pitchFamily="34" charset="-120"/>
-                <a:ea typeface="微軟正黑體" panose="020B0604030504040204" pitchFamily="34" charset="-120"/>
-              </a:rPr>
-              <a:t>、</a:t>
-            </a:r>
-            <a:r>
-              <a:rPr lang="en-US" altLang="zh-TW" sz="3200" dirty="0">
-                <a:solidFill>
-                  <a:prstClr val="white"/>
-                </a:solidFill>
-                <a:latin typeface="微軟正黑體" panose="020B0604030504040204" pitchFamily="34" charset="-120"/>
-                <a:ea typeface="微軟正黑體" panose="020B0604030504040204" pitchFamily="34" charset="-120"/>
-              </a:rPr>
-              <a:t>BERT</a:t>
-            </a:r>
-            <a:r>
-              <a:rPr lang="zh-TW" altLang="en-US" sz="3200" dirty="0">
-                <a:solidFill>
-                  <a:prstClr val="white"/>
-                </a:solidFill>
-                <a:latin typeface="微軟正黑體" panose="020B0604030504040204" pitchFamily="34" charset="-120"/>
-                <a:ea typeface="微軟正黑體" panose="020B0604030504040204" pitchFamily="34" charset="-120"/>
-              </a:rPr>
-              <a:t>、</a:t>
-            </a:r>
-            <a:r>
-              <a:rPr lang="en-US" altLang="zh-TW" sz="3200" dirty="0">
-                <a:solidFill>
-                  <a:prstClr val="white"/>
-                </a:solidFill>
-                <a:latin typeface="微軟正黑體" panose="020B0604030504040204" pitchFamily="34" charset="-120"/>
-                <a:ea typeface="微軟正黑體" panose="020B0604030504040204" pitchFamily="34" charset="-120"/>
-              </a:rPr>
-              <a:t>BART</a:t>
-            </a:r>
-            <a:r>
-              <a:rPr lang="zh-TW" altLang="en-US" sz="3200" dirty="0">
-                <a:solidFill>
-                  <a:prstClr val="white"/>
-                </a:solidFill>
-                <a:latin typeface="微軟正黑體" panose="020B0604030504040204" pitchFamily="34" charset="-120"/>
-                <a:ea typeface="微軟正黑體" panose="020B0604030504040204" pitchFamily="34" charset="-120"/>
-              </a:rPr>
-              <a:t>、</a:t>
-            </a:r>
-            <a:r>
-              <a:rPr lang="en-US" altLang="zh-TW" sz="3200" dirty="0">
-                <a:solidFill>
-                  <a:prstClr val="white"/>
-                </a:solidFill>
-                <a:latin typeface="微軟正黑體" panose="020B0604030504040204" pitchFamily="34" charset="-120"/>
-                <a:ea typeface="微軟正黑體" panose="020B0604030504040204" pitchFamily="34" charset="-120"/>
-              </a:rPr>
-              <a:t>T5 </a:t>
-            </a:r>
-            <a:r>
-              <a:rPr lang="zh-TW" altLang="en-US" sz="3200" dirty="0">
-                <a:solidFill>
-                  <a:prstClr val="white"/>
-                </a:solidFill>
-                <a:latin typeface="微軟正黑體" panose="020B0604030504040204" pitchFamily="34" charset="-120"/>
-                <a:ea typeface="微軟正黑體" panose="020B0604030504040204" pitchFamily="34" charset="-120"/>
-              </a:rPr>
-              <a:t>等）都被訓練爲語言模型</a:t>
+              <a:t>用來訓練模型用的文字</a:t>
             </a:r>
             <a:endParaRPr lang="en-US" altLang="zh-TW" sz="3200" dirty="0">
               <a:solidFill>
@@ -16130,7 +19679,7 @@
                 <a:latin typeface="微軟正黑體" panose="020B0604030504040204" pitchFamily="34" charset="-120"/>
                 <a:ea typeface="微軟正黑體" panose="020B0604030504040204" pitchFamily="34" charset="-120"/>
               </a:rPr>
-              <a:t>經以無監督學習的方式接受了大量原始文字的訓練，不需要人工來標記</a:t>
+              <a:t>使用自監督學習，來調整模型參數</a:t>
             </a:r>
             <a:endParaRPr lang="en-US" altLang="zh-TW" sz="3200" dirty="0">
               <a:solidFill>
@@ -16153,7 +19702,67 @@
                 <a:latin typeface="微軟正黑體" panose="020B0604030504040204" pitchFamily="34" charset="-120"/>
                 <a:ea typeface="微軟正黑體" panose="020B0604030504040204" pitchFamily="34" charset="-120"/>
               </a:rPr>
-              <a:t>對其訓練過的語言進行統計理解</a:t>
+              <a:t>通常使用</a:t>
+            </a:r>
+            <a:r>
+              <a:rPr lang="en-US" altLang="zh-TW" sz="3200" dirty="0">
+                <a:solidFill>
+                  <a:prstClr val="white"/>
+                </a:solidFill>
+                <a:latin typeface="微軟正黑體" panose="020B0604030504040204" pitchFamily="34" charset="-120"/>
+                <a:ea typeface="微軟正黑體" panose="020B0604030504040204" pitchFamily="34" charset="-120"/>
+              </a:rPr>
+              <a:t>txt</a:t>
+            </a:r>
+            <a:r>
+              <a:rPr lang="zh-TW" altLang="en-US" sz="3200" dirty="0">
+                <a:solidFill>
+                  <a:prstClr val="white"/>
+                </a:solidFill>
+                <a:latin typeface="微軟正黑體" panose="020B0604030504040204" pitchFamily="34" charset="-120"/>
+                <a:ea typeface="微軟正黑體" panose="020B0604030504040204" pitchFamily="34" charset="-120"/>
+              </a:rPr>
+              <a:t>、</a:t>
+            </a:r>
+            <a:r>
+              <a:rPr lang="en-US" altLang="zh-TW" sz="3200" dirty="0" err="1">
+                <a:solidFill>
+                  <a:prstClr val="white"/>
+                </a:solidFill>
+                <a:latin typeface="微軟正黑體" panose="020B0604030504040204" pitchFamily="34" charset="-120"/>
+                <a:ea typeface="微軟正黑體" panose="020B0604030504040204" pitchFamily="34" charset="-120"/>
+              </a:rPr>
+              <a:t>json</a:t>
+            </a:r>
+            <a:r>
+              <a:rPr lang="zh-TW" altLang="en-US" sz="3200" dirty="0">
+                <a:solidFill>
+                  <a:prstClr val="white"/>
+                </a:solidFill>
+                <a:latin typeface="微軟正黑體" panose="020B0604030504040204" pitchFamily="34" charset="-120"/>
+                <a:ea typeface="微軟正黑體" panose="020B0604030504040204" pitchFamily="34" charset="-120"/>
+              </a:rPr>
+              <a:t>、</a:t>
+            </a:r>
+            <a:r>
+              <a:rPr lang="en-US" altLang="zh-TW" sz="3200" dirty="0">
+                <a:solidFill>
+                  <a:prstClr val="white"/>
+                </a:solidFill>
+                <a:latin typeface="微軟正黑體" panose="020B0604030504040204" pitchFamily="34" charset="-120"/>
+                <a:ea typeface="微軟正黑體" panose="020B0604030504040204" pitchFamily="34" charset="-120"/>
+              </a:rPr>
+              <a:t>csv</a:t>
+            </a:r>
+            <a:r>
+              <a:rPr lang="zh-TW" altLang="en-US" sz="3200" dirty="0">
+                <a:solidFill>
+                  <a:prstClr val="white"/>
+                </a:solidFill>
+                <a:latin typeface="微軟正黑體" panose="020B0604030504040204" pitchFamily="34" charset="-120"/>
+                <a:ea typeface="微軟正黑體" panose="020B0604030504040204" pitchFamily="34" charset="-120"/>
+              </a:rPr>
+              <a:t>格式</a:t>
             </a:r>
             <a:endParaRPr lang="en-US" altLang="zh-TW" sz="3200" dirty="0">
               <a:solidFill>
@@ -16176,7 +19785,27 @@
                 <a:latin typeface="微軟正黑體" panose="020B0604030504040204" pitchFamily="34" charset="-120"/>
                 <a:ea typeface="微軟正黑體" panose="020B0604030504040204" pitchFamily="34" charset="-120"/>
               </a:rPr>
-              <a:t>對於特定的實際任務並不是很有用</a:t>
+              <a:t>大部分來自網路爬蟲</a:t>
+            </a:r>
+            <a:r>
+              <a:rPr lang="en-US" altLang="zh-TW" sz="3200" dirty="0">
+                <a:solidFill>
+                  <a:prstClr val="white"/>
+                </a:solidFill>
+                <a:latin typeface="微軟正黑體" panose="020B0604030504040204" pitchFamily="34" charset="-120"/>
+                <a:ea typeface="微軟正黑體" panose="020B0604030504040204" pitchFamily="34" charset="-120"/>
+              </a:rPr>
+              <a:t>(common crawl)</a:t>
+            </a:r>
+            <a:r>
+              <a:rPr lang="zh-TW" altLang="en-US" sz="3200" dirty="0">
+                <a:solidFill>
+                  <a:prstClr val="white"/>
+                </a:solidFill>
+                <a:latin typeface="微軟正黑體" panose="020B0604030504040204" pitchFamily="34" charset="-120"/>
+                <a:ea typeface="微軟正黑體" panose="020B0604030504040204" pitchFamily="34" charset="-120"/>
+              </a:rPr>
+              <a:t>，維基百科以及各組織自行獲得</a:t>
             </a:r>
             <a:endParaRPr lang="en-US" altLang="zh-TW" sz="3200" dirty="0">
               <a:solidFill>
@@ -16199,17 +19828,40 @@
                 <a:latin typeface="微軟正黑體" panose="020B0604030504040204" pitchFamily="34" charset="-120"/>
                 <a:ea typeface="微軟正黑體" panose="020B0604030504040204" pitchFamily="34" charset="-120"/>
               </a:rPr>
-              <a:t>經歷一個稱爲</a:t>
-            </a:r>
+              <a:t>下載回來後經過整理、清洗、去重等預處理才能拿來訓練</a:t>
+            </a:r>
+            <a:endParaRPr lang="en-US" altLang="zh-TW" sz="3200" dirty="0">
+              <a:solidFill>
+                <a:prstClr val="white"/>
+              </a:solidFill>
+              <a:latin typeface="微軟正黑體" panose="020B0604030504040204" pitchFamily="34" charset="-120"/>
+              <a:ea typeface="微軟正黑體" panose="020B0604030504040204" pitchFamily="34" charset="-120"/>
+            </a:endParaRPr>
+          </a:p>
+          <a:p>
+            <a:pPr marL="514350" indent="-514350">
+              <a:buFont typeface="Arial" panose="020B0604020202020204" pitchFamily="34" charset="0"/>
+              <a:buChar char="•"/>
+            </a:pPr>
             <a:r>
               <a:rPr lang="zh-TW" altLang="en-US" sz="3200" dirty="0">
                 <a:solidFill>
-                  <a:srgbClr val="FF0000"/>
-                </a:solidFill>
-                <a:latin typeface="微軟正黑體" panose="020B0604030504040204" pitchFamily="34" charset="-120"/>
-                <a:ea typeface="微軟正黑體" panose="020B0604030504040204" pitchFamily="34" charset="-120"/>
-              </a:rPr>
-              <a:t>遷移學習</a:t>
+                  <a:prstClr val="white"/>
+                </a:solidFill>
+                <a:latin typeface="微軟正黑體" panose="020B0604030504040204" pitchFamily="34" charset="-120"/>
+                <a:ea typeface="微軟正黑體" panose="020B0604030504040204" pitchFamily="34" charset="-120"/>
+              </a:rPr>
+              <a:t>模型預處理佔了整個專案大約</a:t>
+            </a:r>
+            <a:r>
+              <a:rPr lang="en-US" altLang="zh-TW" sz="3200" dirty="0">
+                <a:solidFill>
+                  <a:prstClr val="white"/>
+                </a:solidFill>
+                <a:latin typeface="微軟正黑體" panose="020B0604030504040204" pitchFamily="34" charset="-120"/>
+                <a:ea typeface="微軟正黑體" panose="020B0604030504040204" pitchFamily="34" charset="-120"/>
+              </a:rPr>
+              <a:t>40%</a:t>
             </a:r>
             <a:r>
               <a:rPr lang="zh-TW" altLang="en-US" sz="3200" dirty="0">
@@ -16219,14 +19871,70 @@
                 <a:latin typeface="微軟正黑體" panose="020B0604030504040204" pitchFamily="34" charset="-120"/>
                 <a:ea typeface="微軟正黑體" panose="020B0604030504040204" pitchFamily="34" charset="-120"/>
               </a:rPr>
-              <a:t>的過程</a:t>
-            </a:r>
-          </a:p>
-        </p:txBody>
-      </p:sp>
-      <p:sp>
-        <p:nvSpPr>
-          <p:cNvPr id="4" name="文字版面配置區 2"/>
+              <a:t>以上的成本</a:t>
+            </a:r>
+            <a:endParaRPr lang="en-US" altLang="zh-TW" sz="3200" dirty="0">
+              <a:solidFill>
+                <a:prstClr val="white"/>
+              </a:solidFill>
+              <a:latin typeface="微軟正黑體" panose="020B0604030504040204" pitchFamily="34" charset="-120"/>
+              <a:ea typeface="微軟正黑體" panose="020B0604030504040204" pitchFamily="34" charset="-120"/>
+            </a:endParaRPr>
+          </a:p>
+          <a:p>
+            <a:pPr marL="514350" indent="-514350">
+              <a:buFont typeface="Arial" panose="020B0604020202020204" pitchFamily="34" charset="0"/>
+              <a:buChar char="•"/>
+            </a:pPr>
+            <a:r>
+              <a:rPr lang="zh-TW" altLang="en-US" sz="3200" dirty="0">
+                <a:solidFill>
+                  <a:prstClr val="white"/>
+                </a:solidFill>
+                <a:latin typeface="微軟正黑體" panose="020B0604030504040204" pitchFamily="34" charset="-120"/>
+                <a:ea typeface="微軟正黑體" panose="020B0604030504040204" pitchFamily="34" charset="-120"/>
+              </a:rPr>
+              <a:t>實作會先轉換成</a:t>
+            </a:r>
+            <a:r>
+              <a:rPr lang="en-US" altLang="zh-TW" sz="3200" dirty="0">
+                <a:solidFill>
+                  <a:prstClr val="white"/>
+                </a:solidFill>
+                <a:latin typeface="微軟正黑體" panose="020B0604030504040204" pitchFamily="34" charset="-120"/>
+                <a:ea typeface="微軟正黑體" panose="020B0604030504040204" pitchFamily="34" charset="-120"/>
+              </a:rPr>
+              <a:t>arrow</a:t>
+            </a:r>
+            <a:r>
+              <a:rPr lang="zh-TW" altLang="en-US" sz="3200" dirty="0">
+                <a:solidFill>
+                  <a:prstClr val="white"/>
+                </a:solidFill>
+                <a:latin typeface="微軟正黑體" panose="020B0604030504040204" pitchFamily="34" charset="-120"/>
+                <a:ea typeface="微軟正黑體" panose="020B0604030504040204" pitchFamily="34" charset="-120"/>
+              </a:rPr>
+              <a:t>格式，不會純文字</a:t>
+            </a:r>
+            <a:endParaRPr lang="en-US" altLang="zh-TW" sz="3200" dirty="0">
+              <a:solidFill>
+                <a:prstClr val="white"/>
+              </a:solidFill>
+              <a:latin typeface="微軟正黑體" panose="020B0604030504040204" pitchFamily="34" charset="-120"/>
+              <a:ea typeface="微軟正黑體" panose="020B0604030504040204" pitchFamily="34" charset="-120"/>
+            </a:endParaRPr>
+          </a:p>
+        </p:txBody>
+      </p:sp>
+      <p:sp>
+        <p:nvSpPr>
+          <p:cNvPr id="4" name="文字版面配置區 2">
+            <a:extLst>
+              <a:ext uri="{FF2B5EF4-FFF2-40B4-BE49-F238E27FC236}">
+                <a16:creationId xmlns:a16="http://schemas.microsoft.com/office/drawing/2014/main" id="{1DA5B11A-D220-F2EE-E6B7-95323B2AEE39}"/>
+              </a:ext>
+            </a:extLst>
+          </p:cNvPr>
           <p:cNvSpPr txBox="1">
             <a:spLocks/>
           </p:cNvSpPr>
@@ -16234,8 +19942,8 @@
         </p:nvSpPr>
         <p:spPr>
           <a:xfrm>
-            <a:off x="990600" y="304800"/>
-            <a:ext cx="7696200" cy="990600"/>
+            <a:off x="2416628" y="219389"/>
+            <a:ext cx="4888523" cy="990600"/>
           </a:xfrm>
           <a:prstGeom prst="rect">
             <a:avLst/>
@@ -16254,7 +19962,7 @@
               <a:defRPr/>
             </a:pPr>
             <a:r>
-              <a:rPr lang="en-US" altLang="zh-TW" sz="4800" b="1" kern="0" dirty="0">
+              <a:rPr lang="zh-TW" altLang="en-US" sz="4800" b="1" kern="0" dirty="0">
                 <a:solidFill>
                   <a:srgbClr val="00B0F0"/>
                 </a:solidFill>
@@ -16268,24 +19976,7 @@
                 <a:latin typeface="微軟正黑體" panose="020B0604030504040204" pitchFamily="34" charset="-120"/>
                 <a:ea typeface="微軟正黑體" panose="020B0604030504040204" pitchFamily="34" charset="-120"/>
               </a:rPr>
-              <a:t>Transformer </a:t>
-            </a:r>
-            <a:r>
-              <a:rPr lang="zh-TW" altLang="en-US" sz="4800" b="1" kern="0" dirty="0">
-                <a:solidFill>
-                  <a:srgbClr val="00B0F0"/>
-                </a:solidFill>
-                <a:effectLst>
-                  <a:outerShdw blurRad="38100" dist="38100" dir="2700000" algn="tl">
-                    <a:srgbClr val="000000">
-                      <a:alpha val="43137"/>
-                    </a:srgbClr>
-                  </a:outerShdw>
-                </a:effectLst>
-                <a:latin typeface="微軟正黑體" panose="020B0604030504040204" pitchFamily="34" charset="-120"/>
-                <a:ea typeface="微軟正黑體" panose="020B0604030504040204" pitchFamily="34" charset="-120"/>
-              </a:rPr>
-              <a:t>架構 </a:t>
+              <a:t>什麼是資料集</a:t>
             </a:r>
           </a:p>
         </p:txBody>
@@ -16293,7 +19984,7 @@
     </p:spTree>
     <p:extLst>
       <p:ext uri="{BB962C8B-B14F-4D97-AF65-F5344CB8AC3E}">
-        <p14:creationId xmlns:p14="http://schemas.microsoft.com/office/powerpoint/2010/main" val="3120591296"/>
+        <p14:creationId xmlns:p14="http://schemas.microsoft.com/office/powerpoint/2010/main" val="1690799653"/>
       </p:ext>
     </p:extLst>
   </p:cSld>
